--- a/slides/TP557_15_classificação de movimentos.pptx
+++ b/slides/TP557_15_classificação de movimentos.pptx
@@ -217,7 +217,7 @@
           <a:p>
             <a:fld id="{144F1436-6906-4D93-B7A2-786C327BFA14}" type="datetimeFigureOut">
               <a:rPr lang="nl-BE" smtClean="0"/>
-              <a:t>25/10/2023</a:t>
+              <a:t>20/04/2025</a:t>
             </a:fld>
             <a:endParaRPr lang="nl-BE"/>
           </a:p>
@@ -382,7 +382,7 @@
           <a:p>
             <a:fld id="{AA8CD09E-2914-4F47-B6C1-51B2C31814C9}" type="datetimeFigureOut">
               <a:rPr lang="pt-BR" smtClean="0"/>
-              <a:t>25/10/2023</a:t>
+              <a:t>20/04/2025</a:t>
             </a:fld>
             <a:endParaRPr lang="pt-BR"/>
           </a:p>
@@ -1533,6 +1533,38 @@
           <a:bodyPr/>
           <a:lstStyle/>
           <a:p>
+            <a:r>
+              <a:rPr lang="pt-BR" dirty="0" smtClean="0">
+                <a:solidFill>
+                  <a:srgbClr val="FF0000"/>
+                </a:solidFill>
+                <a:hlinkClick r:id="rId3"/>
+              </a:rPr>
+              <a:t>https://github.com/Mjrovai/UNIFEI-IESTI01-TinyML-2022.1/blob/main/00_Curse_Folder/2_Applications_Deploy/Class_19/IESTI01_TinyML_class_19.pdf</a:t>
+            </a:r>
+            <a:endParaRPr lang="pt-BR" dirty="0" smtClean="0">
+              <a:solidFill>
+                <a:srgbClr val="FF0000"/>
+              </a:solidFill>
+            </a:endParaRPr>
+          </a:p>
+          <a:p>
+            <a:r>
+              <a:rPr lang="pt-BR" dirty="0" smtClean="0">
+                <a:solidFill>
+                  <a:srgbClr val="FF0000"/>
+                </a:solidFill>
+                <a:hlinkClick r:id="rId4"/>
+              </a:rPr>
+              <a:t>https://github.com/Mjrovai/UNIFEI-IESTI01-TinyML-2022.1/blob/main/00_Curse_Folder/2_Applications_Deploy/Class_20/IESTI01_TinyML_class_20.pdf</a:t>
+            </a:r>
+            <a:endParaRPr lang="pt-BR" dirty="0" smtClean="0">
+              <a:solidFill>
+                <a:srgbClr val="FF0000"/>
+              </a:solidFill>
+            </a:endParaRPr>
+          </a:p>
+          <a:p>
             <a:endParaRPr lang="pt-BR" dirty="0"/>
           </a:p>
         </p:txBody>
@@ -2037,6 +2069,87 @@
           <a:bodyPr/>
           <a:lstStyle/>
           <a:p>
+            <a:pPr marL="152408" indent="0" algn="just">
+              <a:lnSpc>
+                <a:spcPct val="107000"/>
+              </a:lnSpc>
+              <a:spcAft>
+                <a:spcPts val="533"/>
+              </a:spcAft>
+              <a:buNone/>
+            </a:pPr>
+            <a:r>
+              <a:rPr lang="pt-BR" sz="1200" dirty="0" smtClean="0">
+                <a:solidFill>
+                  <a:srgbClr val="FF0000"/>
+                </a:solidFill>
+                <a:ea typeface="Calibri" panose="020F0502020204030204" pitchFamily="34" charset="0"/>
+                <a:cs typeface="Arial" panose="020B0604020202020204" pitchFamily="34" charset="0"/>
+              </a:rPr>
+              <a:t>Aqui são gerados dados com o celular</a:t>
+            </a:r>
+          </a:p>
+          <a:p>
+            <a:pPr marL="152408" indent="0" algn="just">
+              <a:lnSpc>
+                <a:spcPct val="107000"/>
+              </a:lnSpc>
+              <a:spcAft>
+                <a:spcPts val="533"/>
+              </a:spcAft>
+              <a:buNone/>
+            </a:pPr>
+            <a:r>
+              <a:rPr lang="pt-BR" sz="1200" dirty="0" smtClean="0">
+                <a:solidFill>
+                  <a:srgbClr val="FF0000"/>
+                </a:solidFill>
+                <a:ea typeface="Calibri" panose="020F0502020204030204" pitchFamily="34" charset="0"/>
+                <a:cs typeface="Arial" panose="020B0604020202020204" pitchFamily="34" charset="0"/>
+              </a:rPr>
+              <a:t>Link no meu </a:t>
+            </a:r>
+            <a:r>
+              <a:rPr lang="pt-BR" sz="1200" dirty="0" err="1" smtClean="0">
+                <a:solidFill>
+                  <a:srgbClr val="FF0000"/>
+                </a:solidFill>
+                <a:ea typeface="Calibri" panose="020F0502020204030204" pitchFamily="34" charset="0"/>
+                <a:cs typeface="Arial" panose="020B0604020202020204" pitchFamily="34" charset="0"/>
+              </a:rPr>
+              <a:t>edge</a:t>
+            </a:r>
+            <a:r>
+              <a:rPr lang="pt-BR" sz="1200" dirty="0" smtClean="0">
+                <a:solidFill>
+                  <a:srgbClr val="FF0000"/>
+                </a:solidFill>
+                <a:ea typeface="Calibri" panose="020F0502020204030204" pitchFamily="34" charset="0"/>
+                <a:cs typeface="Arial" panose="020B0604020202020204" pitchFamily="34" charset="0"/>
+              </a:rPr>
+              <a:t> impulse</a:t>
+            </a:r>
+          </a:p>
+          <a:p>
+            <a:pPr marL="152408" indent="0" algn="just">
+              <a:lnSpc>
+                <a:spcPct val="107000"/>
+              </a:lnSpc>
+              <a:spcAft>
+                <a:spcPts val="533"/>
+              </a:spcAft>
+              <a:buNone/>
+            </a:pPr>
+            <a:r>
+              <a:rPr lang="pt-BR" sz="1200" dirty="0" smtClean="0">
+                <a:solidFill>
+                  <a:srgbClr val="FF0000"/>
+                </a:solidFill>
+                <a:ea typeface="Calibri" panose="020F0502020204030204" pitchFamily="34" charset="0"/>
+                <a:cs typeface="Arial" panose="020B0604020202020204" pitchFamily="34" charset="0"/>
+              </a:rPr>
+              <a:t>https://studio.edgeimpulse.com/public/298808/live</a:t>
+            </a:r>
             <a:endParaRPr lang="pt-BR" dirty="0"/>
           </a:p>
         </p:txBody>
@@ -2099,7 +2212,7 @@
           <p:cNvPr id="2" name="Título 1">
             <a:extLst>
               <a:ext uri="{FF2B5EF4-FFF2-40B4-BE49-F238E27FC236}">
-                <a16:creationId xmlns:a16="http://schemas.microsoft.com/office/drawing/2014/main" id="{1DB9B4FF-B06E-403C-A326-BDC64D8FF94E}"/>
+                <a16:creationId xmlns:a16="http://schemas.microsoft.com/office/drawing/2014/main" xmlns="" id="{1DB9B4FF-B06E-403C-A326-BDC64D8FF94E}"/>
               </a:ext>
             </a:extLst>
           </p:cNvPr>
@@ -2136,7 +2249,7 @@
           <p:cNvPr id="3" name="Subtítulo 2">
             <a:extLst>
               <a:ext uri="{FF2B5EF4-FFF2-40B4-BE49-F238E27FC236}">
-                <a16:creationId xmlns:a16="http://schemas.microsoft.com/office/drawing/2014/main" id="{247BDFCE-746E-45BF-A319-4733D58D1632}"/>
+                <a16:creationId xmlns:a16="http://schemas.microsoft.com/office/drawing/2014/main" xmlns="" id="{247BDFCE-746E-45BF-A319-4733D58D1632}"/>
               </a:ext>
             </a:extLst>
           </p:cNvPr>
@@ -2206,7 +2319,7 @@
           <p:cNvPr id="4" name="Espaço Reservado para Data 3">
             <a:extLst>
               <a:ext uri="{FF2B5EF4-FFF2-40B4-BE49-F238E27FC236}">
-                <a16:creationId xmlns:a16="http://schemas.microsoft.com/office/drawing/2014/main" id="{9EDE2778-5372-4104-B96D-968184DA8288}"/>
+                <a16:creationId xmlns:a16="http://schemas.microsoft.com/office/drawing/2014/main" xmlns="" id="{9EDE2778-5372-4104-B96D-968184DA8288}"/>
               </a:ext>
             </a:extLst>
           </p:cNvPr>
@@ -2224,7 +2337,7 @@
           <a:p>
             <a:fld id="{63289F7E-B80B-496E-81B4-D396C37C9454}" type="datetimeFigureOut">
               <a:rPr lang="pt-BR" smtClean="0"/>
-              <a:t>25/10/2023</a:t>
+              <a:t>20/04/2025</a:t>
             </a:fld>
             <a:endParaRPr lang="pt-BR"/>
           </a:p>
@@ -2235,7 +2348,7 @@
           <p:cNvPr id="5" name="Espaço Reservado para Rodapé 4">
             <a:extLst>
               <a:ext uri="{FF2B5EF4-FFF2-40B4-BE49-F238E27FC236}">
-                <a16:creationId xmlns:a16="http://schemas.microsoft.com/office/drawing/2014/main" id="{C1DD0F41-C861-4051-988D-3024A37A4B93}"/>
+                <a16:creationId xmlns:a16="http://schemas.microsoft.com/office/drawing/2014/main" xmlns="" id="{C1DD0F41-C861-4051-988D-3024A37A4B93}"/>
               </a:ext>
             </a:extLst>
           </p:cNvPr>
@@ -2260,7 +2373,7 @@
           <p:cNvPr id="6" name="Espaço Reservado para Número de Slide 5">
             <a:extLst>
               <a:ext uri="{FF2B5EF4-FFF2-40B4-BE49-F238E27FC236}">
-                <a16:creationId xmlns:a16="http://schemas.microsoft.com/office/drawing/2014/main" id="{07E5967E-D980-431A-A5DB-3F0C5030A81E}"/>
+                <a16:creationId xmlns:a16="http://schemas.microsoft.com/office/drawing/2014/main" xmlns="" id="{07E5967E-D980-431A-A5DB-3F0C5030A81E}"/>
               </a:ext>
             </a:extLst>
           </p:cNvPr>
@@ -2319,7 +2432,7 @@
           <p:cNvPr id="2" name="Título 1">
             <a:extLst>
               <a:ext uri="{FF2B5EF4-FFF2-40B4-BE49-F238E27FC236}">
-                <a16:creationId xmlns:a16="http://schemas.microsoft.com/office/drawing/2014/main" id="{9036C49F-3E68-4175-81BA-3C3FEE44308A}"/>
+                <a16:creationId xmlns:a16="http://schemas.microsoft.com/office/drawing/2014/main" xmlns="" id="{9036C49F-3E68-4175-81BA-3C3FEE44308A}"/>
               </a:ext>
             </a:extLst>
           </p:cNvPr>
@@ -2347,7 +2460,7 @@
           <p:cNvPr id="3" name="Espaço Reservado para Texto Vertical 2">
             <a:extLst>
               <a:ext uri="{FF2B5EF4-FFF2-40B4-BE49-F238E27FC236}">
-                <a16:creationId xmlns:a16="http://schemas.microsoft.com/office/drawing/2014/main" id="{426FA736-3DD3-4D4E-B57B-BBE1D8F7D424}"/>
+                <a16:creationId xmlns:a16="http://schemas.microsoft.com/office/drawing/2014/main" xmlns="" id="{426FA736-3DD3-4D4E-B57B-BBE1D8F7D424}"/>
               </a:ext>
             </a:extLst>
           </p:cNvPr>
@@ -2404,7 +2517,7 @@
           <p:cNvPr id="4" name="Espaço Reservado para Data 3">
             <a:extLst>
               <a:ext uri="{FF2B5EF4-FFF2-40B4-BE49-F238E27FC236}">
-                <a16:creationId xmlns:a16="http://schemas.microsoft.com/office/drawing/2014/main" id="{99E8855C-D8FD-48F6-B14E-861E0DE4D915}"/>
+                <a16:creationId xmlns:a16="http://schemas.microsoft.com/office/drawing/2014/main" xmlns="" id="{99E8855C-D8FD-48F6-B14E-861E0DE4D915}"/>
               </a:ext>
             </a:extLst>
           </p:cNvPr>
@@ -2422,7 +2535,7 @@
           <a:p>
             <a:fld id="{63289F7E-B80B-496E-81B4-D396C37C9454}" type="datetimeFigureOut">
               <a:rPr lang="pt-BR" smtClean="0"/>
-              <a:t>25/10/2023</a:t>
+              <a:t>20/04/2025</a:t>
             </a:fld>
             <a:endParaRPr lang="pt-BR"/>
           </a:p>
@@ -2433,7 +2546,7 @@
           <p:cNvPr id="5" name="Espaço Reservado para Rodapé 4">
             <a:extLst>
               <a:ext uri="{FF2B5EF4-FFF2-40B4-BE49-F238E27FC236}">
-                <a16:creationId xmlns:a16="http://schemas.microsoft.com/office/drawing/2014/main" id="{97C0BB88-2F21-42A5-ACFF-83DA47F2D340}"/>
+                <a16:creationId xmlns:a16="http://schemas.microsoft.com/office/drawing/2014/main" xmlns="" id="{97C0BB88-2F21-42A5-ACFF-83DA47F2D340}"/>
               </a:ext>
             </a:extLst>
           </p:cNvPr>
@@ -2458,7 +2571,7 @@
           <p:cNvPr id="6" name="Espaço Reservado para Número de Slide 5">
             <a:extLst>
               <a:ext uri="{FF2B5EF4-FFF2-40B4-BE49-F238E27FC236}">
-                <a16:creationId xmlns:a16="http://schemas.microsoft.com/office/drawing/2014/main" id="{6CB462B3-1F22-4C05-B4B8-7A279FB7D5E9}"/>
+                <a16:creationId xmlns:a16="http://schemas.microsoft.com/office/drawing/2014/main" xmlns="" id="{6CB462B3-1F22-4C05-B4B8-7A279FB7D5E9}"/>
               </a:ext>
             </a:extLst>
           </p:cNvPr>
@@ -2517,7 +2630,7 @@
           <p:cNvPr id="2" name="Título Vertical 1">
             <a:extLst>
               <a:ext uri="{FF2B5EF4-FFF2-40B4-BE49-F238E27FC236}">
-                <a16:creationId xmlns:a16="http://schemas.microsoft.com/office/drawing/2014/main" id="{EAEAB728-701C-4207-A9D5-23FF45C60502}"/>
+                <a16:creationId xmlns:a16="http://schemas.microsoft.com/office/drawing/2014/main" xmlns="" id="{EAEAB728-701C-4207-A9D5-23FF45C60502}"/>
               </a:ext>
             </a:extLst>
           </p:cNvPr>
@@ -2550,7 +2663,7 @@
           <p:cNvPr id="3" name="Espaço Reservado para Texto Vertical 2">
             <a:extLst>
               <a:ext uri="{FF2B5EF4-FFF2-40B4-BE49-F238E27FC236}">
-                <a16:creationId xmlns:a16="http://schemas.microsoft.com/office/drawing/2014/main" id="{BA8C8CCF-7823-480A-9A19-0F664DD17E3B}"/>
+                <a16:creationId xmlns:a16="http://schemas.microsoft.com/office/drawing/2014/main" xmlns="" id="{BA8C8CCF-7823-480A-9A19-0F664DD17E3B}"/>
               </a:ext>
             </a:extLst>
           </p:cNvPr>
@@ -2612,7 +2725,7 @@
           <p:cNvPr id="4" name="Espaço Reservado para Data 3">
             <a:extLst>
               <a:ext uri="{FF2B5EF4-FFF2-40B4-BE49-F238E27FC236}">
-                <a16:creationId xmlns:a16="http://schemas.microsoft.com/office/drawing/2014/main" id="{721D5734-7B1F-425D-942F-6EB73344027C}"/>
+                <a16:creationId xmlns:a16="http://schemas.microsoft.com/office/drawing/2014/main" xmlns="" id="{721D5734-7B1F-425D-942F-6EB73344027C}"/>
               </a:ext>
             </a:extLst>
           </p:cNvPr>
@@ -2630,7 +2743,7 @@
           <a:p>
             <a:fld id="{63289F7E-B80B-496E-81B4-D396C37C9454}" type="datetimeFigureOut">
               <a:rPr lang="pt-BR" smtClean="0"/>
-              <a:t>25/10/2023</a:t>
+              <a:t>20/04/2025</a:t>
             </a:fld>
             <a:endParaRPr lang="pt-BR"/>
           </a:p>
@@ -2641,7 +2754,7 @@
           <p:cNvPr id="5" name="Espaço Reservado para Rodapé 4">
             <a:extLst>
               <a:ext uri="{FF2B5EF4-FFF2-40B4-BE49-F238E27FC236}">
-                <a16:creationId xmlns:a16="http://schemas.microsoft.com/office/drawing/2014/main" id="{1E1AAEAC-F08D-45FE-89EC-B1B349A868C9}"/>
+                <a16:creationId xmlns:a16="http://schemas.microsoft.com/office/drawing/2014/main" xmlns="" id="{1E1AAEAC-F08D-45FE-89EC-B1B349A868C9}"/>
               </a:ext>
             </a:extLst>
           </p:cNvPr>
@@ -2666,7 +2779,7 @@
           <p:cNvPr id="6" name="Espaço Reservado para Número de Slide 5">
             <a:extLst>
               <a:ext uri="{FF2B5EF4-FFF2-40B4-BE49-F238E27FC236}">
-                <a16:creationId xmlns:a16="http://schemas.microsoft.com/office/drawing/2014/main" id="{BAA44493-9911-47B2-87A6-C2141A972BC8}"/>
+                <a16:creationId xmlns:a16="http://schemas.microsoft.com/office/drawing/2014/main" xmlns="" id="{BAA44493-9911-47B2-87A6-C2141A972BC8}"/>
               </a:ext>
             </a:extLst>
           </p:cNvPr>
@@ -2885,7 +2998,7 @@
             <a:fld id="{1D8BD707-D9CF-40AE-B4C6-C98DA3205C09}" type="datetimeFigureOut">
               <a:rPr lang="en-US" smtClean="0"/>
               <a:pPr/>
-              <a:t>10/25/2023</a:t>
+              <a:t>4/20/2025</a:t>
             </a:fld>
             <a:endParaRPr lang="en-US"/>
           </a:p>
@@ -3057,7 +3170,7 @@
             <a:fld id="{1D8BD707-D9CF-40AE-B4C6-C98DA3205C09}" type="datetimeFigureOut">
               <a:rPr lang="en-US" smtClean="0"/>
               <a:pPr/>
-              <a:t>10/25/2023</a:t>
+              <a:t>4/20/2025</a:t>
             </a:fld>
             <a:endParaRPr lang="en-US"/>
           </a:p>
@@ -3305,7 +3418,7 @@
             <a:fld id="{1D8BD707-D9CF-40AE-B4C6-C98DA3205C09}" type="datetimeFigureOut">
               <a:rPr lang="en-US" smtClean="0"/>
               <a:pPr/>
-              <a:t>10/25/2023</a:t>
+              <a:t>4/20/2025</a:t>
             </a:fld>
             <a:endParaRPr lang="en-US"/>
           </a:p>
@@ -3595,7 +3708,7 @@
             <a:fld id="{1D8BD707-D9CF-40AE-B4C6-C98DA3205C09}" type="datetimeFigureOut">
               <a:rPr lang="en-US" smtClean="0"/>
               <a:pPr/>
-              <a:t>10/25/2023</a:t>
+              <a:t>4/20/2025</a:t>
             </a:fld>
             <a:endParaRPr lang="en-US"/>
           </a:p>
@@ -4019,7 +4132,7 @@
             <a:fld id="{1D8BD707-D9CF-40AE-B4C6-C98DA3205C09}" type="datetimeFigureOut">
               <a:rPr lang="en-US" smtClean="0"/>
               <a:pPr/>
-              <a:t>10/25/2023</a:t>
+              <a:t>4/20/2025</a:t>
             </a:fld>
             <a:endParaRPr lang="en-US"/>
           </a:p>
@@ -4139,7 +4252,7 @@
             <a:fld id="{1D8BD707-D9CF-40AE-B4C6-C98DA3205C09}" type="datetimeFigureOut">
               <a:rPr lang="en-US" smtClean="0"/>
               <a:pPr/>
-              <a:t>10/25/2023</a:t>
+              <a:t>4/20/2025</a:t>
             </a:fld>
             <a:endParaRPr lang="en-US"/>
           </a:p>
@@ -4236,7 +4349,7 @@
             <a:fld id="{1D8BD707-D9CF-40AE-B4C6-C98DA3205C09}" type="datetimeFigureOut">
               <a:rPr lang="en-US" smtClean="0"/>
               <a:pPr/>
-              <a:t>10/25/2023</a:t>
+              <a:t>4/20/2025</a:t>
             </a:fld>
             <a:endParaRPr lang="en-US"/>
           </a:p>
@@ -4515,7 +4628,7 @@
             <a:fld id="{1D8BD707-D9CF-40AE-B4C6-C98DA3205C09}" type="datetimeFigureOut">
               <a:rPr lang="en-US" smtClean="0"/>
               <a:pPr/>
-              <a:t>10/25/2023</a:t>
+              <a:t>4/20/2025</a:t>
             </a:fld>
             <a:endParaRPr lang="en-US"/>
           </a:p>
@@ -4599,7 +4712,7 @@
           <p:cNvPr id="2" name="Título 1">
             <a:extLst>
               <a:ext uri="{FF2B5EF4-FFF2-40B4-BE49-F238E27FC236}">
-                <a16:creationId xmlns:a16="http://schemas.microsoft.com/office/drawing/2014/main" id="{71BD44A5-8F21-4626-A01D-48A1C874B1D5}"/>
+                <a16:creationId xmlns:a16="http://schemas.microsoft.com/office/drawing/2014/main" xmlns="" id="{71BD44A5-8F21-4626-A01D-48A1C874B1D5}"/>
               </a:ext>
             </a:extLst>
           </p:cNvPr>
@@ -4627,7 +4740,7 @@
           <p:cNvPr id="3" name="Espaço Reservado para Conteúdo 2">
             <a:extLst>
               <a:ext uri="{FF2B5EF4-FFF2-40B4-BE49-F238E27FC236}">
-                <a16:creationId xmlns:a16="http://schemas.microsoft.com/office/drawing/2014/main" id="{B79E8085-65A9-48AA-951D-71D978BFF4ED}"/>
+                <a16:creationId xmlns:a16="http://schemas.microsoft.com/office/drawing/2014/main" xmlns="" id="{B79E8085-65A9-48AA-951D-71D978BFF4ED}"/>
               </a:ext>
             </a:extLst>
           </p:cNvPr>
@@ -4684,7 +4797,7 @@
           <p:cNvPr id="4" name="Espaço Reservado para Data 3">
             <a:extLst>
               <a:ext uri="{FF2B5EF4-FFF2-40B4-BE49-F238E27FC236}">
-                <a16:creationId xmlns:a16="http://schemas.microsoft.com/office/drawing/2014/main" id="{F05BE1AF-51EA-425D-B188-DE7BD675009F}"/>
+                <a16:creationId xmlns:a16="http://schemas.microsoft.com/office/drawing/2014/main" xmlns="" id="{F05BE1AF-51EA-425D-B188-DE7BD675009F}"/>
               </a:ext>
             </a:extLst>
           </p:cNvPr>
@@ -4702,7 +4815,7 @@
           <a:p>
             <a:fld id="{63289F7E-B80B-496E-81B4-D396C37C9454}" type="datetimeFigureOut">
               <a:rPr lang="pt-BR" smtClean="0"/>
-              <a:t>25/10/2023</a:t>
+              <a:t>20/04/2025</a:t>
             </a:fld>
             <a:endParaRPr lang="pt-BR"/>
           </a:p>
@@ -4713,7 +4826,7 @@
           <p:cNvPr id="5" name="Espaço Reservado para Rodapé 4">
             <a:extLst>
               <a:ext uri="{FF2B5EF4-FFF2-40B4-BE49-F238E27FC236}">
-                <a16:creationId xmlns:a16="http://schemas.microsoft.com/office/drawing/2014/main" id="{121BE632-29CF-4CB9-B365-C9EF38F89BE6}"/>
+                <a16:creationId xmlns:a16="http://schemas.microsoft.com/office/drawing/2014/main" xmlns="" id="{121BE632-29CF-4CB9-B365-C9EF38F89BE6}"/>
               </a:ext>
             </a:extLst>
           </p:cNvPr>
@@ -4738,7 +4851,7 @@
           <p:cNvPr id="6" name="Espaço Reservado para Número de Slide 5">
             <a:extLst>
               <a:ext uri="{FF2B5EF4-FFF2-40B4-BE49-F238E27FC236}">
-                <a16:creationId xmlns:a16="http://schemas.microsoft.com/office/drawing/2014/main" id="{60CF3DD1-9AEC-4A57-B461-4E4DD86FAC18}"/>
+                <a16:creationId xmlns:a16="http://schemas.microsoft.com/office/drawing/2014/main" xmlns="" id="{60CF3DD1-9AEC-4A57-B461-4E4DD86FAC18}"/>
               </a:ext>
             </a:extLst>
           </p:cNvPr>
@@ -4972,7 +5085,7 @@
             <a:fld id="{1D8BD707-D9CF-40AE-B4C6-C98DA3205C09}" type="datetimeFigureOut">
               <a:rPr lang="en-US" smtClean="0"/>
               <a:pPr/>
-              <a:t>10/25/2023</a:t>
+              <a:t>4/20/2025</a:t>
             </a:fld>
             <a:endParaRPr lang="en-US"/>
           </a:p>
@@ -5144,7 +5257,7 @@
             <a:fld id="{1D8BD707-D9CF-40AE-B4C6-C98DA3205C09}" type="datetimeFigureOut">
               <a:rPr lang="en-US" smtClean="0"/>
               <a:pPr/>
-              <a:t>10/25/2023</a:t>
+              <a:t>4/20/2025</a:t>
             </a:fld>
             <a:endParaRPr lang="en-US"/>
           </a:p>
@@ -5326,7 +5439,7 @@
             <a:fld id="{1D8BD707-D9CF-40AE-B4C6-C98DA3205C09}" type="datetimeFigureOut">
               <a:rPr lang="en-US" smtClean="0"/>
               <a:pPr/>
-              <a:t>10/25/2023</a:t>
+              <a:t>4/20/2025</a:t>
             </a:fld>
             <a:endParaRPr lang="en-US"/>
           </a:p>
@@ -5410,7 +5523,7 @@
           <p:cNvPr id="2" name="Título 1">
             <a:extLst>
               <a:ext uri="{FF2B5EF4-FFF2-40B4-BE49-F238E27FC236}">
-                <a16:creationId xmlns:a16="http://schemas.microsoft.com/office/drawing/2014/main" id="{34AB2FF0-A4D7-4E28-991D-FF26140D5988}"/>
+                <a16:creationId xmlns:a16="http://schemas.microsoft.com/office/drawing/2014/main" xmlns="" id="{34AB2FF0-A4D7-4E28-991D-FF26140D5988}"/>
               </a:ext>
             </a:extLst>
           </p:cNvPr>
@@ -5447,7 +5560,7 @@
           <p:cNvPr id="3" name="Espaço Reservado para Texto 2">
             <a:extLst>
               <a:ext uri="{FF2B5EF4-FFF2-40B4-BE49-F238E27FC236}">
-                <a16:creationId xmlns:a16="http://schemas.microsoft.com/office/drawing/2014/main" id="{E2AC45B0-4145-40DB-8E61-105461170604}"/>
+                <a16:creationId xmlns:a16="http://schemas.microsoft.com/office/drawing/2014/main" xmlns="" id="{E2AC45B0-4145-40DB-8E61-105461170604}"/>
               </a:ext>
             </a:extLst>
           </p:cNvPr>
@@ -5572,7 +5685,7 @@
           <p:cNvPr id="4" name="Espaço Reservado para Data 3">
             <a:extLst>
               <a:ext uri="{FF2B5EF4-FFF2-40B4-BE49-F238E27FC236}">
-                <a16:creationId xmlns:a16="http://schemas.microsoft.com/office/drawing/2014/main" id="{50F1D3FB-740A-4EBA-A309-2CE71D12ECFB}"/>
+                <a16:creationId xmlns:a16="http://schemas.microsoft.com/office/drawing/2014/main" xmlns="" id="{50F1D3FB-740A-4EBA-A309-2CE71D12ECFB}"/>
               </a:ext>
             </a:extLst>
           </p:cNvPr>
@@ -5590,7 +5703,7 @@
           <a:p>
             <a:fld id="{63289F7E-B80B-496E-81B4-D396C37C9454}" type="datetimeFigureOut">
               <a:rPr lang="pt-BR" smtClean="0"/>
-              <a:t>25/10/2023</a:t>
+              <a:t>20/04/2025</a:t>
             </a:fld>
             <a:endParaRPr lang="pt-BR"/>
           </a:p>
@@ -5601,7 +5714,7 @@
           <p:cNvPr id="5" name="Espaço Reservado para Rodapé 4">
             <a:extLst>
               <a:ext uri="{FF2B5EF4-FFF2-40B4-BE49-F238E27FC236}">
-                <a16:creationId xmlns:a16="http://schemas.microsoft.com/office/drawing/2014/main" id="{BDCAB18F-8715-4465-A940-F9C193A2ACE9}"/>
+                <a16:creationId xmlns:a16="http://schemas.microsoft.com/office/drawing/2014/main" xmlns="" id="{BDCAB18F-8715-4465-A940-F9C193A2ACE9}"/>
               </a:ext>
             </a:extLst>
           </p:cNvPr>
@@ -5626,7 +5739,7 @@
           <p:cNvPr id="6" name="Espaço Reservado para Número de Slide 5">
             <a:extLst>
               <a:ext uri="{FF2B5EF4-FFF2-40B4-BE49-F238E27FC236}">
-                <a16:creationId xmlns:a16="http://schemas.microsoft.com/office/drawing/2014/main" id="{353466C6-8248-429F-8056-FF040BF509EB}"/>
+                <a16:creationId xmlns:a16="http://schemas.microsoft.com/office/drawing/2014/main" xmlns="" id="{353466C6-8248-429F-8056-FF040BF509EB}"/>
               </a:ext>
             </a:extLst>
           </p:cNvPr>
@@ -5685,7 +5798,7 @@
           <p:cNvPr id="2" name="Título 1">
             <a:extLst>
               <a:ext uri="{FF2B5EF4-FFF2-40B4-BE49-F238E27FC236}">
-                <a16:creationId xmlns:a16="http://schemas.microsoft.com/office/drawing/2014/main" id="{BC7BB9F0-F14B-4A91-B2B7-35BC47FE4DE7}"/>
+                <a16:creationId xmlns:a16="http://schemas.microsoft.com/office/drawing/2014/main" xmlns="" id="{BC7BB9F0-F14B-4A91-B2B7-35BC47FE4DE7}"/>
               </a:ext>
             </a:extLst>
           </p:cNvPr>
@@ -5713,7 +5826,7 @@
           <p:cNvPr id="3" name="Espaço Reservado para Conteúdo 2">
             <a:extLst>
               <a:ext uri="{FF2B5EF4-FFF2-40B4-BE49-F238E27FC236}">
-                <a16:creationId xmlns:a16="http://schemas.microsoft.com/office/drawing/2014/main" id="{EC1FC1C4-73DA-47A6-8496-B0B457F7D39A}"/>
+                <a16:creationId xmlns:a16="http://schemas.microsoft.com/office/drawing/2014/main" xmlns="" id="{EC1FC1C4-73DA-47A6-8496-B0B457F7D39A}"/>
               </a:ext>
             </a:extLst>
           </p:cNvPr>
@@ -5775,7 +5888,7 @@
           <p:cNvPr id="4" name="Espaço Reservado para Conteúdo 3">
             <a:extLst>
               <a:ext uri="{FF2B5EF4-FFF2-40B4-BE49-F238E27FC236}">
-                <a16:creationId xmlns:a16="http://schemas.microsoft.com/office/drawing/2014/main" id="{E92F06A8-A449-4D92-9912-76873E529B38}"/>
+                <a16:creationId xmlns:a16="http://schemas.microsoft.com/office/drawing/2014/main" xmlns="" id="{E92F06A8-A449-4D92-9912-76873E529B38}"/>
               </a:ext>
             </a:extLst>
           </p:cNvPr>
@@ -5837,7 +5950,7 @@
           <p:cNvPr id="5" name="Espaço Reservado para Data 4">
             <a:extLst>
               <a:ext uri="{FF2B5EF4-FFF2-40B4-BE49-F238E27FC236}">
-                <a16:creationId xmlns:a16="http://schemas.microsoft.com/office/drawing/2014/main" id="{938070A4-BC2F-4D55-BD8D-DEAF11BB9EE9}"/>
+                <a16:creationId xmlns:a16="http://schemas.microsoft.com/office/drawing/2014/main" xmlns="" id="{938070A4-BC2F-4D55-BD8D-DEAF11BB9EE9}"/>
               </a:ext>
             </a:extLst>
           </p:cNvPr>
@@ -5855,7 +5968,7 @@
           <a:p>
             <a:fld id="{63289F7E-B80B-496E-81B4-D396C37C9454}" type="datetimeFigureOut">
               <a:rPr lang="pt-BR" smtClean="0"/>
-              <a:t>25/10/2023</a:t>
+              <a:t>20/04/2025</a:t>
             </a:fld>
             <a:endParaRPr lang="pt-BR"/>
           </a:p>
@@ -5866,7 +5979,7 @@
           <p:cNvPr id="6" name="Espaço Reservado para Rodapé 5">
             <a:extLst>
               <a:ext uri="{FF2B5EF4-FFF2-40B4-BE49-F238E27FC236}">
-                <a16:creationId xmlns:a16="http://schemas.microsoft.com/office/drawing/2014/main" id="{45CC2DB8-844A-465F-BA9A-7734C80C7F43}"/>
+                <a16:creationId xmlns:a16="http://schemas.microsoft.com/office/drawing/2014/main" xmlns="" id="{45CC2DB8-844A-465F-BA9A-7734C80C7F43}"/>
               </a:ext>
             </a:extLst>
           </p:cNvPr>
@@ -5891,7 +6004,7 @@
           <p:cNvPr id="7" name="Espaço Reservado para Número de Slide 6">
             <a:extLst>
               <a:ext uri="{FF2B5EF4-FFF2-40B4-BE49-F238E27FC236}">
-                <a16:creationId xmlns:a16="http://schemas.microsoft.com/office/drawing/2014/main" id="{4CC606A8-097B-4040-94E0-CD8C88280D8F}"/>
+                <a16:creationId xmlns:a16="http://schemas.microsoft.com/office/drawing/2014/main" xmlns="" id="{4CC606A8-097B-4040-94E0-CD8C88280D8F}"/>
               </a:ext>
             </a:extLst>
           </p:cNvPr>
@@ -5950,7 +6063,7 @@
           <p:cNvPr id="2" name="Título 1">
             <a:extLst>
               <a:ext uri="{FF2B5EF4-FFF2-40B4-BE49-F238E27FC236}">
-                <a16:creationId xmlns:a16="http://schemas.microsoft.com/office/drawing/2014/main" id="{76D66686-0143-4CB6-8C09-BA326F1E7ACA}"/>
+                <a16:creationId xmlns:a16="http://schemas.microsoft.com/office/drawing/2014/main" xmlns="" id="{76D66686-0143-4CB6-8C09-BA326F1E7ACA}"/>
               </a:ext>
             </a:extLst>
           </p:cNvPr>
@@ -5983,7 +6096,7 @@
           <p:cNvPr id="3" name="Espaço Reservado para Texto 2">
             <a:extLst>
               <a:ext uri="{FF2B5EF4-FFF2-40B4-BE49-F238E27FC236}">
-                <a16:creationId xmlns:a16="http://schemas.microsoft.com/office/drawing/2014/main" id="{0227AB85-F59E-4BCE-B846-4FA0992C2F23}"/>
+                <a16:creationId xmlns:a16="http://schemas.microsoft.com/office/drawing/2014/main" xmlns="" id="{0227AB85-F59E-4BCE-B846-4FA0992C2F23}"/>
               </a:ext>
             </a:extLst>
           </p:cNvPr>
@@ -6054,7 +6167,7 @@
           <p:cNvPr id="4" name="Espaço Reservado para Conteúdo 3">
             <a:extLst>
               <a:ext uri="{FF2B5EF4-FFF2-40B4-BE49-F238E27FC236}">
-                <a16:creationId xmlns:a16="http://schemas.microsoft.com/office/drawing/2014/main" id="{3373456C-7319-4D0A-827D-D29F6B083F5D}"/>
+                <a16:creationId xmlns:a16="http://schemas.microsoft.com/office/drawing/2014/main" xmlns="" id="{3373456C-7319-4D0A-827D-D29F6B083F5D}"/>
               </a:ext>
             </a:extLst>
           </p:cNvPr>
@@ -6116,7 +6229,7 @@
           <p:cNvPr id="5" name="Espaço Reservado para Texto 4">
             <a:extLst>
               <a:ext uri="{FF2B5EF4-FFF2-40B4-BE49-F238E27FC236}">
-                <a16:creationId xmlns:a16="http://schemas.microsoft.com/office/drawing/2014/main" id="{4CD109D0-2E83-4262-8029-A871CEC47406}"/>
+                <a16:creationId xmlns:a16="http://schemas.microsoft.com/office/drawing/2014/main" xmlns="" id="{4CD109D0-2E83-4262-8029-A871CEC47406}"/>
               </a:ext>
             </a:extLst>
           </p:cNvPr>
@@ -6187,7 +6300,7 @@
           <p:cNvPr id="6" name="Espaço Reservado para Conteúdo 5">
             <a:extLst>
               <a:ext uri="{FF2B5EF4-FFF2-40B4-BE49-F238E27FC236}">
-                <a16:creationId xmlns:a16="http://schemas.microsoft.com/office/drawing/2014/main" id="{AD706E3A-CFBB-4A6C-A65F-D0360A9E74FE}"/>
+                <a16:creationId xmlns:a16="http://schemas.microsoft.com/office/drawing/2014/main" xmlns="" id="{AD706E3A-CFBB-4A6C-A65F-D0360A9E74FE}"/>
               </a:ext>
             </a:extLst>
           </p:cNvPr>
@@ -6249,7 +6362,7 @@
           <p:cNvPr id="7" name="Espaço Reservado para Data 6">
             <a:extLst>
               <a:ext uri="{FF2B5EF4-FFF2-40B4-BE49-F238E27FC236}">
-                <a16:creationId xmlns:a16="http://schemas.microsoft.com/office/drawing/2014/main" id="{4172C0E5-5AF0-4805-BB51-443733CD2BD5}"/>
+                <a16:creationId xmlns:a16="http://schemas.microsoft.com/office/drawing/2014/main" xmlns="" id="{4172C0E5-5AF0-4805-BB51-443733CD2BD5}"/>
               </a:ext>
             </a:extLst>
           </p:cNvPr>
@@ -6267,7 +6380,7 @@
           <a:p>
             <a:fld id="{63289F7E-B80B-496E-81B4-D396C37C9454}" type="datetimeFigureOut">
               <a:rPr lang="pt-BR" smtClean="0"/>
-              <a:t>25/10/2023</a:t>
+              <a:t>20/04/2025</a:t>
             </a:fld>
             <a:endParaRPr lang="pt-BR"/>
           </a:p>
@@ -6278,7 +6391,7 @@
           <p:cNvPr id="8" name="Espaço Reservado para Rodapé 7">
             <a:extLst>
               <a:ext uri="{FF2B5EF4-FFF2-40B4-BE49-F238E27FC236}">
-                <a16:creationId xmlns:a16="http://schemas.microsoft.com/office/drawing/2014/main" id="{0E801648-156F-497E-99CF-797DF48051E1}"/>
+                <a16:creationId xmlns:a16="http://schemas.microsoft.com/office/drawing/2014/main" xmlns="" id="{0E801648-156F-497E-99CF-797DF48051E1}"/>
               </a:ext>
             </a:extLst>
           </p:cNvPr>
@@ -6303,7 +6416,7 @@
           <p:cNvPr id="9" name="Espaço Reservado para Número de Slide 8">
             <a:extLst>
               <a:ext uri="{FF2B5EF4-FFF2-40B4-BE49-F238E27FC236}">
-                <a16:creationId xmlns:a16="http://schemas.microsoft.com/office/drawing/2014/main" id="{EEE23D32-80E7-4796-A137-66BF842E4B53}"/>
+                <a16:creationId xmlns:a16="http://schemas.microsoft.com/office/drawing/2014/main" xmlns="" id="{EEE23D32-80E7-4796-A137-66BF842E4B53}"/>
               </a:ext>
             </a:extLst>
           </p:cNvPr>
@@ -6362,7 +6475,7 @@
           <p:cNvPr id="2" name="Título 1">
             <a:extLst>
               <a:ext uri="{FF2B5EF4-FFF2-40B4-BE49-F238E27FC236}">
-                <a16:creationId xmlns:a16="http://schemas.microsoft.com/office/drawing/2014/main" id="{2BCE2379-C78F-47E1-8CFC-B846E7AF148D}"/>
+                <a16:creationId xmlns:a16="http://schemas.microsoft.com/office/drawing/2014/main" xmlns="" id="{2BCE2379-C78F-47E1-8CFC-B846E7AF148D}"/>
               </a:ext>
             </a:extLst>
           </p:cNvPr>
@@ -6390,7 +6503,7 @@
           <p:cNvPr id="3" name="Espaço Reservado para Data 2">
             <a:extLst>
               <a:ext uri="{FF2B5EF4-FFF2-40B4-BE49-F238E27FC236}">
-                <a16:creationId xmlns:a16="http://schemas.microsoft.com/office/drawing/2014/main" id="{342600A9-7F92-4E22-9D94-E4717252A817}"/>
+                <a16:creationId xmlns:a16="http://schemas.microsoft.com/office/drawing/2014/main" xmlns="" id="{342600A9-7F92-4E22-9D94-E4717252A817}"/>
               </a:ext>
             </a:extLst>
           </p:cNvPr>
@@ -6408,7 +6521,7 @@
           <a:p>
             <a:fld id="{63289F7E-B80B-496E-81B4-D396C37C9454}" type="datetimeFigureOut">
               <a:rPr lang="pt-BR" smtClean="0"/>
-              <a:t>25/10/2023</a:t>
+              <a:t>20/04/2025</a:t>
             </a:fld>
             <a:endParaRPr lang="pt-BR"/>
           </a:p>
@@ -6419,7 +6532,7 @@
           <p:cNvPr id="4" name="Espaço Reservado para Rodapé 3">
             <a:extLst>
               <a:ext uri="{FF2B5EF4-FFF2-40B4-BE49-F238E27FC236}">
-                <a16:creationId xmlns:a16="http://schemas.microsoft.com/office/drawing/2014/main" id="{192E6BED-F546-40CC-A2DF-99CBA853654E}"/>
+                <a16:creationId xmlns:a16="http://schemas.microsoft.com/office/drawing/2014/main" xmlns="" id="{192E6BED-F546-40CC-A2DF-99CBA853654E}"/>
               </a:ext>
             </a:extLst>
           </p:cNvPr>
@@ -6444,7 +6557,7 @@
           <p:cNvPr id="5" name="Espaço Reservado para Número de Slide 4">
             <a:extLst>
               <a:ext uri="{FF2B5EF4-FFF2-40B4-BE49-F238E27FC236}">
-                <a16:creationId xmlns:a16="http://schemas.microsoft.com/office/drawing/2014/main" id="{6091CC40-A8C4-4063-80EB-CC5099621678}"/>
+                <a16:creationId xmlns:a16="http://schemas.microsoft.com/office/drawing/2014/main" xmlns="" id="{6091CC40-A8C4-4063-80EB-CC5099621678}"/>
               </a:ext>
             </a:extLst>
           </p:cNvPr>
@@ -6503,7 +6616,7 @@
           <p:cNvPr id="2" name="Espaço Reservado para Data 1">
             <a:extLst>
               <a:ext uri="{FF2B5EF4-FFF2-40B4-BE49-F238E27FC236}">
-                <a16:creationId xmlns:a16="http://schemas.microsoft.com/office/drawing/2014/main" id="{DD19515C-212C-4EAE-84A3-8FF4BC844F1B}"/>
+                <a16:creationId xmlns:a16="http://schemas.microsoft.com/office/drawing/2014/main" xmlns="" id="{DD19515C-212C-4EAE-84A3-8FF4BC844F1B}"/>
               </a:ext>
             </a:extLst>
           </p:cNvPr>
@@ -6521,7 +6634,7 @@
           <a:p>
             <a:fld id="{63289F7E-B80B-496E-81B4-D396C37C9454}" type="datetimeFigureOut">
               <a:rPr lang="pt-BR" smtClean="0"/>
-              <a:t>25/10/2023</a:t>
+              <a:t>20/04/2025</a:t>
             </a:fld>
             <a:endParaRPr lang="pt-BR"/>
           </a:p>
@@ -6532,7 +6645,7 @@
           <p:cNvPr id="3" name="Espaço Reservado para Rodapé 2">
             <a:extLst>
               <a:ext uri="{FF2B5EF4-FFF2-40B4-BE49-F238E27FC236}">
-                <a16:creationId xmlns:a16="http://schemas.microsoft.com/office/drawing/2014/main" id="{94D3D120-B3E8-4C96-861D-7A4F12F49B3A}"/>
+                <a16:creationId xmlns:a16="http://schemas.microsoft.com/office/drawing/2014/main" xmlns="" id="{94D3D120-B3E8-4C96-861D-7A4F12F49B3A}"/>
               </a:ext>
             </a:extLst>
           </p:cNvPr>
@@ -6557,7 +6670,7 @@
           <p:cNvPr id="4" name="Espaço Reservado para Número de Slide 3">
             <a:extLst>
               <a:ext uri="{FF2B5EF4-FFF2-40B4-BE49-F238E27FC236}">
-                <a16:creationId xmlns:a16="http://schemas.microsoft.com/office/drawing/2014/main" id="{42E49B68-FA1B-468B-9F17-D5C09243D454}"/>
+                <a16:creationId xmlns:a16="http://schemas.microsoft.com/office/drawing/2014/main" xmlns="" id="{42E49B68-FA1B-468B-9F17-D5C09243D454}"/>
               </a:ext>
             </a:extLst>
           </p:cNvPr>
@@ -6616,7 +6729,7 @@
           <p:cNvPr id="2" name="Título 1">
             <a:extLst>
               <a:ext uri="{FF2B5EF4-FFF2-40B4-BE49-F238E27FC236}">
-                <a16:creationId xmlns:a16="http://schemas.microsoft.com/office/drawing/2014/main" id="{1C17BCBE-A897-4319-85EC-D87909C24980}"/>
+                <a16:creationId xmlns:a16="http://schemas.microsoft.com/office/drawing/2014/main" xmlns="" id="{1C17BCBE-A897-4319-85EC-D87909C24980}"/>
               </a:ext>
             </a:extLst>
           </p:cNvPr>
@@ -6653,7 +6766,7 @@
           <p:cNvPr id="3" name="Espaço Reservado para Conteúdo 2">
             <a:extLst>
               <a:ext uri="{FF2B5EF4-FFF2-40B4-BE49-F238E27FC236}">
-                <a16:creationId xmlns:a16="http://schemas.microsoft.com/office/drawing/2014/main" id="{4226F885-0204-4913-868B-4B8B82576F17}"/>
+                <a16:creationId xmlns:a16="http://schemas.microsoft.com/office/drawing/2014/main" xmlns="" id="{4226F885-0204-4913-868B-4B8B82576F17}"/>
               </a:ext>
             </a:extLst>
           </p:cNvPr>
@@ -6743,7 +6856,7 @@
           <p:cNvPr id="4" name="Espaço Reservado para Texto 3">
             <a:extLst>
               <a:ext uri="{FF2B5EF4-FFF2-40B4-BE49-F238E27FC236}">
-                <a16:creationId xmlns:a16="http://schemas.microsoft.com/office/drawing/2014/main" id="{00F9F784-A858-441B-8AB5-697098141751}"/>
+                <a16:creationId xmlns:a16="http://schemas.microsoft.com/office/drawing/2014/main" xmlns="" id="{00F9F784-A858-441B-8AB5-697098141751}"/>
               </a:ext>
             </a:extLst>
           </p:cNvPr>
@@ -6814,7 +6927,7 @@
           <p:cNvPr id="5" name="Espaço Reservado para Data 4">
             <a:extLst>
               <a:ext uri="{FF2B5EF4-FFF2-40B4-BE49-F238E27FC236}">
-                <a16:creationId xmlns:a16="http://schemas.microsoft.com/office/drawing/2014/main" id="{A4DC363A-5000-472E-8B17-02E7DCB8840A}"/>
+                <a16:creationId xmlns:a16="http://schemas.microsoft.com/office/drawing/2014/main" xmlns="" id="{A4DC363A-5000-472E-8B17-02E7DCB8840A}"/>
               </a:ext>
             </a:extLst>
           </p:cNvPr>
@@ -6832,7 +6945,7 @@
           <a:p>
             <a:fld id="{63289F7E-B80B-496E-81B4-D396C37C9454}" type="datetimeFigureOut">
               <a:rPr lang="pt-BR" smtClean="0"/>
-              <a:t>25/10/2023</a:t>
+              <a:t>20/04/2025</a:t>
             </a:fld>
             <a:endParaRPr lang="pt-BR"/>
           </a:p>
@@ -6843,7 +6956,7 @@
           <p:cNvPr id="6" name="Espaço Reservado para Rodapé 5">
             <a:extLst>
               <a:ext uri="{FF2B5EF4-FFF2-40B4-BE49-F238E27FC236}">
-                <a16:creationId xmlns:a16="http://schemas.microsoft.com/office/drawing/2014/main" id="{5548425D-2C21-4C56-BAD4-662978775C28}"/>
+                <a16:creationId xmlns:a16="http://schemas.microsoft.com/office/drawing/2014/main" xmlns="" id="{5548425D-2C21-4C56-BAD4-662978775C28}"/>
               </a:ext>
             </a:extLst>
           </p:cNvPr>
@@ -6868,7 +6981,7 @@
           <p:cNvPr id="7" name="Espaço Reservado para Número de Slide 6">
             <a:extLst>
               <a:ext uri="{FF2B5EF4-FFF2-40B4-BE49-F238E27FC236}">
-                <a16:creationId xmlns:a16="http://schemas.microsoft.com/office/drawing/2014/main" id="{C63E9726-E64C-42B2-AE8A-8C235A956B48}"/>
+                <a16:creationId xmlns:a16="http://schemas.microsoft.com/office/drawing/2014/main" xmlns="" id="{C63E9726-E64C-42B2-AE8A-8C235A956B48}"/>
               </a:ext>
             </a:extLst>
           </p:cNvPr>
@@ -6927,7 +7040,7 @@
           <p:cNvPr id="2" name="Título 1">
             <a:extLst>
               <a:ext uri="{FF2B5EF4-FFF2-40B4-BE49-F238E27FC236}">
-                <a16:creationId xmlns:a16="http://schemas.microsoft.com/office/drawing/2014/main" id="{11086A78-3E74-450C-96A6-CA8AC37AF772}"/>
+                <a16:creationId xmlns:a16="http://schemas.microsoft.com/office/drawing/2014/main" xmlns="" id="{11086A78-3E74-450C-96A6-CA8AC37AF772}"/>
               </a:ext>
             </a:extLst>
           </p:cNvPr>
@@ -6964,7 +7077,7 @@
           <p:cNvPr id="3" name="Espaço Reservado para Imagem 2">
             <a:extLst>
               <a:ext uri="{FF2B5EF4-FFF2-40B4-BE49-F238E27FC236}">
-                <a16:creationId xmlns:a16="http://schemas.microsoft.com/office/drawing/2014/main" id="{5F5B7312-975A-4DBC-9B2F-3652ADA006FD}"/>
+                <a16:creationId xmlns:a16="http://schemas.microsoft.com/office/drawing/2014/main" xmlns="" id="{5F5B7312-975A-4DBC-9B2F-3652ADA006FD}"/>
               </a:ext>
             </a:extLst>
           </p:cNvPr>
@@ -7031,7 +7144,7 @@
           <p:cNvPr id="4" name="Espaço Reservado para Texto 3">
             <a:extLst>
               <a:ext uri="{FF2B5EF4-FFF2-40B4-BE49-F238E27FC236}">
-                <a16:creationId xmlns:a16="http://schemas.microsoft.com/office/drawing/2014/main" id="{AAF805F5-1DFF-41C6-944C-7D79FE0D0963}"/>
+                <a16:creationId xmlns:a16="http://schemas.microsoft.com/office/drawing/2014/main" xmlns="" id="{AAF805F5-1DFF-41C6-944C-7D79FE0D0963}"/>
               </a:ext>
             </a:extLst>
           </p:cNvPr>
@@ -7102,7 +7215,7 @@
           <p:cNvPr id="5" name="Espaço Reservado para Data 4">
             <a:extLst>
               <a:ext uri="{FF2B5EF4-FFF2-40B4-BE49-F238E27FC236}">
-                <a16:creationId xmlns:a16="http://schemas.microsoft.com/office/drawing/2014/main" id="{02113D81-8665-4516-BD81-C6A1F254EECD}"/>
+                <a16:creationId xmlns:a16="http://schemas.microsoft.com/office/drawing/2014/main" xmlns="" id="{02113D81-8665-4516-BD81-C6A1F254EECD}"/>
               </a:ext>
             </a:extLst>
           </p:cNvPr>
@@ -7120,7 +7233,7 @@
           <a:p>
             <a:fld id="{63289F7E-B80B-496E-81B4-D396C37C9454}" type="datetimeFigureOut">
               <a:rPr lang="pt-BR" smtClean="0"/>
-              <a:t>25/10/2023</a:t>
+              <a:t>20/04/2025</a:t>
             </a:fld>
             <a:endParaRPr lang="pt-BR"/>
           </a:p>
@@ -7131,7 +7244,7 @@
           <p:cNvPr id="6" name="Espaço Reservado para Rodapé 5">
             <a:extLst>
               <a:ext uri="{FF2B5EF4-FFF2-40B4-BE49-F238E27FC236}">
-                <a16:creationId xmlns:a16="http://schemas.microsoft.com/office/drawing/2014/main" id="{2B00C88B-FF32-40AA-A187-727D96FD7862}"/>
+                <a16:creationId xmlns:a16="http://schemas.microsoft.com/office/drawing/2014/main" xmlns="" id="{2B00C88B-FF32-40AA-A187-727D96FD7862}"/>
               </a:ext>
             </a:extLst>
           </p:cNvPr>
@@ -7156,7 +7269,7 @@
           <p:cNvPr id="7" name="Espaço Reservado para Número de Slide 6">
             <a:extLst>
               <a:ext uri="{FF2B5EF4-FFF2-40B4-BE49-F238E27FC236}">
-                <a16:creationId xmlns:a16="http://schemas.microsoft.com/office/drawing/2014/main" id="{A04D1A2D-69F7-4B8F-A730-BC26DC340BA6}"/>
+                <a16:creationId xmlns:a16="http://schemas.microsoft.com/office/drawing/2014/main" xmlns="" id="{A04D1A2D-69F7-4B8F-A730-BC26DC340BA6}"/>
               </a:ext>
             </a:extLst>
           </p:cNvPr>
@@ -7220,7 +7333,7 @@
           <p:cNvPr id="2" name="Espaço Reservado para Título 1">
             <a:extLst>
               <a:ext uri="{FF2B5EF4-FFF2-40B4-BE49-F238E27FC236}">
-                <a16:creationId xmlns:a16="http://schemas.microsoft.com/office/drawing/2014/main" id="{E69A0273-1966-4A1B-9370-4C1CE5036371}"/>
+                <a16:creationId xmlns:a16="http://schemas.microsoft.com/office/drawing/2014/main" xmlns="" id="{E69A0273-1966-4A1B-9370-4C1CE5036371}"/>
               </a:ext>
             </a:extLst>
           </p:cNvPr>
@@ -7258,7 +7371,7 @@
           <p:cNvPr id="3" name="Espaço Reservado para Texto 2">
             <a:extLst>
               <a:ext uri="{FF2B5EF4-FFF2-40B4-BE49-F238E27FC236}">
-                <a16:creationId xmlns:a16="http://schemas.microsoft.com/office/drawing/2014/main" id="{3B9CF87A-0448-49A7-AB25-EBC1D56A40EF}"/>
+                <a16:creationId xmlns:a16="http://schemas.microsoft.com/office/drawing/2014/main" xmlns="" id="{3B9CF87A-0448-49A7-AB25-EBC1D56A40EF}"/>
               </a:ext>
             </a:extLst>
           </p:cNvPr>
@@ -7325,7 +7438,7 @@
           <p:cNvPr id="4" name="Espaço Reservado para Data 3">
             <a:extLst>
               <a:ext uri="{FF2B5EF4-FFF2-40B4-BE49-F238E27FC236}">
-                <a16:creationId xmlns:a16="http://schemas.microsoft.com/office/drawing/2014/main" id="{2EF7B1F2-BB5A-44D0-816D-16AD2C71430E}"/>
+                <a16:creationId xmlns:a16="http://schemas.microsoft.com/office/drawing/2014/main" xmlns="" id="{2EF7B1F2-BB5A-44D0-816D-16AD2C71430E}"/>
               </a:ext>
             </a:extLst>
           </p:cNvPr>
@@ -7361,7 +7474,7 @@
           <a:p>
             <a:fld id="{63289F7E-B80B-496E-81B4-D396C37C9454}" type="datetimeFigureOut">
               <a:rPr lang="pt-BR" smtClean="0"/>
-              <a:t>25/10/2023</a:t>
+              <a:t>20/04/2025</a:t>
             </a:fld>
             <a:endParaRPr lang="pt-BR"/>
           </a:p>
@@ -7372,7 +7485,7 @@
           <p:cNvPr id="5" name="Espaço Reservado para Rodapé 4">
             <a:extLst>
               <a:ext uri="{FF2B5EF4-FFF2-40B4-BE49-F238E27FC236}">
-                <a16:creationId xmlns:a16="http://schemas.microsoft.com/office/drawing/2014/main" id="{C703F94C-2CC8-4DAA-BC35-14FC3E841DCD}"/>
+                <a16:creationId xmlns:a16="http://schemas.microsoft.com/office/drawing/2014/main" xmlns="" id="{C703F94C-2CC8-4DAA-BC35-14FC3E841DCD}"/>
               </a:ext>
             </a:extLst>
           </p:cNvPr>
@@ -7415,7 +7528,7 @@
           <p:cNvPr id="6" name="Espaço Reservado para Número de Slide 5">
             <a:extLst>
               <a:ext uri="{FF2B5EF4-FFF2-40B4-BE49-F238E27FC236}">
-                <a16:creationId xmlns:a16="http://schemas.microsoft.com/office/drawing/2014/main" id="{64051336-7048-457A-8B61-D94291D71648}"/>
+                <a16:creationId xmlns:a16="http://schemas.microsoft.com/office/drawing/2014/main" xmlns="" id="{64051336-7048-457A-8B61-D94291D71648}"/>
               </a:ext>
             </a:extLst>
           </p:cNvPr>
@@ -7914,7 +8027,7 @@
             <a:fld id="{1D8BD707-D9CF-40AE-B4C6-C98DA3205C09}" type="datetimeFigureOut">
               <a:rPr lang="en-US" smtClean="0"/>
               <a:pPr/>
-              <a:t>10/25/2023</a:t>
+              <a:t>4/20/2025</a:t>
             </a:fld>
             <a:endParaRPr lang="en-US"/>
           </a:p>
@@ -8295,7 +8408,7 @@
           <p:cNvPr id="2" name="Título 1">
             <a:extLst>
               <a:ext uri="{FF2B5EF4-FFF2-40B4-BE49-F238E27FC236}">
-                <a16:creationId xmlns:a16="http://schemas.microsoft.com/office/drawing/2014/main" id="{32666AC8-2E17-4DB4-B0F5-60C640CCFD2E}"/>
+                <a16:creationId xmlns:a16="http://schemas.microsoft.com/office/drawing/2014/main" xmlns="" id="{32666AC8-2E17-4DB4-B0F5-60C640CCFD2E}"/>
               </a:ext>
             </a:extLst>
           </p:cNvPr>
@@ -8330,6 +8443,10 @@
               <a:rPr lang="pt-BR" sz="5400" dirty="0"/>
               <a:t> Learning:</a:t>
             </a:r>
+            <a:r>
+              <a:rPr lang="pt-BR" dirty="0"/>
+              <a:t/>
+            </a:r>
             <a:br>
               <a:rPr lang="pt-BR" dirty="0"/>
             </a:br>
@@ -8350,7 +8467,7 @@
           <p:cNvPr id="1026" name="Picture 2" descr="Logo">
             <a:extLst>
               <a:ext uri="{FF2B5EF4-FFF2-40B4-BE49-F238E27FC236}">
-                <a16:creationId xmlns:a16="http://schemas.microsoft.com/office/drawing/2014/main" id="{3F2642E0-4F6A-4196-8F58-E77D36E9A33F}"/>
+                <a16:creationId xmlns:a16="http://schemas.microsoft.com/office/drawing/2014/main" xmlns="" id="{3F2642E0-4F6A-4196-8F58-E77D36E9A33F}"/>
               </a:ext>
             </a:extLst>
           </p:cNvPr>
@@ -8395,7 +8512,7 @@
           <p:cNvPr id="5122" name="Picture 2" descr="Image result for machine learning">
             <a:extLst>
               <a:ext uri="{FF2B5EF4-FFF2-40B4-BE49-F238E27FC236}">
-                <a16:creationId xmlns:a16="http://schemas.microsoft.com/office/drawing/2014/main" id="{810CE0A2-4102-44A6-A370-175E7896CDCB}"/>
+                <a16:creationId xmlns:a16="http://schemas.microsoft.com/office/drawing/2014/main" xmlns="" id="{810CE0A2-4102-44A6-A370-175E7896CDCB}"/>
               </a:ext>
             </a:extLst>
           </p:cNvPr>
@@ -8440,7 +8557,7 @@
           <p:cNvPr id="3" name="Picture 2" descr="IoT Group">
             <a:extLst>
               <a:ext uri="{FF2B5EF4-FFF2-40B4-BE49-F238E27FC236}">
-                <a16:creationId xmlns:a16="http://schemas.microsoft.com/office/drawing/2014/main" id="{AC034F57-E830-B6E7-6790-12FDBBDB2975}"/>
+                <a16:creationId xmlns:a16="http://schemas.microsoft.com/office/drawing/2014/main" xmlns="" id="{AC034F57-E830-B6E7-6790-12FDBBDB2975}"/>
               </a:ext>
             </a:extLst>
           </p:cNvPr>
@@ -8485,7 +8602,7 @@
           <p:cNvPr id="5" name="CaixaDeTexto 4">
             <a:extLst>
               <a:ext uri="{FF2B5EF4-FFF2-40B4-BE49-F238E27FC236}">
-                <a16:creationId xmlns:a16="http://schemas.microsoft.com/office/drawing/2014/main" id="{2D82026D-D2EA-05D7-61F2-DEE04704DB7E}"/>
+                <a16:creationId xmlns:a16="http://schemas.microsoft.com/office/drawing/2014/main" xmlns="" id="{2D82026D-D2EA-05D7-61F2-DEE04704DB7E}"/>
               </a:ext>
             </a:extLst>
           </p:cNvPr>
@@ -8570,7 +8687,7 @@
           <p:cNvPr id="2" name="Título 1">
             <a:extLst>
               <a:ext uri="{FF2B5EF4-FFF2-40B4-BE49-F238E27FC236}">
-                <a16:creationId xmlns:a16="http://schemas.microsoft.com/office/drawing/2014/main" id="{5F09B89C-3183-4D52-981A-62798DDFF2B8}"/>
+                <a16:creationId xmlns:a16="http://schemas.microsoft.com/office/drawing/2014/main" xmlns="" id="{5F09B89C-3183-4D52-981A-62798DDFF2B8}"/>
               </a:ext>
             </a:extLst>
           </p:cNvPr>
@@ -8610,7 +8727,7 @@
           <p:cNvPr id="3" name="AutoShape 2" descr="An example of graph signal reconstruction over wireless sensor network. |  Download Scientific Diagram">
             <a:extLst>
               <a:ext uri="{FF2B5EF4-FFF2-40B4-BE49-F238E27FC236}">
-                <a16:creationId xmlns:a16="http://schemas.microsoft.com/office/drawing/2014/main" id="{0166B4DD-D72A-4A54-94A7-2C38133837FD}"/>
+                <a16:creationId xmlns:a16="http://schemas.microsoft.com/office/drawing/2014/main" xmlns="" id="{0166B4DD-D72A-4A54-94A7-2C38133837FD}"/>
               </a:ext>
             </a:extLst>
           </p:cNvPr>
@@ -8661,7 +8778,7 @@
           <p:cNvPr id="7" name="AutoShape 4" descr="An example of graph signal reconstruction over wireless sensor network. |  Download Scientific Diagram">
             <a:extLst>
               <a:ext uri="{FF2B5EF4-FFF2-40B4-BE49-F238E27FC236}">
-                <a16:creationId xmlns:a16="http://schemas.microsoft.com/office/drawing/2014/main" id="{14C2B67D-81A1-457E-A410-FE4350A3CCA4}"/>
+                <a16:creationId xmlns:a16="http://schemas.microsoft.com/office/drawing/2014/main" xmlns="" id="{14C2B67D-81A1-457E-A410-FE4350A3CCA4}"/>
               </a:ext>
             </a:extLst>
           </p:cNvPr>
@@ -8712,7 +8829,7 @@
           <p:cNvPr id="4" name="Espaço Reservado para Conteúdo 3">
             <a:extLst>
               <a:ext uri="{FF2B5EF4-FFF2-40B4-BE49-F238E27FC236}">
-                <a16:creationId xmlns:a16="http://schemas.microsoft.com/office/drawing/2014/main" id="{0349BA64-C9D7-4730-9CA9-5C4AD9FC7969}"/>
+                <a16:creationId xmlns:a16="http://schemas.microsoft.com/office/drawing/2014/main" xmlns="" id="{0349BA64-C9D7-4730-9CA9-5C4AD9FC7969}"/>
               </a:ext>
             </a:extLst>
           </p:cNvPr>
@@ -8787,7 +8904,7 @@
           <p:cNvPr id="2050" name="Picture 2">
             <a:extLst>
               <a:ext uri="{FF2B5EF4-FFF2-40B4-BE49-F238E27FC236}">
-                <a16:creationId xmlns:a16="http://schemas.microsoft.com/office/drawing/2014/main" id="{41EE8F3B-F21B-EBDD-8836-71298D219C33}"/>
+                <a16:creationId xmlns:a16="http://schemas.microsoft.com/office/drawing/2014/main" xmlns="" id="{41EE8F3B-F21B-EBDD-8836-71298D219C33}"/>
               </a:ext>
             </a:extLst>
           </p:cNvPr>
@@ -8878,7 +8995,7 @@
           <p:cNvPr id="2" name="Título 1">
             <a:extLst>
               <a:ext uri="{FF2B5EF4-FFF2-40B4-BE49-F238E27FC236}">
-                <a16:creationId xmlns:a16="http://schemas.microsoft.com/office/drawing/2014/main" id="{5F09B89C-3183-4D52-981A-62798DDFF2B8}"/>
+                <a16:creationId xmlns:a16="http://schemas.microsoft.com/office/drawing/2014/main" xmlns="" id="{5F09B89C-3183-4D52-981A-62798DDFF2B8}"/>
               </a:ext>
             </a:extLst>
           </p:cNvPr>
@@ -8918,7 +9035,7 @@
           <p:cNvPr id="3" name="AutoShape 2" descr="An example of graph signal reconstruction over wireless sensor network. |  Download Scientific Diagram">
             <a:extLst>
               <a:ext uri="{FF2B5EF4-FFF2-40B4-BE49-F238E27FC236}">
-                <a16:creationId xmlns:a16="http://schemas.microsoft.com/office/drawing/2014/main" id="{0166B4DD-D72A-4A54-94A7-2C38133837FD}"/>
+                <a16:creationId xmlns:a16="http://schemas.microsoft.com/office/drawing/2014/main" xmlns="" id="{0166B4DD-D72A-4A54-94A7-2C38133837FD}"/>
               </a:ext>
             </a:extLst>
           </p:cNvPr>
@@ -8969,7 +9086,7 @@
           <p:cNvPr id="7" name="AutoShape 4" descr="An example of graph signal reconstruction over wireless sensor network. |  Download Scientific Diagram">
             <a:extLst>
               <a:ext uri="{FF2B5EF4-FFF2-40B4-BE49-F238E27FC236}">
-                <a16:creationId xmlns:a16="http://schemas.microsoft.com/office/drawing/2014/main" id="{14C2B67D-81A1-457E-A410-FE4350A3CCA4}"/>
+                <a16:creationId xmlns:a16="http://schemas.microsoft.com/office/drawing/2014/main" xmlns="" id="{14C2B67D-81A1-457E-A410-FE4350A3CCA4}"/>
               </a:ext>
             </a:extLst>
           </p:cNvPr>
@@ -9020,7 +9137,7 @@
           <p:cNvPr id="4" name="Espaço Reservado para Conteúdo 3">
             <a:extLst>
               <a:ext uri="{FF2B5EF4-FFF2-40B4-BE49-F238E27FC236}">
-                <a16:creationId xmlns:a16="http://schemas.microsoft.com/office/drawing/2014/main" id="{0349BA64-C9D7-4730-9CA9-5C4AD9FC7969}"/>
+                <a16:creationId xmlns:a16="http://schemas.microsoft.com/office/drawing/2014/main" xmlns="" id="{0349BA64-C9D7-4730-9CA9-5C4AD9FC7969}"/>
               </a:ext>
             </a:extLst>
           </p:cNvPr>
@@ -9244,7 +9361,7 @@
           <p:cNvPr id="6" name="Imagem 5">
             <a:extLst>
               <a:ext uri="{FF2B5EF4-FFF2-40B4-BE49-F238E27FC236}">
-                <a16:creationId xmlns:a16="http://schemas.microsoft.com/office/drawing/2014/main" id="{226A6266-4F96-A9EE-A327-C4A981C95342}"/>
+                <a16:creationId xmlns:a16="http://schemas.microsoft.com/office/drawing/2014/main" xmlns="" id="{226A6266-4F96-A9EE-A327-C4A981C95342}"/>
               </a:ext>
             </a:extLst>
           </p:cNvPr>
@@ -9274,7 +9391,7 @@
           <p:cNvPr id="3074" name="Picture 2">
             <a:extLst>
               <a:ext uri="{FF2B5EF4-FFF2-40B4-BE49-F238E27FC236}">
-                <a16:creationId xmlns:a16="http://schemas.microsoft.com/office/drawing/2014/main" id="{CBE89270-4C86-1A06-BB71-909DD12DB6C2}"/>
+                <a16:creationId xmlns:a16="http://schemas.microsoft.com/office/drawing/2014/main" xmlns="" id="{CBE89270-4C86-1A06-BB71-909DD12DB6C2}"/>
               </a:ext>
             </a:extLst>
           </p:cNvPr>
@@ -9365,7 +9482,7 @@
           <p:cNvPr id="2" name="Título 1">
             <a:extLst>
               <a:ext uri="{FF2B5EF4-FFF2-40B4-BE49-F238E27FC236}">
-                <a16:creationId xmlns:a16="http://schemas.microsoft.com/office/drawing/2014/main" id="{5F09B89C-3183-4D52-981A-62798DDFF2B8}"/>
+                <a16:creationId xmlns:a16="http://schemas.microsoft.com/office/drawing/2014/main" xmlns="" id="{5F09B89C-3183-4D52-981A-62798DDFF2B8}"/>
               </a:ext>
             </a:extLst>
           </p:cNvPr>
@@ -9405,7 +9522,7 @@
           <p:cNvPr id="3" name="AutoShape 2" descr="An example of graph signal reconstruction over wireless sensor network. |  Download Scientific Diagram">
             <a:extLst>
               <a:ext uri="{FF2B5EF4-FFF2-40B4-BE49-F238E27FC236}">
-                <a16:creationId xmlns:a16="http://schemas.microsoft.com/office/drawing/2014/main" id="{0166B4DD-D72A-4A54-94A7-2C38133837FD}"/>
+                <a16:creationId xmlns:a16="http://schemas.microsoft.com/office/drawing/2014/main" xmlns="" id="{0166B4DD-D72A-4A54-94A7-2C38133837FD}"/>
               </a:ext>
             </a:extLst>
           </p:cNvPr>
@@ -9456,7 +9573,7 @@
           <p:cNvPr id="7" name="AutoShape 4" descr="An example of graph signal reconstruction over wireless sensor network. |  Download Scientific Diagram">
             <a:extLst>
               <a:ext uri="{FF2B5EF4-FFF2-40B4-BE49-F238E27FC236}">
-                <a16:creationId xmlns:a16="http://schemas.microsoft.com/office/drawing/2014/main" id="{14C2B67D-81A1-457E-A410-FE4350A3CCA4}"/>
+                <a16:creationId xmlns:a16="http://schemas.microsoft.com/office/drawing/2014/main" xmlns="" id="{14C2B67D-81A1-457E-A410-FE4350A3CCA4}"/>
               </a:ext>
             </a:extLst>
           </p:cNvPr>
@@ -9507,7 +9624,7 @@
           <p:cNvPr id="4" name="Espaço Reservado para Conteúdo 3">
             <a:extLst>
               <a:ext uri="{FF2B5EF4-FFF2-40B4-BE49-F238E27FC236}">
-                <a16:creationId xmlns:a16="http://schemas.microsoft.com/office/drawing/2014/main" id="{0349BA64-C9D7-4730-9CA9-5C4AD9FC7969}"/>
+                <a16:creationId xmlns:a16="http://schemas.microsoft.com/office/drawing/2014/main" xmlns="" id="{0349BA64-C9D7-4730-9CA9-5C4AD9FC7969}"/>
               </a:ext>
             </a:extLst>
           </p:cNvPr>
@@ -9692,7 +9809,7 @@
           <p:cNvPr id="5" name="Picture 2">
             <a:extLst>
               <a:ext uri="{FF2B5EF4-FFF2-40B4-BE49-F238E27FC236}">
-                <a16:creationId xmlns:a16="http://schemas.microsoft.com/office/drawing/2014/main" id="{07870545-4F2D-B338-1639-8D24A15221F0}"/>
+                <a16:creationId xmlns:a16="http://schemas.microsoft.com/office/drawing/2014/main" xmlns="" id="{07870545-4F2D-B338-1639-8D24A15221F0}"/>
               </a:ext>
             </a:extLst>
           </p:cNvPr>
@@ -9783,7 +9900,7 @@
           <p:cNvPr id="2" name="Título 1">
             <a:extLst>
               <a:ext uri="{FF2B5EF4-FFF2-40B4-BE49-F238E27FC236}">
-                <a16:creationId xmlns:a16="http://schemas.microsoft.com/office/drawing/2014/main" id="{5F09B89C-3183-4D52-981A-62798DDFF2B8}"/>
+                <a16:creationId xmlns:a16="http://schemas.microsoft.com/office/drawing/2014/main" xmlns="" id="{5F09B89C-3183-4D52-981A-62798DDFF2B8}"/>
               </a:ext>
             </a:extLst>
           </p:cNvPr>
@@ -9823,7 +9940,7 @@
           <p:cNvPr id="3" name="AutoShape 2" descr="An example of graph signal reconstruction over wireless sensor network. |  Download Scientific Diagram">
             <a:extLst>
               <a:ext uri="{FF2B5EF4-FFF2-40B4-BE49-F238E27FC236}">
-                <a16:creationId xmlns:a16="http://schemas.microsoft.com/office/drawing/2014/main" id="{0166B4DD-D72A-4A54-94A7-2C38133837FD}"/>
+                <a16:creationId xmlns:a16="http://schemas.microsoft.com/office/drawing/2014/main" xmlns="" id="{0166B4DD-D72A-4A54-94A7-2C38133837FD}"/>
               </a:ext>
             </a:extLst>
           </p:cNvPr>
@@ -9874,7 +9991,7 @@
           <p:cNvPr id="7" name="AutoShape 4" descr="An example of graph signal reconstruction over wireless sensor network. |  Download Scientific Diagram">
             <a:extLst>
               <a:ext uri="{FF2B5EF4-FFF2-40B4-BE49-F238E27FC236}">
-                <a16:creationId xmlns:a16="http://schemas.microsoft.com/office/drawing/2014/main" id="{14C2B67D-81A1-457E-A410-FE4350A3CCA4}"/>
+                <a16:creationId xmlns:a16="http://schemas.microsoft.com/office/drawing/2014/main" xmlns="" id="{14C2B67D-81A1-457E-A410-FE4350A3CCA4}"/>
               </a:ext>
             </a:extLst>
           </p:cNvPr>
@@ -9925,7 +10042,7 @@
           <p:cNvPr id="4" name="Espaço Reservado para Conteúdo 3">
             <a:extLst>
               <a:ext uri="{FF2B5EF4-FFF2-40B4-BE49-F238E27FC236}">
-                <a16:creationId xmlns:a16="http://schemas.microsoft.com/office/drawing/2014/main" id="{0349BA64-C9D7-4730-9CA9-5C4AD9FC7969}"/>
+                <a16:creationId xmlns:a16="http://schemas.microsoft.com/office/drawing/2014/main" xmlns="" id="{0349BA64-C9D7-4730-9CA9-5C4AD9FC7969}"/>
               </a:ext>
             </a:extLst>
           </p:cNvPr>
@@ -10051,7 +10168,7 @@
           <p:cNvPr id="6" name="Imagem 5">
             <a:extLst>
               <a:ext uri="{FF2B5EF4-FFF2-40B4-BE49-F238E27FC236}">
-                <a16:creationId xmlns:a16="http://schemas.microsoft.com/office/drawing/2014/main" id="{3876BA1F-0314-9771-20B7-DAEE6955ED5F}"/>
+                <a16:creationId xmlns:a16="http://schemas.microsoft.com/office/drawing/2014/main" xmlns="" id="{3876BA1F-0314-9771-20B7-DAEE6955ED5F}"/>
               </a:ext>
             </a:extLst>
           </p:cNvPr>
@@ -10081,7 +10198,7 @@
           <p:cNvPr id="8" name="Picture 2">
             <a:extLst>
               <a:ext uri="{FF2B5EF4-FFF2-40B4-BE49-F238E27FC236}">
-                <a16:creationId xmlns:a16="http://schemas.microsoft.com/office/drawing/2014/main" id="{CF338048-EB3D-C9A4-2D47-CD7735A5E606}"/>
+                <a16:creationId xmlns:a16="http://schemas.microsoft.com/office/drawing/2014/main" xmlns="" id="{CF338048-EB3D-C9A4-2D47-CD7735A5E606}"/>
               </a:ext>
             </a:extLst>
           </p:cNvPr>
@@ -10172,7 +10289,7 @@
           <p:cNvPr id="2" name="Título 1">
             <a:extLst>
               <a:ext uri="{FF2B5EF4-FFF2-40B4-BE49-F238E27FC236}">
-                <a16:creationId xmlns:a16="http://schemas.microsoft.com/office/drawing/2014/main" id="{5F09B89C-3183-4D52-981A-62798DDFF2B8}"/>
+                <a16:creationId xmlns:a16="http://schemas.microsoft.com/office/drawing/2014/main" xmlns="" id="{5F09B89C-3183-4D52-981A-62798DDFF2B8}"/>
               </a:ext>
             </a:extLst>
           </p:cNvPr>
@@ -10212,7 +10329,7 @@
           <p:cNvPr id="3" name="AutoShape 2" descr="An example of graph signal reconstruction over wireless sensor network. |  Download Scientific Diagram">
             <a:extLst>
               <a:ext uri="{FF2B5EF4-FFF2-40B4-BE49-F238E27FC236}">
-                <a16:creationId xmlns:a16="http://schemas.microsoft.com/office/drawing/2014/main" id="{0166B4DD-D72A-4A54-94A7-2C38133837FD}"/>
+                <a16:creationId xmlns:a16="http://schemas.microsoft.com/office/drawing/2014/main" xmlns="" id="{0166B4DD-D72A-4A54-94A7-2C38133837FD}"/>
               </a:ext>
             </a:extLst>
           </p:cNvPr>
@@ -10263,7 +10380,7 @@
           <p:cNvPr id="7" name="AutoShape 4" descr="An example of graph signal reconstruction over wireless sensor network. |  Download Scientific Diagram">
             <a:extLst>
               <a:ext uri="{FF2B5EF4-FFF2-40B4-BE49-F238E27FC236}">
-                <a16:creationId xmlns:a16="http://schemas.microsoft.com/office/drawing/2014/main" id="{14C2B67D-81A1-457E-A410-FE4350A3CCA4}"/>
+                <a16:creationId xmlns:a16="http://schemas.microsoft.com/office/drawing/2014/main" xmlns="" id="{14C2B67D-81A1-457E-A410-FE4350A3CCA4}"/>
               </a:ext>
             </a:extLst>
           </p:cNvPr>
@@ -10314,7 +10431,7 @@
           <p:cNvPr id="4" name="Espaço Reservado para Conteúdo 3">
             <a:extLst>
               <a:ext uri="{FF2B5EF4-FFF2-40B4-BE49-F238E27FC236}">
-                <a16:creationId xmlns:a16="http://schemas.microsoft.com/office/drawing/2014/main" id="{0349BA64-C9D7-4730-9CA9-5C4AD9FC7969}"/>
+                <a16:creationId xmlns:a16="http://schemas.microsoft.com/office/drawing/2014/main" xmlns="" id="{0349BA64-C9D7-4730-9CA9-5C4AD9FC7969}"/>
               </a:ext>
             </a:extLst>
           </p:cNvPr>
@@ -10462,7 +10579,7 @@
           <p:cNvPr id="9" name="Imagem 8">
             <a:extLst>
               <a:ext uri="{FF2B5EF4-FFF2-40B4-BE49-F238E27FC236}">
-                <a16:creationId xmlns:a16="http://schemas.microsoft.com/office/drawing/2014/main" id="{E34DDF80-3AF4-098B-D371-5E05913D72CB}"/>
+                <a16:creationId xmlns:a16="http://schemas.microsoft.com/office/drawing/2014/main" xmlns="" id="{E34DDF80-3AF4-098B-D371-5E05913D72CB}"/>
               </a:ext>
             </a:extLst>
           </p:cNvPr>
@@ -10536,7 +10653,7 @@
           <p:cNvPr id="2" name="Título 1">
             <a:extLst>
               <a:ext uri="{FF2B5EF4-FFF2-40B4-BE49-F238E27FC236}">
-                <a16:creationId xmlns:a16="http://schemas.microsoft.com/office/drawing/2014/main" id="{5F09B89C-3183-4D52-981A-62798DDFF2B8}"/>
+                <a16:creationId xmlns:a16="http://schemas.microsoft.com/office/drawing/2014/main" xmlns="" id="{5F09B89C-3183-4D52-981A-62798DDFF2B8}"/>
               </a:ext>
             </a:extLst>
           </p:cNvPr>
@@ -10576,7 +10693,7 @@
           <p:cNvPr id="3" name="AutoShape 2" descr="An example of graph signal reconstruction over wireless sensor network. |  Download Scientific Diagram">
             <a:extLst>
               <a:ext uri="{FF2B5EF4-FFF2-40B4-BE49-F238E27FC236}">
-                <a16:creationId xmlns:a16="http://schemas.microsoft.com/office/drawing/2014/main" id="{0166B4DD-D72A-4A54-94A7-2C38133837FD}"/>
+                <a16:creationId xmlns:a16="http://schemas.microsoft.com/office/drawing/2014/main" xmlns="" id="{0166B4DD-D72A-4A54-94A7-2C38133837FD}"/>
               </a:ext>
             </a:extLst>
           </p:cNvPr>
@@ -10627,7 +10744,7 @@
           <p:cNvPr id="7" name="AutoShape 4" descr="An example of graph signal reconstruction over wireless sensor network. |  Download Scientific Diagram">
             <a:extLst>
               <a:ext uri="{FF2B5EF4-FFF2-40B4-BE49-F238E27FC236}">
-                <a16:creationId xmlns:a16="http://schemas.microsoft.com/office/drawing/2014/main" id="{14C2B67D-81A1-457E-A410-FE4350A3CCA4}"/>
+                <a16:creationId xmlns:a16="http://schemas.microsoft.com/office/drawing/2014/main" xmlns="" id="{14C2B67D-81A1-457E-A410-FE4350A3CCA4}"/>
               </a:ext>
             </a:extLst>
           </p:cNvPr>
@@ -10678,7 +10795,7 @@
           <p:cNvPr id="4" name="Espaço Reservado para Conteúdo 3">
             <a:extLst>
               <a:ext uri="{FF2B5EF4-FFF2-40B4-BE49-F238E27FC236}">
-                <a16:creationId xmlns:a16="http://schemas.microsoft.com/office/drawing/2014/main" id="{0349BA64-C9D7-4730-9CA9-5C4AD9FC7969}"/>
+                <a16:creationId xmlns:a16="http://schemas.microsoft.com/office/drawing/2014/main" xmlns="" id="{0349BA64-C9D7-4730-9CA9-5C4AD9FC7969}"/>
               </a:ext>
             </a:extLst>
           </p:cNvPr>
@@ -10790,7 +10907,7 @@
           <p:cNvPr id="6" name="Imagem 5">
             <a:extLst>
               <a:ext uri="{FF2B5EF4-FFF2-40B4-BE49-F238E27FC236}">
-                <a16:creationId xmlns:a16="http://schemas.microsoft.com/office/drawing/2014/main" id="{AA943D34-6194-3573-A1F3-15277F095134}"/>
+                <a16:creationId xmlns:a16="http://schemas.microsoft.com/office/drawing/2014/main" xmlns="" id="{AA943D34-6194-3573-A1F3-15277F095134}"/>
               </a:ext>
             </a:extLst>
           </p:cNvPr>
@@ -10820,7 +10937,7 @@
           <p:cNvPr id="10" name="Imagem 9">
             <a:extLst>
               <a:ext uri="{FF2B5EF4-FFF2-40B4-BE49-F238E27FC236}">
-                <a16:creationId xmlns:a16="http://schemas.microsoft.com/office/drawing/2014/main" id="{25B0EB0A-63CF-B662-F66B-F677CAAE5270}"/>
+                <a16:creationId xmlns:a16="http://schemas.microsoft.com/office/drawing/2014/main" xmlns="" id="{25B0EB0A-63CF-B662-F66B-F677CAAE5270}"/>
               </a:ext>
             </a:extLst>
           </p:cNvPr>
@@ -10894,7 +11011,7 @@
           <p:cNvPr id="2" name="Título 1">
             <a:extLst>
               <a:ext uri="{FF2B5EF4-FFF2-40B4-BE49-F238E27FC236}">
-                <a16:creationId xmlns:a16="http://schemas.microsoft.com/office/drawing/2014/main" id="{5F09B89C-3183-4D52-981A-62798DDFF2B8}"/>
+                <a16:creationId xmlns:a16="http://schemas.microsoft.com/office/drawing/2014/main" xmlns="" id="{5F09B89C-3183-4D52-981A-62798DDFF2B8}"/>
               </a:ext>
             </a:extLst>
           </p:cNvPr>
@@ -10934,7 +11051,7 @@
           <p:cNvPr id="3" name="AutoShape 2" descr="An example of graph signal reconstruction over wireless sensor network. |  Download Scientific Diagram">
             <a:extLst>
               <a:ext uri="{FF2B5EF4-FFF2-40B4-BE49-F238E27FC236}">
-                <a16:creationId xmlns:a16="http://schemas.microsoft.com/office/drawing/2014/main" id="{0166B4DD-D72A-4A54-94A7-2C38133837FD}"/>
+                <a16:creationId xmlns:a16="http://schemas.microsoft.com/office/drawing/2014/main" xmlns="" id="{0166B4DD-D72A-4A54-94A7-2C38133837FD}"/>
               </a:ext>
             </a:extLst>
           </p:cNvPr>
@@ -10985,7 +11102,7 @@
           <p:cNvPr id="7" name="AutoShape 4" descr="An example of graph signal reconstruction over wireless sensor network. |  Download Scientific Diagram">
             <a:extLst>
               <a:ext uri="{FF2B5EF4-FFF2-40B4-BE49-F238E27FC236}">
-                <a16:creationId xmlns:a16="http://schemas.microsoft.com/office/drawing/2014/main" id="{14C2B67D-81A1-457E-A410-FE4350A3CCA4}"/>
+                <a16:creationId xmlns:a16="http://schemas.microsoft.com/office/drawing/2014/main" xmlns="" id="{14C2B67D-81A1-457E-A410-FE4350A3CCA4}"/>
               </a:ext>
             </a:extLst>
           </p:cNvPr>
@@ -11036,7 +11153,7 @@
           <p:cNvPr id="4" name="Espaço Reservado para Conteúdo 3">
             <a:extLst>
               <a:ext uri="{FF2B5EF4-FFF2-40B4-BE49-F238E27FC236}">
-                <a16:creationId xmlns:a16="http://schemas.microsoft.com/office/drawing/2014/main" id="{0349BA64-C9D7-4730-9CA9-5C4AD9FC7969}"/>
+                <a16:creationId xmlns:a16="http://schemas.microsoft.com/office/drawing/2014/main" xmlns="" id="{0349BA64-C9D7-4730-9CA9-5C4AD9FC7969}"/>
               </a:ext>
             </a:extLst>
           </p:cNvPr>
@@ -11221,7 +11338,7 @@
           <p:cNvPr id="2" name="Título 1">
             <a:extLst>
               <a:ext uri="{FF2B5EF4-FFF2-40B4-BE49-F238E27FC236}">
-                <a16:creationId xmlns:a16="http://schemas.microsoft.com/office/drawing/2014/main" id="{5F09B89C-3183-4D52-981A-62798DDFF2B8}"/>
+                <a16:creationId xmlns:a16="http://schemas.microsoft.com/office/drawing/2014/main" xmlns="" id="{5F09B89C-3183-4D52-981A-62798DDFF2B8}"/>
               </a:ext>
             </a:extLst>
           </p:cNvPr>
@@ -11256,7 +11373,7 @@
           <p:cNvPr id="3" name="AutoShape 2" descr="An example of graph signal reconstruction over wireless sensor network. |  Download Scientific Diagram">
             <a:extLst>
               <a:ext uri="{FF2B5EF4-FFF2-40B4-BE49-F238E27FC236}">
-                <a16:creationId xmlns:a16="http://schemas.microsoft.com/office/drawing/2014/main" id="{0166B4DD-D72A-4A54-94A7-2C38133837FD}"/>
+                <a16:creationId xmlns:a16="http://schemas.microsoft.com/office/drawing/2014/main" xmlns="" id="{0166B4DD-D72A-4A54-94A7-2C38133837FD}"/>
               </a:ext>
             </a:extLst>
           </p:cNvPr>
@@ -11307,7 +11424,7 @@
           <p:cNvPr id="7" name="AutoShape 4" descr="An example of graph signal reconstruction over wireless sensor network. |  Download Scientific Diagram">
             <a:extLst>
               <a:ext uri="{FF2B5EF4-FFF2-40B4-BE49-F238E27FC236}">
-                <a16:creationId xmlns:a16="http://schemas.microsoft.com/office/drawing/2014/main" id="{14C2B67D-81A1-457E-A410-FE4350A3CCA4}"/>
+                <a16:creationId xmlns:a16="http://schemas.microsoft.com/office/drawing/2014/main" xmlns="" id="{14C2B67D-81A1-457E-A410-FE4350A3CCA4}"/>
               </a:ext>
             </a:extLst>
           </p:cNvPr>
@@ -11358,7 +11475,7 @@
           <p:cNvPr id="4" name="Espaço Reservado para Conteúdo 3">
             <a:extLst>
               <a:ext uri="{FF2B5EF4-FFF2-40B4-BE49-F238E27FC236}">
-                <a16:creationId xmlns:a16="http://schemas.microsoft.com/office/drawing/2014/main" id="{0349BA64-C9D7-4730-9CA9-5C4AD9FC7969}"/>
+                <a16:creationId xmlns:a16="http://schemas.microsoft.com/office/drawing/2014/main" xmlns="" id="{0349BA64-C9D7-4730-9CA9-5C4AD9FC7969}"/>
               </a:ext>
             </a:extLst>
           </p:cNvPr>
@@ -11495,7 +11612,7 @@
           <p:cNvPr id="9" name="Imagem 8">
             <a:extLst>
               <a:ext uri="{FF2B5EF4-FFF2-40B4-BE49-F238E27FC236}">
-                <a16:creationId xmlns:a16="http://schemas.microsoft.com/office/drawing/2014/main" id="{805DE0C9-CC2B-9A66-2836-0B5BA9411A2D}"/>
+                <a16:creationId xmlns:a16="http://schemas.microsoft.com/office/drawing/2014/main" xmlns="" id="{805DE0C9-CC2B-9A66-2836-0B5BA9411A2D}"/>
               </a:ext>
             </a:extLst>
           </p:cNvPr>
@@ -11569,7 +11686,7 @@
           <p:cNvPr id="2" name="Título 1">
             <a:extLst>
               <a:ext uri="{FF2B5EF4-FFF2-40B4-BE49-F238E27FC236}">
-                <a16:creationId xmlns:a16="http://schemas.microsoft.com/office/drawing/2014/main" id="{5F09B89C-3183-4D52-981A-62798DDFF2B8}"/>
+                <a16:creationId xmlns:a16="http://schemas.microsoft.com/office/drawing/2014/main" xmlns="" id="{5F09B89C-3183-4D52-981A-62798DDFF2B8}"/>
               </a:ext>
             </a:extLst>
           </p:cNvPr>
@@ -11609,7 +11726,7 @@
           <p:cNvPr id="3" name="AutoShape 2" descr="An example of graph signal reconstruction over wireless sensor network. |  Download Scientific Diagram">
             <a:extLst>
               <a:ext uri="{FF2B5EF4-FFF2-40B4-BE49-F238E27FC236}">
-                <a16:creationId xmlns:a16="http://schemas.microsoft.com/office/drawing/2014/main" id="{0166B4DD-D72A-4A54-94A7-2C38133837FD}"/>
+                <a16:creationId xmlns:a16="http://schemas.microsoft.com/office/drawing/2014/main" xmlns="" id="{0166B4DD-D72A-4A54-94A7-2C38133837FD}"/>
               </a:ext>
             </a:extLst>
           </p:cNvPr>
@@ -11660,7 +11777,7 @@
           <p:cNvPr id="7" name="AutoShape 4" descr="An example of graph signal reconstruction over wireless sensor network. |  Download Scientific Diagram">
             <a:extLst>
               <a:ext uri="{FF2B5EF4-FFF2-40B4-BE49-F238E27FC236}">
-                <a16:creationId xmlns:a16="http://schemas.microsoft.com/office/drawing/2014/main" id="{14C2B67D-81A1-457E-A410-FE4350A3CCA4}"/>
+                <a16:creationId xmlns:a16="http://schemas.microsoft.com/office/drawing/2014/main" xmlns="" id="{14C2B67D-81A1-457E-A410-FE4350A3CCA4}"/>
               </a:ext>
             </a:extLst>
           </p:cNvPr>
@@ -11711,7 +11828,7 @@
           <p:cNvPr id="5" name="Picture 2" descr="Mockup Celular - iPhone Mockup | Maker Mockup">
             <a:extLst>
               <a:ext uri="{FF2B5EF4-FFF2-40B4-BE49-F238E27FC236}">
-                <a16:creationId xmlns:a16="http://schemas.microsoft.com/office/drawing/2014/main" id="{FC87A0DC-550D-BB34-6B8D-21472B938809}"/>
+                <a16:creationId xmlns:a16="http://schemas.microsoft.com/office/drawing/2014/main" xmlns="" id="{FC87A0DC-550D-BB34-6B8D-21472B938809}"/>
               </a:ext>
             </a:extLst>
           </p:cNvPr>
@@ -11760,7 +11877,7 @@
           <p:cNvPr id="1028" name="Picture 4" descr="Notebook Samsung Book 4GB, 15.6'', Intel Celeron, 500 GB, Windows 10 Home,  Cinza - Samsung Book - Magazine Luiza">
             <a:extLst>
               <a:ext uri="{FF2B5EF4-FFF2-40B4-BE49-F238E27FC236}">
-                <a16:creationId xmlns:a16="http://schemas.microsoft.com/office/drawing/2014/main" id="{846ECC3C-0F71-81E5-1C69-59A8D9A2C0AB}"/>
+                <a16:creationId xmlns:a16="http://schemas.microsoft.com/office/drawing/2014/main" xmlns="" id="{846ECC3C-0F71-81E5-1C69-59A8D9A2C0AB}"/>
               </a:ext>
             </a:extLst>
           </p:cNvPr>
@@ -11807,7 +11924,7 @@
           <p:cNvPr id="1030" name="Picture 6" descr="Colar monitora vacas para melhorar produtividade de leite - 12/05/2023 -  Tec - Folha">
             <a:extLst>
               <a:ext uri="{FF2B5EF4-FFF2-40B4-BE49-F238E27FC236}">
-                <a16:creationId xmlns:a16="http://schemas.microsoft.com/office/drawing/2014/main" id="{219B56EB-C5FB-216B-A62B-12BD558A49F2}"/>
+                <a16:creationId xmlns:a16="http://schemas.microsoft.com/office/drawing/2014/main" xmlns="" id="{219B56EB-C5FB-216B-A62B-12BD558A49F2}"/>
               </a:ext>
             </a:extLst>
           </p:cNvPr>
@@ -11854,7 +11971,7 @@
           <p:cNvPr id="6" name="Picture 2" descr="Free photo industrial containers box for logistic import export business.">
             <a:extLst>
               <a:ext uri="{FF2B5EF4-FFF2-40B4-BE49-F238E27FC236}">
-                <a16:creationId xmlns:a16="http://schemas.microsoft.com/office/drawing/2014/main" id="{EEB34E5E-7F0E-7162-8BAF-B92B4B06BA43}"/>
+                <a16:creationId xmlns:a16="http://schemas.microsoft.com/office/drawing/2014/main" xmlns="" id="{EEB34E5E-7F0E-7162-8BAF-B92B4B06BA43}"/>
               </a:ext>
             </a:extLst>
           </p:cNvPr>
@@ -11901,7 +12018,7 @@
           <p:cNvPr id="10" name="Imagem 9">
             <a:extLst>
               <a:ext uri="{FF2B5EF4-FFF2-40B4-BE49-F238E27FC236}">
-                <a16:creationId xmlns:a16="http://schemas.microsoft.com/office/drawing/2014/main" id="{240919DB-71EF-5F88-F569-C5D883B2B487}"/>
+                <a16:creationId xmlns:a16="http://schemas.microsoft.com/office/drawing/2014/main" xmlns="" id="{240919DB-71EF-5F88-F569-C5D883B2B487}"/>
               </a:ext>
             </a:extLst>
           </p:cNvPr>
@@ -11975,7 +12092,7 @@
           <p:cNvPr id="2" name="Título 1">
             <a:extLst>
               <a:ext uri="{FF2B5EF4-FFF2-40B4-BE49-F238E27FC236}">
-                <a16:creationId xmlns:a16="http://schemas.microsoft.com/office/drawing/2014/main" id="{5F09B89C-3183-4D52-981A-62798DDFF2B8}"/>
+                <a16:creationId xmlns:a16="http://schemas.microsoft.com/office/drawing/2014/main" xmlns="" id="{5F09B89C-3183-4D52-981A-62798DDFF2B8}"/>
               </a:ext>
             </a:extLst>
           </p:cNvPr>
@@ -12015,7 +12132,7 @@
           <p:cNvPr id="3" name="AutoShape 2" descr="An example of graph signal reconstruction over wireless sensor network. |  Download Scientific Diagram">
             <a:extLst>
               <a:ext uri="{FF2B5EF4-FFF2-40B4-BE49-F238E27FC236}">
-                <a16:creationId xmlns:a16="http://schemas.microsoft.com/office/drawing/2014/main" id="{0166B4DD-D72A-4A54-94A7-2C38133837FD}"/>
+                <a16:creationId xmlns:a16="http://schemas.microsoft.com/office/drawing/2014/main" xmlns="" id="{0166B4DD-D72A-4A54-94A7-2C38133837FD}"/>
               </a:ext>
             </a:extLst>
           </p:cNvPr>
@@ -12066,7 +12183,7 @@
           <p:cNvPr id="7" name="AutoShape 4" descr="An example of graph signal reconstruction over wireless sensor network. |  Download Scientific Diagram">
             <a:extLst>
               <a:ext uri="{FF2B5EF4-FFF2-40B4-BE49-F238E27FC236}">
-                <a16:creationId xmlns:a16="http://schemas.microsoft.com/office/drawing/2014/main" id="{14C2B67D-81A1-457E-A410-FE4350A3CCA4}"/>
+                <a16:creationId xmlns:a16="http://schemas.microsoft.com/office/drawing/2014/main" xmlns="" id="{14C2B67D-81A1-457E-A410-FE4350A3CCA4}"/>
               </a:ext>
             </a:extLst>
           </p:cNvPr>
@@ -12117,7 +12234,7 @@
           <p:cNvPr id="4" name="Espaço Reservado para Conteúdo 3">
             <a:extLst>
               <a:ext uri="{FF2B5EF4-FFF2-40B4-BE49-F238E27FC236}">
-                <a16:creationId xmlns:a16="http://schemas.microsoft.com/office/drawing/2014/main" id="{0349BA64-C9D7-4730-9CA9-5C4AD9FC7969}"/>
+                <a16:creationId xmlns:a16="http://schemas.microsoft.com/office/drawing/2014/main" xmlns="" id="{0349BA64-C9D7-4730-9CA9-5C4AD9FC7969}"/>
               </a:ext>
             </a:extLst>
           </p:cNvPr>
@@ -12163,7 +12280,7 @@
           <p:cNvPr id="1026" name="Picture 2" descr="Free photo industrial containers box for logistic import export business.">
             <a:extLst>
               <a:ext uri="{FF2B5EF4-FFF2-40B4-BE49-F238E27FC236}">
-                <a16:creationId xmlns:a16="http://schemas.microsoft.com/office/drawing/2014/main" id="{FDC07977-F662-66CB-7534-103E83976919}"/>
+                <a16:creationId xmlns:a16="http://schemas.microsoft.com/office/drawing/2014/main" xmlns="" id="{FDC07977-F662-66CB-7534-103E83976919}"/>
               </a:ext>
             </a:extLst>
           </p:cNvPr>
@@ -12254,7 +12371,7 @@
           <p:cNvPr id="2" name="Título 1">
             <a:extLst>
               <a:ext uri="{FF2B5EF4-FFF2-40B4-BE49-F238E27FC236}">
-                <a16:creationId xmlns:a16="http://schemas.microsoft.com/office/drawing/2014/main" id="{5F09B89C-3183-4D52-981A-62798DDFF2B8}"/>
+                <a16:creationId xmlns:a16="http://schemas.microsoft.com/office/drawing/2014/main" xmlns="" id="{5F09B89C-3183-4D52-981A-62798DDFF2B8}"/>
               </a:ext>
             </a:extLst>
           </p:cNvPr>
@@ -12294,7 +12411,7 @@
           <p:cNvPr id="3" name="AutoShape 2" descr="An example of graph signal reconstruction over wireless sensor network. |  Download Scientific Diagram">
             <a:extLst>
               <a:ext uri="{FF2B5EF4-FFF2-40B4-BE49-F238E27FC236}">
-                <a16:creationId xmlns:a16="http://schemas.microsoft.com/office/drawing/2014/main" id="{0166B4DD-D72A-4A54-94A7-2C38133837FD}"/>
+                <a16:creationId xmlns:a16="http://schemas.microsoft.com/office/drawing/2014/main" xmlns="" id="{0166B4DD-D72A-4A54-94A7-2C38133837FD}"/>
               </a:ext>
             </a:extLst>
           </p:cNvPr>
@@ -12345,7 +12462,7 @@
           <p:cNvPr id="7" name="AutoShape 4" descr="An example of graph signal reconstruction over wireless sensor network. |  Download Scientific Diagram">
             <a:extLst>
               <a:ext uri="{FF2B5EF4-FFF2-40B4-BE49-F238E27FC236}">
-                <a16:creationId xmlns:a16="http://schemas.microsoft.com/office/drawing/2014/main" id="{14C2B67D-81A1-457E-A410-FE4350A3CCA4}"/>
+                <a16:creationId xmlns:a16="http://schemas.microsoft.com/office/drawing/2014/main" xmlns="" id="{14C2B67D-81A1-457E-A410-FE4350A3CCA4}"/>
               </a:ext>
             </a:extLst>
           </p:cNvPr>
@@ -12396,7 +12513,7 @@
           <p:cNvPr id="4" name="Espaço Reservado para Conteúdo 3">
             <a:extLst>
               <a:ext uri="{FF2B5EF4-FFF2-40B4-BE49-F238E27FC236}">
-                <a16:creationId xmlns:a16="http://schemas.microsoft.com/office/drawing/2014/main" id="{0349BA64-C9D7-4730-9CA9-5C4AD9FC7969}"/>
+                <a16:creationId xmlns:a16="http://schemas.microsoft.com/office/drawing/2014/main" xmlns="" id="{0349BA64-C9D7-4730-9CA9-5C4AD9FC7969}"/>
               </a:ext>
             </a:extLst>
           </p:cNvPr>
@@ -12442,7 +12559,7 @@
           <p:cNvPr id="1026" name="Picture 2" descr="Free photo industrial containers box for logistic import export business.">
             <a:extLst>
               <a:ext uri="{FF2B5EF4-FFF2-40B4-BE49-F238E27FC236}">
-                <a16:creationId xmlns:a16="http://schemas.microsoft.com/office/drawing/2014/main" id="{FDC07977-F662-66CB-7534-103E83976919}"/>
+                <a16:creationId xmlns:a16="http://schemas.microsoft.com/office/drawing/2014/main" xmlns="" id="{FDC07977-F662-66CB-7534-103E83976919}"/>
               </a:ext>
             </a:extLst>
           </p:cNvPr>
@@ -12533,7 +12650,7 @@
           <p:cNvPr id="2" name="Título 1">
             <a:extLst>
               <a:ext uri="{FF2B5EF4-FFF2-40B4-BE49-F238E27FC236}">
-                <a16:creationId xmlns:a16="http://schemas.microsoft.com/office/drawing/2014/main" id="{5F09B89C-3183-4D52-981A-62798DDFF2B8}"/>
+                <a16:creationId xmlns:a16="http://schemas.microsoft.com/office/drawing/2014/main" xmlns="" id="{5F09B89C-3183-4D52-981A-62798DDFF2B8}"/>
               </a:ext>
             </a:extLst>
           </p:cNvPr>
@@ -12573,7 +12690,7 @@
           <p:cNvPr id="3" name="AutoShape 2" descr="An example of graph signal reconstruction over wireless sensor network. |  Download Scientific Diagram">
             <a:extLst>
               <a:ext uri="{FF2B5EF4-FFF2-40B4-BE49-F238E27FC236}">
-                <a16:creationId xmlns:a16="http://schemas.microsoft.com/office/drawing/2014/main" id="{0166B4DD-D72A-4A54-94A7-2C38133837FD}"/>
+                <a16:creationId xmlns:a16="http://schemas.microsoft.com/office/drawing/2014/main" xmlns="" id="{0166B4DD-D72A-4A54-94A7-2C38133837FD}"/>
               </a:ext>
             </a:extLst>
           </p:cNvPr>
@@ -12624,7 +12741,7 @@
           <p:cNvPr id="7" name="AutoShape 4" descr="An example of graph signal reconstruction over wireless sensor network. |  Download Scientific Diagram">
             <a:extLst>
               <a:ext uri="{FF2B5EF4-FFF2-40B4-BE49-F238E27FC236}">
-                <a16:creationId xmlns:a16="http://schemas.microsoft.com/office/drawing/2014/main" id="{14C2B67D-81A1-457E-A410-FE4350A3CCA4}"/>
+                <a16:creationId xmlns:a16="http://schemas.microsoft.com/office/drawing/2014/main" xmlns="" id="{14C2B67D-81A1-457E-A410-FE4350A3CCA4}"/>
               </a:ext>
             </a:extLst>
           </p:cNvPr>
@@ -12675,7 +12792,7 @@
           <p:cNvPr id="4" name="Espaço Reservado para Conteúdo 3">
             <a:extLst>
               <a:ext uri="{FF2B5EF4-FFF2-40B4-BE49-F238E27FC236}">
-                <a16:creationId xmlns:a16="http://schemas.microsoft.com/office/drawing/2014/main" id="{0349BA64-C9D7-4730-9CA9-5C4AD9FC7969}"/>
+                <a16:creationId xmlns:a16="http://schemas.microsoft.com/office/drawing/2014/main" xmlns="" id="{0349BA64-C9D7-4730-9CA9-5C4AD9FC7969}"/>
               </a:ext>
             </a:extLst>
           </p:cNvPr>
@@ -12721,7 +12838,7 @@
           <p:cNvPr id="2050" name="Picture 2" descr="Free PSD blue cargo container on transparent background">
             <a:extLst>
               <a:ext uri="{FF2B5EF4-FFF2-40B4-BE49-F238E27FC236}">
-                <a16:creationId xmlns:a16="http://schemas.microsoft.com/office/drawing/2014/main" id="{A98A15EA-A147-6CDF-C2F6-87AAFC6C49FD}"/>
+                <a16:creationId xmlns:a16="http://schemas.microsoft.com/office/drawing/2014/main" xmlns="" id="{A98A15EA-A147-6CDF-C2F6-87AAFC6C49FD}"/>
               </a:ext>
             </a:extLst>
           </p:cNvPr>
@@ -12768,7 +12885,7 @@
           <p:cNvPr id="6" name="CaixaDeTexto 5">
             <a:extLst>
               <a:ext uri="{FF2B5EF4-FFF2-40B4-BE49-F238E27FC236}">
-                <a16:creationId xmlns:a16="http://schemas.microsoft.com/office/drawing/2014/main" id="{42657F2C-3A0E-77BB-E339-41D96ABE7E97}"/>
+                <a16:creationId xmlns:a16="http://schemas.microsoft.com/office/drawing/2014/main" xmlns="" id="{42657F2C-3A0E-77BB-E339-41D96ABE7E97}"/>
               </a:ext>
             </a:extLst>
           </p:cNvPr>
@@ -12858,7 +12975,7 @@
           <p:cNvPr id="2" name="Título 1">
             <a:extLst>
               <a:ext uri="{FF2B5EF4-FFF2-40B4-BE49-F238E27FC236}">
-                <a16:creationId xmlns:a16="http://schemas.microsoft.com/office/drawing/2014/main" id="{5F09B89C-3183-4D52-981A-62798DDFF2B8}"/>
+                <a16:creationId xmlns:a16="http://schemas.microsoft.com/office/drawing/2014/main" xmlns="" id="{5F09B89C-3183-4D52-981A-62798DDFF2B8}"/>
               </a:ext>
             </a:extLst>
           </p:cNvPr>
@@ -12898,7 +13015,7 @@
           <p:cNvPr id="3" name="AutoShape 2" descr="An example of graph signal reconstruction over wireless sensor network. |  Download Scientific Diagram">
             <a:extLst>
               <a:ext uri="{FF2B5EF4-FFF2-40B4-BE49-F238E27FC236}">
-                <a16:creationId xmlns:a16="http://schemas.microsoft.com/office/drawing/2014/main" id="{0166B4DD-D72A-4A54-94A7-2C38133837FD}"/>
+                <a16:creationId xmlns:a16="http://schemas.microsoft.com/office/drawing/2014/main" xmlns="" id="{0166B4DD-D72A-4A54-94A7-2C38133837FD}"/>
               </a:ext>
             </a:extLst>
           </p:cNvPr>
@@ -12949,7 +13066,7 @@
           <p:cNvPr id="7" name="AutoShape 4" descr="An example of graph signal reconstruction over wireless sensor network. |  Download Scientific Diagram">
             <a:extLst>
               <a:ext uri="{FF2B5EF4-FFF2-40B4-BE49-F238E27FC236}">
-                <a16:creationId xmlns:a16="http://schemas.microsoft.com/office/drawing/2014/main" id="{14C2B67D-81A1-457E-A410-FE4350A3CCA4}"/>
+                <a16:creationId xmlns:a16="http://schemas.microsoft.com/office/drawing/2014/main" xmlns="" id="{14C2B67D-81A1-457E-A410-FE4350A3CCA4}"/>
               </a:ext>
             </a:extLst>
           </p:cNvPr>
@@ -13000,7 +13117,7 @@
           <p:cNvPr id="4" name="Espaço Reservado para Conteúdo 3">
             <a:extLst>
               <a:ext uri="{FF2B5EF4-FFF2-40B4-BE49-F238E27FC236}">
-                <a16:creationId xmlns:a16="http://schemas.microsoft.com/office/drawing/2014/main" id="{0349BA64-C9D7-4730-9CA9-5C4AD9FC7969}"/>
+                <a16:creationId xmlns:a16="http://schemas.microsoft.com/office/drawing/2014/main" xmlns="" id="{0349BA64-C9D7-4730-9CA9-5C4AD9FC7969}"/>
               </a:ext>
             </a:extLst>
           </p:cNvPr>
@@ -13046,7 +13163,7 @@
           <p:cNvPr id="3074" name="Picture 2" descr="Free photo aerial view of cargo ship with cargo container on sea">
             <a:extLst>
               <a:ext uri="{FF2B5EF4-FFF2-40B4-BE49-F238E27FC236}">
-                <a16:creationId xmlns:a16="http://schemas.microsoft.com/office/drawing/2014/main" id="{6D87BA9E-F12B-B77C-65AD-AFA156B87962}"/>
+                <a16:creationId xmlns:a16="http://schemas.microsoft.com/office/drawing/2014/main" xmlns="" id="{6D87BA9E-F12B-B77C-65AD-AFA156B87962}"/>
               </a:ext>
             </a:extLst>
           </p:cNvPr>
@@ -13093,7 +13210,7 @@
           <p:cNvPr id="6" name="CaixaDeTexto 5">
             <a:extLst>
               <a:ext uri="{FF2B5EF4-FFF2-40B4-BE49-F238E27FC236}">
-                <a16:creationId xmlns:a16="http://schemas.microsoft.com/office/drawing/2014/main" id="{7CAF6758-F677-FD03-7446-3A59B85054CD}"/>
+                <a16:creationId xmlns:a16="http://schemas.microsoft.com/office/drawing/2014/main" xmlns="" id="{7CAF6758-F677-FD03-7446-3A59B85054CD}"/>
               </a:ext>
             </a:extLst>
           </p:cNvPr>
@@ -13185,7 +13302,7 @@
           <p:cNvPr id="2" name="Título 1">
             <a:extLst>
               <a:ext uri="{FF2B5EF4-FFF2-40B4-BE49-F238E27FC236}">
-                <a16:creationId xmlns:a16="http://schemas.microsoft.com/office/drawing/2014/main" id="{5F09B89C-3183-4D52-981A-62798DDFF2B8}"/>
+                <a16:creationId xmlns:a16="http://schemas.microsoft.com/office/drawing/2014/main" xmlns="" id="{5F09B89C-3183-4D52-981A-62798DDFF2B8}"/>
               </a:ext>
             </a:extLst>
           </p:cNvPr>
@@ -13225,7 +13342,7 @@
           <p:cNvPr id="3" name="AutoShape 2" descr="An example of graph signal reconstruction over wireless sensor network. |  Download Scientific Diagram">
             <a:extLst>
               <a:ext uri="{FF2B5EF4-FFF2-40B4-BE49-F238E27FC236}">
-                <a16:creationId xmlns:a16="http://schemas.microsoft.com/office/drawing/2014/main" id="{0166B4DD-D72A-4A54-94A7-2C38133837FD}"/>
+                <a16:creationId xmlns:a16="http://schemas.microsoft.com/office/drawing/2014/main" xmlns="" id="{0166B4DD-D72A-4A54-94A7-2C38133837FD}"/>
               </a:ext>
             </a:extLst>
           </p:cNvPr>
@@ -13276,7 +13393,7 @@
           <p:cNvPr id="7" name="AutoShape 4" descr="An example of graph signal reconstruction over wireless sensor network. |  Download Scientific Diagram">
             <a:extLst>
               <a:ext uri="{FF2B5EF4-FFF2-40B4-BE49-F238E27FC236}">
-                <a16:creationId xmlns:a16="http://schemas.microsoft.com/office/drawing/2014/main" id="{14C2B67D-81A1-457E-A410-FE4350A3CCA4}"/>
+                <a16:creationId xmlns:a16="http://schemas.microsoft.com/office/drawing/2014/main" xmlns="" id="{14C2B67D-81A1-457E-A410-FE4350A3CCA4}"/>
               </a:ext>
             </a:extLst>
           </p:cNvPr>
@@ -13327,7 +13444,7 @@
           <p:cNvPr id="4" name="Espaço Reservado para Conteúdo 3">
             <a:extLst>
               <a:ext uri="{FF2B5EF4-FFF2-40B4-BE49-F238E27FC236}">
-                <a16:creationId xmlns:a16="http://schemas.microsoft.com/office/drawing/2014/main" id="{0349BA64-C9D7-4730-9CA9-5C4AD9FC7969}"/>
+                <a16:creationId xmlns:a16="http://schemas.microsoft.com/office/drawing/2014/main" xmlns="" id="{0349BA64-C9D7-4730-9CA9-5C4AD9FC7969}"/>
               </a:ext>
             </a:extLst>
           </p:cNvPr>
@@ -13516,7 +13633,7 @@
           <p:cNvPr id="6" name="Imagem 5">
             <a:extLst>
               <a:ext uri="{FF2B5EF4-FFF2-40B4-BE49-F238E27FC236}">
-                <a16:creationId xmlns:a16="http://schemas.microsoft.com/office/drawing/2014/main" id="{C63B75BA-F777-3A50-CB3A-A642F3CCAB53}"/>
+                <a16:creationId xmlns:a16="http://schemas.microsoft.com/office/drawing/2014/main" xmlns="" id="{C63B75BA-F777-3A50-CB3A-A642F3CCAB53}"/>
               </a:ext>
             </a:extLst>
           </p:cNvPr>
@@ -13590,7 +13707,7 @@
           <p:cNvPr id="2" name="Título 1">
             <a:extLst>
               <a:ext uri="{FF2B5EF4-FFF2-40B4-BE49-F238E27FC236}">
-                <a16:creationId xmlns:a16="http://schemas.microsoft.com/office/drawing/2014/main" id="{5F09B89C-3183-4D52-981A-62798DDFF2B8}"/>
+                <a16:creationId xmlns:a16="http://schemas.microsoft.com/office/drawing/2014/main" xmlns="" id="{5F09B89C-3183-4D52-981A-62798DDFF2B8}"/>
               </a:ext>
             </a:extLst>
           </p:cNvPr>
@@ -13630,7 +13747,7 @@
           <p:cNvPr id="3" name="AutoShape 2" descr="An example of graph signal reconstruction over wireless sensor network. |  Download Scientific Diagram">
             <a:extLst>
               <a:ext uri="{FF2B5EF4-FFF2-40B4-BE49-F238E27FC236}">
-                <a16:creationId xmlns:a16="http://schemas.microsoft.com/office/drawing/2014/main" id="{0166B4DD-D72A-4A54-94A7-2C38133837FD}"/>
+                <a16:creationId xmlns:a16="http://schemas.microsoft.com/office/drawing/2014/main" xmlns="" id="{0166B4DD-D72A-4A54-94A7-2C38133837FD}"/>
               </a:ext>
             </a:extLst>
           </p:cNvPr>
@@ -13681,7 +13798,7 @@
           <p:cNvPr id="7" name="AutoShape 4" descr="An example of graph signal reconstruction over wireless sensor network. |  Download Scientific Diagram">
             <a:extLst>
               <a:ext uri="{FF2B5EF4-FFF2-40B4-BE49-F238E27FC236}">
-                <a16:creationId xmlns:a16="http://schemas.microsoft.com/office/drawing/2014/main" id="{14C2B67D-81A1-457E-A410-FE4350A3CCA4}"/>
+                <a16:creationId xmlns:a16="http://schemas.microsoft.com/office/drawing/2014/main" xmlns="" id="{14C2B67D-81A1-457E-A410-FE4350A3CCA4}"/>
               </a:ext>
             </a:extLst>
           </p:cNvPr>
@@ -13732,7 +13849,7 @@
           <p:cNvPr id="4" name="Espaço Reservado para Conteúdo 3">
             <a:extLst>
               <a:ext uri="{FF2B5EF4-FFF2-40B4-BE49-F238E27FC236}">
-                <a16:creationId xmlns:a16="http://schemas.microsoft.com/office/drawing/2014/main" id="{0349BA64-C9D7-4730-9CA9-5C4AD9FC7969}"/>
+                <a16:creationId xmlns:a16="http://schemas.microsoft.com/office/drawing/2014/main" xmlns="" id="{0349BA64-C9D7-4730-9CA9-5C4AD9FC7969}"/>
               </a:ext>
             </a:extLst>
           </p:cNvPr>
@@ -13921,7 +14038,7 @@
           <p:cNvPr id="10" name="Imagem 9">
             <a:extLst>
               <a:ext uri="{FF2B5EF4-FFF2-40B4-BE49-F238E27FC236}">
-                <a16:creationId xmlns:a16="http://schemas.microsoft.com/office/drawing/2014/main" id="{C7DAF8C7-0817-CFEF-006D-3A402E0434AD}"/>
+                <a16:creationId xmlns:a16="http://schemas.microsoft.com/office/drawing/2014/main" xmlns="" id="{C7DAF8C7-0817-CFEF-006D-3A402E0434AD}"/>
               </a:ext>
             </a:extLst>
           </p:cNvPr>
@@ -13995,7 +14112,7 @@
           <p:cNvPr id="2" name="Título 1">
             <a:extLst>
               <a:ext uri="{FF2B5EF4-FFF2-40B4-BE49-F238E27FC236}">
-                <a16:creationId xmlns:a16="http://schemas.microsoft.com/office/drawing/2014/main" id="{5F09B89C-3183-4D52-981A-62798DDFF2B8}"/>
+                <a16:creationId xmlns:a16="http://schemas.microsoft.com/office/drawing/2014/main" xmlns="" id="{5F09B89C-3183-4D52-981A-62798DDFF2B8}"/>
               </a:ext>
             </a:extLst>
           </p:cNvPr>
@@ -14035,7 +14152,7 @@
           <p:cNvPr id="3" name="AutoShape 2" descr="An example of graph signal reconstruction over wireless sensor network. |  Download Scientific Diagram">
             <a:extLst>
               <a:ext uri="{FF2B5EF4-FFF2-40B4-BE49-F238E27FC236}">
-                <a16:creationId xmlns:a16="http://schemas.microsoft.com/office/drawing/2014/main" id="{0166B4DD-D72A-4A54-94A7-2C38133837FD}"/>
+                <a16:creationId xmlns:a16="http://schemas.microsoft.com/office/drawing/2014/main" xmlns="" id="{0166B4DD-D72A-4A54-94A7-2C38133837FD}"/>
               </a:ext>
             </a:extLst>
           </p:cNvPr>
@@ -14086,7 +14203,7 @@
           <p:cNvPr id="7" name="AutoShape 4" descr="An example of graph signal reconstruction over wireless sensor network. |  Download Scientific Diagram">
             <a:extLst>
               <a:ext uri="{FF2B5EF4-FFF2-40B4-BE49-F238E27FC236}">
-                <a16:creationId xmlns:a16="http://schemas.microsoft.com/office/drawing/2014/main" id="{14C2B67D-81A1-457E-A410-FE4350A3CCA4}"/>
+                <a16:creationId xmlns:a16="http://schemas.microsoft.com/office/drawing/2014/main" xmlns="" id="{14C2B67D-81A1-457E-A410-FE4350A3CCA4}"/>
               </a:ext>
             </a:extLst>
           </p:cNvPr>
@@ -14137,7 +14254,7 @@
           <p:cNvPr id="4" name="Espaço Reservado para Conteúdo 3">
             <a:extLst>
               <a:ext uri="{FF2B5EF4-FFF2-40B4-BE49-F238E27FC236}">
-                <a16:creationId xmlns:a16="http://schemas.microsoft.com/office/drawing/2014/main" id="{0349BA64-C9D7-4730-9CA9-5C4AD9FC7969}"/>
+                <a16:creationId xmlns:a16="http://schemas.microsoft.com/office/drawing/2014/main" xmlns="" id="{0349BA64-C9D7-4730-9CA9-5C4AD9FC7969}"/>
               </a:ext>
             </a:extLst>
           </p:cNvPr>

--- a/slides/TP557_15_classificação de movimentos.pptx
+++ b/slides/TP557_15_classificação de movimentos.pptx
@@ -6,10 +6,10 @@
     <p:sldMasterId id="2147483660" r:id="rId2"/>
   </p:sldMasterIdLst>
   <p:notesMasterIdLst>
-    <p:notesMasterId r:id="rId20"/>
+    <p:notesMasterId r:id="rId23"/>
   </p:notesMasterIdLst>
   <p:handoutMasterIdLst>
-    <p:handoutMasterId r:id="rId21"/>
+    <p:handoutMasterId r:id="rId24"/>
   </p:handoutMasterIdLst>
   <p:sldIdLst>
     <p:sldId id="256" r:id="rId3"/>
@@ -22,13 +22,16 @@
     <p:sldId id="590" r:id="rId10"/>
     <p:sldId id="585" r:id="rId11"/>
     <p:sldId id="592" r:id="rId12"/>
-    <p:sldId id="593" r:id="rId13"/>
-    <p:sldId id="594" r:id="rId14"/>
-    <p:sldId id="595" r:id="rId15"/>
-    <p:sldId id="596" r:id="rId16"/>
-    <p:sldId id="597" r:id="rId17"/>
-    <p:sldId id="598" r:id="rId18"/>
-    <p:sldId id="584" r:id="rId19"/>
+    <p:sldId id="599" r:id="rId13"/>
+    <p:sldId id="601" r:id="rId14"/>
+    <p:sldId id="600" r:id="rId15"/>
+    <p:sldId id="593" r:id="rId16"/>
+    <p:sldId id="594" r:id="rId17"/>
+    <p:sldId id="595" r:id="rId18"/>
+    <p:sldId id="596" r:id="rId19"/>
+    <p:sldId id="597" r:id="rId20"/>
+    <p:sldId id="598" r:id="rId21"/>
+    <p:sldId id="584" r:id="rId22"/>
   </p:sldIdLst>
   <p:sldSz cx="12192000" cy="6858000"/>
   <p:notesSz cx="7315200" cy="9601200"/>
@@ -891,7 +894,7 @@
     </p:spTree>
     <p:extLst>
       <p:ext uri="{BB962C8B-B14F-4D97-AF65-F5344CB8AC3E}">
-        <p14:creationId xmlns:p14="http://schemas.microsoft.com/office/powerpoint/2010/main" val="2121271820"/>
+        <p14:creationId xmlns:p14="http://schemas.microsoft.com/office/powerpoint/2010/main" val="781385995"/>
       </p:ext>
     </p:extLst>
   </p:cSld>
@@ -975,7 +978,7 @@
     </p:spTree>
     <p:extLst>
       <p:ext uri="{BB962C8B-B14F-4D97-AF65-F5344CB8AC3E}">
-        <p14:creationId xmlns:p14="http://schemas.microsoft.com/office/powerpoint/2010/main" val="1829817525"/>
+        <p14:creationId xmlns:p14="http://schemas.microsoft.com/office/powerpoint/2010/main" val="403325477"/>
       </p:ext>
     </p:extLst>
   </p:cSld>
@@ -1050,7 +1053,7 @@
           <a:p>
             <a:fld id="{6FC8D850-966F-45A6-8DE7-15B891E7D40D}" type="slidenum">
               <a:rPr lang="pt-BR" smtClean="0"/>
-              <a:t>13</a:t>
+              <a:t>14</a:t>
             </a:fld>
             <a:endParaRPr lang="pt-BR"/>
           </a:p>
@@ -1059,7 +1062,7 @@
     </p:spTree>
     <p:extLst>
       <p:ext uri="{BB962C8B-B14F-4D97-AF65-F5344CB8AC3E}">
-        <p14:creationId xmlns:p14="http://schemas.microsoft.com/office/powerpoint/2010/main" val="598410396"/>
+        <p14:creationId xmlns:p14="http://schemas.microsoft.com/office/powerpoint/2010/main" val="2121271820"/>
       </p:ext>
     </p:extLst>
   </p:cSld>
@@ -1134,7 +1137,7 @@
           <a:p>
             <a:fld id="{6FC8D850-966F-45A6-8DE7-15B891E7D40D}" type="slidenum">
               <a:rPr lang="pt-BR" smtClean="0"/>
-              <a:t>14</a:t>
+              <a:t>15</a:t>
             </a:fld>
             <a:endParaRPr lang="pt-BR"/>
           </a:p>
@@ -1143,7 +1146,7 @@
     </p:spTree>
     <p:extLst>
       <p:ext uri="{BB962C8B-B14F-4D97-AF65-F5344CB8AC3E}">
-        <p14:creationId xmlns:p14="http://schemas.microsoft.com/office/powerpoint/2010/main" val="3331813760"/>
+        <p14:creationId xmlns:p14="http://schemas.microsoft.com/office/powerpoint/2010/main" val="1829817525"/>
       </p:ext>
     </p:extLst>
   </p:cSld>
@@ -1218,7 +1221,7 @@
           <a:p>
             <a:fld id="{6FC8D850-966F-45A6-8DE7-15B891E7D40D}" type="slidenum">
               <a:rPr lang="pt-BR" smtClean="0"/>
-              <a:t>15</a:t>
+              <a:t>16</a:t>
             </a:fld>
             <a:endParaRPr lang="pt-BR"/>
           </a:p>
@@ -1227,7 +1230,7 @@
     </p:spTree>
     <p:extLst>
       <p:ext uri="{BB962C8B-B14F-4D97-AF65-F5344CB8AC3E}">
-        <p14:creationId xmlns:p14="http://schemas.microsoft.com/office/powerpoint/2010/main" val="1616951098"/>
+        <p14:creationId xmlns:p14="http://schemas.microsoft.com/office/powerpoint/2010/main" val="598410396"/>
       </p:ext>
     </p:extLst>
   </p:cSld>
@@ -1302,7 +1305,7 @@
           <a:p>
             <a:fld id="{6FC8D850-966F-45A6-8DE7-15B891E7D40D}" type="slidenum">
               <a:rPr lang="pt-BR" smtClean="0"/>
-              <a:t>16</a:t>
+              <a:t>17</a:t>
             </a:fld>
             <a:endParaRPr lang="pt-BR"/>
           </a:p>
@@ -1311,7 +1314,7 @@
     </p:spTree>
     <p:extLst>
       <p:ext uri="{BB962C8B-B14F-4D97-AF65-F5344CB8AC3E}">
-        <p14:creationId xmlns:p14="http://schemas.microsoft.com/office/powerpoint/2010/main" val="60274718"/>
+        <p14:creationId xmlns:p14="http://schemas.microsoft.com/office/powerpoint/2010/main" val="3331813760"/>
       </p:ext>
     </p:extLst>
   </p:cSld>
@@ -1386,7 +1389,175 @@
           <a:p>
             <a:fld id="{6FC8D850-966F-45A6-8DE7-15B891E7D40D}" type="slidenum">
               <a:rPr lang="pt-BR" smtClean="0"/>
-              <a:t>17</a:t>
+              <a:t>18</a:t>
+            </a:fld>
+            <a:endParaRPr lang="pt-BR"/>
+          </a:p>
+        </p:txBody>
+      </p:sp>
+    </p:spTree>
+    <p:extLst>
+      <p:ext uri="{BB962C8B-B14F-4D97-AF65-F5344CB8AC3E}">
+        <p14:creationId xmlns:p14="http://schemas.microsoft.com/office/powerpoint/2010/main" val="1616951098"/>
+      </p:ext>
+    </p:extLst>
+  </p:cSld>
+  <p:clrMapOvr>
+    <a:masterClrMapping/>
+  </p:clrMapOvr>
+</p:notes>
+</file>
+
+<file path=ppt/notesSlides/notesSlide18.xml><?xml version="1.0" encoding="utf-8"?>
+<p:notes xmlns:a="http://schemas.openxmlformats.org/drawingml/2006/main" xmlns:r="http://schemas.openxmlformats.org/officeDocument/2006/relationships" xmlns:p="http://schemas.openxmlformats.org/presentationml/2006/main">
+  <p:cSld>
+    <p:spTree>
+      <p:nvGrpSpPr>
+        <p:cNvPr id="1" name=""/>
+        <p:cNvGrpSpPr/>
+        <p:nvPr/>
+      </p:nvGrpSpPr>
+      <p:grpSpPr>
+        <a:xfrm>
+          <a:off x="0" y="0"/>
+          <a:ext cx="0" cy="0"/>
+          <a:chOff x="0" y="0"/>
+          <a:chExt cx="0" cy="0"/>
+        </a:xfrm>
+      </p:grpSpPr>
+      <p:sp>
+        <p:nvSpPr>
+          <p:cNvPr id="2" name="Espaço Reservado para Imagem de Slide 1"/>
+          <p:cNvSpPr>
+            <a:spLocks noGrp="1" noRot="1" noChangeAspect="1"/>
+          </p:cNvSpPr>
+          <p:nvPr>
+            <p:ph type="sldImg"/>
+          </p:nvPr>
+        </p:nvSpPr>
+        <p:spPr/>
+      </p:sp>
+      <p:sp>
+        <p:nvSpPr>
+          <p:cNvPr id="3" name="Espaço Reservado para Anotações 2"/>
+          <p:cNvSpPr>
+            <a:spLocks noGrp="1"/>
+          </p:cNvSpPr>
+          <p:nvPr>
+            <p:ph type="body" idx="1"/>
+          </p:nvPr>
+        </p:nvSpPr>
+        <p:spPr/>
+        <p:txBody>
+          <a:bodyPr/>
+          <a:lstStyle/>
+          <a:p>
+            <a:endParaRPr lang="pt-BR" dirty="0"/>
+          </a:p>
+        </p:txBody>
+      </p:sp>
+      <p:sp>
+        <p:nvSpPr>
+          <p:cNvPr id="4" name="Espaço Reservado para Número de Slide 3"/>
+          <p:cNvSpPr>
+            <a:spLocks noGrp="1"/>
+          </p:cNvSpPr>
+          <p:nvPr>
+            <p:ph type="sldNum" sz="quarter" idx="5"/>
+          </p:nvPr>
+        </p:nvSpPr>
+        <p:spPr/>
+        <p:txBody>
+          <a:bodyPr/>
+          <a:lstStyle/>
+          <a:p>
+            <a:fld id="{6FC8D850-966F-45A6-8DE7-15B891E7D40D}" type="slidenum">
+              <a:rPr lang="pt-BR" smtClean="0"/>
+              <a:t>19</a:t>
+            </a:fld>
+            <a:endParaRPr lang="pt-BR"/>
+          </a:p>
+        </p:txBody>
+      </p:sp>
+    </p:spTree>
+    <p:extLst>
+      <p:ext uri="{BB962C8B-B14F-4D97-AF65-F5344CB8AC3E}">
+        <p14:creationId xmlns:p14="http://schemas.microsoft.com/office/powerpoint/2010/main" val="60274718"/>
+      </p:ext>
+    </p:extLst>
+  </p:cSld>
+  <p:clrMapOvr>
+    <a:masterClrMapping/>
+  </p:clrMapOvr>
+</p:notes>
+</file>
+
+<file path=ppt/notesSlides/notesSlide19.xml><?xml version="1.0" encoding="utf-8"?>
+<p:notes xmlns:a="http://schemas.openxmlformats.org/drawingml/2006/main" xmlns:r="http://schemas.openxmlformats.org/officeDocument/2006/relationships" xmlns:p="http://schemas.openxmlformats.org/presentationml/2006/main">
+  <p:cSld>
+    <p:spTree>
+      <p:nvGrpSpPr>
+        <p:cNvPr id="1" name=""/>
+        <p:cNvGrpSpPr/>
+        <p:nvPr/>
+      </p:nvGrpSpPr>
+      <p:grpSpPr>
+        <a:xfrm>
+          <a:off x="0" y="0"/>
+          <a:ext cx="0" cy="0"/>
+          <a:chOff x="0" y="0"/>
+          <a:chExt cx="0" cy="0"/>
+        </a:xfrm>
+      </p:grpSpPr>
+      <p:sp>
+        <p:nvSpPr>
+          <p:cNvPr id="2" name="Espaço Reservado para Imagem de Slide 1"/>
+          <p:cNvSpPr>
+            <a:spLocks noGrp="1" noRot="1" noChangeAspect="1"/>
+          </p:cNvSpPr>
+          <p:nvPr>
+            <p:ph type="sldImg"/>
+          </p:nvPr>
+        </p:nvSpPr>
+        <p:spPr/>
+      </p:sp>
+      <p:sp>
+        <p:nvSpPr>
+          <p:cNvPr id="3" name="Espaço Reservado para Anotações 2"/>
+          <p:cNvSpPr>
+            <a:spLocks noGrp="1"/>
+          </p:cNvSpPr>
+          <p:nvPr>
+            <p:ph type="body" idx="1"/>
+          </p:nvPr>
+        </p:nvSpPr>
+        <p:spPr/>
+        <p:txBody>
+          <a:bodyPr/>
+          <a:lstStyle/>
+          <a:p>
+            <a:endParaRPr lang="pt-BR" dirty="0"/>
+          </a:p>
+        </p:txBody>
+      </p:sp>
+      <p:sp>
+        <p:nvSpPr>
+          <p:cNvPr id="4" name="Espaço Reservado para Número de Slide 3"/>
+          <p:cNvSpPr>
+            <a:spLocks noGrp="1"/>
+          </p:cNvSpPr>
+          <p:nvPr>
+            <p:ph type="sldNum" sz="quarter" idx="5"/>
+          </p:nvPr>
+        </p:nvSpPr>
+        <p:spPr/>
+        <p:txBody>
+          <a:bodyPr/>
+          <a:lstStyle/>
+          <a:p>
+            <a:fld id="{6FC8D850-966F-45A6-8DE7-15B891E7D40D}" type="slidenum">
+              <a:rPr lang="pt-BR" smtClean="0"/>
+              <a:t>20</a:t>
             </a:fld>
             <a:endParaRPr lang="pt-BR"/>
           </a:p>
@@ -2212,7 +2383,7 @@
           <p:cNvPr id="2" name="Título 1">
             <a:extLst>
               <a:ext uri="{FF2B5EF4-FFF2-40B4-BE49-F238E27FC236}">
-                <a16:creationId xmlns:a16="http://schemas.microsoft.com/office/drawing/2014/main" xmlns="" id="{1DB9B4FF-B06E-403C-A326-BDC64D8FF94E}"/>
+                <a16:creationId xmlns="" xmlns:a16="http://schemas.microsoft.com/office/drawing/2014/main" id="{1DB9B4FF-B06E-403C-A326-BDC64D8FF94E}"/>
               </a:ext>
             </a:extLst>
           </p:cNvPr>
@@ -2249,7 +2420,7 @@
           <p:cNvPr id="3" name="Subtítulo 2">
             <a:extLst>
               <a:ext uri="{FF2B5EF4-FFF2-40B4-BE49-F238E27FC236}">
-                <a16:creationId xmlns:a16="http://schemas.microsoft.com/office/drawing/2014/main" xmlns="" id="{247BDFCE-746E-45BF-A319-4733D58D1632}"/>
+                <a16:creationId xmlns="" xmlns:a16="http://schemas.microsoft.com/office/drawing/2014/main" id="{247BDFCE-746E-45BF-A319-4733D58D1632}"/>
               </a:ext>
             </a:extLst>
           </p:cNvPr>
@@ -2319,7 +2490,7 @@
           <p:cNvPr id="4" name="Espaço Reservado para Data 3">
             <a:extLst>
               <a:ext uri="{FF2B5EF4-FFF2-40B4-BE49-F238E27FC236}">
-                <a16:creationId xmlns:a16="http://schemas.microsoft.com/office/drawing/2014/main" xmlns="" id="{9EDE2778-5372-4104-B96D-968184DA8288}"/>
+                <a16:creationId xmlns="" xmlns:a16="http://schemas.microsoft.com/office/drawing/2014/main" id="{9EDE2778-5372-4104-B96D-968184DA8288}"/>
               </a:ext>
             </a:extLst>
           </p:cNvPr>
@@ -2348,7 +2519,7 @@
           <p:cNvPr id="5" name="Espaço Reservado para Rodapé 4">
             <a:extLst>
               <a:ext uri="{FF2B5EF4-FFF2-40B4-BE49-F238E27FC236}">
-                <a16:creationId xmlns:a16="http://schemas.microsoft.com/office/drawing/2014/main" xmlns="" id="{C1DD0F41-C861-4051-988D-3024A37A4B93}"/>
+                <a16:creationId xmlns="" xmlns:a16="http://schemas.microsoft.com/office/drawing/2014/main" id="{C1DD0F41-C861-4051-988D-3024A37A4B93}"/>
               </a:ext>
             </a:extLst>
           </p:cNvPr>
@@ -2373,7 +2544,7 @@
           <p:cNvPr id="6" name="Espaço Reservado para Número de Slide 5">
             <a:extLst>
               <a:ext uri="{FF2B5EF4-FFF2-40B4-BE49-F238E27FC236}">
-                <a16:creationId xmlns:a16="http://schemas.microsoft.com/office/drawing/2014/main" xmlns="" id="{07E5967E-D980-431A-A5DB-3F0C5030A81E}"/>
+                <a16:creationId xmlns="" xmlns:a16="http://schemas.microsoft.com/office/drawing/2014/main" id="{07E5967E-D980-431A-A5DB-3F0C5030A81E}"/>
               </a:ext>
             </a:extLst>
           </p:cNvPr>
@@ -2432,7 +2603,7 @@
           <p:cNvPr id="2" name="Título 1">
             <a:extLst>
               <a:ext uri="{FF2B5EF4-FFF2-40B4-BE49-F238E27FC236}">
-                <a16:creationId xmlns:a16="http://schemas.microsoft.com/office/drawing/2014/main" xmlns="" id="{9036C49F-3E68-4175-81BA-3C3FEE44308A}"/>
+                <a16:creationId xmlns="" xmlns:a16="http://schemas.microsoft.com/office/drawing/2014/main" id="{9036C49F-3E68-4175-81BA-3C3FEE44308A}"/>
               </a:ext>
             </a:extLst>
           </p:cNvPr>
@@ -2460,7 +2631,7 @@
           <p:cNvPr id="3" name="Espaço Reservado para Texto Vertical 2">
             <a:extLst>
               <a:ext uri="{FF2B5EF4-FFF2-40B4-BE49-F238E27FC236}">
-                <a16:creationId xmlns:a16="http://schemas.microsoft.com/office/drawing/2014/main" xmlns="" id="{426FA736-3DD3-4D4E-B57B-BBE1D8F7D424}"/>
+                <a16:creationId xmlns="" xmlns:a16="http://schemas.microsoft.com/office/drawing/2014/main" id="{426FA736-3DD3-4D4E-B57B-BBE1D8F7D424}"/>
               </a:ext>
             </a:extLst>
           </p:cNvPr>
@@ -2517,7 +2688,7 @@
           <p:cNvPr id="4" name="Espaço Reservado para Data 3">
             <a:extLst>
               <a:ext uri="{FF2B5EF4-FFF2-40B4-BE49-F238E27FC236}">
-                <a16:creationId xmlns:a16="http://schemas.microsoft.com/office/drawing/2014/main" xmlns="" id="{99E8855C-D8FD-48F6-B14E-861E0DE4D915}"/>
+                <a16:creationId xmlns="" xmlns:a16="http://schemas.microsoft.com/office/drawing/2014/main" id="{99E8855C-D8FD-48F6-B14E-861E0DE4D915}"/>
               </a:ext>
             </a:extLst>
           </p:cNvPr>
@@ -2546,7 +2717,7 @@
           <p:cNvPr id="5" name="Espaço Reservado para Rodapé 4">
             <a:extLst>
               <a:ext uri="{FF2B5EF4-FFF2-40B4-BE49-F238E27FC236}">
-                <a16:creationId xmlns:a16="http://schemas.microsoft.com/office/drawing/2014/main" xmlns="" id="{97C0BB88-2F21-42A5-ACFF-83DA47F2D340}"/>
+                <a16:creationId xmlns="" xmlns:a16="http://schemas.microsoft.com/office/drawing/2014/main" id="{97C0BB88-2F21-42A5-ACFF-83DA47F2D340}"/>
               </a:ext>
             </a:extLst>
           </p:cNvPr>
@@ -2571,7 +2742,7 @@
           <p:cNvPr id="6" name="Espaço Reservado para Número de Slide 5">
             <a:extLst>
               <a:ext uri="{FF2B5EF4-FFF2-40B4-BE49-F238E27FC236}">
-                <a16:creationId xmlns:a16="http://schemas.microsoft.com/office/drawing/2014/main" xmlns="" id="{6CB462B3-1F22-4C05-B4B8-7A279FB7D5E9}"/>
+                <a16:creationId xmlns="" xmlns:a16="http://schemas.microsoft.com/office/drawing/2014/main" id="{6CB462B3-1F22-4C05-B4B8-7A279FB7D5E9}"/>
               </a:ext>
             </a:extLst>
           </p:cNvPr>
@@ -2630,7 +2801,7 @@
           <p:cNvPr id="2" name="Título Vertical 1">
             <a:extLst>
               <a:ext uri="{FF2B5EF4-FFF2-40B4-BE49-F238E27FC236}">
-                <a16:creationId xmlns:a16="http://schemas.microsoft.com/office/drawing/2014/main" xmlns="" id="{EAEAB728-701C-4207-A9D5-23FF45C60502}"/>
+                <a16:creationId xmlns="" xmlns:a16="http://schemas.microsoft.com/office/drawing/2014/main" id="{EAEAB728-701C-4207-A9D5-23FF45C60502}"/>
               </a:ext>
             </a:extLst>
           </p:cNvPr>
@@ -2663,7 +2834,7 @@
           <p:cNvPr id="3" name="Espaço Reservado para Texto Vertical 2">
             <a:extLst>
               <a:ext uri="{FF2B5EF4-FFF2-40B4-BE49-F238E27FC236}">
-                <a16:creationId xmlns:a16="http://schemas.microsoft.com/office/drawing/2014/main" xmlns="" id="{BA8C8CCF-7823-480A-9A19-0F664DD17E3B}"/>
+                <a16:creationId xmlns="" xmlns:a16="http://schemas.microsoft.com/office/drawing/2014/main" id="{BA8C8CCF-7823-480A-9A19-0F664DD17E3B}"/>
               </a:ext>
             </a:extLst>
           </p:cNvPr>
@@ -2725,7 +2896,7 @@
           <p:cNvPr id="4" name="Espaço Reservado para Data 3">
             <a:extLst>
               <a:ext uri="{FF2B5EF4-FFF2-40B4-BE49-F238E27FC236}">
-                <a16:creationId xmlns:a16="http://schemas.microsoft.com/office/drawing/2014/main" xmlns="" id="{721D5734-7B1F-425D-942F-6EB73344027C}"/>
+                <a16:creationId xmlns="" xmlns:a16="http://schemas.microsoft.com/office/drawing/2014/main" id="{721D5734-7B1F-425D-942F-6EB73344027C}"/>
               </a:ext>
             </a:extLst>
           </p:cNvPr>
@@ -2754,7 +2925,7 @@
           <p:cNvPr id="5" name="Espaço Reservado para Rodapé 4">
             <a:extLst>
               <a:ext uri="{FF2B5EF4-FFF2-40B4-BE49-F238E27FC236}">
-                <a16:creationId xmlns:a16="http://schemas.microsoft.com/office/drawing/2014/main" xmlns="" id="{1E1AAEAC-F08D-45FE-89EC-B1B349A868C9}"/>
+                <a16:creationId xmlns="" xmlns:a16="http://schemas.microsoft.com/office/drawing/2014/main" id="{1E1AAEAC-F08D-45FE-89EC-B1B349A868C9}"/>
               </a:ext>
             </a:extLst>
           </p:cNvPr>
@@ -2779,7 +2950,7 @@
           <p:cNvPr id="6" name="Espaço Reservado para Número de Slide 5">
             <a:extLst>
               <a:ext uri="{FF2B5EF4-FFF2-40B4-BE49-F238E27FC236}">
-                <a16:creationId xmlns:a16="http://schemas.microsoft.com/office/drawing/2014/main" xmlns="" id="{BAA44493-9911-47B2-87A6-C2141A972BC8}"/>
+                <a16:creationId xmlns="" xmlns:a16="http://schemas.microsoft.com/office/drawing/2014/main" id="{BAA44493-9911-47B2-87A6-C2141A972BC8}"/>
               </a:ext>
             </a:extLst>
           </p:cNvPr>
@@ -4712,7 +4883,7 @@
           <p:cNvPr id="2" name="Título 1">
             <a:extLst>
               <a:ext uri="{FF2B5EF4-FFF2-40B4-BE49-F238E27FC236}">
-                <a16:creationId xmlns:a16="http://schemas.microsoft.com/office/drawing/2014/main" xmlns="" id="{71BD44A5-8F21-4626-A01D-48A1C874B1D5}"/>
+                <a16:creationId xmlns="" xmlns:a16="http://schemas.microsoft.com/office/drawing/2014/main" id="{71BD44A5-8F21-4626-A01D-48A1C874B1D5}"/>
               </a:ext>
             </a:extLst>
           </p:cNvPr>
@@ -4740,7 +4911,7 @@
           <p:cNvPr id="3" name="Espaço Reservado para Conteúdo 2">
             <a:extLst>
               <a:ext uri="{FF2B5EF4-FFF2-40B4-BE49-F238E27FC236}">
-                <a16:creationId xmlns:a16="http://schemas.microsoft.com/office/drawing/2014/main" xmlns="" id="{B79E8085-65A9-48AA-951D-71D978BFF4ED}"/>
+                <a16:creationId xmlns="" xmlns:a16="http://schemas.microsoft.com/office/drawing/2014/main" id="{B79E8085-65A9-48AA-951D-71D978BFF4ED}"/>
               </a:ext>
             </a:extLst>
           </p:cNvPr>
@@ -4797,7 +4968,7 @@
           <p:cNvPr id="4" name="Espaço Reservado para Data 3">
             <a:extLst>
               <a:ext uri="{FF2B5EF4-FFF2-40B4-BE49-F238E27FC236}">
-                <a16:creationId xmlns:a16="http://schemas.microsoft.com/office/drawing/2014/main" xmlns="" id="{F05BE1AF-51EA-425D-B188-DE7BD675009F}"/>
+                <a16:creationId xmlns="" xmlns:a16="http://schemas.microsoft.com/office/drawing/2014/main" id="{F05BE1AF-51EA-425D-B188-DE7BD675009F}"/>
               </a:ext>
             </a:extLst>
           </p:cNvPr>
@@ -4826,7 +4997,7 @@
           <p:cNvPr id="5" name="Espaço Reservado para Rodapé 4">
             <a:extLst>
               <a:ext uri="{FF2B5EF4-FFF2-40B4-BE49-F238E27FC236}">
-                <a16:creationId xmlns:a16="http://schemas.microsoft.com/office/drawing/2014/main" xmlns="" id="{121BE632-29CF-4CB9-B365-C9EF38F89BE6}"/>
+                <a16:creationId xmlns="" xmlns:a16="http://schemas.microsoft.com/office/drawing/2014/main" id="{121BE632-29CF-4CB9-B365-C9EF38F89BE6}"/>
               </a:ext>
             </a:extLst>
           </p:cNvPr>
@@ -4851,7 +5022,7 @@
           <p:cNvPr id="6" name="Espaço Reservado para Número de Slide 5">
             <a:extLst>
               <a:ext uri="{FF2B5EF4-FFF2-40B4-BE49-F238E27FC236}">
-                <a16:creationId xmlns:a16="http://schemas.microsoft.com/office/drawing/2014/main" xmlns="" id="{60CF3DD1-9AEC-4A57-B461-4E4DD86FAC18}"/>
+                <a16:creationId xmlns="" xmlns:a16="http://schemas.microsoft.com/office/drawing/2014/main" id="{60CF3DD1-9AEC-4A57-B461-4E4DD86FAC18}"/>
               </a:ext>
             </a:extLst>
           </p:cNvPr>
@@ -5523,7 +5694,7 @@
           <p:cNvPr id="2" name="Título 1">
             <a:extLst>
               <a:ext uri="{FF2B5EF4-FFF2-40B4-BE49-F238E27FC236}">
-                <a16:creationId xmlns:a16="http://schemas.microsoft.com/office/drawing/2014/main" xmlns="" id="{34AB2FF0-A4D7-4E28-991D-FF26140D5988}"/>
+                <a16:creationId xmlns="" xmlns:a16="http://schemas.microsoft.com/office/drawing/2014/main" id="{34AB2FF0-A4D7-4E28-991D-FF26140D5988}"/>
               </a:ext>
             </a:extLst>
           </p:cNvPr>
@@ -5560,7 +5731,7 @@
           <p:cNvPr id="3" name="Espaço Reservado para Texto 2">
             <a:extLst>
               <a:ext uri="{FF2B5EF4-FFF2-40B4-BE49-F238E27FC236}">
-                <a16:creationId xmlns:a16="http://schemas.microsoft.com/office/drawing/2014/main" xmlns="" id="{E2AC45B0-4145-40DB-8E61-105461170604}"/>
+                <a16:creationId xmlns="" xmlns:a16="http://schemas.microsoft.com/office/drawing/2014/main" id="{E2AC45B0-4145-40DB-8E61-105461170604}"/>
               </a:ext>
             </a:extLst>
           </p:cNvPr>
@@ -5685,7 +5856,7 @@
           <p:cNvPr id="4" name="Espaço Reservado para Data 3">
             <a:extLst>
               <a:ext uri="{FF2B5EF4-FFF2-40B4-BE49-F238E27FC236}">
-                <a16:creationId xmlns:a16="http://schemas.microsoft.com/office/drawing/2014/main" xmlns="" id="{50F1D3FB-740A-4EBA-A309-2CE71D12ECFB}"/>
+                <a16:creationId xmlns="" xmlns:a16="http://schemas.microsoft.com/office/drawing/2014/main" id="{50F1D3FB-740A-4EBA-A309-2CE71D12ECFB}"/>
               </a:ext>
             </a:extLst>
           </p:cNvPr>
@@ -5714,7 +5885,7 @@
           <p:cNvPr id="5" name="Espaço Reservado para Rodapé 4">
             <a:extLst>
               <a:ext uri="{FF2B5EF4-FFF2-40B4-BE49-F238E27FC236}">
-                <a16:creationId xmlns:a16="http://schemas.microsoft.com/office/drawing/2014/main" xmlns="" id="{BDCAB18F-8715-4465-A940-F9C193A2ACE9}"/>
+                <a16:creationId xmlns="" xmlns:a16="http://schemas.microsoft.com/office/drawing/2014/main" id="{BDCAB18F-8715-4465-A940-F9C193A2ACE9}"/>
               </a:ext>
             </a:extLst>
           </p:cNvPr>
@@ -5739,7 +5910,7 @@
           <p:cNvPr id="6" name="Espaço Reservado para Número de Slide 5">
             <a:extLst>
               <a:ext uri="{FF2B5EF4-FFF2-40B4-BE49-F238E27FC236}">
-                <a16:creationId xmlns:a16="http://schemas.microsoft.com/office/drawing/2014/main" xmlns="" id="{353466C6-8248-429F-8056-FF040BF509EB}"/>
+                <a16:creationId xmlns="" xmlns:a16="http://schemas.microsoft.com/office/drawing/2014/main" id="{353466C6-8248-429F-8056-FF040BF509EB}"/>
               </a:ext>
             </a:extLst>
           </p:cNvPr>
@@ -5798,7 +5969,7 @@
           <p:cNvPr id="2" name="Título 1">
             <a:extLst>
               <a:ext uri="{FF2B5EF4-FFF2-40B4-BE49-F238E27FC236}">
-                <a16:creationId xmlns:a16="http://schemas.microsoft.com/office/drawing/2014/main" xmlns="" id="{BC7BB9F0-F14B-4A91-B2B7-35BC47FE4DE7}"/>
+                <a16:creationId xmlns="" xmlns:a16="http://schemas.microsoft.com/office/drawing/2014/main" id="{BC7BB9F0-F14B-4A91-B2B7-35BC47FE4DE7}"/>
               </a:ext>
             </a:extLst>
           </p:cNvPr>
@@ -5826,7 +5997,7 @@
           <p:cNvPr id="3" name="Espaço Reservado para Conteúdo 2">
             <a:extLst>
               <a:ext uri="{FF2B5EF4-FFF2-40B4-BE49-F238E27FC236}">
-                <a16:creationId xmlns:a16="http://schemas.microsoft.com/office/drawing/2014/main" xmlns="" id="{EC1FC1C4-73DA-47A6-8496-B0B457F7D39A}"/>
+                <a16:creationId xmlns="" xmlns:a16="http://schemas.microsoft.com/office/drawing/2014/main" id="{EC1FC1C4-73DA-47A6-8496-B0B457F7D39A}"/>
               </a:ext>
             </a:extLst>
           </p:cNvPr>
@@ -5888,7 +6059,7 @@
           <p:cNvPr id="4" name="Espaço Reservado para Conteúdo 3">
             <a:extLst>
               <a:ext uri="{FF2B5EF4-FFF2-40B4-BE49-F238E27FC236}">
-                <a16:creationId xmlns:a16="http://schemas.microsoft.com/office/drawing/2014/main" xmlns="" id="{E92F06A8-A449-4D92-9912-76873E529B38}"/>
+                <a16:creationId xmlns="" xmlns:a16="http://schemas.microsoft.com/office/drawing/2014/main" id="{E92F06A8-A449-4D92-9912-76873E529B38}"/>
               </a:ext>
             </a:extLst>
           </p:cNvPr>
@@ -5950,7 +6121,7 @@
           <p:cNvPr id="5" name="Espaço Reservado para Data 4">
             <a:extLst>
               <a:ext uri="{FF2B5EF4-FFF2-40B4-BE49-F238E27FC236}">
-                <a16:creationId xmlns:a16="http://schemas.microsoft.com/office/drawing/2014/main" xmlns="" id="{938070A4-BC2F-4D55-BD8D-DEAF11BB9EE9}"/>
+                <a16:creationId xmlns="" xmlns:a16="http://schemas.microsoft.com/office/drawing/2014/main" id="{938070A4-BC2F-4D55-BD8D-DEAF11BB9EE9}"/>
               </a:ext>
             </a:extLst>
           </p:cNvPr>
@@ -5979,7 +6150,7 @@
           <p:cNvPr id="6" name="Espaço Reservado para Rodapé 5">
             <a:extLst>
               <a:ext uri="{FF2B5EF4-FFF2-40B4-BE49-F238E27FC236}">
-                <a16:creationId xmlns:a16="http://schemas.microsoft.com/office/drawing/2014/main" xmlns="" id="{45CC2DB8-844A-465F-BA9A-7734C80C7F43}"/>
+                <a16:creationId xmlns="" xmlns:a16="http://schemas.microsoft.com/office/drawing/2014/main" id="{45CC2DB8-844A-465F-BA9A-7734C80C7F43}"/>
               </a:ext>
             </a:extLst>
           </p:cNvPr>
@@ -6004,7 +6175,7 @@
           <p:cNvPr id="7" name="Espaço Reservado para Número de Slide 6">
             <a:extLst>
               <a:ext uri="{FF2B5EF4-FFF2-40B4-BE49-F238E27FC236}">
-                <a16:creationId xmlns:a16="http://schemas.microsoft.com/office/drawing/2014/main" xmlns="" id="{4CC606A8-097B-4040-94E0-CD8C88280D8F}"/>
+                <a16:creationId xmlns="" xmlns:a16="http://schemas.microsoft.com/office/drawing/2014/main" id="{4CC606A8-097B-4040-94E0-CD8C88280D8F}"/>
               </a:ext>
             </a:extLst>
           </p:cNvPr>
@@ -6063,7 +6234,7 @@
           <p:cNvPr id="2" name="Título 1">
             <a:extLst>
               <a:ext uri="{FF2B5EF4-FFF2-40B4-BE49-F238E27FC236}">
-                <a16:creationId xmlns:a16="http://schemas.microsoft.com/office/drawing/2014/main" xmlns="" id="{76D66686-0143-4CB6-8C09-BA326F1E7ACA}"/>
+                <a16:creationId xmlns="" xmlns:a16="http://schemas.microsoft.com/office/drawing/2014/main" id="{76D66686-0143-4CB6-8C09-BA326F1E7ACA}"/>
               </a:ext>
             </a:extLst>
           </p:cNvPr>
@@ -6096,7 +6267,7 @@
           <p:cNvPr id="3" name="Espaço Reservado para Texto 2">
             <a:extLst>
               <a:ext uri="{FF2B5EF4-FFF2-40B4-BE49-F238E27FC236}">
-                <a16:creationId xmlns:a16="http://schemas.microsoft.com/office/drawing/2014/main" xmlns="" id="{0227AB85-F59E-4BCE-B846-4FA0992C2F23}"/>
+                <a16:creationId xmlns="" xmlns:a16="http://schemas.microsoft.com/office/drawing/2014/main" id="{0227AB85-F59E-4BCE-B846-4FA0992C2F23}"/>
               </a:ext>
             </a:extLst>
           </p:cNvPr>
@@ -6167,7 +6338,7 @@
           <p:cNvPr id="4" name="Espaço Reservado para Conteúdo 3">
             <a:extLst>
               <a:ext uri="{FF2B5EF4-FFF2-40B4-BE49-F238E27FC236}">
-                <a16:creationId xmlns:a16="http://schemas.microsoft.com/office/drawing/2014/main" xmlns="" id="{3373456C-7319-4D0A-827D-D29F6B083F5D}"/>
+                <a16:creationId xmlns="" xmlns:a16="http://schemas.microsoft.com/office/drawing/2014/main" id="{3373456C-7319-4D0A-827D-D29F6B083F5D}"/>
               </a:ext>
             </a:extLst>
           </p:cNvPr>
@@ -6229,7 +6400,7 @@
           <p:cNvPr id="5" name="Espaço Reservado para Texto 4">
             <a:extLst>
               <a:ext uri="{FF2B5EF4-FFF2-40B4-BE49-F238E27FC236}">
-                <a16:creationId xmlns:a16="http://schemas.microsoft.com/office/drawing/2014/main" xmlns="" id="{4CD109D0-2E83-4262-8029-A871CEC47406}"/>
+                <a16:creationId xmlns="" xmlns:a16="http://schemas.microsoft.com/office/drawing/2014/main" id="{4CD109D0-2E83-4262-8029-A871CEC47406}"/>
               </a:ext>
             </a:extLst>
           </p:cNvPr>
@@ -6300,7 +6471,7 @@
           <p:cNvPr id="6" name="Espaço Reservado para Conteúdo 5">
             <a:extLst>
               <a:ext uri="{FF2B5EF4-FFF2-40B4-BE49-F238E27FC236}">
-                <a16:creationId xmlns:a16="http://schemas.microsoft.com/office/drawing/2014/main" xmlns="" id="{AD706E3A-CFBB-4A6C-A65F-D0360A9E74FE}"/>
+                <a16:creationId xmlns="" xmlns:a16="http://schemas.microsoft.com/office/drawing/2014/main" id="{AD706E3A-CFBB-4A6C-A65F-D0360A9E74FE}"/>
               </a:ext>
             </a:extLst>
           </p:cNvPr>
@@ -6362,7 +6533,7 @@
           <p:cNvPr id="7" name="Espaço Reservado para Data 6">
             <a:extLst>
               <a:ext uri="{FF2B5EF4-FFF2-40B4-BE49-F238E27FC236}">
-                <a16:creationId xmlns:a16="http://schemas.microsoft.com/office/drawing/2014/main" xmlns="" id="{4172C0E5-5AF0-4805-BB51-443733CD2BD5}"/>
+                <a16:creationId xmlns="" xmlns:a16="http://schemas.microsoft.com/office/drawing/2014/main" id="{4172C0E5-5AF0-4805-BB51-443733CD2BD5}"/>
               </a:ext>
             </a:extLst>
           </p:cNvPr>
@@ -6391,7 +6562,7 @@
           <p:cNvPr id="8" name="Espaço Reservado para Rodapé 7">
             <a:extLst>
               <a:ext uri="{FF2B5EF4-FFF2-40B4-BE49-F238E27FC236}">
-                <a16:creationId xmlns:a16="http://schemas.microsoft.com/office/drawing/2014/main" xmlns="" id="{0E801648-156F-497E-99CF-797DF48051E1}"/>
+                <a16:creationId xmlns="" xmlns:a16="http://schemas.microsoft.com/office/drawing/2014/main" id="{0E801648-156F-497E-99CF-797DF48051E1}"/>
               </a:ext>
             </a:extLst>
           </p:cNvPr>
@@ -6416,7 +6587,7 @@
           <p:cNvPr id="9" name="Espaço Reservado para Número de Slide 8">
             <a:extLst>
               <a:ext uri="{FF2B5EF4-FFF2-40B4-BE49-F238E27FC236}">
-                <a16:creationId xmlns:a16="http://schemas.microsoft.com/office/drawing/2014/main" xmlns="" id="{EEE23D32-80E7-4796-A137-66BF842E4B53}"/>
+                <a16:creationId xmlns="" xmlns:a16="http://schemas.microsoft.com/office/drawing/2014/main" id="{EEE23D32-80E7-4796-A137-66BF842E4B53}"/>
               </a:ext>
             </a:extLst>
           </p:cNvPr>
@@ -6475,7 +6646,7 @@
           <p:cNvPr id="2" name="Título 1">
             <a:extLst>
               <a:ext uri="{FF2B5EF4-FFF2-40B4-BE49-F238E27FC236}">
-                <a16:creationId xmlns:a16="http://schemas.microsoft.com/office/drawing/2014/main" xmlns="" id="{2BCE2379-C78F-47E1-8CFC-B846E7AF148D}"/>
+                <a16:creationId xmlns="" xmlns:a16="http://schemas.microsoft.com/office/drawing/2014/main" id="{2BCE2379-C78F-47E1-8CFC-B846E7AF148D}"/>
               </a:ext>
             </a:extLst>
           </p:cNvPr>
@@ -6503,7 +6674,7 @@
           <p:cNvPr id="3" name="Espaço Reservado para Data 2">
             <a:extLst>
               <a:ext uri="{FF2B5EF4-FFF2-40B4-BE49-F238E27FC236}">
-                <a16:creationId xmlns:a16="http://schemas.microsoft.com/office/drawing/2014/main" xmlns="" id="{342600A9-7F92-4E22-9D94-E4717252A817}"/>
+                <a16:creationId xmlns="" xmlns:a16="http://schemas.microsoft.com/office/drawing/2014/main" id="{342600A9-7F92-4E22-9D94-E4717252A817}"/>
               </a:ext>
             </a:extLst>
           </p:cNvPr>
@@ -6532,7 +6703,7 @@
           <p:cNvPr id="4" name="Espaço Reservado para Rodapé 3">
             <a:extLst>
               <a:ext uri="{FF2B5EF4-FFF2-40B4-BE49-F238E27FC236}">
-                <a16:creationId xmlns:a16="http://schemas.microsoft.com/office/drawing/2014/main" xmlns="" id="{192E6BED-F546-40CC-A2DF-99CBA853654E}"/>
+                <a16:creationId xmlns="" xmlns:a16="http://schemas.microsoft.com/office/drawing/2014/main" id="{192E6BED-F546-40CC-A2DF-99CBA853654E}"/>
               </a:ext>
             </a:extLst>
           </p:cNvPr>
@@ -6557,7 +6728,7 @@
           <p:cNvPr id="5" name="Espaço Reservado para Número de Slide 4">
             <a:extLst>
               <a:ext uri="{FF2B5EF4-FFF2-40B4-BE49-F238E27FC236}">
-                <a16:creationId xmlns:a16="http://schemas.microsoft.com/office/drawing/2014/main" xmlns="" id="{6091CC40-A8C4-4063-80EB-CC5099621678}"/>
+                <a16:creationId xmlns="" xmlns:a16="http://schemas.microsoft.com/office/drawing/2014/main" id="{6091CC40-A8C4-4063-80EB-CC5099621678}"/>
               </a:ext>
             </a:extLst>
           </p:cNvPr>
@@ -6616,7 +6787,7 @@
           <p:cNvPr id="2" name="Espaço Reservado para Data 1">
             <a:extLst>
               <a:ext uri="{FF2B5EF4-FFF2-40B4-BE49-F238E27FC236}">
-                <a16:creationId xmlns:a16="http://schemas.microsoft.com/office/drawing/2014/main" xmlns="" id="{DD19515C-212C-4EAE-84A3-8FF4BC844F1B}"/>
+                <a16:creationId xmlns="" xmlns:a16="http://schemas.microsoft.com/office/drawing/2014/main" id="{DD19515C-212C-4EAE-84A3-8FF4BC844F1B}"/>
               </a:ext>
             </a:extLst>
           </p:cNvPr>
@@ -6645,7 +6816,7 @@
           <p:cNvPr id="3" name="Espaço Reservado para Rodapé 2">
             <a:extLst>
               <a:ext uri="{FF2B5EF4-FFF2-40B4-BE49-F238E27FC236}">
-                <a16:creationId xmlns:a16="http://schemas.microsoft.com/office/drawing/2014/main" xmlns="" id="{94D3D120-B3E8-4C96-861D-7A4F12F49B3A}"/>
+                <a16:creationId xmlns="" xmlns:a16="http://schemas.microsoft.com/office/drawing/2014/main" id="{94D3D120-B3E8-4C96-861D-7A4F12F49B3A}"/>
               </a:ext>
             </a:extLst>
           </p:cNvPr>
@@ -6670,7 +6841,7 @@
           <p:cNvPr id="4" name="Espaço Reservado para Número de Slide 3">
             <a:extLst>
               <a:ext uri="{FF2B5EF4-FFF2-40B4-BE49-F238E27FC236}">
-                <a16:creationId xmlns:a16="http://schemas.microsoft.com/office/drawing/2014/main" xmlns="" id="{42E49B68-FA1B-468B-9F17-D5C09243D454}"/>
+                <a16:creationId xmlns="" xmlns:a16="http://schemas.microsoft.com/office/drawing/2014/main" id="{42E49B68-FA1B-468B-9F17-D5C09243D454}"/>
               </a:ext>
             </a:extLst>
           </p:cNvPr>
@@ -6729,7 +6900,7 @@
           <p:cNvPr id="2" name="Título 1">
             <a:extLst>
               <a:ext uri="{FF2B5EF4-FFF2-40B4-BE49-F238E27FC236}">
-                <a16:creationId xmlns:a16="http://schemas.microsoft.com/office/drawing/2014/main" xmlns="" id="{1C17BCBE-A897-4319-85EC-D87909C24980}"/>
+                <a16:creationId xmlns="" xmlns:a16="http://schemas.microsoft.com/office/drawing/2014/main" id="{1C17BCBE-A897-4319-85EC-D87909C24980}"/>
               </a:ext>
             </a:extLst>
           </p:cNvPr>
@@ -6766,7 +6937,7 @@
           <p:cNvPr id="3" name="Espaço Reservado para Conteúdo 2">
             <a:extLst>
               <a:ext uri="{FF2B5EF4-FFF2-40B4-BE49-F238E27FC236}">
-                <a16:creationId xmlns:a16="http://schemas.microsoft.com/office/drawing/2014/main" xmlns="" id="{4226F885-0204-4913-868B-4B8B82576F17}"/>
+                <a16:creationId xmlns="" xmlns:a16="http://schemas.microsoft.com/office/drawing/2014/main" id="{4226F885-0204-4913-868B-4B8B82576F17}"/>
               </a:ext>
             </a:extLst>
           </p:cNvPr>
@@ -6856,7 +7027,7 @@
           <p:cNvPr id="4" name="Espaço Reservado para Texto 3">
             <a:extLst>
               <a:ext uri="{FF2B5EF4-FFF2-40B4-BE49-F238E27FC236}">
-                <a16:creationId xmlns:a16="http://schemas.microsoft.com/office/drawing/2014/main" xmlns="" id="{00F9F784-A858-441B-8AB5-697098141751}"/>
+                <a16:creationId xmlns="" xmlns:a16="http://schemas.microsoft.com/office/drawing/2014/main" id="{00F9F784-A858-441B-8AB5-697098141751}"/>
               </a:ext>
             </a:extLst>
           </p:cNvPr>
@@ -6927,7 +7098,7 @@
           <p:cNvPr id="5" name="Espaço Reservado para Data 4">
             <a:extLst>
               <a:ext uri="{FF2B5EF4-FFF2-40B4-BE49-F238E27FC236}">
-                <a16:creationId xmlns:a16="http://schemas.microsoft.com/office/drawing/2014/main" xmlns="" id="{A4DC363A-5000-472E-8B17-02E7DCB8840A}"/>
+                <a16:creationId xmlns="" xmlns:a16="http://schemas.microsoft.com/office/drawing/2014/main" id="{A4DC363A-5000-472E-8B17-02E7DCB8840A}"/>
               </a:ext>
             </a:extLst>
           </p:cNvPr>
@@ -6956,7 +7127,7 @@
           <p:cNvPr id="6" name="Espaço Reservado para Rodapé 5">
             <a:extLst>
               <a:ext uri="{FF2B5EF4-FFF2-40B4-BE49-F238E27FC236}">
-                <a16:creationId xmlns:a16="http://schemas.microsoft.com/office/drawing/2014/main" xmlns="" id="{5548425D-2C21-4C56-BAD4-662978775C28}"/>
+                <a16:creationId xmlns="" xmlns:a16="http://schemas.microsoft.com/office/drawing/2014/main" id="{5548425D-2C21-4C56-BAD4-662978775C28}"/>
               </a:ext>
             </a:extLst>
           </p:cNvPr>
@@ -6981,7 +7152,7 @@
           <p:cNvPr id="7" name="Espaço Reservado para Número de Slide 6">
             <a:extLst>
               <a:ext uri="{FF2B5EF4-FFF2-40B4-BE49-F238E27FC236}">
-                <a16:creationId xmlns:a16="http://schemas.microsoft.com/office/drawing/2014/main" xmlns="" id="{C63E9726-E64C-42B2-AE8A-8C235A956B48}"/>
+                <a16:creationId xmlns="" xmlns:a16="http://schemas.microsoft.com/office/drawing/2014/main" id="{C63E9726-E64C-42B2-AE8A-8C235A956B48}"/>
               </a:ext>
             </a:extLst>
           </p:cNvPr>
@@ -7040,7 +7211,7 @@
           <p:cNvPr id="2" name="Título 1">
             <a:extLst>
               <a:ext uri="{FF2B5EF4-FFF2-40B4-BE49-F238E27FC236}">
-                <a16:creationId xmlns:a16="http://schemas.microsoft.com/office/drawing/2014/main" xmlns="" id="{11086A78-3E74-450C-96A6-CA8AC37AF772}"/>
+                <a16:creationId xmlns="" xmlns:a16="http://schemas.microsoft.com/office/drawing/2014/main" id="{11086A78-3E74-450C-96A6-CA8AC37AF772}"/>
               </a:ext>
             </a:extLst>
           </p:cNvPr>
@@ -7077,7 +7248,7 @@
           <p:cNvPr id="3" name="Espaço Reservado para Imagem 2">
             <a:extLst>
               <a:ext uri="{FF2B5EF4-FFF2-40B4-BE49-F238E27FC236}">
-                <a16:creationId xmlns:a16="http://schemas.microsoft.com/office/drawing/2014/main" xmlns="" id="{5F5B7312-975A-4DBC-9B2F-3652ADA006FD}"/>
+                <a16:creationId xmlns="" xmlns:a16="http://schemas.microsoft.com/office/drawing/2014/main" id="{5F5B7312-975A-4DBC-9B2F-3652ADA006FD}"/>
               </a:ext>
             </a:extLst>
           </p:cNvPr>
@@ -7144,7 +7315,7 @@
           <p:cNvPr id="4" name="Espaço Reservado para Texto 3">
             <a:extLst>
               <a:ext uri="{FF2B5EF4-FFF2-40B4-BE49-F238E27FC236}">
-                <a16:creationId xmlns:a16="http://schemas.microsoft.com/office/drawing/2014/main" xmlns="" id="{AAF805F5-1DFF-41C6-944C-7D79FE0D0963}"/>
+                <a16:creationId xmlns="" xmlns:a16="http://schemas.microsoft.com/office/drawing/2014/main" id="{AAF805F5-1DFF-41C6-944C-7D79FE0D0963}"/>
               </a:ext>
             </a:extLst>
           </p:cNvPr>
@@ -7215,7 +7386,7 @@
           <p:cNvPr id="5" name="Espaço Reservado para Data 4">
             <a:extLst>
               <a:ext uri="{FF2B5EF4-FFF2-40B4-BE49-F238E27FC236}">
-                <a16:creationId xmlns:a16="http://schemas.microsoft.com/office/drawing/2014/main" xmlns="" id="{02113D81-8665-4516-BD81-C6A1F254EECD}"/>
+                <a16:creationId xmlns="" xmlns:a16="http://schemas.microsoft.com/office/drawing/2014/main" id="{02113D81-8665-4516-BD81-C6A1F254EECD}"/>
               </a:ext>
             </a:extLst>
           </p:cNvPr>
@@ -7244,7 +7415,7 @@
           <p:cNvPr id="6" name="Espaço Reservado para Rodapé 5">
             <a:extLst>
               <a:ext uri="{FF2B5EF4-FFF2-40B4-BE49-F238E27FC236}">
-                <a16:creationId xmlns:a16="http://schemas.microsoft.com/office/drawing/2014/main" xmlns="" id="{2B00C88B-FF32-40AA-A187-727D96FD7862}"/>
+                <a16:creationId xmlns="" xmlns:a16="http://schemas.microsoft.com/office/drawing/2014/main" id="{2B00C88B-FF32-40AA-A187-727D96FD7862}"/>
               </a:ext>
             </a:extLst>
           </p:cNvPr>
@@ -7269,7 +7440,7 @@
           <p:cNvPr id="7" name="Espaço Reservado para Número de Slide 6">
             <a:extLst>
               <a:ext uri="{FF2B5EF4-FFF2-40B4-BE49-F238E27FC236}">
-                <a16:creationId xmlns:a16="http://schemas.microsoft.com/office/drawing/2014/main" xmlns="" id="{A04D1A2D-69F7-4B8F-A730-BC26DC340BA6}"/>
+                <a16:creationId xmlns="" xmlns:a16="http://schemas.microsoft.com/office/drawing/2014/main" id="{A04D1A2D-69F7-4B8F-A730-BC26DC340BA6}"/>
               </a:ext>
             </a:extLst>
           </p:cNvPr>
@@ -7333,7 +7504,7 @@
           <p:cNvPr id="2" name="Espaço Reservado para Título 1">
             <a:extLst>
               <a:ext uri="{FF2B5EF4-FFF2-40B4-BE49-F238E27FC236}">
-                <a16:creationId xmlns:a16="http://schemas.microsoft.com/office/drawing/2014/main" xmlns="" id="{E69A0273-1966-4A1B-9370-4C1CE5036371}"/>
+                <a16:creationId xmlns="" xmlns:a16="http://schemas.microsoft.com/office/drawing/2014/main" id="{E69A0273-1966-4A1B-9370-4C1CE5036371}"/>
               </a:ext>
             </a:extLst>
           </p:cNvPr>
@@ -7371,7 +7542,7 @@
           <p:cNvPr id="3" name="Espaço Reservado para Texto 2">
             <a:extLst>
               <a:ext uri="{FF2B5EF4-FFF2-40B4-BE49-F238E27FC236}">
-                <a16:creationId xmlns:a16="http://schemas.microsoft.com/office/drawing/2014/main" xmlns="" id="{3B9CF87A-0448-49A7-AB25-EBC1D56A40EF}"/>
+                <a16:creationId xmlns="" xmlns:a16="http://schemas.microsoft.com/office/drawing/2014/main" id="{3B9CF87A-0448-49A7-AB25-EBC1D56A40EF}"/>
               </a:ext>
             </a:extLst>
           </p:cNvPr>
@@ -7438,7 +7609,7 @@
           <p:cNvPr id="4" name="Espaço Reservado para Data 3">
             <a:extLst>
               <a:ext uri="{FF2B5EF4-FFF2-40B4-BE49-F238E27FC236}">
-                <a16:creationId xmlns:a16="http://schemas.microsoft.com/office/drawing/2014/main" xmlns="" id="{2EF7B1F2-BB5A-44D0-816D-16AD2C71430E}"/>
+                <a16:creationId xmlns="" xmlns:a16="http://schemas.microsoft.com/office/drawing/2014/main" id="{2EF7B1F2-BB5A-44D0-816D-16AD2C71430E}"/>
               </a:ext>
             </a:extLst>
           </p:cNvPr>
@@ -7485,7 +7656,7 @@
           <p:cNvPr id="5" name="Espaço Reservado para Rodapé 4">
             <a:extLst>
               <a:ext uri="{FF2B5EF4-FFF2-40B4-BE49-F238E27FC236}">
-                <a16:creationId xmlns:a16="http://schemas.microsoft.com/office/drawing/2014/main" xmlns="" id="{C703F94C-2CC8-4DAA-BC35-14FC3E841DCD}"/>
+                <a16:creationId xmlns="" xmlns:a16="http://schemas.microsoft.com/office/drawing/2014/main" id="{C703F94C-2CC8-4DAA-BC35-14FC3E841DCD}"/>
               </a:ext>
             </a:extLst>
           </p:cNvPr>
@@ -7528,7 +7699,7 @@
           <p:cNvPr id="6" name="Espaço Reservado para Número de Slide 5">
             <a:extLst>
               <a:ext uri="{FF2B5EF4-FFF2-40B4-BE49-F238E27FC236}">
-                <a16:creationId xmlns:a16="http://schemas.microsoft.com/office/drawing/2014/main" xmlns="" id="{64051336-7048-457A-8B61-D94291D71648}"/>
+                <a16:creationId xmlns="" xmlns:a16="http://schemas.microsoft.com/office/drawing/2014/main" id="{64051336-7048-457A-8B61-D94291D71648}"/>
               </a:ext>
             </a:extLst>
           </p:cNvPr>
@@ -8408,7 +8579,7 @@
           <p:cNvPr id="2" name="Título 1">
             <a:extLst>
               <a:ext uri="{FF2B5EF4-FFF2-40B4-BE49-F238E27FC236}">
-                <a16:creationId xmlns:a16="http://schemas.microsoft.com/office/drawing/2014/main" xmlns="" id="{32666AC8-2E17-4DB4-B0F5-60C640CCFD2E}"/>
+                <a16:creationId xmlns="" xmlns:a16="http://schemas.microsoft.com/office/drawing/2014/main" id="{32666AC8-2E17-4DB4-B0F5-60C640CCFD2E}"/>
               </a:ext>
             </a:extLst>
           </p:cNvPr>
@@ -8467,7 +8638,7 @@
           <p:cNvPr id="1026" name="Picture 2" descr="Logo">
             <a:extLst>
               <a:ext uri="{FF2B5EF4-FFF2-40B4-BE49-F238E27FC236}">
-                <a16:creationId xmlns:a16="http://schemas.microsoft.com/office/drawing/2014/main" xmlns="" id="{3F2642E0-4F6A-4196-8F58-E77D36E9A33F}"/>
+                <a16:creationId xmlns="" xmlns:a16="http://schemas.microsoft.com/office/drawing/2014/main" id="{3F2642E0-4F6A-4196-8F58-E77D36E9A33F}"/>
               </a:ext>
             </a:extLst>
           </p:cNvPr>
@@ -8512,7 +8683,7 @@
           <p:cNvPr id="5122" name="Picture 2" descr="Image result for machine learning">
             <a:extLst>
               <a:ext uri="{FF2B5EF4-FFF2-40B4-BE49-F238E27FC236}">
-                <a16:creationId xmlns:a16="http://schemas.microsoft.com/office/drawing/2014/main" xmlns="" id="{810CE0A2-4102-44A6-A370-175E7896CDCB}"/>
+                <a16:creationId xmlns="" xmlns:a16="http://schemas.microsoft.com/office/drawing/2014/main" id="{810CE0A2-4102-44A6-A370-175E7896CDCB}"/>
               </a:ext>
             </a:extLst>
           </p:cNvPr>
@@ -8557,7 +8728,7 @@
           <p:cNvPr id="3" name="Picture 2" descr="IoT Group">
             <a:extLst>
               <a:ext uri="{FF2B5EF4-FFF2-40B4-BE49-F238E27FC236}">
-                <a16:creationId xmlns:a16="http://schemas.microsoft.com/office/drawing/2014/main" xmlns="" id="{AC034F57-E830-B6E7-6790-12FDBBDB2975}"/>
+                <a16:creationId xmlns="" xmlns:a16="http://schemas.microsoft.com/office/drawing/2014/main" id="{AC034F57-E830-B6E7-6790-12FDBBDB2975}"/>
               </a:ext>
             </a:extLst>
           </p:cNvPr>
@@ -8602,7 +8773,7 @@
           <p:cNvPr id="5" name="CaixaDeTexto 4">
             <a:extLst>
               <a:ext uri="{FF2B5EF4-FFF2-40B4-BE49-F238E27FC236}">
-                <a16:creationId xmlns:a16="http://schemas.microsoft.com/office/drawing/2014/main" xmlns="" id="{2D82026D-D2EA-05D7-61F2-DEE04704DB7E}"/>
+                <a16:creationId xmlns="" xmlns:a16="http://schemas.microsoft.com/office/drawing/2014/main" id="{2D82026D-D2EA-05D7-61F2-DEE04704DB7E}"/>
               </a:ext>
             </a:extLst>
           </p:cNvPr>
@@ -8687,7 +8858,7 @@
           <p:cNvPr id="2" name="Título 1">
             <a:extLst>
               <a:ext uri="{FF2B5EF4-FFF2-40B4-BE49-F238E27FC236}">
-                <a16:creationId xmlns:a16="http://schemas.microsoft.com/office/drawing/2014/main" xmlns="" id="{5F09B89C-3183-4D52-981A-62798DDFF2B8}"/>
+                <a16:creationId xmlns="" xmlns:a16="http://schemas.microsoft.com/office/drawing/2014/main" id="{5F09B89C-3183-4D52-981A-62798DDFF2B8}"/>
               </a:ext>
             </a:extLst>
           </p:cNvPr>
@@ -8727,7 +8898,7 @@
           <p:cNvPr id="3" name="AutoShape 2" descr="An example of graph signal reconstruction over wireless sensor network. |  Download Scientific Diagram">
             <a:extLst>
               <a:ext uri="{FF2B5EF4-FFF2-40B4-BE49-F238E27FC236}">
-                <a16:creationId xmlns:a16="http://schemas.microsoft.com/office/drawing/2014/main" xmlns="" id="{0166B4DD-D72A-4A54-94A7-2C38133837FD}"/>
+                <a16:creationId xmlns="" xmlns:a16="http://schemas.microsoft.com/office/drawing/2014/main" id="{0166B4DD-D72A-4A54-94A7-2C38133837FD}"/>
               </a:ext>
             </a:extLst>
           </p:cNvPr>
@@ -8778,7 +8949,7 @@
           <p:cNvPr id="7" name="AutoShape 4" descr="An example of graph signal reconstruction over wireless sensor network. |  Download Scientific Diagram">
             <a:extLst>
               <a:ext uri="{FF2B5EF4-FFF2-40B4-BE49-F238E27FC236}">
-                <a16:creationId xmlns:a16="http://schemas.microsoft.com/office/drawing/2014/main" xmlns="" id="{14C2B67D-81A1-457E-A410-FE4350A3CCA4}"/>
+                <a16:creationId xmlns="" xmlns:a16="http://schemas.microsoft.com/office/drawing/2014/main" id="{14C2B67D-81A1-457E-A410-FE4350A3CCA4}"/>
               </a:ext>
             </a:extLst>
           </p:cNvPr>
@@ -8829,7 +9000,7 @@
           <p:cNvPr id="4" name="Espaço Reservado para Conteúdo 3">
             <a:extLst>
               <a:ext uri="{FF2B5EF4-FFF2-40B4-BE49-F238E27FC236}">
-                <a16:creationId xmlns:a16="http://schemas.microsoft.com/office/drawing/2014/main" xmlns="" id="{0349BA64-C9D7-4730-9CA9-5C4AD9FC7969}"/>
+                <a16:creationId xmlns="" xmlns:a16="http://schemas.microsoft.com/office/drawing/2014/main" id="{0349BA64-C9D7-4730-9CA9-5C4AD9FC7969}"/>
               </a:ext>
             </a:extLst>
           </p:cNvPr>
@@ -8852,7 +9023,7 @@
           </a:bodyPr>
           <a:lstStyle/>
           <a:p>
-            <a:pPr marL="495308" indent="-342900" algn="just">
+            <a:pPr marL="438158" indent="-285750" algn="just">
               <a:lnSpc>
                 <a:spcPct val="107000"/>
               </a:lnSpc>
@@ -8861,24 +9032,44 @@
               </a:spcAft>
             </a:pPr>
             <a:r>
-              <a:rPr lang="pt-BR" sz="2000" dirty="0">
+              <a:rPr lang="pt-BR" sz="1734" dirty="0" smtClean="0">
                 <a:ea typeface="Calibri" panose="020F0502020204030204" pitchFamily="34" charset="0"/>
                 <a:cs typeface="Arial" panose="020B0604020202020204" pitchFamily="34" charset="0"/>
               </a:rPr>
-              <a:t>Exemplo de dado recebido com frequência de leitura de 62.5 Hz;</a:t>
-            </a:r>
-          </a:p>
-          <a:p>
-            <a:pPr marL="152408" indent="0" algn="just">
+              <a:t>Exemplo de 10 segundos de dados coletados por um acelerômetro </a:t>
+            </a:r>
+            <a:r>
+              <a:rPr lang="pt-BR" sz="1800" dirty="0">
+                <a:ea typeface="Calibri" panose="020F0502020204030204" pitchFamily="34" charset="0"/>
+                <a:cs typeface="Arial" panose="020B0604020202020204" pitchFamily="34" charset="0"/>
+              </a:rPr>
+              <a:t>com frequência de leitura de 62.5 Hz, i.e. 62.5 amostras por segundo</a:t>
+            </a:r>
+            <a:r>
+              <a:rPr lang="pt-BR" sz="1800" dirty="0" smtClean="0">
+                <a:ea typeface="Calibri" panose="020F0502020204030204" pitchFamily="34" charset="0"/>
+                <a:cs typeface="Arial" panose="020B0604020202020204" pitchFamily="34" charset="0"/>
+              </a:rPr>
+              <a:t>.</a:t>
+            </a:r>
+          </a:p>
+          <a:p>
+            <a:pPr marL="438158" indent="-285750" algn="just">
               <a:lnSpc>
                 <a:spcPct val="107000"/>
               </a:lnSpc>
               <a:spcAft>
                 <a:spcPts val="533"/>
               </a:spcAft>
-              <a:buNone/>
             </a:pPr>
-            <a:endParaRPr lang="pt-BR" sz="2000" dirty="0">
+            <a:r>
+              <a:rPr lang="pt-BR" sz="1800" dirty="0" smtClean="0">
+                <a:ea typeface="Calibri" panose="020F0502020204030204" pitchFamily="34" charset="0"/>
+                <a:cs typeface="Arial" panose="020B0604020202020204" pitchFamily="34" charset="0"/>
+              </a:rPr>
+              <a:t>Que tipo de dado é este?</a:t>
+            </a:r>
+            <a:endParaRPr lang="pt-BR" sz="1734" dirty="0">
               <a:ea typeface="Calibri" panose="020F0502020204030204" pitchFamily="34" charset="0"/>
               <a:cs typeface="Arial" panose="020B0604020202020204" pitchFamily="34" charset="0"/>
             </a:endParaRPr>
@@ -8901,49 +9092,26 @@
       </p:sp>
       <p:pic>
         <p:nvPicPr>
-          <p:cNvPr id="2050" name="Picture 2">
-            <a:extLst>
-              <a:ext uri="{FF2B5EF4-FFF2-40B4-BE49-F238E27FC236}">
-                <a16:creationId xmlns:a16="http://schemas.microsoft.com/office/drawing/2014/main" xmlns="" id="{41EE8F3B-F21B-EBDD-8836-71298D219C33}"/>
-              </a:ext>
-            </a:extLst>
-          </p:cNvPr>
+          <p:cNvPr id="5" name="Imagem 4"/>
           <p:cNvPicPr>
-            <a:picLocks noChangeAspect="1" noChangeArrowheads="1"/>
+            <a:picLocks noChangeAspect="1"/>
           </p:cNvPicPr>
           <p:nvPr/>
         </p:nvPicPr>
         <p:blipFill>
-          <a:blip r:embed="rId4">
-            <a:extLst>
-              <a:ext uri="{28A0092B-C50C-407E-A947-70E740481C1C}">
-                <a14:useLocalDpi xmlns:a14="http://schemas.microsoft.com/office/drawing/2010/main" val="0"/>
-              </a:ext>
-            </a:extLst>
-          </a:blip>
-          <a:srcRect/>
+          <a:blip r:embed="rId4"/>
           <a:stretch>
             <a:fillRect/>
           </a:stretch>
         </p:blipFill>
-        <p:spPr bwMode="auto">
+        <p:spPr>
           <a:xfrm>
-            <a:off x="2591611" y="2044700"/>
-            <a:ext cx="6429375" cy="2971800"/>
+            <a:off x="1138421" y="2668970"/>
+            <a:ext cx="9711958" cy="2312933"/>
           </a:xfrm>
           <a:prstGeom prst="rect">
             <a:avLst/>
           </a:prstGeom>
-          <a:noFill/>
-          <a:extLst>
-            <a:ext uri="{909E8E84-426E-40DD-AFC4-6F175D3DCCD1}">
-              <a14:hiddenFill xmlns:a14="http://schemas.microsoft.com/office/drawing/2010/main">
-                <a:solidFill>
-                  <a:srgbClr val="FFFFFF"/>
-                </a:solidFill>
-              </a14:hiddenFill>
-            </a:ext>
-          </a:extLst>
         </p:spPr>
       </p:pic>
     </p:spTree>
@@ -8995,7 +9163,7 @@
           <p:cNvPr id="2" name="Título 1">
             <a:extLst>
               <a:ext uri="{FF2B5EF4-FFF2-40B4-BE49-F238E27FC236}">
-                <a16:creationId xmlns:a16="http://schemas.microsoft.com/office/drawing/2014/main" xmlns="" id="{5F09B89C-3183-4D52-981A-62798DDFF2B8}"/>
+                <a16:creationId xmlns="" xmlns:a16="http://schemas.microsoft.com/office/drawing/2014/main" id="{5F09B89C-3183-4D52-981A-62798DDFF2B8}"/>
               </a:ext>
             </a:extLst>
           </p:cNvPr>
@@ -9035,7 +9203,7 @@
           <p:cNvPr id="3" name="AutoShape 2" descr="An example of graph signal reconstruction over wireless sensor network. |  Download Scientific Diagram">
             <a:extLst>
               <a:ext uri="{FF2B5EF4-FFF2-40B4-BE49-F238E27FC236}">
-                <a16:creationId xmlns:a16="http://schemas.microsoft.com/office/drawing/2014/main" xmlns="" id="{0166B4DD-D72A-4A54-94A7-2C38133837FD}"/>
+                <a16:creationId xmlns="" xmlns:a16="http://schemas.microsoft.com/office/drawing/2014/main" id="{0166B4DD-D72A-4A54-94A7-2C38133837FD}"/>
               </a:ext>
             </a:extLst>
           </p:cNvPr>
@@ -9086,7 +9254,7 @@
           <p:cNvPr id="7" name="AutoShape 4" descr="An example of graph signal reconstruction over wireless sensor network. |  Download Scientific Diagram">
             <a:extLst>
               <a:ext uri="{FF2B5EF4-FFF2-40B4-BE49-F238E27FC236}">
-                <a16:creationId xmlns:a16="http://schemas.microsoft.com/office/drawing/2014/main" xmlns="" id="{14C2B67D-81A1-457E-A410-FE4350A3CCA4}"/>
+                <a16:creationId xmlns="" xmlns:a16="http://schemas.microsoft.com/office/drawing/2014/main" id="{14C2B67D-81A1-457E-A410-FE4350A3CCA4}"/>
               </a:ext>
             </a:extLst>
           </p:cNvPr>
@@ -9137,7 +9305,7 @@
           <p:cNvPr id="4" name="Espaço Reservado para Conteúdo 3">
             <a:extLst>
               <a:ext uri="{FF2B5EF4-FFF2-40B4-BE49-F238E27FC236}">
-                <a16:creationId xmlns:a16="http://schemas.microsoft.com/office/drawing/2014/main" xmlns="" id="{0349BA64-C9D7-4730-9CA9-5C4AD9FC7969}"/>
+                <a16:creationId xmlns="" xmlns:a16="http://schemas.microsoft.com/office/drawing/2014/main" id="{0349BA64-C9D7-4730-9CA9-5C4AD9FC7969}"/>
               </a:ext>
             </a:extLst>
           </p:cNvPr>
@@ -9151,7 +9319,7 @@
         <p:spPr>
           <a:xfrm>
             <a:off x="304800" y="1066800"/>
-            <a:ext cx="9295589" cy="4330419"/>
+            <a:ext cx="9785131" cy="4330419"/>
           </a:xfrm>
         </p:spPr>
         <p:txBody>
@@ -9160,7 +9328,7 @@
           </a:bodyPr>
           <a:lstStyle/>
           <a:p>
-            <a:pPr marL="495308" indent="-342900" algn="just">
+            <a:pPr marL="438158" indent="-285750" algn="just">
               <a:lnSpc>
                 <a:spcPct val="107000"/>
               </a:lnSpc>
@@ -9169,12 +9337,40 @@
               </a:spcAft>
             </a:pPr>
             <a:r>
-              <a:rPr lang="pt-BR" sz="2000" dirty="0">
+              <a:rPr lang="pt-BR" sz="1734" dirty="0" smtClean="0">
                 <a:ea typeface="Calibri" panose="020F0502020204030204" pitchFamily="34" charset="0"/>
                 <a:cs typeface="Arial" panose="020B0604020202020204" pitchFamily="34" charset="0"/>
               </a:rPr>
-              <a:t>Exemplo de dado recebido com frequência de leitura de 62.5 Hz;</a:t>
-            </a:r>
+              <a:t>Série temporal: cada amostra tem correlação com as anteriores e posteriores.</a:t>
+            </a:r>
+          </a:p>
+          <a:p>
+            <a:pPr marL="438158" indent="-285750" algn="just">
+              <a:lnSpc>
+                <a:spcPct val="107000"/>
+              </a:lnSpc>
+              <a:spcAft>
+                <a:spcPts val="533"/>
+              </a:spcAft>
+            </a:pPr>
+            <a:r>
+              <a:rPr lang="pt-BR" sz="1734" dirty="0" smtClean="0">
+                <a:ea typeface="Calibri" panose="020F0502020204030204" pitchFamily="34" charset="0"/>
+                <a:cs typeface="Arial" panose="020B0604020202020204" pitchFamily="34" charset="0"/>
+              </a:rPr>
+              <a:t>Assim, por serem séries temporais, vamos processar janelas que capturem pelo menos um ciclo de movimento, por exemplo, 2 </a:t>
+            </a:r>
+            <a:r>
+              <a:rPr lang="pt-BR" sz="1734" smtClean="0">
+                <a:ea typeface="Calibri" panose="020F0502020204030204" pitchFamily="34" charset="0"/>
+                <a:cs typeface="Arial" panose="020B0604020202020204" pitchFamily="34" charset="0"/>
+              </a:rPr>
+              <a:t>segundos.</a:t>
+            </a:r>
+            <a:endParaRPr lang="pt-BR" sz="1734" dirty="0">
+              <a:ea typeface="Calibri" panose="020F0502020204030204" pitchFamily="34" charset="0"/>
+              <a:cs typeface="Arial" panose="020B0604020202020204" pitchFamily="34" charset="0"/>
+            </a:endParaRPr>
           </a:p>
           <a:p>
             <a:pPr marL="495308" indent="-342900" algn="just">
@@ -9190,181 +9386,11 @@
               <a:cs typeface="Arial" panose="020B0604020202020204" pitchFamily="34" charset="0"/>
             </a:endParaRPr>
           </a:p>
-          <a:p>
-            <a:pPr marL="495308" indent="-342900" algn="just">
-              <a:lnSpc>
-                <a:spcPct val="107000"/>
-              </a:lnSpc>
-              <a:spcAft>
-                <a:spcPts val="533"/>
-              </a:spcAft>
-            </a:pPr>
-            <a:endParaRPr lang="pt-BR" sz="2000" dirty="0">
-              <a:ea typeface="Calibri" panose="020F0502020204030204" pitchFamily="34" charset="0"/>
-              <a:cs typeface="Arial" panose="020B0604020202020204" pitchFamily="34" charset="0"/>
-            </a:endParaRPr>
-          </a:p>
-          <a:p>
-            <a:pPr marL="495308" indent="-342900" algn="just">
-              <a:lnSpc>
-                <a:spcPct val="107000"/>
-              </a:lnSpc>
-              <a:spcAft>
-                <a:spcPts val="533"/>
-              </a:spcAft>
-            </a:pPr>
-            <a:endParaRPr lang="pt-BR" sz="2000" dirty="0">
-              <a:ea typeface="Calibri" panose="020F0502020204030204" pitchFamily="34" charset="0"/>
-              <a:cs typeface="Arial" panose="020B0604020202020204" pitchFamily="34" charset="0"/>
-            </a:endParaRPr>
-          </a:p>
-          <a:p>
-            <a:pPr marL="495308" indent="-342900" algn="just">
-              <a:lnSpc>
-                <a:spcPct val="107000"/>
-              </a:lnSpc>
-              <a:spcAft>
-                <a:spcPts val="533"/>
-              </a:spcAft>
-            </a:pPr>
-            <a:endParaRPr lang="pt-BR" sz="2000" dirty="0">
-              <a:ea typeface="Calibri" panose="020F0502020204030204" pitchFamily="34" charset="0"/>
-              <a:cs typeface="Arial" panose="020B0604020202020204" pitchFamily="34" charset="0"/>
-            </a:endParaRPr>
-          </a:p>
-          <a:p>
-            <a:pPr marL="495308" indent="-342900" algn="just">
-              <a:lnSpc>
-                <a:spcPct val="107000"/>
-              </a:lnSpc>
-              <a:spcAft>
-                <a:spcPts val="533"/>
-              </a:spcAft>
-            </a:pPr>
-            <a:endParaRPr lang="pt-BR" sz="2000" dirty="0">
-              <a:ea typeface="Calibri" panose="020F0502020204030204" pitchFamily="34" charset="0"/>
-              <a:cs typeface="Arial" panose="020B0604020202020204" pitchFamily="34" charset="0"/>
-            </a:endParaRPr>
-          </a:p>
-          <a:p>
-            <a:pPr marL="495308" indent="-342900" algn="just">
-              <a:lnSpc>
-                <a:spcPct val="107000"/>
-              </a:lnSpc>
-              <a:spcAft>
-                <a:spcPts val="533"/>
-              </a:spcAft>
-            </a:pPr>
-            <a:endParaRPr lang="pt-BR" sz="2000" dirty="0">
-              <a:ea typeface="Calibri" panose="020F0502020204030204" pitchFamily="34" charset="0"/>
-              <a:cs typeface="Arial" panose="020B0604020202020204" pitchFamily="34" charset="0"/>
-            </a:endParaRPr>
-          </a:p>
-          <a:p>
-            <a:pPr marL="495308" indent="-342900" algn="just">
-              <a:lnSpc>
-                <a:spcPct val="107000"/>
-              </a:lnSpc>
-              <a:spcAft>
-                <a:spcPts val="533"/>
-              </a:spcAft>
-            </a:pPr>
-            <a:endParaRPr lang="pt-BR" sz="2000" dirty="0">
-              <a:ea typeface="Calibri" panose="020F0502020204030204" pitchFamily="34" charset="0"/>
-              <a:cs typeface="Arial" panose="020B0604020202020204" pitchFamily="34" charset="0"/>
-            </a:endParaRPr>
-          </a:p>
-          <a:p>
-            <a:pPr marL="495308" indent="-342900" algn="just">
-              <a:lnSpc>
-                <a:spcPct val="107000"/>
-              </a:lnSpc>
-              <a:spcAft>
-                <a:spcPts val="533"/>
-              </a:spcAft>
-            </a:pPr>
-            <a:r>
-              <a:rPr lang="pt-BR" sz="2000" dirty="0">
-                <a:ea typeface="Calibri" panose="020F0502020204030204" pitchFamily="34" charset="0"/>
-                <a:cs typeface="Arial" panose="020B0604020202020204" pitchFamily="34" charset="0"/>
-              </a:rPr>
-              <a:t>Tempo de janela de 2 segundos. Possibilidade de pegar pelo menos 2 ciclos completos.</a:t>
-            </a:r>
-          </a:p>
-          <a:p>
-            <a:pPr marL="495308" indent="-342900" algn="just">
-              <a:lnSpc>
-                <a:spcPct val="107000"/>
-              </a:lnSpc>
-              <a:spcAft>
-                <a:spcPts val="533"/>
-              </a:spcAft>
-            </a:pPr>
-            <a:r>
-              <a:rPr lang="pt-BR" sz="2000" dirty="0">
-                <a:ea typeface="Calibri" panose="020F0502020204030204" pitchFamily="34" charset="0"/>
-                <a:cs typeface="Arial" panose="020B0604020202020204" pitchFamily="34" charset="0"/>
-              </a:rPr>
-              <a:t>2*62,5=125 dados por eixo</a:t>
-            </a:r>
-          </a:p>
-          <a:p>
-            <a:pPr marL="495308" indent="-342900" algn="just">
-              <a:lnSpc>
-                <a:spcPct val="107000"/>
-              </a:lnSpc>
-              <a:spcAft>
-                <a:spcPts val="533"/>
-              </a:spcAft>
-            </a:pPr>
-            <a:r>
-              <a:rPr lang="pt-BR" sz="2000" dirty="0">
-                <a:ea typeface="Calibri" panose="020F0502020204030204" pitchFamily="34" charset="0"/>
-                <a:cs typeface="Arial" panose="020B0604020202020204" pitchFamily="34" charset="0"/>
-              </a:rPr>
-              <a:t>375 valores de entrada.</a:t>
-            </a:r>
-          </a:p>
-          <a:p>
-            <a:pPr marL="152408" indent="0" algn="just">
-              <a:lnSpc>
-                <a:spcPct val="107000"/>
-              </a:lnSpc>
-              <a:spcAft>
-                <a:spcPts val="533"/>
-              </a:spcAft>
-              <a:buNone/>
-            </a:pPr>
-            <a:endParaRPr lang="pt-BR" sz="2000" dirty="0">
-              <a:ea typeface="Calibri" panose="020F0502020204030204" pitchFamily="34" charset="0"/>
-              <a:cs typeface="Arial" panose="020B0604020202020204" pitchFamily="34" charset="0"/>
-            </a:endParaRPr>
-          </a:p>
-          <a:p>
-            <a:pPr marL="495308" indent="-342900" algn="just">
-              <a:lnSpc>
-                <a:spcPct val="107000"/>
-              </a:lnSpc>
-              <a:spcAft>
-                <a:spcPts val="533"/>
-              </a:spcAft>
-            </a:pPr>
-            <a:endParaRPr lang="pt-BR" sz="2000" dirty="0">
-              <a:ea typeface="Calibri" panose="020F0502020204030204" pitchFamily="34" charset="0"/>
-              <a:cs typeface="Arial" panose="020B0604020202020204" pitchFamily="34" charset="0"/>
-            </a:endParaRPr>
-          </a:p>
         </p:txBody>
       </p:sp>
       <p:pic>
         <p:nvPicPr>
-          <p:cNvPr id="6" name="Imagem 5">
-            <a:extLst>
-              <a:ext uri="{FF2B5EF4-FFF2-40B4-BE49-F238E27FC236}">
-                <a16:creationId xmlns:a16="http://schemas.microsoft.com/office/drawing/2014/main" xmlns="" id="{226A6266-4F96-A9EE-A327-C4A981C95342}"/>
-              </a:ext>
-            </a:extLst>
-          </p:cNvPr>
+          <p:cNvPr id="6" name="Imagem 5"/>
           <p:cNvPicPr>
             <a:picLocks noChangeAspect="1"/>
           </p:cNvPicPr>
@@ -9378,65 +9404,18 @@
         </p:blipFill>
         <p:spPr>
           <a:xfrm>
-            <a:off x="1127165" y="2344202"/>
-            <a:ext cx="3132091" cy="1775614"/>
+            <a:off x="1248103" y="2323388"/>
+            <a:ext cx="9206398" cy="2414423"/>
           </a:xfrm>
           <a:prstGeom prst="rect">
             <a:avLst/>
           </a:prstGeom>
         </p:spPr>
       </p:pic>
-      <p:pic>
-        <p:nvPicPr>
-          <p:cNvPr id="3074" name="Picture 2">
-            <a:extLst>
-              <a:ext uri="{FF2B5EF4-FFF2-40B4-BE49-F238E27FC236}">
-                <a16:creationId xmlns:a16="http://schemas.microsoft.com/office/drawing/2014/main" xmlns="" id="{CBE89270-4C86-1A06-BB71-909DD12DB6C2}"/>
-              </a:ext>
-            </a:extLst>
-          </p:cNvPr>
-          <p:cNvPicPr>
-            <a:picLocks noChangeAspect="1" noChangeArrowheads="1"/>
-          </p:cNvPicPr>
-          <p:nvPr/>
-        </p:nvPicPr>
-        <p:blipFill>
-          <a:blip r:embed="rId5">
-            <a:extLst>
-              <a:ext uri="{28A0092B-C50C-407E-A947-70E740481C1C}">
-                <a14:useLocalDpi xmlns:a14="http://schemas.microsoft.com/office/drawing/2010/main" val="0"/>
-              </a:ext>
-            </a:extLst>
-          </a:blip>
-          <a:srcRect/>
-          <a:stretch>
-            <a:fillRect/>
-          </a:stretch>
-        </p:blipFill>
-        <p:spPr bwMode="auto">
-          <a:xfrm>
-            <a:off x="4718058" y="2238375"/>
-            <a:ext cx="6429375" cy="2381250"/>
-          </a:xfrm>
-          <a:prstGeom prst="rect">
-            <a:avLst/>
-          </a:prstGeom>
-          <a:noFill/>
-          <a:extLst>
-            <a:ext uri="{909E8E84-426E-40DD-AFC4-6F175D3DCCD1}">
-              <a14:hiddenFill xmlns:a14="http://schemas.microsoft.com/office/drawing/2010/main">
-                <a:solidFill>
-                  <a:srgbClr val="FFFFFF"/>
-                </a:solidFill>
-              </a14:hiddenFill>
-            </a:ext>
-          </a:extLst>
-        </p:spPr>
-      </p:pic>
     </p:spTree>
     <p:extLst>
       <p:ext uri="{BB962C8B-B14F-4D97-AF65-F5344CB8AC3E}">
-        <p14:creationId xmlns:p14="http://schemas.microsoft.com/office/powerpoint/2010/main" val="2646648382"/>
+        <p14:creationId xmlns:p14="http://schemas.microsoft.com/office/powerpoint/2010/main" val="971700441"/>
       </p:ext>
     </p:extLst>
   </p:cSld>
@@ -9482,7 +9461,7 @@
           <p:cNvPr id="2" name="Título 1">
             <a:extLst>
               <a:ext uri="{FF2B5EF4-FFF2-40B4-BE49-F238E27FC236}">
-                <a16:creationId xmlns:a16="http://schemas.microsoft.com/office/drawing/2014/main" xmlns="" id="{5F09B89C-3183-4D52-981A-62798DDFF2B8}"/>
+                <a16:creationId xmlns="" xmlns:a16="http://schemas.microsoft.com/office/drawing/2014/main" id="{5F09B89C-3183-4D52-981A-62798DDFF2B8}"/>
               </a:ext>
             </a:extLst>
           </p:cNvPr>
@@ -9522,7 +9501,7 @@
           <p:cNvPr id="3" name="AutoShape 2" descr="An example of graph signal reconstruction over wireless sensor network. |  Download Scientific Diagram">
             <a:extLst>
               <a:ext uri="{FF2B5EF4-FFF2-40B4-BE49-F238E27FC236}">
-                <a16:creationId xmlns:a16="http://schemas.microsoft.com/office/drawing/2014/main" xmlns="" id="{0166B4DD-D72A-4A54-94A7-2C38133837FD}"/>
+                <a16:creationId xmlns="" xmlns:a16="http://schemas.microsoft.com/office/drawing/2014/main" id="{0166B4DD-D72A-4A54-94A7-2C38133837FD}"/>
               </a:ext>
             </a:extLst>
           </p:cNvPr>
@@ -9573,7 +9552,7 @@
           <p:cNvPr id="7" name="AutoShape 4" descr="An example of graph signal reconstruction over wireless sensor network. |  Download Scientific Diagram">
             <a:extLst>
               <a:ext uri="{FF2B5EF4-FFF2-40B4-BE49-F238E27FC236}">
-                <a16:creationId xmlns:a16="http://schemas.microsoft.com/office/drawing/2014/main" xmlns="" id="{14C2B67D-81A1-457E-A410-FE4350A3CCA4}"/>
+                <a16:creationId xmlns="" xmlns:a16="http://schemas.microsoft.com/office/drawing/2014/main" id="{14C2B67D-81A1-457E-A410-FE4350A3CCA4}"/>
               </a:ext>
             </a:extLst>
           </p:cNvPr>
@@ -9619,242 +9598,34 @@
           </a:p>
         </p:txBody>
       </p:sp>
-      <p:sp>
-        <p:nvSpPr>
-          <p:cNvPr id="4" name="Espaço Reservado para Conteúdo 3">
-            <a:extLst>
-              <a:ext uri="{FF2B5EF4-FFF2-40B4-BE49-F238E27FC236}">
-                <a16:creationId xmlns:a16="http://schemas.microsoft.com/office/drawing/2014/main" xmlns="" id="{0349BA64-C9D7-4730-9CA9-5C4AD9FC7969}"/>
-              </a:ext>
-            </a:extLst>
-          </p:cNvPr>
-          <p:cNvSpPr>
-            <a:spLocks noGrp="1"/>
-          </p:cNvSpPr>
-          <p:nvPr>
-            <p:ph idx="1"/>
-          </p:nvPr>
-        </p:nvSpPr>
-        <p:spPr>
-          <a:xfrm>
-            <a:off x="304800" y="1066800"/>
-            <a:ext cx="9295589" cy="4330419"/>
-          </a:xfrm>
-        </p:spPr>
-        <p:txBody>
-          <a:bodyPr>
-            <a:noAutofit/>
-          </a:bodyPr>
-          <a:lstStyle/>
-          <a:p>
-            <a:pPr marL="495308" indent="-342900" algn="just">
-              <a:lnSpc>
-                <a:spcPct val="107000"/>
-              </a:lnSpc>
-              <a:spcAft>
-                <a:spcPts val="533"/>
-              </a:spcAft>
-            </a:pPr>
-            <a:r>
-              <a:rPr lang="pt-BR" sz="2000" dirty="0">
-                <a:ea typeface="Calibri" panose="020F0502020204030204" pitchFamily="34" charset="0"/>
-                <a:cs typeface="Arial" panose="020B0604020202020204" pitchFamily="34" charset="0"/>
-              </a:rPr>
-              <a:t>Exemplo de dado recebido com frequência de leitura de 62.5 Hz;</a:t>
-            </a:r>
-          </a:p>
-          <a:p>
-            <a:pPr marL="495308" indent="-342900" algn="just">
-              <a:lnSpc>
-                <a:spcPct val="107000"/>
-              </a:lnSpc>
-              <a:spcAft>
-                <a:spcPts val="533"/>
-              </a:spcAft>
-            </a:pPr>
-            <a:endParaRPr lang="pt-BR" sz="2000" dirty="0">
-              <a:ea typeface="Calibri" panose="020F0502020204030204" pitchFamily="34" charset="0"/>
-              <a:cs typeface="Arial" panose="020B0604020202020204" pitchFamily="34" charset="0"/>
-            </a:endParaRPr>
-          </a:p>
-          <a:p>
-            <a:pPr marL="495308" indent="-342900" algn="just">
-              <a:lnSpc>
-                <a:spcPct val="107000"/>
-              </a:lnSpc>
-              <a:spcAft>
-                <a:spcPts val="533"/>
-              </a:spcAft>
-            </a:pPr>
-            <a:r>
-              <a:rPr lang="pt-BR" sz="2000" dirty="0">
-                <a:ea typeface="Calibri" panose="020F0502020204030204" pitchFamily="34" charset="0"/>
-                <a:cs typeface="Arial" panose="020B0604020202020204" pitchFamily="34" charset="0"/>
-              </a:rPr>
-              <a:t>375 valores de entrada.</a:t>
-            </a:r>
-          </a:p>
-          <a:p>
-            <a:pPr marL="495308" indent="-342900" algn="just">
-              <a:lnSpc>
-                <a:spcPct val="107000"/>
-              </a:lnSpc>
-              <a:spcAft>
-                <a:spcPts val="533"/>
-              </a:spcAft>
-            </a:pPr>
-            <a:endParaRPr lang="pt-BR" sz="2000" dirty="0">
-              <a:ea typeface="Calibri" panose="020F0502020204030204" pitchFamily="34" charset="0"/>
-              <a:cs typeface="Arial" panose="020B0604020202020204" pitchFamily="34" charset="0"/>
-            </a:endParaRPr>
-          </a:p>
-          <a:p>
-            <a:pPr marL="495308" indent="-342900" algn="just">
-              <a:lnSpc>
-                <a:spcPct val="107000"/>
-              </a:lnSpc>
-              <a:spcAft>
-                <a:spcPts val="533"/>
-              </a:spcAft>
-            </a:pPr>
-            <a:r>
-              <a:rPr lang="pt-BR" sz="2000" dirty="0">
-                <a:ea typeface="Calibri" panose="020F0502020204030204" pitchFamily="34" charset="0"/>
-                <a:cs typeface="Arial" panose="020B0604020202020204" pitchFamily="34" charset="0"/>
-              </a:rPr>
-              <a:t>Rede neural mais complexa.</a:t>
-            </a:r>
-          </a:p>
-          <a:p>
-            <a:pPr marL="495308" indent="-342900" algn="just">
-              <a:lnSpc>
-                <a:spcPct val="107000"/>
-              </a:lnSpc>
-              <a:spcAft>
-                <a:spcPts val="533"/>
-              </a:spcAft>
-            </a:pPr>
-            <a:r>
-              <a:rPr lang="pt-BR" sz="2000" dirty="0">
-                <a:ea typeface="Calibri" panose="020F0502020204030204" pitchFamily="34" charset="0"/>
-                <a:cs typeface="Arial" panose="020B0604020202020204" pitchFamily="34" charset="0"/>
-              </a:rPr>
-              <a:t>Rede </a:t>
-            </a:r>
-            <a:r>
-              <a:rPr lang="pt-BR" sz="2000" dirty="0" err="1">
-                <a:ea typeface="Calibri" panose="020F0502020204030204" pitchFamily="34" charset="0"/>
-                <a:cs typeface="Arial" panose="020B0604020202020204" pitchFamily="34" charset="0"/>
-              </a:rPr>
-              <a:t>convolucional</a:t>
-            </a:r>
-            <a:r>
-              <a:rPr lang="pt-BR" sz="2000" dirty="0">
-                <a:ea typeface="Calibri" panose="020F0502020204030204" pitchFamily="34" charset="0"/>
-                <a:cs typeface="Arial" panose="020B0604020202020204" pitchFamily="34" charset="0"/>
-              </a:rPr>
-              <a:t>.</a:t>
-            </a:r>
-          </a:p>
-          <a:p>
-            <a:pPr marL="495308" indent="-342900" algn="just">
-              <a:lnSpc>
-                <a:spcPct val="107000"/>
-              </a:lnSpc>
-              <a:spcAft>
-                <a:spcPts val="533"/>
-              </a:spcAft>
-            </a:pPr>
-            <a:r>
-              <a:rPr lang="pt-BR" sz="2000" dirty="0">
-                <a:ea typeface="Calibri" panose="020F0502020204030204" pitchFamily="34" charset="0"/>
-                <a:cs typeface="Arial" panose="020B0604020202020204" pitchFamily="34" charset="0"/>
-              </a:rPr>
-              <a:t>Custo energético mais alto para embarcado.</a:t>
-            </a:r>
-          </a:p>
-          <a:p>
-            <a:pPr marL="152408" indent="0" algn="just">
-              <a:lnSpc>
-                <a:spcPct val="107000"/>
-              </a:lnSpc>
-              <a:spcAft>
-                <a:spcPts val="533"/>
-              </a:spcAft>
-              <a:buNone/>
-            </a:pPr>
-            <a:endParaRPr lang="pt-BR" sz="2000" dirty="0">
-              <a:ea typeface="Calibri" panose="020F0502020204030204" pitchFamily="34" charset="0"/>
-              <a:cs typeface="Arial" panose="020B0604020202020204" pitchFamily="34" charset="0"/>
-            </a:endParaRPr>
-          </a:p>
-          <a:p>
-            <a:pPr marL="495308" indent="-342900" algn="just">
-              <a:lnSpc>
-                <a:spcPct val="107000"/>
-              </a:lnSpc>
-              <a:spcAft>
-                <a:spcPts val="533"/>
-              </a:spcAft>
-            </a:pPr>
-            <a:endParaRPr lang="pt-BR" sz="2000" dirty="0">
-              <a:ea typeface="Calibri" panose="020F0502020204030204" pitchFamily="34" charset="0"/>
-              <a:cs typeface="Arial" panose="020B0604020202020204" pitchFamily="34" charset="0"/>
-            </a:endParaRPr>
-          </a:p>
-        </p:txBody>
-      </p:sp>
       <p:pic>
         <p:nvPicPr>
-          <p:cNvPr id="5" name="Picture 2">
-            <a:extLst>
-              <a:ext uri="{FF2B5EF4-FFF2-40B4-BE49-F238E27FC236}">
-                <a16:creationId xmlns:a16="http://schemas.microsoft.com/office/drawing/2014/main" xmlns="" id="{07870545-4F2D-B338-1639-8D24A15221F0}"/>
-              </a:ext>
-            </a:extLst>
-          </p:cNvPr>
+          <p:cNvPr id="5" name="Imagem 4"/>
           <p:cNvPicPr>
-            <a:picLocks noChangeAspect="1" noChangeArrowheads="1"/>
+            <a:picLocks noChangeAspect="1"/>
           </p:cNvPicPr>
           <p:nvPr/>
         </p:nvPicPr>
         <p:blipFill>
-          <a:blip r:embed="rId4">
-            <a:extLst>
-              <a:ext uri="{28A0092B-C50C-407E-A947-70E740481C1C}">
-                <a14:useLocalDpi xmlns:a14="http://schemas.microsoft.com/office/drawing/2010/main" val="0"/>
-              </a:ext>
-            </a:extLst>
-          </a:blip>
-          <a:srcRect/>
+          <a:blip r:embed="rId4"/>
           <a:stretch>
             <a:fillRect/>
           </a:stretch>
         </p:blipFill>
-        <p:spPr bwMode="auto">
+        <p:spPr>
           <a:xfrm>
-            <a:off x="5730566" y="2238375"/>
-            <a:ext cx="5416867" cy="2006247"/>
+            <a:off x="304800" y="1362389"/>
+            <a:ext cx="10011378" cy="4539621"/>
           </a:xfrm>
           <a:prstGeom prst="rect">
             <a:avLst/>
           </a:prstGeom>
-          <a:noFill/>
-          <a:extLst>
-            <a:ext uri="{909E8E84-426E-40DD-AFC4-6F175D3DCCD1}">
-              <a14:hiddenFill xmlns:a14="http://schemas.microsoft.com/office/drawing/2010/main">
-                <a:solidFill>
-                  <a:srgbClr val="FFFFFF"/>
-                </a:solidFill>
-              </a14:hiddenFill>
-            </a:ext>
-          </a:extLst>
         </p:spPr>
       </p:pic>
     </p:spTree>
     <p:extLst>
       <p:ext uri="{BB962C8B-B14F-4D97-AF65-F5344CB8AC3E}">
-        <p14:creationId xmlns:p14="http://schemas.microsoft.com/office/powerpoint/2010/main" val="2891458677"/>
+        <p14:creationId xmlns:p14="http://schemas.microsoft.com/office/powerpoint/2010/main" val="1463151923"/>
       </p:ext>
     </p:extLst>
   </p:cSld>
@@ -9867,20 +9638,6 @@
 <file path=ppt/slides/slide13.xml><?xml version="1.0" encoding="utf-8"?>
 <p:sld xmlns:a="http://schemas.openxmlformats.org/drawingml/2006/main" xmlns:r="http://schemas.openxmlformats.org/officeDocument/2006/relationships" xmlns:p="http://schemas.openxmlformats.org/presentationml/2006/main">
   <p:cSld>
-    <p:bg>
-      <p:bgPr>
-        <a:blipFill dpi="0" rotWithShape="1">
-          <a:blip r:embed="rId3">
-            <a:lum/>
-          </a:blip>
-          <a:srcRect/>
-          <a:stretch>
-            <a:fillRect/>
-          </a:stretch>
-        </a:blipFill>
-        <a:effectLst/>
-      </p:bgPr>
-    </p:bg>
     <p:spTree>
       <p:nvGrpSpPr>
         <p:cNvPr id="1" name=""/>
@@ -9897,13 +9654,7 @@
       </p:grpSpPr>
       <p:sp>
         <p:nvSpPr>
-          <p:cNvPr id="2" name="Título 1">
-            <a:extLst>
-              <a:ext uri="{FF2B5EF4-FFF2-40B4-BE49-F238E27FC236}">
-                <a16:creationId xmlns:a16="http://schemas.microsoft.com/office/drawing/2014/main" xmlns="" id="{5F09B89C-3183-4D52-981A-62798DDFF2B8}"/>
-              </a:ext>
-            </a:extLst>
-          </p:cNvPr>
+          <p:cNvPr id="2" name="Título 1"/>
           <p:cNvSpPr>
             <a:spLocks noGrp="1"/>
           </p:cNvSpPr>
@@ -9911,141 +9662,18 @@
             <p:ph type="title"/>
           </p:nvPr>
         </p:nvSpPr>
-        <p:spPr>
-          <a:xfrm>
-            <a:off x="304800" y="183092"/>
-            <a:ext cx="6559285" cy="762000"/>
-          </a:xfrm>
-        </p:spPr>
-        <p:txBody>
-          <a:bodyPr>
-            <a:normAutofit/>
-          </a:bodyPr>
-          <a:lstStyle/>
-          <a:p>
-            <a:r>
-              <a:rPr lang="pt-BR" dirty="0"/>
-              <a:t>Motion </a:t>
-            </a:r>
-            <a:r>
-              <a:rPr lang="pt-BR" dirty="0" err="1"/>
-              <a:t>Classification</a:t>
-            </a:r>
-            <a:endParaRPr lang="pt-BR" dirty="0"/>
-          </a:p>
-        </p:txBody>
-      </p:sp>
-      <p:sp>
-        <p:nvSpPr>
-          <p:cNvPr id="3" name="AutoShape 2" descr="An example of graph signal reconstruction over wireless sensor network. |  Download Scientific Diagram">
-            <a:extLst>
-              <a:ext uri="{FF2B5EF4-FFF2-40B4-BE49-F238E27FC236}">
-                <a16:creationId xmlns:a16="http://schemas.microsoft.com/office/drawing/2014/main" xmlns="" id="{0166B4DD-D72A-4A54-94A7-2C38133837FD}"/>
-              </a:ext>
-            </a:extLst>
-          </p:cNvPr>
-          <p:cNvSpPr>
-            <a:spLocks noChangeAspect="1" noChangeArrowheads="1"/>
-          </p:cNvSpPr>
-          <p:nvPr/>
-        </p:nvSpPr>
-        <p:spPr bwMode="auto">
-          <a:xfrm>
-            <a:off x="5994400" y="3327400"/>
-            <a:ext cx="203200" cy="203200"/>
-          </a:xfrm>
-          <a:prstGeom prst="rect">
-            <a:avLst/>
-          </a:prstGeom>
-          <a:noFill/>
-          <a:extLst>
-            <a:ext uri="{909E8E84-426E-40DD-AFC4-6F175D3DCCD1}">
-              <a14:hiddenFill xmlns:a14="http://schemas.microsoft.com/office/drawing/2010/main">
-                <a:solidFill>
-                  <a:srgbClr val="FFFFFF"/>
-                </a:solidFill>
-              </a14:hiddenFill>
-            </a:ext>
-          </a:extLst>
-        </p:spPr>
-        <p:txBody>
-          <a:bodyPr vert="horz" wrap="square" lIns="60960" tIns="30480" rIns="60960" bIns="30480" numCol="1" anchor="t" anchorCtr="0" compatLnSpc="1">
-            <a:prstTxWarp prst="textNoShape">
-              <a:avLst/>
-            </a:prstTxWarp>
-          </a:bodyPr>
-          <a:lstStyle/>
-          <a:p>
-            <a:pPr defTabSz="609630"/>
-            <a:endParaRPr lang="pt-BR" sz="1200">
-              <a:solidFill>
-                <a:prstClr val="black"/>
-              </a:solidFill>
-              <a:latin typeface="Calibri"/>
-            </a:endParaRPr>
-          </a:p>
-        </p:txBody>
-      </p:sp>
-      <p:sp>
-        <p:nvSpPr>
-          <p:cNvPr id="7" name="AutoShape 4" descr="An example of graph signal reconstruction over wireless sensor network. |  Download Scientific Diagram">
-            <a:extLst>
-              <a:ext uri="{FF2B5EF4-FFF2-40B4-BE49-F238E27FC236}">
-                <a16:creationId xmlns:a16="http://schemas.microsoft.com/office/drawing/2014/main" xmlns="" id="{14C2B67D-81A1-457E-A410-FE4350A3CCA4}"/>
-              </a:ext>
-            </a:extLst>
-          </p:cNvPr>
-          <p:cNvSpPr>
-            <a:spLocks noChangeAspect="1" noChangeArrowheads="1"/>
-          </p:cNvSpPr>
-          <p:nvPr/>
-        </p:nvSpPr>
-        <p:spPr bwMode="auto">
-          <a:xfrm>
-            <a:off x="6096000" y="3429000"/>
-            <a:ext cx="203200" cy="203200"/>
-          </a:xfrm>
-          <a:prstGeom prst="rect">
-            <a:avLst/>
-          </a:prstGeom>
-          <a:noFill/>
-          <a:extLst>
-            <a:ext uri="{909E8E84-426E-40DD-AFC4-6F175D3DCCD1}">
-              <a14:hiddenFill xmlns:a14="http://schemas.microsoft.com/office/drawing/2010/main">
-                <a:solidFill>
-                  <a:srgbClr val="FFFFFF"/>
-                </a:solidFill>
-              </a14:hiddenFill>
-            </a:ext>
-          </a:extLst>
-        </p:spPr>
-        <p:txBody>
-          <a:bodyPr vert="horz" wrap="square" lIns="60960" tIns="30480" rIns="60960" bIns="30480" numCol="1" anchor="t" anchorCtr="0" compatLnSpc="1">
-            <a:prstTxWarp prst="textNoShape">
-              <a:avLst/>
-            </a:prstTxWarp>
-          </a:bodyPr>
-          <a:lstStyle/>
-          <a:p>
-            <a:pPr defTabSz="609630"/>
-            <a:endParaRPr lang="pt-BR" sz="1200">
-              <a:solidFill>
-                <a:prstClr val="black"/>
-              </a:solidFill>
-              <a:latin typeface="Calibri"/>
-            </a:endParaRPr>
-          </a:p>
-        </p:txBody>
-      </p:sp>
-      <p:sp>
-        <p:nvSpPr>
-          <p:cNvPr id="4" name="Espaço Reservado para Conteúdo 3">
-            <a:extLst>
-              <a:ext uri="{FF2B5EF4-FFF2-40B4-BE49-F238E27FC236}">
-                <a16:creationId xmlns:a16="http://schemas.microsoft.com/office/drawing/2014/main" xmlns="" id="{0349BA64-C9D7-4730-9CA9-5C4AD9FC7969}"/>
-              </a:ext>
-            </a:extLst>
-          </p:cNvPr>
+        <p:spPr/>
+        <p:txBody>
+          <a:bodyPr/>
+          <a:lstStyle/>
+          <a:p>
+            <a:endParaRPr lang="pt-BR"/>
+          </a:p>
+        </p:txBody>
+      </p:sp>
+      <p:sp>
+        <p:nvSpPr>
+          <p:cNvPr id="3" name="Espaço Reservado para Conteúdo 2"/>
           <p:cNvSpPr>
             <a:spLocks noGrp="1"/>
           </p:cNvSpPr>
@@ -10053,197 +9681,19 @@
             <p:ph idx="1"/>
           </p:nvPr>
         </p:nvSpPr>
-        <p:spPr>
-          <a:xfrm>
-            <a:off x="304800" y="1066800"/>
-            <a:ext cx="9295589" cy="4330419"/>
-          </a:xfrm>
-        </p:spPr>
-        <p:txBody>
-          <a:bodyPr>
-            <a:noAutofit/>
-          </a:bodyPr>
-          <a:lstStyle/>
-          <a:p>
-            <a:pPr marL="495308" indent="-342900" algn="just">
-              <a:lnSpc>
-                <a:spcPct val="107000"/>
-              </a:lnSpc>
-              <a:spcAft>
-                <a:spcPts val="533"/>
-              </a:spcAft>
-            </a:pPr>
-            <a:r>
-              <a:rPr lang="pt-BR" sz="2000" dirty="0">
-                <a:ea typeface="Calibri" panose="020F0502020204030204" pitchFamily="34" charset="0"/>
-                <a:cs typeface="Arial" panose="020B0604020202020204" pitchFamily="34" charset="0"/>
-              </a:rPr>
-              <a:t>Exemplo de dado recebido com frequência de leitura de 62.5 Hz;</a:t>
-            </a:r>
-          </a:p>
-          <a:p>
-            <a:pPr marL="495308" indent="-342900" algn="just">
-              <a:lnSpc>
-                <a:spcPct val="107000"/>
-              </a:lnSpc>
-              <a:spcAft>
-                <a:spcPts val="533"/>
-              </a:spcAft>
-            </a:pPr>
-            <a:r>
-              <a:rPr lang="pt-BR" sz="2000" dirty="0">
-                <a:ea typeface="Calibri" panose="020F0502020204030204" pitchFamily="34" charset="0"/>
-                <a:cs typeface="Arial" panose="020B0604020202020204" pitchFamily="34" charset="0"/>
-              </a:rPr>
-              <a:t>Solução: </a:t>
-            </a:r>
-            <a:r>
-              <a:rPr lang="pt-BR" sz="2000" dirty="0" err="1">
-                <a:ea typeface="Calibri" panose="020F0502020204030204" pitchFamily="34" charset="0"/>
-                <a:cs typeface="Arial" panose="020B0604020202020204" pitchFamily="34" charset="0"/>
-              </a:rPr>
-              <a:t>Pré</a:t>
-            </a:r>
-            <a:r>
-              <a:rPr lang="pt-BR" sz="2000" dirty="0">
-                <a:ea typeface="Calibri" panose="020F0502020204030204" pitchFamily="34" charset="0"/>
-                <a:cs typeface="Arial" panose="020B0604020202020204" pitchFamily="34" charset="0"/>
-              </a:rPr>
-              <a:t> processamento dos dados.</a:t>
-            </a:r>
-          </a:p>
-          <a:p>
-            <a:pPr marL="495308" indent="-342900" algn="just">
-              <a:lnSpc>
-                <a:spcPct val="107000"/>
-              </a:lnSpc>
-              <a:spcAft>
-                <a:spcPts val="533"/>
-              </a:spcAft>
-            </a:pPr>
-            <a:r>
-              <a:rPr lang="pt-BR" sz="2000" dirty="0">
-                <a:ea typeface="Calibri" panose="020F0502020204030204" pitchFamily="34" charset="0"/>
-                <a:cs typeface="Arial" panose="020B0604020202020204" pitchFamily="34" charset="0"/>
-              </a:rPr>
-              <a:t>Valores RMS das três curvas</a:t>
-            </a:r>
-          </a:p>
-          <a:p>
-            <a:pPr marL="152408" indent="0" algn="just">
-              <a:lnSpc>
-                <a:spcPct val="107000"/>
-              </a:lnSpc>
-              <a:spcAft>
-                <a:spcPts val="533"/>
-              </a:spcAft>
-              <a:buNone/>
-            </a:pPr>
-            <a:r>
-              <a:rPr lang="pt-BR" sz="2000" dirty="0">
-                <a:ea typeface="Calibri" panose="020F0502020204030204" pitchFamily="34" charset="0"/>
-                <a:cs typeface="Arial" panose="020B0604020202020204" pitchFamily="34" charset="0"/>
-              </a:rPr>
-              <a:t> </a:t>
-            </a:r>
-          </a:p>
-          <a:p>
-            <a:pPr marL="495308" indent="-342900" algn="just">
-              <a:lnSpc>
-                <a:spcPct val="107000"/>
-              </a:lnSpc>
-              <a:spcAft>
-                <a:spcPts val="533"/>
-              </a:spcAft>
-            </a:pPr>
-            <a:endParaRPr lang="pt-BR" sz="2000" dirty="0">
-              <a:ea typeface="Calibri" panose="020F0502020204030204" pitchFamily="34" charset="0"/>
-              <a:cs typeface="Arial" panose="020B0604020202020204" pitchFamily="34" charset="0"/>
-            </a:endParaRPr>
-          </a:p>
-        </p:txBody>
-      </p:sp>
-      <p:pic>
-        <p:nvPicPr>
-          <p:cNvPr id="6" name="Imagem 5">
-            <a:extLst>
-              <a:ext uri="{FF2B5EF4-FFF2-40B4-BE49-F238E27FC236}">
-                <a16:creationId xmlns:a16="http://schemas.microsoft.com/office/drawing/2014/main" xmlns="" id="{3876BA1F-0314-9771-20B7-DAEE6955ED5F}"/>
-              </a:ext>
-            </a:extLst>
-          </p:cNvPr>
-          <p:cNvPicPr>
-            <a:picLocks noChangeAspect="1"/>
-          </p:cNvPicPr>
-          <p:nvPr/>
-        </p:nvPicPr>
-        <p:blipFill>
-          <a:blip r:embed="rId4"/>
-          <a:stretch>
-            <a:fillRect/>
-          </a:stretch>
-        </p:blipFill>
-        <p:spPr>
-          <a:xfrm>
-            <a:off x="6981833" y="3055444"/>
-            <a:ext cx="4943475" cy="1524000"/>
-          </a:xfrm>
-          <a:prstGeom prst="rect">
-            <a:avLst/>
-          </a:prstGeom>
-        </p:spPr>
-      </p:pic>
-      <p:pic>
-        <p:nvPicPr>
-          <p:cNvPr id="8" name="Picture 2">
-            <a:extLst>
-              <a:ext uri="{FF2B5EF4-FFF2-40B4-BE49-F238E27FC236}">
-                <a16:creationId xmlns:a16="http://schemas.microsoft.com/office/drawing/2014/main" xmlns="" id="{CF338048-EB3D-C9A4-2D47-CD7735A5E606}"/>
-              </a:ext>
-            </a:extLst>
-          </p:cNvPr>
-          <p:cNvPicPr>
-            <a:picLocks noChangeAspect="1" noChangeArrowheads="1"/>
-          </p:cNvPicPr>
-          <p:nvPr/>
-        </p:nvPicPr>
-        <p:blipFill>
-          <a:blip r:embed="rId5">
-            <a:extLst>
-              <a:ext uri="{28A0092B-C50C-407E-A947-70E740481C1C}">
-                <a14:useLocalDpi xmlns:a14="http://schemas.microsoft.com/office/drawing/2010/main" val="0"/>
-              </a:ext>
-            </a:extLst>
-          </a:blip>
-          <a:srcRect/>
-          <a:stretch>
-            <a:fillRect/>
-          </a:stretch>
-        </p:blipFill>
-        <p:spPr bwMode="auto">
-          <a:xfrm>
-            <a:off x="552458" y="2904419"/>
-            <a:ext cx="6429375" cy="2381250"/>
-          </a:xfrm>
-          <a:prstGeom prst="rect">
-            <a:avLst/>
-          </a:prstGeom>
-          <a:noFill/>
-          <a:extLst>
-            <a:ext uri="{909E8E84-426E-40DD-AFC4-6F175D3DCCD1}">
-              <a14:hiddenFill xmlns:a14="http://schemas.microsoft.com/office/drawing/2010/main">
-                <a:solidFill>
-                  <a:srgbClr val="FFFFFF"/>
-                </a:solidFill>
-              </a14:hiddenFill>
-            </a:ext>
-          </a:extLst>
-        </p:spPr>
-      </p:pic>
+        <p:spPr/>
+        <p:txBody>
+          <a:bodyPr/>
+          <a:lstStyle/>
+          <a:p>
+            <a:endParaRPr lang="pt-BR"/>
+          </a:p>
+        </p:txBody>
+      </p:sp>
     </p:spTree>
     <p:extLst>
       <p:ext uri="{BB962C8B-B14F-4D97-AF65-F5344CB8AC3E}">
-        <p14:creationId xmlns:p14="http://schemas.microsoft.com/office/powerpoint/2010/main" val="2598366965"/>
+        <p14:creationId xmlns:p14="http://schemas.microsoft.com/office/powerpoint/2010/main" val="320590118"/>
       </p:ext>
     </p:extLst>
   </p:cSld>
@@ -10289,7 +9739,7 @@
           <p:cNvPr id="2" name="Título 1">
             <a:extLst>
               <a:ext uri="{FF2B5EF4-FFF2-40B4-BE49-F238E27FC236}">
-                <a16:creationId xmlns:a16="http://schemas.microsoft.com/office/drawing/2014/main" xmlns="" id="{5F09B89C-3183-4D52-981A-62798DDFF2B8}"/>
+                <a16:creationId xmlns="" xmlns:a16="http://schemas.microsoft.com/office/drawing/2014/main" id="{5F09B89C-3183-4D52-981A-62798DDFF2B8}"/>
               </a:ext>
             </a:extLst>
           </p:cNvPr>
@@ -10329,7 +9779,7 @@
           <p:cNvPr id="3" name="AutoShape 2" descr="An example of graph signal reconstruction over wireless sensor network. |  Download Scientific Diagram">
             <a:extLst>
               <a:ext uri="{FF2B5EF4-FFF2-40B4-BE49-F238E27FC236}">
-                <a16:creationId xmlns:a16="http://schemas.microsoft.com/office/drawing/2014/main" xmlns="" id="{0166B4DD-D72A-4A54-94A7-2C38133837FD}"/>
+                <a16:creationId xmlns="" xmlns:a16="http://schemas.microsoft.com/office/drawing/2014/main" id="{0166B4DD-D72A-4A54-94A7-2C38133837FD}"/>
               </a:ext>
             </a:extLst>
           </p:cNvPr>
@@ -10380,7 +9830,7 @@
           <p:cNvPr id="7" name="AutoShape 4" descr="An example of graph signal reconstruction over wireless sensor network. |  Download Scientific Diagram">
             <a:extLst>
               <a:ext uri="{FF2B5EF4-FFF2-40B4-BE49-F238E27FC236}">
-                <a16:creationId xmlns:a16="http://schemas.microsoft.com/office/drawing/2014/main" xmlns="" id="{14C2B67D-81A1-457E-A410-FE4350A3CCA4}"/>
+                <a16:creationId xmlns="" xmlns:a16="http://schemas.microsoft.com/office/drawing/2014/main" id="{14C2B67D-81A1-457E-A410-FE4350A3CCA4}"/>
               </a:ext>
             </a:extLst>
           </p:cNvPr>
@@ -10431,7 +9881,7 @@
           <p:cNvPr id="4" name="Espaço Reservado para Conteúdo 3">
             <a:extLst>
               <a:ext uri="{FF2B5EF4-FFF2-40B4-BE49-F238E27FC236}">
-                <a16:creationId xmlns:a16="http://schemas.microsoft.com/office/drawing/2014/main" xmlns="" id="{0349BA64-C9D7-4730-9CA9-5C4AD9FC7969}"/>
+                <a16:creationId xmlns="" xmlns:a16="http://schemas.microsoft.com/office/drawing/2014/main" id="{0349BA64-C9D7-4730-9CA9-5C4AD9FC7969}"/>
               </a:ext>
             </a:extLst>
           </p:cNvPr>
@@ -10445,7 +9895,7 @@
         <p:spPr>
           <a:xfrm>
             <a:off x="304800" y="1066800"/>
-            <a:ext cx="9295589" cy="4330419"/>
+            <a:ext cx="9958552" cy="4330419"/>
           </a:xfrm>
         </p:spPr>
         <p:txBody>
@@ -10467,96 +9917,19 @@
                 <a:ea typeface="Calibri" panose="020F0502020204030204" pitchFamily="34" charset="0"/>
                 <a:cs typeface="Arial" panose="020B0604020202020204" pitchFamily="34" charset="0"/>
               </a:rPr>
-              <a:t>Exemplo de dado recebido com frequência de leitura de 62.5 Hz;</a:t>
-            </a:r>
-          </a:p>
-          <a:p>
-            <a:pPr marL="495308" indent="-342900" algn="just">
-              <a:lnSpc>
-                <a:spcPct val="107000"/>
-              </a:lnSpc>
-              <a:spcAft>
-                <a:spcPts val="533"/>
-              </a:spcAft>
-            </a:pPr>
-            <a:r>
-              <a:rPr lang="pt-BR" sz="2000" dirty="0">
+              <a:t>Exemplo de dado recebido com frequência de leitura de 62.5 </a:t>
+            </a:r>
+            <a:r>
+              <a:rPr lang="pt-BR" sz="2000" dirty="0" smtClean="0">
                 <a:ea typeface="Calibri" panose="020F0502020204030204" pitchFamily="34" charset="0"/>
                 <a:cs typeface="Arial" panose="020B0604020202020204" pitchFamily="34" charset="0"/>
               </a:rPr>
-              <a:t>Solução: Pré-processamento dos dados.</a:t>
-            </a:r>
-          </a:p>
-          <a:p>
-            <a:pPr marL="495308" indent="-342900" algn="just">
-              <a:lnSpc>
-                <a:spcPct val="107000"/>
-              </a:lnSpc>
-              <a:spcAft>
-                <a:spcPts val="533"/>
-              </a:spcAft>
-            </a:pPr>
-            <a:r>
-              <a:rPr lang="pt-BR" sz="2000" dirty="0">
-                <a:ea typeface="Calibri" panose="020F0502020204030204" pitchFamily="34" charset="0"/>
-                <a:cs typeface="Arial" panose="020B0604020202020204" pitchFamily="34" charset="0"/>
-              </a:rPr>
-              <a:t>Calculo da FFT das curvas:</a:t>
-            </a:r>
-          </a:p>
-          <a:p>
-            <a:pPr marL="152408" indent="0" algn="just">
-              <a:lnSpc>
-                <a:spcPct val="107000"/>
-              </a:lnSpc>
-              <a:spcAft>
-                <a:spcPts val="533"/>
-              </a:spcAft>
-              <a:buNone/>
-            </a:pPr>
-            <a:r>
-              <a:rPr lang="pt-BR" sz="2000" dirty="0">
-                <a:ea typeface="Calibri" panose="020F0502020204030204" pitchFamily="34" charset="0"/>
-                <a:cs typeface="Arial" panose="020B0604020202020204" pitchFamily="34" charset="0"/>
-              </a:rPr>
-              <a:t>Pegar a frequência e a amplitude da fundamental mais duas harmônicas por eixo: 9 valores de amplitude e 9 frequências: 18 valores</a:t>
-            </a:r>
-          </a:p>
-          <a:p>
-            <a:pPr marL="152408" indent="0" algn="just">
-              <a:lnSpc>
-                <a:spcPct val="107000"/>
-              </a:lnSpc>
-              <a:spcAft>
-                <a:spcPts val="533"/>
-              </a:spcAft>
-              <a:buNone/>
-            </a:pPr>
-            <a:r>
-              <a:rPr lang="pt-BR" sz="2000" dirty="0">
-                <a:ea typeface="Calibri" panose="020F0502020204030204" pitchFamily="34" charset="0"/>
-                <a:cs typeface="Arial" panose="020B0604020202020204" pitchFamily="34" charset="0"/>
-              </a:rPr>
-              <a:t> </a:t>
-            </a:r>
-          </a:p>
-          <a:p>
-            <a:pPr marL="152408" indent="0" algn="just">
-              <a:lnSpc>
-                <a:spcPct val="107000"/>
-              </a:lnSpc>
-              <a:spcAft>
-                <a:spcPts val="533"/>
-              </a:spcAft>
-              <a:buNone/>
-            </a:pPr>
-            <a:r>
-              <a:rPr lang="pt-BR" sz="2000" dirty="0">
-                <a:ea typeface="Calibri" panose="020F0502020204030204" pitchFamily="34" charset="0"/>
-                <a:cs typeface="Arial" panose="020B0604020202020204" pitchFamily="34" charset="0"/>
-              </a:rPr>
-              <a:t> </a:t>
-            </a:r>
+              <a:t>Hz, i.e. 62.5 amostras por segundo.</a:t>
+            </a:r>
+            <a:endParaRPr lang="pt-BR" sz="2000" dirty="0">
+              <a:ea typeface="Calibri" panose="020F0502020204030204" pitchFamily="34" charset="0"/>
+              <a:cs typeface="Arial" panose="020B0604020202020204" pitchFamily="34" charset="0"/>
+            </a:endParaRPr>
           </a:p>
           <a:p>
             <a:pPr marL="495308" indent="-342900" algn="just">
@@ -10572,14 +9945,185 @@
               <a:cs typeface="Arial" panose="020B0604020202020204" pitchFamily="34" charset="0"/>
             </a:endParaRPr>
           </a:p>
+          <a:p>
+            <a:pPr marL="495308" indent="-342900" algn="just">
+              <a:lnSpc>
+                <a:spcPct val="107000"/>
+              </a:lnSpc>
+              <a:spcAft>
+                <a:spcPts val="533"/>
+              </a:spcAft>
+            </a:pPr>
+            <a:endParaRPr lang="pt-BR" sz="2000" dirty="0">
+              <a:ea typeface="Calibri" panose="020F0502020204030204" pitchFamily="34" charset="0"/>
+              <a:cs typeface="Arial" panose="020B0604020202020204" pitchFamily="34" charset="0"/>
+            </a:endParaRPr>
+          </a:p>
+          <a:p>
+            <a:pPr marL="495308" indent="-342900" algn="just">
+              <a:lnSpc>
+                <a:spcPct val="107000"/>
+              </a:lnSpc>
+              <a:spcAft>
+                <a:spcPts val="533"/>
+              </a:spcAft>
+            </a:pPr>
+            <a:endParaRPr lang="pt-BR" sz="2000" dirty="0">
+              <a:ea typeface="Calibri" panose="020F0502020204030204" pitchFamily="34" charset="0"/>
+              <a:cs typeface="Arial" panose="020B0604020202020204" pitchFamily="34" charset="0"/>
+            </a:endParaRPr>
+          </a:p>
+          <a:p>
+            <a:pPr marL="495308" indent="-342900" algn="just">
+              <a:lnSpc>
+                <a:spcPct val="107000"/>
+              </a:lnSpc>
+              <a:spcAft>
+                <a:spcPts val="533"/>
+              </a:spcAft>
+            </a:pPr>
+            <a:endParaRPr lang="pt-BR" sz="2000" dirty="0">
+              <a:ea typeface="Calibri" panose="020F0502020204030204" pitchFamily="34" charset="0"/>
+              <a:cs typeface="Arial" panose="020B0604020202020204" pitchFamily="34" charset="0"/>
+            </a:endParaRPr>
+          </a:p>
+          <a:p>
+            <a:pPr marL="495308" indent="-342900" algn="just">
+              <a:lnSpc>
+                <a:spcPct val="107000"/>
+              </a:lnSpc>
+              <a:spcAft>
+                <a:spcPts val="533"/>
+              </a:spcAft>
+            </a:pPr>
+            <a:endParaRPr lang="pt-BR" sz="2000" dirty="0">
+              <a:ea typeface="Calibri" panose="020F0502020204030204" pitchFamily="34" charset="0"/>
+              <a:cs typeface="Arial" panose="020B0604020202020204" pitchFamily="34" charset="0"/>
+            </a:endParaRPr>
+          </a:p>
+          <a:p>
+            <a:pPr marL="495308" indent="-342900" algn="just">
+              <a:lnSpc>
+                <a:spcPct val="107000"/>
+              </a:lnSpc>
+              <a:spcAft>
+                <a:spcPts val="533"/>
+              </a:spcAft>
+            </a:pPr>
+            <a:endParaRPr lang="pt-BR" sz="2000" dirty="0">
+              <a:ea typeface="Calibri" panose="020F0502020204030204" pitchFamily="34" charset="0"/>
+              <a:cs typeface="Arial" panose="020B0604020202020204" pitchFamily="34" charset="0"/>
+            </a:endParaRPr>
+          </a:p>
+          <a:p>
+            <a:pPr marL="495308" indent="-342900" algn="just">
+              <a:lnSpc>
+                <a:spcPct val="107000"/>
+              </a:lnSpc>
+              <a:spcAft>
+                <a:spcPts val="533"/>
+              </a:spcAft>
+            </a:pPr>
+            <a:endParaRPr lang="pt-BR" sz="2000" dirty="0">
+              <a:ea typeface="Calibri" panose="020F0502020204030204" pitchFamily="34" charset="0"/>
+              <a:cs typeface="Arial" panose="020B0604020202020204" pitchFamily="34" charset="0"/>
+            </a:endParaRPr>
+          </a:p>
+          <a:p>
+            <a:pPr marL="495308" indent="-342900" algn="just">
+              <a:lnSpc>
+                <a:spcPct val="107000"/>
+              </a:lnSpc>
+              <a:spcAft>
+                <a:spcPts val="533"/>
+              </a:spcAft>
+            </a:pPr>
+            <a:r>
+              <a:rPr lang="pt-BR" sz="2000" dirty="0">
+                <a:ea typeface="Calibri" panose="020F0502020204030204" pitchFamily="34" charset="0"/>
+                <a:cs typeface="Arial" panose="020B0604020202020204" pitchFamily="34" charset="0"/>
+              </a:rPr>
+              <a:t>Tempo de janela de 2 segundos. Possibilidade de pegar pelo menos 2 ciclos completos.</a:t>
+            </a:r>
+          </a:p>
+          <a:p>
+            <a:pPr marL="495308" indent="-342900" algn="just">
+              <a:lnSpc>
+                <a:spcPct val="107000"/>
+              </a:lnSpc>
+              <a:spcAft>
+                <a:spcPts val="533"/>
+              </a:spcAft>
+            </a:pPr>
+            <a:r>
+              <a:rPr lang="pt-BR" sz="2000" dirty="0" smtClean="0">
+                <a:ea typeface="Calibri" panose="020F0502020204030204" pitchFamily="34" charset="0"/>
+                <a:cs typeface="Arial" panose="020B0604020202020204" pitchFamily="34" charset="0"/>
+              </a:rPr>
+              <a:t>2*62,5 = 125 amostras por </a:t>
+            </a:r>
+            <a:r>
+              <a:rPr lang="pt-BR" sz="2000" dirty="0">
+                <a:ea typeface="Calibri" panose="020F0502020204030204" pitchFamily="34" charset="0"/>
+                <a:cs typeface="Arial" panose="020B0604020202020204" pitchFamily="34" charset="0"/>
+              </a:rPr>
+              <a:t>eixo</a:t>
+            </a:r>
+          </a:p>
+          <a:p>
+            <a:pPr marL="495308" indent="-342900" algn="just">
+              <a:lnSpc>
+                <a:spcPct val="107000"/>
+              </a:lnSpc>
+              <a:spcAft>
+                <a:spcPts val="533"/>
+              </a:spcAft>
+            </a:pPr>
+            <a:r>
+              <a:rPr lang="pt-BR" sz="2000" dirty="0">
+                <a:ea typeface="Calibri" panose="020F0502020204030204" pitchFamily="34" charset="0"/>
+                <a:cs typeface="Arial" panose="020B0604020202020204" pitchFamily="34" charset="0"/>
+              </a:rPr>
+              <a:t>375 valores de entrada.</a:t>
+            </a:r>
+          </a:p>
+          <a:p>
+            <a:pPr marL="152408" indent="0" algn="just">
+              <a:lnSpc>
+                <a:spcPct val="107000"/>
+              </a:lnSpc>
+              <a:spcAft>
+                <a:spcPts val="533"/>
+              </a:spcAft>
+              <a:buNone/>
+            </a:pPr>
+            <a:endParaRPr lang="pt-BR" sz="2000" dirty="0">
+              <a:ea typeface="Calibri" panose="020F0502020204030204" pitchFamily="34" charset="0"/>
+              <a:cs typeface="Arial" panose="020B0604020202020204" pitchFamily="34" charset="0"/>
+            </a:endParaRPr>
+          </a:p>
+          <a:p>
+            <a:pPr marL="495308" indent="-342900" algn="just">
+              <a:lnSpc>
+                <a:spcPct val="107000"/>
+              </a:lnSpc>
+              <a:spcAft>
+                <a:spcPts val="533"/>
+              </a:spcAft>
+            </a:pPr>
+            <a:endParaRPr lang="pt-BR" sz="2000" dirty="0">
+              <a:ea typeface="Calibri" panose="020F0502020204030204" pitchFamily="34" charset="0"/>
+              <a:cs typeface="Arial" panose="020B0604020202020204" pitchFamily="34" charset="0"/>
+            </a:endParaRPr>
+          </a:p>
         </p:txBody>
       </p:sp>
       <p:pic>
         <p:nvPicPr>
-          <p:cNvPr id="9" name="Imagem 8">
+          <p:cNvPr id="6" name="Imagem 5">
             <a:extLst>
               <a:ext uri="{FF2B5EF4-FFF2-40B4-BE49-F238E27FC236}">
-                <a16:creationId xmlns:a16="http://schemas.microsoft.com/office/drawing/2014/main" xmlns="" id="{E34DDF80-3AF4-098B-D371-5E05913D72CB}"/>
+                <a16:creationId xmlns="" xmlns:a16="http://schemas.microsoft.com/office/drawing/2014/main" id="{226A6266-4F96-A9EE-A327-C4A981C95342}"/>
               </a:ext>
             </a:extLst>
           </p:cNvPr>
@@ -10596,18 +10140,65 @@
         </p:blipFill>
         <p:spPr>
           <a:xfrm>
-            <a:off x="3584442" y="3530600"/>
-            <a:ext cx="3676474" cy="2911767"/>
+            <a:off x="1127165" y="2344202"/>
+            <a:ext cx="3132091" cy="1775614"/>
           </a:xfrm>
           <a:prstGeom prst="rect">
             <a:avLst/>
           </a:prstGeom>
         </p:spPr>
       </p:pic>
+      <p:pic>
+        <p:nvPicPr>
+          <p:cNvPr id="3074" name="Picture 2">
+            <a:extLst>
+              <a:ext uri="{FF2B5EF4-FFF2-40B4-BE49-F238E27FC236}">
+                <a16:creationId xmlns="" xmlns:a16="http://schemas.microsoft.com/office/drawing/2014/main" id="{CBE89270-4C86-1A06-BB71-909DD12DB6C2}"/>
+              </a:ext>
+            </a:extLst>
+          </p:cNvPr>
+          <p:cNvPicPr>
+            <a:picLocks noChangeAspect="1" noChangeArrowheads="1"/>
+          </p:cNvPicPr>
+          <p:nvPr/>
+        </p:nvPicPr>
+        <p:blipFill>
+          <a:blip r:embed="rId5">
+            <a:extLst>
+              <a:ext uri="{28A0092B-C50C-407E-A947-70E740481C1C}">
+                <a14:useLocalDpi xmlns:a14="http://schemas.microsoft.com/office/drawing/2010/main" val="0"/>
+              </a:ext>
+            </a:extLst>
+          </a:blip>
+          <a:srcRect/>
+          <a:stretch>
+            <a:fillRect/>
+          </a:stretch>
+        </p:blipFill>
+        <p:spPr bwMode="auto">
+          <a:xfrm>
+            <a:off x="4718058" y="2238375"/>
+            <a:ext cx="6429375" cy="2381250"/>
+          </a:xfrm>
+          <a:prstGeom prst="rect">
+            <a:avLst/>
+          </a:prstGeom>
+          <a:noFill/>
+          <a:extLst>
+            <a:ext uri="{909E8E84-426E-40DD-AFC4-6F175D3DCCD1}">
+              <a14:hiddenFill xmlns:a14="http://schemas.microsoft.com/office/drawing/2010/main">
+                <a:solidFill>
+                  <a:srgbClr val="FFFFFF"/>
+                </a:solidFill>
+              </a14:hiddenFill>
+            </a:ext>
+          </a:extLst>
+        </p:spPr>
+      </p:pic>
     </p:spTree>
     <p:extLst>
       <p:ext uri="{BB962C8B-B14F-4D97-AF65-F5344CB8AC3E}">
-        <p14:creationId xmlns:p14="http://schemas.microsoft.com/office/powerpoint/2010/main" val="1164262540"/>
+        <p14:creationId xmlns:p14="http://schemas.microsoft.com/office/powerpoint/2010/main" val="2646648382"/>
       </p:ext>
     </p:extLst>
   </p:cSld>
@@ -10653,7 +10244,7 @@
           <p:cNvPr id="2" name="Título 1">
             <a:extLst>
               <a:ext uri="{FF2B5EF4-FFF2-40B4-BE49-F238E27FC236}">
-                <a16:creationId xmlns:a16="http://schemas.microsoft.com/office/drawing/2014/main" xmlns="" id="{5F09B89C-3183-4D52-981A-62798DDFF2B8}"/>
+                <a16:creationId xmlns="" xmlns:a16="http://schemas.microsoft.com/office/drawing/2014/main" id="{5F09B89C-3183-4D52-981A-62798DDFF2B8}"/>
               </a:ext>
             </a:extLst>
           </p:cNvPr>
@@ -10693,7 +10284,7 @@
           <p:cNvPr id="3" name="AutoShape 2" descr="An example of graph signal reconstruction over wireless sensor network. |  Download Scientific Diagram">
             <a:extLst>
               <a:ext uri="{FF2B5EF4-FFF2-40B4-BE49-F238E27FC236}">
-                <a16:creationId xmlns:a16="http://schemas.microsoft.com/office/drawing/2014/main" xmlns="" id="{0166B4DD-D72A-4A54-94A7-2C38133837FD}"/>
+                <a16:creationId xmlns="" xmlns:a16="http://schemas.microsoft.com/office/drawing/2014/main" id="{0166B4DD-D72A-4A54-94A7-2C38133837FD}"/>
               </a:ext>
             </a:extLst>
           </p:cNvPr>
@@ -10744,7 +10335,7 @@
           <p:cNvPr id="7" name="AutoShape 4" descr="An example of graph signal reconstruction over wireless sensor network. |  Download Scientific Diagram">
             <a:extLst>
               <a:ext uri="{FF2B5EF4-FFF2-40B4-BE49-F238E27FC236}">
-                <a16:creationId xmlns:a16="http://schemas.microsoft.com/office/drawing/2014/main" xmlns="" id="{14C2B67D-81A1-457E-A410-FE4350A3CCA4}"/>
+                <a16:creationId xmlns="" xmlns:a16="http://schemas.microsoft.com/office/drawing/2014/main" id="{14C2B67D-81A1-457E-A410-FE4350A3CCA4}"/>
               </a:ext>
             </a:extLst>
           </p:cNvPr>
@@ -10795,7 +10386,7 @@
           <p:cNvPr id="4" name="Espaço Reservado para Conteúdo 3">
             <a:extLst>
               <a:ext uri="{FF2B5EF4-FFF2-40B4-BE49-F238E27FC236}">
-                <a16:creationId xmlns:a16="http://schemas.microsoft.com/office/drawing/2014/main" xmlns="" id="{0349BA64-C9D7-4730-9CA9-5C4AD9FC7969}"/>
+                <a16:creationId xmlns="" xmlns:a16="http://schemas.microsoft.com/office/drawing/2014/main" id="{0349BA64-C9D7-4730-9CA9-5C4AD9FC7969}"/>
               </a:ext>
             </a:extLst>
           </p:cNvPr>
@@ -10832,58 +10423,6 @@
                 <a:cs typeface="Arial" panose="020B0604020202020204" pitchFamily="34" charset="0"/>
               </a:rPr>
               <a:t>Exemplo de dado recebido com frequência de leitura de 62.5 Hz;</a:t>
-            </a:r>
-          </a:p>
-          <a:p>
-            <a:pPr marL="495308" indent="-342900" algn="just">
-              <a:lnSpc>
-                <a:spcPct val="107000"/>
-              </a:lnSpc>
-              <a:spcAft>
-                <a:spcPts val="533"/>
-              </a:spcAft>
-            </a:pPr>
-            <a:r>
-              <a:rPr lang="pt-BR" sz="2000" dirty="0">
-                <a:ea typeface="Calibri" panose="020F0502020204030204" pitchFamily="34" charset="0"/>
-                <a:cs typeface="Arial" panose="020B0604020202020204" pitchFamily="34" charset="0"/>
-              </a:rPr>
-              <a:t>Solução: Pré-processamento dos dados.</a:t>
-            </a:r>
-          </a:p>
-          <a:p>
-            <a:pPr marL="495308" indent="-342900" algn="just">
-              <a:lnSpc>
-                <a:spcPct val="107000"/>
-              </a:lnSpc>
-              <a:spcAft>
-                <a:spcPts val="533"/>
-              </a:spcAft>
-            </a:pPr>
-            <a:r>
-              <a:rPr lang="pt-BR" sz="2000" dirty="0">
-                <a:ea typeface="Calibri" panose="020F0502020204030204" pitchFamily="34" charset="0"/>
-                <a:cs typeface="Arial" panose="020B0604020202020204" pitchFamily="34" charset="0"/>
-              </a:rPr>
-              <a:t>Calcular a densidade espectral de potência (PSD) : 4 regiões* 3 eixos= 12 valores </a:t>
-            </a:r>
-          </a:p>
-          <a:p>
-            <a:pPr marL="152408" indent="0" algn="just">
-              <a:lnSpc>
-                <a:spcPct val="107000"/>
-              </a:lnSpc>
-              <a:spcAft>
-                <a:spcPts val="533"/>
-              </a:spcAft>
-              <a:buNone/>
-            </a:pPr>
-            <a:r>
-              <a:rPr lang="pt-BR" sz="2000" dirty="0">
-                <a:ea typeface="Calibri" panose="020F0502020204030204" pitchFamily="34" charset="0"/>
-                <a:cs typeface="Arial" panose="020B0604020202020204" pitchFamily="34" charset="0"/>
-              </a:rPr>
-              <a:t> </a:t>
             </a:r>
           </a:p>
           <a:p>
@@ -10900,72 +10439,184 @@
               <a:cs typeface="Arial" panose="020B0604020202020204" pitchFamily="34" charset="0"/>
             </a:endParaRPr>
           </a:p>
+          <a:p>
+            <a:pPr marL="495308" indent="-342900" algn="just">
+              <a:lnSpc>
+                <a:spcPct val="107000"/>
+              </a:lnSpc>
+              <a:spcAft>
+                <a:spcPts val="533"/>
+              </a:spcAft>
+            </a:pPr>
+            <a:r>
+              <a:rPr lang="pt-BR" sz="2000" dirty="0">
+                <a:ea typeface="Calibri" panose="020F0502020204030204" pitchFamily="34" charset="0"/>
+                <a:cs typeface="Arial" panose="020B0604020202020204" pitchFamily="34" charset="0"/>
+              </a:rPr>
+              <a:t>375 valores de entrada.</a:t>
+            </a:r>
+          </a:p>
+          <a:p>
+            <a:pPr marL="495308" indent="-342900" algn="just">
+              <a:lnSpc>
+                <a:spcPct val="107000"/>
+              </a:lnSpc>
+              <a:spcAft>
+                <a:spcPts val="533"/>
+              </a:spcAft>
+            </a:pPr>
+            <a:endParaRPr lang="pt-BR" sz="2000" dirty="0">
+              <a:ea typeface="Calibri" panose="020F0502020204030204" pitchFamily="34" charset="0"/>
+              <a:cs typeface="Arial" panose="020B0604020202020204" pitchFamily="34" charset="0"/>
+            </a:endParaRPr>
+          </a:p>
+          <a:p>
+            <a:pPr marL="495308" indent="-342900" algn="just">
+              <a:lnSpc>
+                <a:spcPct val="107000"/>
+              </a:lnSpc>
+              <a:spcAft>
+                <a:spcPts val="533"/>
+              </a:spcAft>
+            </a:pPr>
+            <a:r>
+              <a:rPr lang="pt-BR" sz="2000" dirty="0">
+                <a:ea typeface="Calibri" panose="020F0502020204030204" pitchFamily="34" charset="0"/>
+                <a:cs typeface="Arial" panose="020B0604020202020204" pitchFamily="34" charset="0"/>
+              </a:rPr>
+              <a:t>Rede neural mais complexa.</a:t>
+            </a:r>
+          </a:p>
+          <a:p>
+            <a:pPr marL="495308" indent="-342900" algn="just">
+              <a:lnSpc>
+                <a:spcPct val="107000"/>
+              </a:lnSpc>
+              <a:spcAft>
+                <a:spcPts val="533"/>
+              </a:spcAft>
+            </a:pPr>
+            <a:r>
+              <a:rPr lang="pt-BR" sz="2000" dirty="0">
+                <a:ea typeface="Calibri" panose="020F0502020204030204" pitchFamily="34" charset="0"/>
+                <a:cs typeface="Arial" panose="020B0604020202020204" pitchFamily="34" charset="0"/>
+              </a:rPr>
+              <a:t>Rede </a:t>
+            </a:r>
+            <a:r>
+              <a:rPr lang="pt-BR" sz="2000" dirty="0" err="1">
+                <a:ea typeface="Calibri" panose="020F0502020204030204" pitchFamily="34" charset="0"/>
+                <a:cs typeface="Arial" panose="020B0604020202020204" pitchFamily="34" charset="0"/>
+              </a:rPr>
+              <a:t>convolucional</a:t>
+            </a:r>
+            <a:r>
+              <a:rPr lang="pt-BR" sz="2000" dirty="0">
+                <a:ea typeface="Calibri" panose="020F0502020204030204" pitchFamily="34" charset="0"/>
+                <a:cs typeface="Arial" panose="020B0604020202020204" pitchFamily="34" charset="0"/>
+              </a:rPr>
+              <a:t>.</a:t>
+            </a:r>
+          </a:p>
+          <a:p>
+            <a:pPr marL="495308" indent="-342900" algn="just">
+              <a:lnSpc>
+                <a:spcPct val="107000"/>
+              </a:lnSpc>
+              <a:spcAft>
+                <a:spcPts val="533"/>
+              </a:spcAft>
+            </a:pPr>
+            <a:r>
+              <a:rPr lang="pt-BR" sz="2000" dirty="0">
+                <a:ea typeface="Calibri" panose="020F0502020204030204" pitchFamily="34" charset="0"/>
+                <a:cs typeface="Arial" panose="020B0604020202020204" pitchFamily="34" charset="0"/>
+              </a:rPr>
+              <a:t>Custo energético mais alto para embarcado.</a:t>
+            </a:r>
+          </a:p>
+          <a:p>
+            <a:pPr marL="152408" indent="0" algn="just">
+              <a:lnSpc>
+                <a:spcPct val="107000"/>
+              </a:lnSpc>
+              <a:spcAft>
+                <a:spcPts val="533"/>
+              </a:spcAft>
+              <a:buNone/>
+            </a:pPr>
+            <a:endParaRPr lang="pt-BR" sz="2000" dirty="0">
+              <a:ea typeface="Calibri" panose="020F0502020204030204" pitchFamily="34" charset="0"/>
+              <a:cs typeface="Arial" panose="020B0604020202020204" pitchFamily="34" charset="0"/>
+            </a:endParaRPr>
+          </a:p>
+          <a:p>
+            <a:pPr marL="495308" indent="-342900" algn="just">
+              <a:lnSpc>
+                <a:spcPct val="107000"/>
+              </a:lnSpc>
+              <a:spcAft>
+                <a:spcPts val="533"/>
+              </a:spcAft>
+            </a:pPr>
+            <a:endParaRPr lang="pt-BR" sz="2000" dirty="0">
+              <a:ea typeface="Calibri" panose="020F0502020204030204" pitchFamily="34" charset="0"/>
+              <a:cs typeface="Arial" panose="020B0604020202020204" pitchFamily="34" charset="0"/>
+            </a:endParaRPr>
+          </a:p>
         </p:txBody>
       </p:sp>
       <p:pic>
         <p:nvPicPr>
-          <p:cNvPr id="6" name="Imagem 5">
+          <p:cNvPr id="5" name="Picture 2">
             <a:extLst>
               <a:ext uri="{FF2B5EF4-FFF2-40B4-BE49-F238E27FC236}">
-                <a16:creationId xmlns:a16="http://schemas.microsoft.com/office/drawing/2014/main" xmlns="" id="{AA943D34-6194-3573-A1F3-15277F095134}"/>
+                <a16:creationId xmlns="" xmlns:a16="http://schemas.microsoft.com/office/drawing/2014/main" id="{07870545-4F2D-B338-1639-8D24A15221F0}"/>
               </a:ext>
             </a:extLst>
           </p:cNvPr>
           <p:cNvPicPr>
-            <a:picLocks noChangeAspect="1"/>
+            <a:picLocks noChangeAspect="1" noChangeArrowheads="1"/>
           </p:cNvPicPr>
           <p:nvPr/>
         </p:nvPicPr>
         <p:blipFill>
-          <a:blip r:embed="rId4"/>
+          <a:blip r:embed="rId4">
+            <a:extLst>
+              <a:ext uri="{28A0092B-C50C-407E-A947-70E740481C1C}">
+                <a14:useLocalDpi xmlns:a14="http://schemas.microsoft.com/office/drawing/2010/main" val="0"/>
+              </a:ext>
+            </a:extLst>
+          </a:blip>
+          <a:srcRect/>
           <a:stretch>
             <a:fillRect/>
           </a:stretch>
         </p:blipFill>
-        <p:spPr>
+        <p:spPr bwMode="auto">
           <a:xfrm>
-            <a:off x="2167229" y="2440094"/>
-            <a:ext cx="3827171" cy="3731492"/>
+            <a:off x="5730566" y="2238375"/>
+            <a:ext cx="5416867" cy="2006247"/>
           </a:xfrm>
           <a:prstGeom prst="rect">
             <a:avLst/>
           </a:prstGeom>
-        </p:spPr>
-      </p:pic>
-      <p:pic>
-        <p:nvPicPr>
-          <p:cNvPr id="10" name="Imagem 9">
-            <a:extLst>
-              <a:ext uri="{FF2B5EF4-FFF2-40B4-BE49-F238E27FC236}">
-                <a16:creationId xmlns:a16="http://schemas.microsoft.com/office/drawing/2014/main" xmlns="" id="{25B0EB0A-63CF-B662-F66B-F677CAAE5270}"/>
-              </a:ext>
-            </a:extLst>
-          </p:cNvPr>
-          <p:cNvPicPr>
-            <a:picLocks noChangeAspect="1"/>
-          </p:cNvPicPr>
-          <p:nvPr/>
-        </p:nvPicPr>
-        <p:blipFill>
-          <a:blip r:embed="rId5"/>
-          <a:stretch>
-            <a:fillRect/>
-          </a:stretch>
-        </p:blipFill>
-        <p:spPr>
-          <a:xfrm>
-            <a:off x="6400800" y="2904874"/>
-            <a:ext cx="5113867" cy="2614053"/>
-          </a:xfrm>
-          <a:prstGeom prst="rect">
-            <a:avLst/>
-          </a:prstGeom>
+          <a:noFill/>
+          <a:extLst>
+            <a:ext uri="{909E8E84-426E-40DD-AFC4-6F175D3DCCD1}">
+              <a14:hiddenFill xmlns:a14="http://schemas.microsoft.com/office/drawing/2010/main">
+                <a:solidFill>
+                  <a:srgbClr val="FFFFFF"/>
+                </a:solidFill>
+              </a14:hiddenFill>
+            </a:ext>
+          </a:extLst>
         </p:spPr>
       </p:pic>
     </p:spTree>
     <p:extLst>
       <p:ext uri="{BB962C8B-B14F-4D97-AF65-F5344CB8AC3E}">
-        <p14:creationId xmlns:p14="http://schemas.microsoft.com/office/powerpoint/2010/main" val="3141207834"/>
+        <p14:creationId xmlns:p14="http://schemas.microsoft.com/office/powerpoint/2010/main" val="2891458677"/>
       </p:ext>
     </p:extLst>
   </p:cSld>
@@ -11011,7 +10662,7 @@
           <p:cNvPr id="2" name="Título 1">
             <a:extLst>
               <a:ext uri="{FF2B5EF4-FFF2-40B4-BE49-F238E27FC236}">
-                <a16:creationId xmlns:a16="http://schemas.microsoft.com/office/drawing/2014/main" xmlns="" id="{5F09B89C-3183-4D52-981A-62798DDFF2B8}"/>
+                <a16:creationId xmlns="" xmlns:a16="http://schemas.microsoft.com/office/drawing/2014/main" id="{5F09B89C-3183-4D52-981A-62798DDFF2B8}"/>
               </a:ext>
             </a:extLst>
           </p:cNvPr>
@@ -11051,7 +10702,7 @@
           <p:cNvPr id="3" name="AutoShape 2" descr="An example of graph signal reconstruction over wireless sensor network. |  Download Scientific Diagram">
             <a:extLst>
               <a:ext uri="{FF2B5EF4-FFF2-40B4-BE49-F238E27FC236}">
-                <a16:creationId xmlns:a16="http://schemas.microsoft.com/office/drawing/2014/main" xmlns="" id="{0166B4DD-D72A-4A54-94A7-2C38133837FD}"/>
+                <a16:creationId xmlns="" xmlns:a16="http://schemas.microsoft.com/office/drawing/2014/main" id="{0166B4DD-D72A-4A54-94A7-2C38133837FD}"/>
               </a:ext>
             </a:extLst>
           </p:cNvPr>
@@ -11102,7 +10753,7 @@
           <p:cNvPr id="7" name="AutoShape 4" descr="An example of graph signal reconstruction over wireless sensor network. |  Download Scientific Diagram">
             <a:extLst>
               <a:ext uri="{FF2B5EF4-FFF2-40B4-BE49-F238E27FC236}">
-                <a16:creationId xmlns:a16="http://schemas.microsoft.com/office/drawing/2014/main" xmlns="" id="{14C2B67D-81A1-457E-A410-FE4350A3CCA4}"/>
+                <a16:creationId xmlns="" xmlns:a16="http://schemas.microsoft.com/office/drawing/2014/main" id="{14C2B67D-81A1-457E-A410-FE4350A3CCA4}"/>
               </a:ext>
             </a:extLst>
           </p:cNvPr>
@@ -11153,7 +10804,7 @@
           <p:cNvPr id="4" name="Espaço Reservado para Conteúdo 3">
             <a:extLst>
               <a:ext uri="{FF2B5EF4-FFF2-40B4-BE49-F238E27FC236}">
-                <a16:creationId xmlns:a16="http://schemas.microsoft.com/office/drawing/2014/main" xmlns="" id="{0349BA64-C9D7-4730-9CA9-5C4AD9FC7969}"/>
+                <a16:creationId xmlns="" xmlns:a16="http://schemas.microsoft.com/office/drawing/2014/main" id="{0349BA64-C9D7-4730-9CA9-5C4AD9FC7969}"/>
               </a:ext>
             </a:extLst>
           </p:cNvPr>
@@ -11175,6 +10826,71 @@
             <a:noAutofit/>
           </a:bodyPr>
           <a:lstStyle/>
+          <a:p>
+            <a:pPr marL="495308" indent="-342900" algn="just">
+              <a:lnSpc>
+                <a:spcPct val="107000"/>
+              </a:lnSpc>
+              <a:spcAft>
+                <a:spcPts val="533"/>
+              </a:spcAft>
+            </a:pPr>
+            <a:r>
+              <a:rPr lang="pt-BR" sz="2000" dirty="0">
+                <a:ea typeface="Calibri" panose="020F0502020204030204" pitchFamily="34" charset="0"/>
+                <a:cs typeface="Arial" panose="020B0604020202020204" pitchFamily="34" charset="0"/>
+              </a:rPr>
+              <a:t>Exemplo de dado recebido com frequência de leitura de 62.5 Hz;</a:t>
+            </a:r>
+          </a:p>
+          <a:p>
+            <a:pPr marL="495308" indent="-342900" algn="just">
+              <a:lnSpc>
+                <a:spcPct val="107000"/>
+              </a:lnSpc>
+              <a:spcAft>
+                <a:spcPts val="533"/>
+              </a:spcAft>
+            </a:pPr>
+            <a:r>
+              <a:rPr lang="pt-BR" sz="2000" dirty="0">
+                <a:ea typeface="Calibri" panose="020F0502020204030204" pitchFamily="34" charset="0"/>
+                <a:cs typeface="Arial" panose="020B0604020202020204" pitchFamily="34" charset="0"/>
+              </a:rPr>
+              <a:t>Solução: </a:t>
+            </a:r>
+            <a:r>
+              <a:rPr lang="pt-BR" sz="2000" dirty="0" err="1">
+                <a:ea typeface="Calibri" panose="020F0502020204030204" pitchFamily="34" charset="0"/>
+                <a:cs typeface="Arial" panose="020B0604020202020204" pitchFamily="34" charset="0"/>
+              </a:rPr>
+              <a:t>Pré</a:t>
+            </a:r>
+            <a:r>
+              <a:rPr lang="pt-BR" sz="2000" dirty="0">
+                <a:ea typeface="Calibri" panose="020F0502020204030204" pitchFamily="34" charset="0"/>
+                <a:cs typeface="Arial" panose="020B0604020202020204" pitchFamily="34" charset="0"/>
+              </a:rPr>
+              <a:t> processamento dos dados.</a:t>
+            </a:r>
+          </a:p>
+          <a:p>
+            <a:pPr marL="495308" indent="-342900" algn="just">
+              <a:lnSpc>
+                <a:spcPct val="107000"/>
+              </a:lnSpc>
+              <a:spcAft>
+                <a:spcPts val="533"/>
+              </a:spcAft>
+            </a:pPr>
+            <a:r>
+              <a:rPr lang="pt-BR" sz="2000" dirty="0">
+                <a:ea typeface="Calibri" panose="020F0502020204030204" pitchFamily="34" charset="0"/>
+                <a:cs typeface="Arial" panose="020B0604020202020204" pitchFamily="34" charset="0"/>
+              </a:rPr>
+              <a:t>Valores RMS das três curvas</a:t>
+            </a:r>
+          </a:p>
           <a:p>
             <a:pPr marL="152408" indent="0" algn="just">
               <a:lnSpc>
@@ -11190,73 +10906,7 @@
                 <a:ea typeface="Calibri" panose="020F0502020204030204" pitchFamily="34" charset="0"/>
                 <a:cs typeface="Arial" panose="020B0604020202020204" pitchFamily="34" charset="0"/>
               </a:rPr>
-              <a:t>Para este exemplo ficamos com uma rede neural com: </a:t>
-            </a:r>
-          </a:p>
-          <a:p>
-            <a:pPr marL="152408" indent="0" algn="just">
-              <a:lnSpc>
-                <a:spcPct val="107000"/>
-              </a:lnSpc>
-              <a:spcAft>
-                <a:spcPts val="533"/>
-              </a:spcAft>
-              <a:buNone/>
-            </a:pPr>
-            <a:endParaRPr lang="pt-BR" sz="2000" dirty="0">
-              <a:ea typeface="Calibri" panose="020F0502020204030204" pitchFamily="34" charset="0"/>
-              <a:cs typeface="Arial" panose="020B0604020202020204" pitchFamily="34" charset="0"/>
-            </a:endParaRPr>
-          </a:p>
-          <a:p>
-            <a:pPr marL="495308" indent="-342900" algn="just">
-              <a:lnSpc>
-                <a:spcPct val="107000"/>
-              </a:lnSpc>
-              <a:spcAft>
-                <a:spcPts val="533"/>
-              </a:spcAft>
-            </a:pPr>
-            <a:r>
-              <a:rPr lang="pt-BR" sz="2000" dirty="0">
-                <a:ea typeface="Calibri" panose="020F0502020204030204" pitchFamily="34" charset="0"/>
-                <a:cs typeface="Arial" panose="020B0604020202020204" pitchFamily="34" charset="0"/>
-              </a:rPr>
-              <a:t>33 entradas</a:t>
-            </a:r>
-          </a:p>
-          <a:p>
-            <a:pPr marL="495308" indent="-342900" algn="just">
-              <a:lnSpc>
-                <a:spcPct val="107000"/>
-              </a:lnSpc>
-              <a:spcAft>
-                <a:spcPts val="533"/>
-              </a:spcAft>
-            </a:pPr>
-            <a:r>
-              <a:rPr lang="pt-BR" sz="2000" dirty="0">
-                <a:ea typeface="Calibri" panose="020F0502020204030204" pitchFamily="34" charset="0"/>
-                <a:cs typeface="Arial" panose="020B0604020202020204" pitchFamily="34" charset="0"/>
-              </a:rPr>
-              <a:t>Camadas densas</a:t>
-            </a:r>
-          </a:p>
-          <a:p>
-            <a:pPr marL="495308" indent="-342900" algn="just">
-              <a:lnSpc>
-                <a:spcPct val="107000"/>
-              </a:lnSpc>
-              <a:spcAft>
-                <a:spcPts val="533"/>
-              </a:spcAft>
-            </a:pPr>
-            <a:r>
-              <a:rPr lang="pt-BR" sz="2000" dirty="0">
-                <a:ea typeface="Calibri" panose="020F0502020204030204" pitchFamily="34" charset="0"/>
-                <a:cs typeface="Arial" panose="020B0604020202020204" pitchFamily="34" charset="0"/>
-              </a:rPr>
-              <a:t>4 saídas:  Parado, sendo erguido, no mar, no caminhão.</a:t>
+              <a:t> </a:t>
             </a:r>
           </a:p>
           <a:p>
@@ -11273,26 +10923,89 @@
               <a:cs typeface="Arial" panose="020B0604020202020204" pitchFamily="34" charset="0"/>
             </a:endParaRPr>
           </a:p>
-          <a:p>
-            <a:pPr marL="495308" indent="-342900" algn="just">
-              <a:lnSpc>
-                <a:spcPct val="107000"/>
-              </a:lnSpc>
-              <a:spcAft>
-                <a:spcPts val="533"/>
-              </a:spcAft>
-            </a:pPr>
-            <a:endParaRPr lang="pt-BR" sz="2000" dirty="0">
-              <a:ea typeface="Calibri" panose="020F0502020204030204" pitchFamily="34" charset="0"/>
-              <a:cs typeface="Arial" panose="020B0604020202020204" pitchFamily="34" charset="0"/>
-            </a:endParaRPr>
-          </a:p>
-        </p:txBody>
-      </p:sp>
+        </p:txBody>
+      </p:sp>
+      <p:pic>
+        <p:nvPicPr>
+          <p:cNvPr id="6" name="Imagem 5">
+            <a:extLst>
+              <a:ext uri="{FF2B5EF4-FFF2-40B4-BE49-F238E27FC236}">
+                <a16:creationId xmlns="" xmlns:a16="http://schemas.microsoft.com/office/drawing/2014/main" id="{3876BA1F-0314-9771-20B7-DAEE6955ED5F}"/>
+              </a:ext>
+            </a:extLst>
+          </p:cNvPr>
+          <p:cNvPicPr>
+            <a:picLocks noChangeAspect="1"/>
+          </p:cNvPicPr>
+          <p:nvPr/>
+        </p:nvPicPr>
+        <p:blipFill>
+          <a:blip r:embed="rId4"/>
+          <a:stretch>
+            <a:fillRect/>
+          </a:stretch>
+        </p:blipFill>
+        <p:spPr>
+          <a:xfrm>
+            <a:off x="6981833" y="3055444"/>
+            <a:ext cx="4943475" cy="1524000"/>
+          </a:xfrm>
+          <a:prstGeom prst="rect">
+            <a:avLst/>
+          </a:prstGeom>
+        </p:spPr>
+      </p:pic>
+      <p:pic>
+        <p:nvPicPr>
+          <p:cNvPr id="8" name="Picture 2">
+            <a:extLst>
+              <a:ext uri="{FF2B5EF4-FFF2-40B4-BE49-F238E27FC236}">
+                <a16:creationId xmlns="" xmlns:a16="http://schemas.microsoft.com/office/drawing/2014/main" id="{CF338048-EB3D-C9A4-2D47-CD7735A5E606}"/>
+              </a:ext>
+            </a:extLst>
+          </p:cNvPr>
+          <p:cNvPicPr>
+            <a:picLocks noChangeAspect="1" noChangeArrowheads="1"/>
+          </p:cNvPicPr>
+          <p:nvPr/>
+        </p:nvPicPr>
+        <p:blipFill>
+          <a:blip r:embed="rId5">
+            <a:extLst>
+              <a:ext uri="{28A0092B-C50C-407E-A947-70E740481C1C}">
+                <a14:useLocalDpi xmlns:a14="http://schemas.microsoft.com/office/drawing/2010/main" val="0"/>
+              </a:ext>
+            </a:extLst>
+          </a:blip>
+          <a:srcRect/>
+          <a:stretch>
+            <a:fillRect/>
+          </a:stretch>
+        </p:blipFill>
+        <p:spPr bwMode="auto">
+          <a:xfrm>
+            <a:off x="552458" y="2904419"/>
+            <a:ext cx="6429375" cy="2381250"/>
+          </a:xfrm>
+          <a:prstGeom prst="rect">
+            <a:avLst/>
+          </a:prstGeom>
+          <a:noFill/>
+          <a:extLst>
+            <a:ext uri="{909E8E84-426E-40DD-AFC4-6F175D3DCCD1}">
+              <a14:hiddenFill xmlns:a14="http://schemas.microsoft.com/office/drawing/2010/main">
+                <a:solidFill>
+                  <a:srgbClr val="FFFFFF"/>
+                </a:solidFill>
+              </a14:hiddenFill>
+            </a:ext>
+          </a:extLst>
+        </p:spPr>
+      </p:pic>
     </p:spTree>
     <p:extLst>
       <p:ext uri="{BB962C8B-B14F-4D97-AF65-F5344CB8AC3E}">
-        <p14:creationId xmlns:p14="http://schemas.microsoft.com/office/powerpoint/2010/main" val="3469059530"/>
+        <p14:creationId xmlns:p14="http://schemas.microsoft.com/office/powerpoint/2010/main" val="2598366965"/>
       </p:ext>
     </p:extLst>
   </p:cSld>
@@ -11338,7 +11051,7 @@
           <p:cNvPr id="2" name="Título 1">
             <a:extLst>
               <a:ext uri="{FF2B5EF4-FFF2-40B4-BE49-F238E27FC236}">
-                <a16:creationId xmlns:a16="http://schemas.microsoft.com/office/drawing/2014/main" xmlns="" id="{5F09B89C-3183-4D52-981A-62798DDFF2B8}"/>
+                <a16:creationId xmlns="" xmlns:a16="http://schemas.microsoft.com/office/drawing/2014/main" id="{5F09B89C-3183-4D52-981A-62798DDFF2B8}"/>
               </a:ext>
             </a:extLst>
           </p:cNvPr>
@@ -11363,8 +11076,13 @@
           <a:p>
             <a:r>
               <a:rPr lang="pt-BR" dirty="0"/>
-              <a:t>Edge Impulse</a:t>
-            </a:r>
+              <a:t>Motion </a:t>
+            </a:r>
+            <a:r>
+              <a:rPr lang="pt-BR" dirty="0" err="1"/>
+              <a:t>Classification</a:t>
+            </a:r>
+            <a:endParaRPr lang="pt-BR" dirty="0"/>
           </a:p>
         </p:txBody>
       </p:sp>
@@ -11373,7 +11091,7 @@
           <p:cNvPr id="3" name="AutoShape 2" descr="An example of graph signal reconstruction over wireless sensor network. |  Download Scientific Diagram">
             <a:extLst>
               <a:ext uri="{FF2B5EF4-FFF2-40B4-BE49-F238E27FC236}">
-                <a16:creationId xmlns:a16="http://schemas.microsoft.com/office/drawing/2014/main" xmlns="" id="{0166B4DD-D72A-4A54-94A7-2C38133837FD}"/>
+                <a16:creationId xmlns="" xmlns:a16="http://schemas.microsoft.com/office/drawing/2014/main" id="{0166B4DD-D72A-4A54-94A7-2C38133837FD}"/>
               </a:ext>
             </a:extLst>
           </p:cNvPr>
@@ -11424,7 +11142,7 @@
           <p:cNvPr id="7" name="AutoShape 4" descr="An example of graph signal reconstruction over wireless sensor network. |  Download Scientific Diagram">
             <a:extLst>
               <a:ext uri="{FF2B5EF4-FFF2-40B4-BE49-F238E27FC236}">
-                <a16:creationId xmlns:a16="http://schemas.microsoft.com/office/drawing/2014/main" xmlns="" id="{14C2B67D-81A1-457E-A410-FE4350A3CCA4}"/>
+                <a16:creationId xmlns="" xmlns:a16="http://schemas.microsoft.com/office/drawing/2014/main" id="{14C2B67D-81A1-457E-A410-FE4350A3CCA4}"/>
               </a:ext>
             </a:extLst>
           </p:cNvPr>
@@ -11475,7 +11193,7 @@
           <p:cNvPr id="4" name="Espaço Reservado para Conteúdo 3">
             <a:extLst>
               <a:ext uri="{FF2B5EF4-FFF2-40B4-BE49-F238E27FC236}">
-                <a16:creationId xmlns:a16="http://schemas.microsoft.com/office/drawing/2014/main" xmlns="" id="{0349BA64-C9D7-4730-9CA9-5C4AD9FC7969}"/>
+                <a16:creationId xmlns="" xmlns:a16="http://schemas.microsoft.com/office/drawing/2014/main" id="{0349BA64-C9D7-4730-9CA9-5C4AD9FC7969}"/>
               </a:ext>
             </a:extLst>
           </p:cNvPr>
@@ -11511,7 +11229,7 @@
                 <a:ea typeface="Calibri" panose="020F0502020204030204" pitchFamily="34" charset="0"/>
                 <a:cs typeface="Arial" panose="020B0604020202020204" pitchFamily="34" charset="0"/>
               </a:rPr>
-              <a:t>Trabalho </a:t>
+              <a:t>Exemplo de dado recebido com frequência de leitura de 62.5 Hz;</a:t>
             </a:r>
           </a:p>
           <a:p>
@@ -11528,21 +11246,78 @@
                 <a:ea typeface="Calibri" panose="020F0502020204030204" pitchFamily="34" charset="0"/>
                 <a:cs typeface="Arial" panose="020B0604020202020204" pitchFamily="34" charset="0"/>
               </a:rPr>
-              <a:t>Criar um </a:t>
-            </a:r>
-            <a:r>
-              <a:rPr lang="pt-BR" sz="2000" dirty="0" err="1">
-                <a:ea typeface="Calibri" panose="020F0502020204030204" pitchFamily="34" charset="0"/>
-                <a:cs typeface="Arial" panose="020B0604020202020204" pitchFamily="34" charset="0"/>
-              </a:rPr>
-              <a:t>dataset</a:t>
-            </a:r>
+              <a:t>Solução: Pré-processamento dos dados.</a:t>
+            </a:r>
+          </a:p>
+          <a:p>
+            <a:pPr marL="495308" indent="-342900" algn="just">
+              <a:lnSpc>
+                <a:spcPct val="107000"/>
+              </a:lnSpc>
+              <a:spcAft>
+                <a:spcPts val="533"/>
+              </a:spcAft>
+            </a:pPr>
             <a:r>
               <a:rPr lang="pt-BR" sz="2000" dirty="0">
                 <a:ea typeface="Calibri" panose="020F0502020204030204" pitchFamily="34" charset="0"/>
                 <a:cs typeface="Arial" panose="020B0604020202020204" pitchFamily="34" charset="0"/>
               </a:rPr>
-              <a:t> para classificação de movimento para movimentação de uma cadeira de rodas com uso de movimento da cabeça, treinar pelo menos três movimentos no Edge Impulse.</a:t>
+              <a:t>Calculo da FFT das curvas:</a:t>
+            </a:r>
+          </a:p>
+          <a:p>
+            <a:pPr marL="152408" indent="0" algn="just">
+              <a:lnSpc>
+                <a:spcPct val="107000"/>
+              </a:lnSpc>
+              <a:spcAft>
+                <a:spcPts val="533"/>
+              </a:spcAft>
+              <a:buNone/>
+            </a:pPr>
+            <a:r>
+              <a:rPr lang="pt-BR" sz="2000" dirty="0">
+                <a:ea typeface="Calibri" panose="020F0502020204030204" pitchFamily="34" charset="0"/>
+                <a:cs typeface="Arial" panose="020B0604020202020204" pitchFamily="34" charset="0"/>
+              </a:rPr>
+              <a:t>Pegar a frequência e a amplitude da fundamental mais duas harmônicas por eixo: 9 valores de amplitude e 9 frequências: 18 valores</a:t>
+            </a:r>
+          </a:p>
+          <a:p>
+            <a:pPr marL="152408" indent="0" algn="just">
+              <a:lnSpc>
+                <a:spcPct val="107000"/>
+              </a:lnSpc>
+              <a:spcAft>
+                <a:spcPts val="533"/>
+              </a:spcAft>
+              <a:buNone/>
+            </a:pPr>
+            <a:r>
+              <a:rPr lang="pt-BR" sz="2000" dirty="0">
+                <a:ea typeface="Calibri" panose="020F0502020204030204" pitchFamily="34" charset="0"/>
+                <a:cs typeface="Arial" panose="020B0604020202020204" pitchFamily="34" charset="0"/>
+              </a:rPr>
+              <a:t> </a:t>
+            </a:r>
+          </a:p>
+          <a:p>
+            <a:pPr marL="152408" indent="0" algn="just">
+              <a:lnSpc>
+                <a:spcPct val="107000"/>
+              </a:lnSpc>
+              <a:spcAft>
+                <a:spcPts val="533"/>
+              </a:spcAft>
+              <a:buNone/>
+            </a:pPr>
+            <a:r>
+              <a:rPr lang="pt-BR" sz="2000" dirty="0">
+                <a:ea typeface="Calibri" panose="020F0502020204030204" pitchFamily="34" charset="0"/>
+                <a:cs typeface="Arial" panose="020B0604020202020204" pitchFamily="34" charset="0"/>
+              </a:rPr>
+              <a:t> </a:t>
             </a:r>
           </a:p>
           <a:p>
@@ -11559,52 +11334,6 @@
               <a:cs typeface="Arial" panose="020B0604020202020204" pitchFamily="34" charset="0"/>
             </a:endParaRPr>
           </a:p>
-          <a:p>
-            <a:pPr marL="495308" indent="-342900" algn="just">
-              <a:lnSpc>
-                <a:spcPct val="107000"/>
-              </a:lnSpc>
-              <a:spcAft>
-                <a:spcPts val="533"/>
-              </a:spcAft>
-            </a:pPr>
-            <a:r>
-              <a:rPr lang="pt-BR" sz="2000" dirty="0">
-                <a:ea typeface="Calibri" panose="020F0502020204030204" pitchFamily="34" charset="0"/>
-                <a:cs typeface="Arial" panose="020B0604020202020204" pitchFamily="34" charset="0"/>
-              </a:rPr>
-              <a:t>Exemplo:</a:t>
-            </a:r>
-          </a:p>
-          <a:p>
-            <a:pPr marL="495308" indent="-342900" algn="just">
-              <a:lnSpc>
-                <a:spcPct val="107000"/>
-              </a:lnSpc>
-              <a:spcAft>
-                <a:spcPts val="533"/>
-              </a:spcAft>
-            </a:pPr>
-            <a:endParaRPr lang="pt-BR" sz="2000" dirty="0">
-              <a:ea typeface="Calibri" panose="020F0502020204030204" pitchFamily="34" charset="0"/>
-              <a:cs typeface="Arial" panose="020B0604020202020204" pitchFamily="34" charset="0"/>
-            </a:endParaRPr>
-          </a:p>
-          <a:p>
-            <a:pPr marL="152408" indent="0" algn="just">
-              <a:lnSpc>
-                <a:spcPct val="107000"/>
-              </a:lnSpc>
-              <a:spcAft>
-                <a:spcPts val="533"/>
-              </a:spcAft>
-              <a:buNone/>
-            </a:pPr>
-            <a:endParaRPr lang="pt-BR" sz="2000" dirty="0">
-              <a:ea typeface="Calibri" panose="020F0502020204030204" pitchFamily="34" charset="0"/>
-              <a:cs typeface="Arial" panose="020B0604020202020204" pitchFamily="34" charset="0"/>
-            </a:endParaRPr>
-          </a:p>
         </p:txBody>
       </p:sp>
       <p:pic>
@@ -11612,7 +11341,7 @@
           <p:cNvPr id="9" name="Imagem 8">
             <a:extLst>
               <a:ext uri="{FF2B5EF4-FFF2-40B4-BE49-F238E27FC236}">
-                <a16:creationId xmlns:a16="http://schemas.microsoft.com/office/drawing/2014/main" xmlns="" id="{805DE0C9-CC2B-9A66-2836-0B5BA9411A2D}"/>
+                <a16:creationId xmlns="" xmlns:a16="http://schemas.microsoft.com/office/drawing/2014/main" id="{E34DDF80-3AF4-098B-D371-5E05913D72CB}"/>
               </a:ext>
             </a:extLst>
           </p:cNvPr>
@@ -11629,8 +11358,8 @@
         </p:blipFill>
         <p:spPr>
           <a:xfrm>
-            <a:off x="1713929" y="3567797"/>
-            <a:ext cx="7886460" cy="2426603"/>
+            <a:off x="3584442" y="3530600"/>
+            <a:ext cx="3676474" cy="2911767"/>
           </a:xfrm>
           <a:prstGeom prst="rect">
             <a:avLst/>
@@ -11640,7 +11369,692 @@
     </p:spTree>
     <p:extLst>
       <p:ext uri="{BB962C8B-B14F-4D97-AF65-F5344CB8AC3E}">
-        <p14:creationId xmlns:p14="http://schemas.microsoft.com/office/powerpoint/2010/main" val="1017366542"/>
+        <p14:creationId xmlns:p14="http://schemas.microsoft.com/office/powerpoint/2010/main" val="1164262540"/>
+      </p:ext>
+    </p:extLst>
+  </p:cSld>
+  <p:clrMapOvr>
+    <a:masterClrMapping/>
+  </p:clrMapOvr>
+</p:sld>
+</file>
+
+<file path=ppt/slides/slide18.xml><?xml version="1.0" encoding="utf-8"?>
+<p:sld xmlns:a="http://schemas.openxmlformats.org/drawingml/2006/main" xmlns:r="http://schemas.openxmlformats.org/officeDocument/2006/relationships" xmlns:p="http://schemas.openxmlformats.org/presentationml/2006/main">
+  <p:cSld>
+    <p:bg>
+      <p:bgPr>
+        <a:blipFill dpi="0" rotWithShape="1">
+          <a:blip r:embed="rId3">
+            <a:lum/>
+          </a:blip>
+          <a:srcRect/>
+          <a:stretch>
+            <a:fillRect/>
+          </a:stretch>
+        </a:blipFill>
+        <a:effectLst/>
+      </p:bgPr>
+    </p:bg>
+    <p:spTree>
+      <p:nvGrpSpPr>
+        <p:cNvPr id="1" name=""/>
+        <p:cNvGrpSpPr/>
+        <p:nvPr/>
+      </p:nvGrpSpPr>
+      <p:grpSpPr>
+        <a:xfrm>
+          <a:off x="0" y="0"/>
+          <a:ext cx="0" cy="0"/>
+          <a:chOff x="0" y="0"/>
+          <a:chExt cx="0" cy="0"/>
+        </a:xfrm>
+      </p:grpSpPr>
+      <p:sp>
+        <p:nvSpPr>
+          <p:cNvPr id="2" name="Título 1">
+            <a:extLst>
+              <a:ext uri="{FF2B5EF4-FFF2-40B4-BE49-F238E27FC236}">
+                <a16:creationId xmlns="" xmlns:a16="http://schemas.microsoft.com/office/drawing/2014/main" id="{5F09B89C-3183-4D52-981A-62798DDFF2B8}"/>
+              </a:ext>
+            </a:extLst>
+          </p:cNvPr>
+          <p:cNvSpPr>
+            <a:spLocks noGrp="1"/>
+          </p:cNvSpPr>
+          <p:nvPr>
+            <p:ph type="title"/>
+          </p:nvPr>
+        </p:nvSpPr>
+        <p:spPr>
+          <a:xfrm>
+            <a:off x="304800" y="183092"/>
+            <a:ext cx="6559285" cy="762000"/>
+          </a:xfrm>
+        </p:spPr>
+        <p:txBody>
+          <a:bodyPr>
+            <a:normAutofit/>
+          </a:bodyPr>
+          <a:lstStyle/>
+          <a:p>
+            <a:r>
+              <a:rPr lang="pt-BR" dirty="0"/>
+              <a:t>Motion </a:t>
+            </a:r>
+            <a:r>
+              <a:rPr lang="pt-BR" dirty="0" err="1"/>
+              <a:t>Classification</a:t>
+            </a:r>
+            <a:endParaRPr lang="pt-BR" dirty="0"/>
+          </a:p>
+        </p:txBody>
+      </p:sp>
+      <p:sp>
+        <p:nvSpPr>
+          <p:cNvPr id="3" name="AutoShape 2" descr="An example of graph signal reconstruction over wireless sensor network. |  Download Scientific Diagram">
+            <a:extLst>
+              <a:ext uri="{FF2B5EF4-FFF2-40B4-BE49-F238E27FC236}">
+                <a16:creationId xmlns="" xmlns:a16="http://schemas.microsoft.com/office/drawing/2014/main" id="{0166B4DD-D72A-4A54-94A7-2C38133837FD}"/>
+              </a:ext>
+            </a:extLst>
+          </p:cNvPr>
+          <p:cNvSpPr>
+            <a:spLocks noChangeAspect="1" noChangeArrowheads="1"/>
+          </p:cNvSpPr>
+          <p:nvPr/>
+        </p:nvSpPr>
+        <p:spPr bwMode="auto">
+          <a:xfrm>
+            <a:off x="5994400" y="3327400"/>
+            <a:ext cx="203200" cy="203200"/>
+          </a:xfrm>
+          <a:prstGeom prst="rect">
+            <a:avLst/>
+          </a:prstGeom>
+          <a:noFill/>
+          <a:extLst>
+            <a:ext uri="{909E8E84-426E-40DD-AFC4-6F175D3DCCD1}">
+              <a14:hiddenFill xmlns:a14="http://schemas.microsoft.com/office/drawing/2010/main">
+                <a:solidFill>
+                  <a:srgbClr val="FFFFFF"/>
+                </a:solidFill>
+              </a14:hiddenFill>
+            </a:ext>
+          </a:extLst>
+        </p:spPr>
+        <p:txBody>
+          <a:bodyPr vert="horz" wrap="square" lIns="60960" tIns="30480" rIns="60960" bIns="30480" numCol="1" anchor="t" anchorCtr="0" compatLnSpc="1">
+            <a:prstTxWarp prst="textNoShape">
+              <a:avLst/>
+            </a:prstTxWarp>
+          </a:bodyPr>
+          <a:lstStyle/>
+          <a:p>
+            <a:pPr defTabSz="609630"/>
+            <a:endParaRPr lang="pt-BR" sz="1200">
+              <a:solidFill>
+                <a:prstClr val="black"/>
+              </a:solidFill>
+              <a:latin typeface="Calibri"/>
+            </a:endParaRPr>
+          </a:p>
+        </p:txBody>
+      </p:sp>
+      <p:sp>
+        <p:nvSpPr>
+          <p:cNvPr id="7" name="AutoShape 4" descr="An example of graph signal reconstruction over wireless sensor network. |  Download Scientific Diagram">
+            <a:extLst>
+              <a:ext uri="{FF2B5EF4-FFF2-40B4-BE49-F238E27FC236}">
+                <a16:creationId xmlns="" xmlns:a16="http://schemas.microsoft.com/office/drawing/2014/main" id="{14C2B67D-81A1-457E-A410-FE4350A3CCA4}"/>
+              </a:ext>
+            </a:extLst>
+          </p:cNvPr>
+          <p:cNvSpPr>
+            <a:spLocks noChangeAspect="1" noChangeArrowheads="1"/>
+          </p:cNvSpPr>
+          <p:nvPr/>
+        </p:nvSpPr>
+        <p:spPr bwMode="auto">
+          <a:xfrm>
+            <a:off x="6096000" y="3429000"/>
+            <a:ext cx="203200" cy="203200"/>
+          </a:xfrm>
+          <a:prstGeom prst="rect">
+            <a:avLst/>
+          </a:prstGeom>
+          <a:noFill/>
+          <a:extLst>
+            <a:ext uri="{909E8E84-426E-40DD-AFC4-6F175D3DCCD1}">
+              <a14:hiddenFill xmlns:a14="http://schemas.microsoft.com/office/drawing/2010/main">
+                <a:solidFill>
+                  <a:srgbClr val="FFFFFF"/>
+                </a:solidFill>
+              </a14:hiddenFill>
+            </a:ext>
+          </a:extLst>
+        </p:spPr>
+        <p:txBody>
+          <a:bodyPr vert="horz" wrap="square" lIns="60960" tIns="30480" rIns="60960" bIns="30480" numCol="1" anchor="t" anchorCtr="0" compatLnSpc="1">
+            <a:prstTxWarp prst="textNoShape">
+              <a:avLst/>
+            </a:prstTxWarp>
+          </a:bodyPr>
+          <a:lstStyle/>
+          <a:p>
+            <a:pPr defTabSz="609630"/>
+            <a:endParaRPr lang="pt-BR" sz="1200">
+              <a:solidFill>
+                <a:prstClr val="black"/>
+              </a:solidFill>
+              <a:latin typeface="Calibri"/>
+            </a:endParaRPr>
+          </a:p>
+        </p:txBody>
+      </p:sp>
+      <p:sp>
+        <p:nvSpPr>
+          <p:cNvPr id="4" name="Espaço Reservado para Conteúdo 3">
+            <a:extLst>
+              <a:ext uri="{FF2B5EF4-FFF2-40B4-BE49-F238E27FC236}">
+                <a16:creationId xmlns="" xmlns:a16="http://schemas.microsoft.com/office/drawing/2014/main" id="{0349BA64-C9D7-4730-9CA9-5C4AD9FC7969}"/>
+              </a:ext>
+            </a:extLst>
+          </p:cNvPr>
+          <p:cNvSpPr>
+            <a:spLocks noGrp="1"/>
+          </p:cNvSpPr>
+          <p:nvPr>
+            <p:ph idx="1"/>
+          </p:nvPr>
+        </p:nvSpPr>
+        <p:spPr>
+          <a:xfrm>
+            <a:off x="304800" y="1066800"/>
+            <a:ext cx="9295589" cy="4330419"/>
+          </a:xfrm>
+        </p:spPr>
+        <p:txBody>
+          <a:bodyPr>
+            <a:noAutofit/>
+          </a:bodyPr>
+          <a:lstStyle/>
+          <a:p>
+            <a:pPr marL="495308" indent="-342900" algn="just">
+              <a:lnSpc>
+                <a:spcPct val="107000"/>
+              </a:lnSpc>
+              <a:spcAft>
+                <a:spcPts val="533"/>
+              </a:spcAft>
+            </a:pPr>
+            <a:r>
+              <a:rPr lang="pt-BR" sz="2000" dirty="0">
+                <a:ea typeface="Calibri" panose="020F0502020204030204" pitchFamily="34" charset="0"/>
+                <a:cs typeface="Arial" panose="020B0604020202020204" pitchFamily="34" charset="0"/>
+              </a:rPr>
+              <a:t>Exemplo de dado recebido com frequência de leitura de 62.5 Hz;</a:t>
+            </a:r>
+          </a:p>
+          <a:p>
+            <a:pPr marL="495308" indent="-342900" algn="just">
+              <a:lnSpc>
+                <a:spcPct val="107000"/>
+              </a:lnSpc>
+              <a:spcAft>
+                <a:spcPts val="533"/>
+              </a:spcAft>
+            </a:pPr>
+            <a:r>
+              <a:rPr lang="pt-BR" sz="2000" dirty="0">
+                <a:ea typeface="Calibri" panose="020F0502020204030204" pitchFamily="34" charset="0"/>
+                <a:cs typeface="Arial" panose="020B0604020202020204" pitchFamily="34" charset="0"/>
+              </a:rPr>
+              <a:t>Solução: Pré-processamento dos dados.</a:t>
+            </a:r>
+          </a:p>
+          <a:p>
+            <a:pPr marL="495308" indent="-342900" algn="just">
+              <a:lnSpc>
+                <a:spcPct val="107000"/>
+              </a:lnSpc>
+              <a:spcAft>
+                <a:spcPts val="533"/>
+              </a:spcAft>
+            </a:pPr>
+            <a:r>
+              <a:rPr lang="pt-BR" sz="2000" dirty="0">
+                <a:ea typeface="Calibri" panose="020F0502020204030204" pitchFamily="34" charset="0"/>
+                <a:cs typeface="Arial" panose="020B0604020202020204" pitchFamily="34" charset="0"/>
+              </a:rPr>
+              <a:t>Calcular a densidade espectral de potência (PSD) : 4 regiões* 3 eixos= 12 valores </a:t>
+            </a:r>
+          </a:p>
+          <a:p>
+            <a:pPr marL="152408" indent="0" algn="just">
+              <a:lnSpc>
+                <a:spcPct val="107000"/>
+              </a:lnSpc>
+              <a:spcAft>
+                <a:spcPts val="533"/>
+              </a:spcAft>
+              <a:buNone/>
+            </a:pPr>
+            <a:r>
+              <a:rPr lang="pt-BR" sz="2000" dirty="0">
+                <a:ea typeface="Calibri" panose="020F0502020204030204" pitchFamily="34" charset="0"/>
+                <a:cs typeface="Arial" panose="020B0604020202020204" pitchFamily="34" charset="0"/>
+              </a:rPr>
+              <a:t> </a:t>
+            </a:r>
+          </a:p>
+          <a:p>
+            <a:pPr marL="495308" indent="-342900" algn="just">
+              <a:lnSpc>
+                <a:spcPct val="107000"/>
+              </a:lnSpc>
+              <a:spcAft>
+                <a:spcPts val="533"/>
+              </a:spcAft>
+            </a:pPr>
+            <a:endParaRPr lang="pt-BR" sz="2000" dirty="0">
+              <a:ea typeface="Calibri" panose="020F0502020204030204" pitchFamily="34" charset="0"/>
+              <a:cs typeface="Arial" panose="020B0604020202020204" pitchFamily="34" charset="0"/>
+            </a:endParaRPr>
+          </a:p>
+        </p:txBody>
+      </p:sp>
+      <p:pic>
+        <p:nvPicPr>
+          <p:cNvPr id="6" name="Imagem 5">
+            <a:extLst>
+              <a:ext uri="{FF2B5EF4-FFF2-40B4-BE49-F238E27FC236}">
+                <a16:creationId xmlns="" xmlns:a16="http://schemas.microsoft.com/office/drawing/2014/main" id="{AA943D34-6194-3573-A1F3-15277F095134}"/>
+              </a:ext>
+            </a:extLst>
+          </p:cNvPr>
+          <p:cNvPicPr>
+            <a:picLocks noChangeAspect="1"/>
+          </p:cNvPicPr>
+          <p:nvPr/>
+        </p:nvPicPr>
+        <p:blipFill>
+          <a:blip r:embed="rId4"/>
+          <a:stretch>
+            <a:fillRect/>
+          </a:stretch>
+        </p:blipFill>
+        <p:spPr>
+          <a:xfrm>
+            <a:off x="2167229" y="2440094"/>
+            <a:ext cx="3827171" cy="3731492"/>
+          </a:xfrm>
+          <a:prstGeom prst="rect">
+            <a:avLst/>
+          </a:prstGeom>
+        </p:spPr>
+      </p:pic>
+      <p:pic>
+        <p:nvPicPr>
+          <p:cNvPr id="10" name="Imagem 9">
+            <a:extLst>
+              <a:ext uri="{FF2B5EF4-FFF2-40B4-BE49-F238E27FC236}">
+                <a16:creationId xmlns="" xmlns:a16="http://schemas.microsoft.com/office/drawing/2014/main" id="{25B0EB0A-63CF-B662-F66B-F677CAAE5270}"/>
+              </a:ext>
+            </a:extLst>
+          </p:cNvPr>
+          <p:cNvPicPr>
+            <a:picLocks noChangeAspect="1"/>
+          </p:cNvPicPr>
+          <p:nvPr/>
+        </p:nvPicPr>
+        <p:blipFill>
+          <a:blip r:embed="rId5"/>
+          <a:stretch>
+            <a:fillRect/>
+          </a:stretch>
+        </p:blipFill>
+        <p:spPr>
+          <a:xfrm>
+            <a:off x="6400800" y="2904874"/>
+            <a:ext cx="5113867" cy="2614053"/>
+          </a:xfrm>
+          <a:prstGeom prst="rect">
+            <a:avLst/>
+          </a:prstGeom>
+        </p:spPr>
+      </p:pic>
+    </p:spTree>
+    <p:extLst>
+      <p:ext uri="{BB962C8B-B14F-4D97-AF65-F5344CB8AC3E}">
+        <p14:creationId xmlns:p14="http://schemas.microsoft.com/office/powerpoint/2010/main" val="3141207834"/>
+      </p:ext>
+    </p:extLst>
+  </p:cSld>
+  <p:clrMapOvr>
+    <a:masterClrMapping/>
+  </p:clrMapOvr>
+</p:sld>
+</file>
+
+<file path=ppt/slides/slide19.xml><?xml version="1.0" encoding="utf-8"?>
+<p:sld xmlns:a="http://schemas.openxmlformats.org/drawingml/2006/main" xmlns:r="http://schemas.openxmlformats.org/officeDocument/2006/relationships" xmlns:p="http://schemas.openxmlformats.org/presentationml/2006/main">
+  <p:cSld>
+    <p:bg>
+      <p:bgPr>
+        <a:blipFill dpi="0" rotWithShape="1">
+          <a:blip r:embed="rId3">
+            <a:lum/>
+          </a:blip>
+          <a:srcRect/>
+          <a:stretch>
+            <a:fillRect/>
+          </a:stretch>
+        </a:blipFill>
+        <a:effectLst/>
+      </p:bgPr>
+    </p:bg>
+    <p:spTree>
+      <p:nvGrpSpPr>
+        <p:cNvPr id="1" name=""/>
+        <p:cNvGrpSpPr/>
+        <p:nvPr/>
+      </p:nvGrpSpPr>
+      <p:grpSpPr>
+        <a:xfrm>
+          <a:off x="0" y="0"/>
+          <a:ext cx="0" cy="0"/>
+          <a:chOff x="0" y="0"/>
+          <a:chExt cx="0" cy="0"/>
+        </a:xfrm>
+      </p:grpSpPr>
+      <p:sp>
+        <p:nvSpPr>
+          <p:cNvPr id="2" name="Título 1">
+            <a:extLst>
+              <a:ext uri="{FF2B5EF4-FFF2-40B4-BE49-F238E27FC236}">
+                <a16:creationId xmlns="" xmlns:a16="http://schemas.microsoft.com/office/drawing/2014/main" id="{5F09B89C-3183-4D52-981A-62798DDFF2B8}"/>
+              </a:ext>
+            </a:extLst>
+          </p:cNvPr>
+          <p:cNvSpPr>
+            <a:spLocks noGrp="1"/>
+          </p:cNvSpPr>
+          <p:nvPr>
+            <p:ph type="title"/>
+          </p:nvPr>
+        </p:nvSpPr>
+        <p:spPr>
+          <a:xfrm>
+            <a:off x="304800" y="183092"/>
+            <a:ext cx="6559285" cy="762000"/>
+          </a:xfrm>
+        </p:spPr>
+        <p:txBody>
+          <a:bodyPr>
+            <a:normAutofit/>
+          </a:bodyPr>
+          <a:lstStyle/>
+          <a:p>
+            <a:r>
+              <a:rPr lang="pt-BR" dirty="0"/>
+              <a:t>Motion </a:t>
+            </a:r>
+            <a:r>
+              <a:rPr lang="pt-BR" dirty="0" err="1"/>
+              <a:t>Classification</a:t>
+            </a:r>
+            <a:endParaRPr lang="pt-BR" dirty="0"/>
+          </a:p>
+        </p:txBody>
+      </p:sp>
+      <p:sp>
+        <p:nvSpPr>
+          <p:cNvPr id="3" name="AutoShape 2" descr="An example of graph signal reconstruction over wireless sensor network. |  Download Scientific Diagram">
+            <a:extLst>
+              <a:ext uri="{FF2B5EF4-FFF2-40B4-BE49-F238E27FC236}">
+                <a16:creationId xmlns="" xmlns:a16="http://schemas.microsoft.com/office/drawing/2014/main" id="{0166B4DD-D72A-4A54-94A7-2C38133837FD}"/>
+              </a:ext>
+            </a:extLst>
+          </p:cNvPr>
+          <p:cNvSpPr>
+            <a:spLocks noChangeAspect="1" noChangeArrowheads="1"/>
+          </p:cNvSpPr>
+          <p:nvPr/>
+        </p:nvSpPr>
+        <p:spPr bwMode="auto">
+          <a:xfrm>
+            <a:off x="5994400" y="3327400"/>
+            <a:ext cx="203200" cy="203200"/>
+          </a:xfrm>
+          <a:prstGeom prst="rect">
+            <a:avLst/>
+          </a:prstGeom>
+          <a:noFill/>
+          <a:extLst>
+            <a:ext uri="{909E8E84-426E-40DD-AFC4-6F175D3DCCD1}">
+              <a14:hiddenFill xmlns:a14="http://schemas.microsoft.com/office/drawing/2010/main">
+                <a:solidFill>
+                  <a:srgbClr val="FFFFFF"/>
+                </a:solidFill>
+              </a14:hiddenFill>
+            </a:ext>
+          </a:extLst>
+        </p:spPr>
+        <p:txBody>
+          <a:bodyPr vert="horz" wrap="square" lIns="60960" tIns="30480" rIns="60960" bIns="30480" numCol="1" anchor="t" anchorCtr="0" compatLnSpc="1">
+            <a:prstTxWarp prst="textNoShape">
+              <a:avLst/>
+            </a:prstTxWarp>
+          </a:bodyPr>
+          <a:lstStyle/>
+          <a:p>
+            <a:pPr defTabSz="609630"/>
+            <a:endParaRPr lang="pt-BR" sz="1200">
+              <a:solidFill>
+                <a:prstClr val="black"/>
+              </a:solidFill>
+              <a:latin typeface="Calibri"/>
+            </a:endParaRPr>
+          </a:p>
+        </p:txBody>
+      </p:sp>
+      <p:sp>
+        <p:nvSpPr>
+          <p:cNvPr id="7" name="AutoShape 4" descr="An example of graph signal reconstruction over wireless sensor network. |  Download Scientific Diagram">
+            <a:extLst>
+              <a:ext uri="{FF2B5EF4-FFF2-40B4-BE49-F238E27FC236}">
+                <a16:creationId xmlns="" xmlns:a16="http://schemas.microsoft.com/office/drawing/2014/main" id="{14C2B67D-81A1-457E-A410-FE4350A3CCA4}"/>
+              </a:ext>
+            </a:extLst>
+          </p:cNvPr>
+          <p:cNvSpPr>
+            <a:spLocks noChangeAspect="1" noChangeArrowheads="1"/>
+          </p:cNvSpPr>
+          <p:nvPr/>
+        </p:nvSpPr>
+        <p:spPr bwMode="auto">
+          <a:xfrm>
+            <a:off x="6096000" y="3429000"/>
+            <a:ext cx="203200" cy="203200"/>
+          </a:xfrm>
+          <a:prstGeom prst="rect">
+            <a:avLst/>
+          </a:prstGeom>
+          <a:noFill/>
+          <a:extLst>
+            <a:ext uri="{909E8E84-426E-40DD-AFC4-6F175D3DCCD1}">
+              <a14:hiddenFill xmlns:a14="http://schemas.microsoft.com/office/drawing/2010/main">
+                <a:solidFill>
+                  <a:srgbClr val="FFFFFF"/>
+                </a:solidFill>
+              </a14:hiddenFill>
+            </a:ext>
+          </a:extLst>
+        </p:spPr>
+        <p:txBody>
+          <a:bodyPr vert="horz" wrap="square" lIns="60960" tIns="30480" rIns="60960" bIns="30480" numCol="1" anchor="t" anchorCtr="0" compatLnSpc="1">
+            <a:prstTxWarp prst="textNoShape">
+              <a:avLst/>
+            </a:prstTxWarp>
+          </a:bodyPr>
+          <a:lstStyle/>
+          <a:p>
+            <a:pPr defTabSz="609630"/>
+            <a:endParaRPr lang="pt-BR" sz="1200">
+              <a:solidFill>
+                <a:prstClr val="black"/>
+              </a:solidFill>
+              <a:latin typeface="Calibri"/>
+            </a:endParaRPr>
+          </a:p>
+        </p:txBody>
+      </p:sp>
+      <p:sp>
+        <p:nvSpPr>
+          <p:cNvPr id="4" name="Espaço Reservado para Conteúdo 3">
+            <a:extLst>
+              <a:ext uri="{FF2B5EF4-FFF2-40B4-BE49-F238E27FC236}">
+                <a16:creationId xmlns="" xmlns:a16="http://schemas.microsoft.com/office/drawing/2014/main" id="{0349BA64-C9D7-4730-9CA9-5C4AD9FC7969}"/>
+              </a:ext>
+            </a:extLst>
+          </p:cNvPr>
+          <p:cNvSpPr>
+            <a:spLocks noGrp="1"/>
+          </p:cNvSpPr>
+          <p:nvPr>
+            <p:ph idx="1"/>
+          </p:nvPr>
+        </p:nvSpPr>
+        <p:spPr>
+          <a:xfrm>
+            <a:off x="304800" y="1066800"/>
+            <a:ext cx="9295589" cy="4330419"/>
+          </a:xfrm>
+        </p:spPr>
+        <p:txBody>
+          <a:bodyPr>
+            <a:noAutofit/>
+          </a:bodyPr>
+          <a:lstStyle/>
+          <a:p>
+            <a:pPr marL="152408" indent="0" algn="just">
+              <a:lnSpc>
+                <a:spcPct val="107000"/>
+              </a:lnSpc>
+              <a:spcAft>
+                <a:spcPts val="533"/>
+              </a:spcAft>
+              <a:buNone/>
+            </a:pPr>
+            <a:r>
+              <a:rPr lang="pt-BR" sz="2000" dirty="0">
+                <a:ea typeface="Calibri" panose="020F0502020204030204" pitchFamily="34" charset="0"/>
+                <a:cs typeface="Arial" panose="020B0604020202020204" pitchFamily="34" charset="0"/>
+              </a:rPr>
+              <a:t>Para este exemplo ficamos com uma rede neural com: </a:t>
+            </a:r>
+          </a:p>
+          <a:p>
+            <a:pPr marL="152408" indent="0" algn="just">
+              <a:lnSpc>
+                <a:spcPct val="107000"/>
+              </a:lnSpc>
+              <a:spcAft>
+                <a:spcPts val="533"/>
+              </a:spcAft>
+              <a:buNone/>
+            </a:pPr>
+            <a:endParaRPr lang="pt-BR" sz="2000" dirty="0">
+              <a:ea typeface="Calibri" panose="020F0502020204030204" pitchFamily="34" charset="0"/>
+              <a:cs typeface="Arial" panose="020B0604020202020204" pitchFamily="34" charset="0"/>
+            </a:endParaRPr>
+          </a:p>
+          <a:p>
+            <a:pPr marL="495308" indent="-342900" algn="just">
+              <a:lnSpc>
+                <a:spcPct val="107000"/>
+              </a:lnSpc>
+              <a:spcAft>
+                <a:spcPts val="533"/>
+              </a:spcAft>
+            </a:pPr>
+            <a:r>
+              <a:rPr lang="pt-BR" sz="2000" dirty="0">
+                <a:ea typeface="Calibri" panose="020F0502020204030204" pitchFamily="34" charset="0"/>
+                <a:cs typeface="Arial" panose="020B0604020202020204" pitchFamily="34" charset="0"/>
+              </a:rPr>
+              <a:t>33 entradas</a:t>
+            </a:r>
+          </a:p>
+          <a:p>
+            <a:pPr marL="495308" indent="-342900" algn="just">
+              <a:lnSpc>
+                <a:spcPct val="107000"/>
+              </a:lnSpc>
+              <a:spcAft>
+                <a:spcPts val="533"/>
+              </a:spcAft>
+            </a:pPr>
+            <a:r>
+              <a:rPr lang="pt-BR" sz="2000" dirty="0">
+                <a:ea typeface="Calibri" panose="020F0502020204030204" pitchFamily="34" charset="0"/>
+                <a:cs typeface="Arial" panose="020B0604020202020204" pitchFamily="34" charset="0"/>
+              </a:rPr>
+              <a:t>Camadas densas</a:t>
+            </a:r>
+          </a:p>
+          <a:p>
+            <a:pPr marL="495308" indent="-342900" algn="just">
+              <a:lnSpc>
+                <a:spcPct val="107000"/>
+              </a:lnSpc>
+              <a:spcAft>
+                <a:spcPts val="533"/>
+              </a:spcAft>
+            </a:pPr>
+            <a:r>
+              <a:rPr lang="pt-BR" sz="2000" dirty="0">
+                <a:ea typeface="Calibri" panose="020F0502020204030204" pitchFamily="34" charset="0"/>
+                <a:cs typeface="Arial" panose="020B0604020202020204" pitchFamily="34" charset="0"/>
+              </a:rPr>
+              <a:t>4 saídas:  Parado, sendo erguido, no mar, no caminhão.</a:t>
+            </a:r>
+          </a:p>
+          <a:p>
+            <a:pPr marL="495308" indent="-342900" algn="just">
+              <a:lnSpc>
+                <a:spcPct val="107000"/>
+              </a:lnSpc>
+              <a:spcAft>
+                <a:spcPts val="533"/>
+              </a:spcAft>
+            </a:pPr>
+            <a:endParaRPr lang="pt-BR" sz="2000" dirty="0">
+              <a:ea typeface="Calibri" panose="020F0502020204030204" pitchFamily="34" charset="0"/>
+              <a:cs typeface="Arial" panose="020B0604020202020204" pitchFamily="34" charset="0"/>
+            </a:endParaRPr>
+          </a:p>
+          <a:p>
+            <a:pPr marL="495308" indent="-342900" algn="just">
+              <a:lnSpc>
+                <a:spcPct val="107000"/>
+              </a:lnSpc>
+              <a:spcAft>
+                <a:spcPts val="533"/>
+              </a:spcAft>
+            </a:pPr>
+            <a:endParaRPr lang="pt-BR" sz="2000" dirty="0">
+              <a:ea typeface="Calibri" panose="020F0502020204030204" pitchFamily="34" charset="0"/>
+              <a:cs typeface="Arial" panose="020B0604020202020204" pitchFamily="34" charset="0"/>
+            </a:endParaRPr>
+          </a:p>
+        </p:txBody>
+      </p:sp>
+    </p:spTree>
+    <p:extLst>
+      <p:ext uri="{BB962C8B-B14F-4D97-AF65-F5344CB8AC3E}">
+        <p14:creationId xmlns:p14="http://schemas.microsoft.com/office/powerpoint/2010/main" val="3469059530"/>
       </p:ext>
     </p:extLst>
   </p:cSld>
@@ -11686,7 +12100,7 @@
           <p:cNvPr id="2" name="Título 1">
             <a:extLst>
               <a:ext uri="{FF2B5EF4-FFF2-40B4-BE49-F238E27FC236}">
-                <a16:creationId xmlns:a16="http://schemas.microsoft.com/office/drawing/2014/main" xmlns="" id="{5F09B89C-3183-4D52-981A-62798DDFF2B8}"/>
+                <a16:creationId xmlns="" xmlns:a16="http://schemas.microsoft.com/office/drawing/2014/main" id="{5F09B89C-3183-4D52-981A-62798DDFF2B8}"/>
               </a:ext>
             </a:extLst>
           </p:cNvPr>
@@ -11726,7 +12140,7 @@
           <p:cNvPr id="3" name="AutoShape 2" descr="An example of graph signal reconstruction over wireless sensor network. |  Download Scientific Diagram">
             <a:extLst>
               <a:ext uri="{FF2B5EF4-FFF2-40B4-BE49-F238E27FC236}">
-                <a16:creationId xmlns:a16="http://schemas.microsoft.com/office/drawing/2014/main" xmlns="" id="{0166B4DD-D72A-4A54-94A7-2C38133837FD}"/>
+                <a16:creationId xmlns="" xmlns:a16="http://schemas.microsoft.com/office/drawing/2014/main" id="{0166B4DD-D72A-4A54-94A7-2C38133837FD}"/>
               </a:ext>
             </a:extLst>
           </p:cNvPr>
@@ -11777,7 +12191,7 @@
           <p:cNvPr id="7" name="AutoShape 4" descr="An example of graph signal reconstruction over wireless sensor network. |  Download Scientific Diagram">
             <a:extLst>
               <a:ext uri="{FF2B5EF4-FFF2-40B4-BE49-F238E27FC236}">
-                <a16:creationId xmlns:a16="http://schemas.microsoft.com/office/drawing/2014/main" xmlns="" id="{14C2B67D-81A1-457E-A410-FE4350A3CCA4}"/>
+                <a16:creationId xmlns="" xmlns:a16="http://schemas.microsoft.com/office/drawing/2014/main" id="{14C2B67D-81A1-457E-A410-FE4350A3CCA4}"/>
               </a:ext>
             </a:extLst>
           </p:cNvPr>
@@ -11828,7 +12242,7 @@
           <p:cNvPr id="5" name="Picture 2" descr="Mockup Celular - iPhone Mockup | Maker Mockup">
             <a:extLst>
               <a:ext uri="{FF2B5EF4-FFF2-40B4-BE49-F238E27FC236}">
-                <a16:creationId xmlns:a16="http://schemas.microsoft.com/office/drawing/2014/main" xmlns="" id="{FC87A0DC-550D-BB34-6B8D-21472B938809}"/>
+                <a16:creationId xmlns="" xmlns:a16="http://schemas.microsoft.com/office/drawing/2014/main" id="{FC87A0DC-550D-BB34-6B8D-21472B938809}"/>
               </a:ext>
             </a:extLst>
           </p:cNvPr>
@@ -11877,7 +12291,7 @@
           <p:cNvPr id="1028" name="Picture 4" descr="Notebook Samsung Book 4GB, 15.6'', Intel Celeron, 500 GB, Windows 10 Home,  Cinza - Samsung Book - Magazine Luiza">
             <a:extLst>
               <a:ext uri="{FF2B5EF4-FFF2-40B4-BE49-F238E27FC236}">
-                <a16:creationId xmlns:a16="http://schemas.microsoft.com/office/drawing/2014/main" xmlns="" id="{846ECC3C-0F71-81E5-1C69-59A8D9A2C0AB}"/>
+                <a16:creationId xmlns="" xmlns:a16="http://schemas.microsoft.com/office/drawing/2014/main" id="{846ECC3C-0F71-81E5-1C69-59A8D9A2C0AB}"/>
               </a:ext>
             </a:extLst>
           </p:cNvPr>
@@ -11924,7 +12338,7 @@
           <p:cNvPr id="1030" name="Picture 6" descr="Colar monitora vacas para melhorar produtividade de leite - 12/05/2023 -  Tec - Folha">
             <a:extLst>
               <a:ext uri="{FF2B5EF4-FFF2-40B4-BE49-F238E27FC236}">
-                <a16:creationId xmlns:a16="http://schemas.microsoft.com/office/drawing/2014/main" xmlns="" id="{219B56EB-C5FB-216B-A62B-12BD558A49F2}"/>
+                <a16:creationId xmlns="" xmlns:a16="http://schemas.microsoft.com/office/drawing/2014/main" id="{219B56EB-C5FB-216B-A62B-12BD558A49F2}"/>
               </a:ext>
             </a:extLst>
           </p:cNvPr>
@@ -11971,7 +12385,7 @@
           <p:cNvPr id="6" name="Picture 2" descr="Free photo industrial containers box for logistic import export business.">
             <a:extLst>
               <a:ext uri="{FF2B5EF4-FFF2-40B4-BE49-F238E27FC236}">
-                <a16:creationId xmlns:a16="http://schemas.microsoft.com/office/drawing/2014/main" xmlns="" id="{EEB34E5E-7F0E-7162-8BAF-B92B4B06BA43}"/>
+                <a16:creationId xmlns="" xmlns:a16="http://schemas.microsoft.com/office/drawing/2014/main" id="{EEB34E5E-7F0E-7162-8BAF-B92B4B06BA43}"/>
               </a:ext>
             </a:extLst>
           </p:cNvPr>
@@ -12018,7 +12432,7 @@
           <p:cNvPr id="10" name="Imagem 9">
             <a:extLst>
               <a:ext uri="{FF2B5EF4-FFF2-40B4-BE49-F238E27FC236}">
-                <a16:creationId xmlns:a16="http://schemas.microsoft.com/office/drawing/2014/main" xmlns="" id="{240919DB-71EF-5F88-F569-C5D883B2B487}"/>
+                <a16:creationId xmlns="" xmlns:a16="http://schemas.microsoft.com/office/drawing/2014/main" id="{240919DB-71EF-5F88-F569-C5D883B2B487}"/>
               </a:ext>
             </a:extLst>
           </p:cNvPr>
@@ -12047,6 +12461,354 @@
     <p:extLst>
       <p:ext uri="{BB962C8B-B14F-4D97-AF65-F5344CB8AC3E}">
         <p14:creationId xmlns:p14="http://schemas.microsoft.com/office/powerpoint/2010/main" val="2982496246"/>
+      </p:ext>
+    </p:extLst>
+  </p:cSld>
+  <p:clrMapOvr>
+    <a:masterClrMapping/>
+  </p:clrMapOvr>
+</p:sld>
+</file>
+
+<file path=ppt/slides/slide20.xml><?xml version="1.0" encoding="utf-8"?>
+<p:sld xmlns:a="http://schemas.openxmlformats.org/drawingml/2006/main" xmlns:r="http://schemas.openxmlformats.org/officeDocument/2006/relationships" xmlns:p="http://schemas.openxmlformats.org/presentationml/2006/main">
+  <p:cSld>
+    <p:bg>
+      <p:bgPr>
+        <a:blipFill dpi="0" rotWithShape="1">
+          <a:blip r:embed="rId3">
+            <a:lum/>
+          </a:blip>
+          <a:srcRect/>
+          <a:stretch>
+            <a:fillRect/>
+          </a:stretch>
+        </a:blipFill>
+        <a:effectLst/>
+      </p:bgPr>
+    </p:bg>
+    <p:spTree>
+      <p:nvGrpSpPr>
+        <p:cNvPr id="1" name=""/>
+        <p:cNvGrpSpPr/>
+        <p:nvPr/>
+      </p:nvGrpSpPr>
+      <p:grpSpPr>
+        <a:xfrm>
+          <a:off x="0" y="0"/>
+          <a:ext cx="0" cy="0"/>
+          <a:chOff x="0" y="0"/>
+          <a:chExt cx="0" cy="0"/>
+        </a:xfrm>
+      </p:grpSpPr>
+      <p:sp>
+        <p:nvSpPr>
+          <p:cNvPr id="2" name="Título 1">
+            <a:extLst>
+              <a:ext uri="{FF2B5EF4-FFF2-40B4-BE49-F238E27FC236}">
+                <a16:creationId xmlns="" xmlns:a16="http://schemas.microsoft.com/office/drawing/2014/main" id="{5F09B89C-3183-4D52-981A-62798DDFF2B8}"/>
+              </a:ext>
+            </a:extLst>
+          </p:cNvPr>
+          <p:cNvSpPr>
+            <a:spLocks noGrp="1"/>
+          </p:cNvSpPr>
+          <p:nvPr>
+            <p:ph type="title"/>
+          </p:nvPr>
+        </p:nvSpPr>
+        <p:spPr>
+          <a:xfrm>
+            <a:off x="304800" y="183092"/>
+            <a:ext cx="6559285" cy="762000"/>
+          </a:xfrm>
+        </p:spPr>
+        <p:txBody>
+          <a:bodyPr>
+            <a:normAutofit/>
+          </a:bodyPr>
+          <a:lstStyle/>
+          <a:p>
+            <a:r>
+              <a:rPr lang="pt-BR" dirty="0"/>
+              <a:t>Edge Impulse</a:t>
+            </a:r>
+          </a:p>
+        </p:txBody>
+      </p:sp>
+      <p:sp>
+        <p:nvSpPr>
+          <p:cNvPr id="3" name="AutoShape 2" descr="An example of graph signal reconstruction over wireless sensor network. |  Download Scientific Diagram">
+            <a:extLst>
+              <a:ext uri="{FF2B5EF4-FFF2-40B4-BE49-F238E27FC236}">
+                <a16:creationId xmlns="" xmlns:a16="http://schemas.microsoft.com/office/drawing/2014/main" id="{0166B4DD-D72A-4A54-94A7-2C38133837FD}"/>
+              </a:ext>
+            </a:extLst>
+          </p:cNvPr>
+          <p:cNvSpPr>
+            <a:spLocks noChangeAspect="1" noChangeArrowheads="1"/>
+          </p:cNvSpPr>
+          <p:nvPr/>
+        </p:nvSpPr>
+        <p:spPr bwMode="auto">
+          <a:xfrm>
+            <a:off x="5994400" y="3327400"/>
+            <a:ext cx="203200" cy="203200"/>
+          </a:xfrm>
+          <a:prstGeom prst="rect">
+            <a:avLst/>
+          </a:prstGeom>
+          <a:noFill/>
+          <a:extLst>
+            <a:ext uri="{909E8E84-426E-40DD-AFC4-6F175D3DCCD1}">
+              <a14:hiddenFill xmlns:a14="http://schemas.microsoft.com/office/drawing/2010/main">
+                <a:solidFill>
+                  <a:srgbClr val="FFFFFF"/>
+                </a:solidFill>
+              </a14:hiddenFill>
+            </a:ext>
+          </a:extLst>
+        </p:spPr>
+        <p:txBody>
+          <a:bodyPr vert="horz" wrap="square" lIns="60960" tIns="30480" rIns="60960" bIns="30480" numCol="1" anchor="t" anchorCtr="0" compatLnSpc="1">
+            <a:prstTxWarp prst="textNoShape">
+              <a:avLst/>
+            </a:prstTxWarp>
+          </a:bodyPr>
+          <a:lstStyle/>
+          <a:p>
+            <a:pPr defTabSz="609630"/>
+            <a:endParaRPr lang="pt-BR" sz="1200">
+              <a:solidFill>
+                <a:prstClr val="black"/>
+              </a:solidFill>
+              <a:latin typeface="Calibri"/>
+            </a:endParaRPr>
+          </a:p>
+        </p:txBody>
+      </p:sp>
+      <p:sp>
+        <p:nvSpPr>
+          <p:cNvPr id="7" name="AutoShape 4" descr="An example of graph signal reconstruction over wireless sensor network. |  Download Scientific Diagram">
+            <a:extLst>
+              <a:ext uri="{FF2B5EF4-FFF2-40B4-BE49-F238E27FC236}">
+                <a16:creationId xmlns="" xmlns:a16="http://schemas.microsoft.com/office/drawing/2014/main" id="{14C2B67D-81A1-457E-A410-FE4350A3CCA4}"/>
+              </a:ext>
+            </a:extLst>
+          </p:cNvPr>
+          <p:cNvSpPr>
+            <a:spLocks noChangeAspect="1" noChangeArrowheads="1"/>
+          </p:cNvSpPr>
+          <p:nvPr/>
+        </p:nvSpPr>
+        <p:spPr bwMode="auto">
+          <a:xfrm>
+            <a:off x="6096000" y="3429000"/>
+            <a:ext cx="203200" cy="203200"/>
+          </a:xfrm>
+          <a:prstGeom prst="rect">
+            <a:avLst/>
+          </a:prstGeom>
+          <a:noFill/>
+          <a:extLst>
+            <a:ext uri="{909E8E84-426E-40DD-AFC4-6F175D3DCCD1}">
+              <a14:hiddenFill xmlns:a14="http://schemas.microsoft.com/office/drawing/2010/main">
+                <a:solidFill>
+                  <a:srgbClr val="FFFFFF"/>
+                </a:solidFill>
+              </a14:hiddenFill>
+            </a:ext>
+          </a:extLst>
+        </p:spPr>
+        <p:txBody>
+          <a:bodyPr vert="horz" wrap="square" lIns="60960" tIns="30480" rIns="60960" bIns="30480" numCol="1" anchor="t" anchorCtr="0" compatLnSpc="1">
+            <a:prstTxWarp prst="textNoShape">
+              <a:avLst/>
+            </a:prstTxWarp>
+          </a:bodyPr>
+          <a:lstStyle/>
+          <a:p>
+            <a:pPr defTabSz="609630"/>
+            <a:endParaRPr lang="pt-BR" sz="1200">
+              <a:solidFill>
+                <a:prstClr val="black"/>
+              </a:solidFill>
+              <a:latin typeface="Calibri"/>
+            </a:endParaRPr>
+          </a:p>
+        </p:txBody>
+      </p:sp>
+      <p:sp>
+        <p:nvSpPr>
+          <p:cNvPr id="4" name="Espaço Reservado para Conteúdo 3">
+            <a:extLst>
+              <a:ext uri="{FF2B5EF4-FFF2-40B4-BE49-F238E27FC236}">
+                <a16:creationId xmlns="" xmlns:a16="http://schemas.microsoft.com/office/drawing/2014/main" id="{0349BA64-C9D7-4730-9CA9-5C4AD9FC7969}"/>
+              </a:ext>
+            </a:extLst>
+          </p:cNvPr>
+          <p:cNvSpPr>
+            <a:spLocks noGrp="1"/>
+          </p:cNvSpPr>
+          <p:nvPr>
+            <p:ph idx="1"/>
+          </p:nvPr>
+        </p:nvSpPr>
+        <p:spPr>
+          <a:xfrm>
+            <a:off x="304800" y="1066800"/>
+            <a:ext cx="9295589" cy="4330419"/>
+          </a:xfrm>
+        </p:spPr>
+        <p:txBody>
+          <a:bodyPr>
+            <a:noAutofit/>
+          </a:bodyPr>
+          <a:lstStyle/>
+          <a:p>
+            <a:pPr marL="495308" indent="-342900" algn="just">
+              <a:lnSpc>
+                <a:spcPct val="107000"/>
+              </a:lnSpc>
+              <a:spcAft>
+                <a:spcPts val="533"/>
+              </a:spcAft>
+            </a:pPr>
+            <a:r>
+              <a:rPr lang="pt-BR" sz="2000" dirty="0">
+                <a:ea typeface="Calibri" panose="020F0502020204030204" pitchFamily="34" charset="0"/>
+                <a:cs typeface="Arial" panose="020B0604020202020204" pitchFamily="34" charset="0"/>
+              </a:rPr>
+              <a:t>Trabalho </a:t>
+            </a:r>
+          </a:p>
+          <a:p>
+            <a:pPr marL="495308" indent="-342900" algn="just">
+              <a:lnSpc>
+                <a:spcPct val="107000"/>
+              </a:lnSpc>
+              <a:spcAft>
+                <a:spcPts val="533"/>
+              </a:spcAft>
+            </a:pPr>
+            <a:r>
+              <a:rPr lang="pt-BR" sz="2000" dirty="0">
+                <a:ea typeface="Calibri" panose="020F0502020204030204" pitchFamily="34" charset="0"/>
+                <a:cs typeface="Arial" panose="020B0604020202020204" pitchFamily="34" charset="0"/>
+              </a:rPr>
+              <a:t>Criar um </a:t>
+            </a:r>
+            <a:r>
+              <a:rPr lang="pt-BR" sz="2000" dirty="0" err="1">
+                <a:ea typeface="Calibri" panose="020F0502020204030204" pitchFamily="34" charset="0"/>
+                <a:cs typeface="Arial" panose="020B0604020202020204" pitchFamily="34" charset="0"/>
+              </a:rPr>
+              <a:t>dataset</a:t>
+            </a:r>
+            <a:r>
+              <a:rPr lang="pt-BR" sz="2000" dirty="0">
+                <a:ea typeface="Calibri" panose="020F0502020204030204" pitchFamily="34" charset="0"/>
+                <a:cs typeface="Arial" panose="020B0604020202020204" pitchFamily="34" charset="0"/>
+              </a:rPr>
+              <a:t> para classificação de movimento para movimentação de uma cadeira de rodas com uso de movimento da cabeça, treinar pelo menos três movimentos no Edge Impulse.</a:t>
+            </a:r>
+          </a:p>
+          <a:p>
+            <a:pPr marL="495308" indent="-342900" algn="just">
+              <a:lnSpc>
+                <a:spcPct val="107000"/>
+              </a:lnSpc>
+              <a:spcAft>
+                <a:spcPts val="533"/>
+              </a:spcAft>
+            </a:pPr>
+            <a:endParaRPr lang="pt-BR" sz="2000" dirty="0">
+              <a:ea typeface="Calibri" panose="020F0502020204030204" pitchFamily="34" charset="0"/>
+              <a:cs typeface="Arial" panose="020B0604020202020204" pitchFamily="34" charset="0"/>
+            </a:endParaRPr>
+          </a:p>
+          <a:p>
+            <a:pPr marL="495308" indent="-342900" algn="just">
+              <a:lnSpc>
+                <a:spcPct val="107000"/>
+              </a:lnSpc>
+              <a:spcAft>
+                <a:spcPts val="533"/>
+              </a:spcAft>
+            </a:pPr>
+            <a:r>
+              <a:rPr lang="pt-BR" sz="2000" dirty="0">
+                <a:ea typeface="Calibri" panose="020F0502020204030204" pitchFamily="34" charset="0"/>
+                <a:cs typeface="Arial" panose="020B0604020202020204" pitchFamily="34" charset="0"/>
+              </a:rPr>
+              <a:t>Exemplo:</a:t>
+            </a:r>
+          </a:p>
+          <a:p>
+            <a:pPr marL="495308" indent="-342900" algn="just">
+              <a:lnSpc>
+                <a:spcPct val="107000"/>
+              </a:lnSpc>
+              <a:spcAft>
+                <a:spcPts val="533"/>
+              </a:spcAft>
+            </a:pPr>
+            <a:endParaRPr lang="pt-BR" sz="2000" dirty="0">
+              <a:ea typeface="Calibri" panose="020F0502020204030204" pitchFamily="34" charset="0"/>
+              <a:cs typeface="Arial" panose="020B0604020202020204" pitchFamily="34" charset="0"/>
+            </a:endParaRPr>
+          </a:p>
+          <a:p>
+            <a:pPr marL="152408" indent="0" algn="just">
+              <a:lnSpc>
+                <a:spcPct val="107000"/>
+              </a:lnSpc>
+              <a:spcAft>
+                <a:spcPts val="533"/>
+              </a:spcAft>
+              <a:buNone/>
+            </a:pPr>
+            <a:endParaRPr lang="pt-BR" sz="2000" dirty="0">
+              <a:ea typeface="Calibri" panose="020F0502020204030204" pitchFamily="34" charset="0"/>
+              <a:cs typeface="Arial" panose="020B0604020202020204" pitchFamily="34" charset="0"/>
+            </a:endParaRPr>
+          </a:p>
+        </p:txBody>
+      </p:sp>
+      <p:pic>
+        <p:nvPicPr>
+          <p:cNvPr id="9" name="Imagem 8">
+            <a:extLst>
+              <a:ext uri="{FF2B5EF4-FFF2-40B4-BE49-F238E27FC236}">
+                <a16:creationId xmlns="" xmlns:a16="http://schemas.microsoft.com/office/drawing/2014/main" id="{805DE0C9-CC2B-9A66-2836-0B5BA9411A2D}"/>
+              </a:ext>
+            </a:extLst>
+          </p:cNvPr>
+          <p:cNvPicPr>
+            <a:picLocks noChangeAspect="1"/>
+          </p:cNvPicPr>
+          <p:nvPr/>
+        </p:nvPicPr>
+        <p:blipFill>
+          <a:blip r:embed="rId4"/>
+          <a:stretch>
+            <a:fillRect/>
+          </a:stretch>
+        </p:blipFill>
+        <p:spPr>
+          <a:xfrm>
+            <a:off x="1713929" y="3567797"/>
+            <a:ext cx="7886460" cy="2426603"/>
+          </a:xfrm>
+          <a:prstGeom prst="rect">
+            <a:avLst/>
+          </a:prstGeom>
+        </p:spPr>
+      </p:pic>
+    </p:spTree>
+    <p:extLst>
+      <p:ext uri="{BB962C8B-B14F-4D97-AF65-F5344CB8AC3E}">
+        <p14:creationId xmlns:p14="http://schemas.microsoft.com/office/powerpoint/2010/main" val="1017366542"/>
       </p:ext>
     </p:extLst>
   </p:cSld>
@@ -12092,7 +12854,7 @@
           <p:cNvPr id="2" name="Título 1">
             <a:extLst>
               <a:ext uri="{FF2B5EF4-FFF2-40B4-BE49-F238E27FC236}">
-                <a16:creationId xmlns:a16="http://schemas.microsoft.com/office/drawing/2014/main" xmlns="" id="{5F09B89C-3183-4D52-981A-62798DDFF2B8}"/>
+                <a16:creationId xmlns="" xmlns:a16="http://schemas.microsoft.com/office/drawing/2014/main" id="{5F09B89C-3183-4D52-981A-62798DDFF2B8}"/>
               </a:ext>
             </a:extLst>
           </p:cNvPr>
@@ -12132,7 +12894,7 @@
           <p:cNvPr id="3" name="AutoShape 2" descr="An example of graph signal reconstruction over wireless sensor network. |  Download Scientific Diagram">
             <a:extLst>
               <a:ext uri="{FF2B5EF4-FFF2-40B4-BE49-F238E27FC236}">
-                <a16:creationId xmlns:a16="http://schemas.microsoft.com/office/drawing/2014/main" xmlns="" id="{0166B4DD-D72A-4A54-94A7-2C38133837FD}"/>
+                <a16:creationId xmlns="" xmlns:a16="http://schemas.microsoft.com/office/drawing/2014/main" id="{0166B4DD-D72A-4A54-94A7-2C38133837FD}"/>
               </a:ext>
             </a:extLst>
           </p:cNvPr>
@@ -12183,7 +12945,7 @@
           <p:cNvPr id="7" name="AutoShape 4" descr="An example of graph signal reconstruction over wireless sensor network. |  Download Scientific Diagram">
             <a:extLst>
               <a:ext uri="{FF2B5EF4-FFF2-40B4-BE49-F238E27FC236}">
-                <a16:creationId xmlns:a16="http://schemas.microsoft.com/office/drawing/2014/main" xmlns="" id="{14C2B67D-81A1-457E-A410-FE4350A3CCA4}"/>
+                <a16:creationId xmlns="" xmlns:a16="http://schemas.microsoft.com/office/drawing/2014/main" id="{14C2B67D-81A1-457E-A410-FE4350A3CCA4}"/>
               </a:ext>
             </a:extLst>
           </p:cNvPr>
@@ -12234,7 +12996,7 @@
           <p:cNvPr id="4" name="Espaço Reservado para Conteúdo 3">
             <a:extLst>
               <a:ext uri="{FF2B5EF4-FFF2-40B4-BE49-F238E27FC236}">
-                <a16:creationId xmlns:a16="http://schemas.microsoft.com/office/drawing/2014/main" xmlns="" id="{0349BA64-C9D7-4730-9CA9-5C4AD9FC7969}"/>
+                <a16:creationId xmlns="" xmlns:a16="http://schemas.microsoft.com/office/drawing/2014/main" id="{0349BA64-C9D7-4730-9CA9-5C4AD9FC7969}"/>
               </a:ext>
             </a:extLst>
           </p:cNvPr>
@@ -12280,7 +13042,7 @@
           <p:cNvPr id="1026" name="Picture 2" descr="Free photo industrial containers box for logistic import export business.">
             <a:extLst>
               <a:ext uri="{FF2B5EF4-FFF2-40B4-BE49-F238E27FC236}">
-                <a16:creationId xmlns:a16="http://schemas.microsoft.com/office/drawing/2014/main" xmlns="" id="{FDC07977-F662-66CB-7534-103E83976919}"/>
+                <a16:creationId xmlns="" xmlns:a16="http://schemas.microsoft.com/office/drawing/2014/main" id="{FDC07977-F662-66CB-7534-103E83976919}"/>
               </a:ext>
             </a:extLst>
           </p:cNvPr>
@@ -12371,7 +13133,7 @@
           <p:cNvPr id="2" name="Título 1">
             <a:extLst>
               <a:ext uri="{FF2B5EF4-FFF2-40B4-BE49-F238E27FC236}">
-                <a16:creationId xmlns:a16="http://schemas.microsoft.com/office/drawing/2014/main" xmlns="" id="{5F09B89C-3183-4D52-981A-62798DDFF2B8}"/>
+                <a16:creationId xmlns="" xmlns:a16="http://schemas.microsoft.com/office/drawing/2014/main" id="{5F09B89C-3183-4D52-981A-62798DDFF2B8}"/>
               </a:ext>
             </a:extLst>
           </p:cNvPr>
@@ -12411,7 +13173,7 @@
           <p:cNvPr id="3" name="AutoShape 2" descr="An example of graph signal reconstruction over wireless sensor network. |  Download Scientific Diagram">
             <a:extLst>
               <a:ext uri="{FF2B5EF4-FFF2-40B4-BE49-F238E27FC236}">
-                <a16:creationId xmlns:a16="http://schemas.microsoft.com/office/drawing/2014/main" xmlns="" id="{0166B4DD-D72A-4A54-94A7-2C38133837FD}"/>
+                <a16:creationId xmlns="" xmlns:a16="http://schemas.microsoft.com/office/drawing/2014/main" id="{0166B4DD-D72A-4A54-94A7-2C38133837FD}"/>
               </a:ext>
             </a:extLst>
           </p:cNvPr>
@@ -12462,7 +13224,7 @@
           <p:cNvPr id="7" name="AutoShape 4" descr="An example of graph signal reconstruction over wireless sensor network. |  Download Scientific Diagram">
             <a:extLst>
               <a:ext uri="{FF2B5EF4-FFF2-40B4-BE49-F238E27FC236}">
-                <a16:creationId xmlns:a16="http://schemas.microsoft.com/office/drawing/2014/main" xmlns="" id="{14C2B67D-81A1-457E-A410-FE4350A3CCA4}"/>
+                <a16:creationId xmlns="" xmlns:a16="http://schemas.microsoft.com/office/drawing/2014/main" id="{14C2B67D-81A1-457E-A410-FE4350A3CCA4}"/>
               </a:ext>
             </a:extLst>
           </p:cNvPr>
@@ -12513,7 +13275,7 @@
           <p:cNvPr id="4" name="Espaço Reservado para Conteúdo 3">
             <a:extLst>
               <a:ext uri="{FF2B5EF4-FFF2-40B4-BE49-F238E27FC236}">
-                <a16:creationId xmlns:a16="http://schemas.microsoft.com/office/drawing/2014/main" xmlns="" id="{0349BA64-C9D7-4730-9CA9-5C4AD9FC7969}"/>
+                <a16:creationId xmlns="" xmlns:a16="http://schemas.microsoft.com/office/drawing/2014/main" id="{0349BA64-C9D7-4730-9CA9-5C4AD9FC7969}"/>
               </a:ext>
             </a:extLst>
           </p:cNvPr>
@@ -12559,7 +13321,7 @@
           <p:cNvPr id="1026" name="Picture 2" descr="Free photo industrial containers box for logistic import export business.">
             <a:extLst>
               <a:ext uri="{FF2B5EF4-FFF2-40B4-BE49-F238E27FC236}">
-                <a16:creationId xmlns:a16="http://schemas.microsoft.com/office/drawing/2014/main" xmlns="" id="{FDC07977-F662-66CB-7534-103E83976919}"/>
+                <a16:creationId xmlns="" xmlns:a16="http://schemas.microsoft.com/office/drawing/2014/main" id="{FDC07977-F662-66CB-7534-103E83976919}"/>
               </a:ext>
             </a:extLst>
           </p:cNvPr>
@@ -12650,7 +13412,7 @@
           <p:cNvPr id="2" name="Título 1">
             <a:extLst>
               <a:ext uri="{FF2B5EF4-FFF2-40B4-BE49-F238E27FC236}">
-                <a16:creationId xmlns:a16="http://schemas.microsoft.com/office/drawing/2014/main" xmlns="" id="{5F09B89C-3183-4D52-981A-62798DDFF2B8}"/>
+                <a16:creationId xmlns="" xmlns:a16="http://schemas.microsoft.com/office/drawing/2014/main" id="{5F09B89C-3183-4D52-981A-62798DDFF2B8}"/>
               </a:ext>
             </a:extLst>
           </p:cNvPr>
@@ -12690,7 +13452,7 @@
           <p:cNvPr id="3" name="AutoShape 2" descr="An example of graph signal reconstruction over wireless sensor network. |  Download Scientific Diagram">
             <a:extLst>
               <a:ext uri="{FF2B5EF4-FFF2-40B4-BE49-F238E27FC236}">
-                <a16:creationId xmlns:a16="http://schemas.microsoft.com/office/drawing/2014/main" xmlns="" id="{0166B4DD-D72A-4A54-94A7-2C38133837FD}"/>
+                <a16:creationId xmlns="" xmlns:a16="http://schemas.microsoft.com/office/drawing/2014/main" id="{0166B4DD-D72A-4A54-94A7-2C38133837FD}"/>
               </a:ext>
             </a:extLst>
           </p:cNvPr>
@@ -12741,7 +13503,7 @@
           <p:cNvPr id="7" name="AutoShape 4" descr="An example of graph signal reconstruction over wireless sensor network. |  Download Scientific Diagram">
             <a:extLst>
               <a:ext uri="{FF2B5EF4-FFF2-40B4-BE49-F238E27FC236}">
-                <a16:creationId xmlns:a16="http://schemas.microsoft.com/office/drawing/2014/main" xmlns="" id="{14C2B67D-81A1-457E-A410-FE4350A3CCA4}"/>
+                <a16:creationId xmlns="" xmlns:a16="http://schemas.microsoft.com/office/drawing/2014/main" id="{14C2B67D-81A1-457E-A410-FE4350A3CCA4}"/>
               </a:ext>
             </a:extLst>
           </p:cNvPr>
@@ -12792,7 +13554,7 @@
           <p:cNvPr id="4" name="Espaço Reservado para Conteúdo 3">
             <a:extLst>
               <a:ext uri="{FF2B5EF4-FFF2-40B4-BE49-F238E27FC236}">
-                <a16:creationId xmlns:a16="http://schemas.microsoft.com/office/drawing/2014/main" xmlns="" id="{0349BA64-C9D7-4730-9CA9-5C4AD9FC7969}"/>
+                <a16:creationId xmlns="" xmlns:a16="http://schemas.microsoft.com/office/drawing/2014/main" id="{0349BA64-C9D7-4730-9CA9-5C4AD9FC7969}"/>
               </a:ext>
             </a:extLst>
           </p:cNvPr>
@@ -12838,7 +13600,7 @@
           <p:cNvPr id="2050" name="Picture 2" descr="Free PSD blue cargo container on transparent background">
             <a:extLst>
               <a:ext uri="{FF2B5EF4-FFF2-40B4-BE49-F238E27FC236}">
-                <a16:creationId xmlns:a16="http://schemas.microsoft.com/office/drawing/2014/main" xmlns="" id="{A98A15EA-A147-6CDF-C2F6-87AAFC6C49FD}"/>
+                <a16:creationId xmlns="" xmlns:a16="http://schemas.microsoft.com/office/drawing/2014/main" id="{A98A15EA-A147-6CDF-C2F6-87AAFC6C49FD}"/>
               </a:ext>
             </a:extLst>
           </p:cNvPr>
@@ -12885,7 +13647,7 @@
           <p:cNvPr id="6" name="CaixaDeTexto 5">
             <a:extLst>
               <a:ext uri="{FF2B5EF4-FFF2-40B4-BE49-F238E27FC236}">
-                <a16:creationId xmlns:a16="http://schemas.microsoft.com/office/drawing/2014/main" xmlns="" id="{42657F2C-3A0E-77BB-E339-41D96ABE7E97}"/>
+                <a16:creationId xmlns="" xmlns:a16="http://schemas.microsoft.com/office/drawing/2014/main" id="{42657F2C-3A0E-77BB-E339-41D96ABE7E97}"/>
               </a:ext>
             </a:extLst>
           </p:cNvPr>
@@ -12975,7 +13737,7 @@
           <p:cNvPr id="2" name="Título 1">
             <a:extLst>
               <a:ext uri="{FF2B5EF4-FFF2-40B4-BE49-F238E27FC236}">
-                <a16:creationId xmlns:a16="http://schemas.microsoft.com/office/drawing/2014/main" xmlns="" id="{5F09B89C-3183-4D52-981A-62798DDFF2B8}"/>
+                <a16:creationId xmlns="" xmlns:a16="http://schemas.microsoft.com/office/drawing/2014/main" id="{5F09B89C-3183-4D52-981A-62798DDFF2B8}"/>
               </a:ext>
             </a:extLst>
           </p:cNvPr>
@@ -13015,7 +13777,7 @@
           <p:cNvPr id="3" name="AutoShape 2" descr="An example of graph signal reconstruction over wireless sensor network. |  Download Scientific Diagram">
             <a:extLst>
               <a:ext uri="{FF2B5EF4-FFF2-40B4-BE49-F238E27FC236}">
-                <a16:creationId xmlns:a16="http://schemas.microsoft.com/office/drawing/2014/main" xmlns="" id="{0166B4DD-D72A-4A54-94A7-2C38133837FD}"/>
+                <a16:creationId xmlns="" xmlns:a16="http://schemas.microsoft.com/office/drawing/2014/main" id="{0166B4DD-D72A-4A54-94A7-2C38133837FD}"/>
               </a:ext>
             </a:extLst>
           </p:cNvPr>
@@ -13066,7 +13828,7 @@
           <p:cNvPr id="7" name="AutoShape 4" descr="An example of graph signal reconstruction over wireless sensor network. |  Download Scientific Diagram">
             <a:extLst>
               <a:ext uri="{FF2B5EF4-FFF2-40B4-BE49-F238E27FC236}">
-                <a16:creationId xmlns:a16="http://schemas.microsoft.com/office/drawing/2014/main" xmlns="" id="{14C2B67D-81A1-457E-A410-FE4350A3CCA4}"/>
+                <a16:creationId xmlns="" xmlns:a16="http://schemas.microsoft.com/office/drawing/2014/main" id="{14C2B67D-81A1-457E-A410-FE4350A3CCA4}"/>
               </a:ext>
             </a:extLst>
           </p:cNvPr>
@@ -13117,7 +13879,7 @@
           <p:cNvPr id="4" name="Espaço Reservado para Conteúdo 3">
             <a:extLst>
               <a:ext uri="{FF2B5EF4-FFF2-40B4-BE49-F238E27FC236}">
-                <a16:creationId xmlns:a16="http://schemas.microsoft.com/office/drawing/2014/main" xmlns="" id="{0349BA64-C9D7-4730-9CA9-5C4AD9FC7969}"/>
+                <a16:creationId xmlns="" xmlns:a16="http://schemas.microsoft.com/office/drawing/2014/main" id="{0349BA64-C9D7-4730-9CA9-5C4AD9FC7969}"/>
               </a:ext>
             </a:extLst>
           </p:cNvPr>
@@ -13163,7 +13925,7 @@
           <p:cNvPr id="3074" name="Picture 2" descr="Free photo aerial view of cargo ship with cargo container on sea">
             <a:extLst>
               <a:ext uri="{FF2B5EF4-FFF2-40B4-BE49-F238E27FC236}">
-                <a16:creationId xmlns:a16="http://schemas.microsoft.com/office/drawing/2014/main" xmlns="" id="{6D87BA9E-F12B-B77C-65AD-AFA156B87962}"/>
+                <a16:creationId xmlns="" xmlns:a16="http://schemas.microsoft.com/office/drawing/2014/main" id="{6D87BA9E-F12B-B77C-65AD-AFA156B87962}"/>
               </a:ext>
             </a:extLst>
           </p:cNvPr>
@@ -13210,7 +13972,7 @@
           <p:cNvPr id="6" name="CaixaDeTexto 5">
             <a:extLst>
               <a:ext uri="{FF2B5EF4-FFF2-40B4-BE49-F238E27FC236}">
-                <a16:creationId xmlns:a16="http://schemas.microsoft.com/office/drawing/2014/main" xmlns="" id="{7CAF6758-F677-FD03-7446-3A59B85054CD}"/>
+                <a16:creationId xmlns="" xmlns:a16="http://schemas.microsoft.com/office/drawing/2014/main" id="{7CAF6758-F677-FD03-7446-3A59B85054CD}"/>
               </a:ext>
             </a:extLst>
           </p:cNvPr>
@@ -13302,7 +14064,7 @@
           <p:cNvPr id="2" name="Título 1">
             <a:extLst>
               <a:ext uri="{FF2B5EF4-FFF2-40B4-BE49-F238E27FC236}">
-                <a16:creationId xmlns:a16="http://schemas.microsoft.com/office/drawing/2014/main" xmlns="" id="{5F09B89C-3183-4D52-981A-62798DDFF2B8}"/>
+                <a16:creationId xmlns="" xmlns:a16="http://schemas.microsoft.com/office/drawing/2014/main" id="{5F09B89C-3183-4D52-981A-62798DDFF2B8}"/>
               </a:ext>
             </a:extLst>
           </p:cNvPr>
@@ -13342,7 +14104,7 @@
           <p:cNvPr id="3" name="AutoShape 2" descr="An example of graph signal reconstruction over wireless sensor network. |  Download Scientific Diagram">
             <a:extLst>
               <a:ext uri="{FF2B5EF4-FFF2-40B4-BE49-F238E27FC236}">
-                <a16:creationId xmlns:a16="http://schemas.microsoft.com/office/drawing/2014/main" xmlns="" id="{0166B4DD-D72A-4A54-94A7-2C38133837FD}"/>
+                <a16:creationId xmlns="" xmlns:a16="http://schemas.microsoft.com/office/drawing/2014/main" id="{0166B4DD-D72A-4A54-94A7-2C38133837FD}"/>
               </a:ext>
             </a:extLst>
           </p:cNvPr>
@@ -13393,7 +14155,7 @@
           <p:cNvPr id="7" name="AutoShape 4" descr="An example of graph signal reconstruction over wireless sensor network. |  Download Scientific Diagram">
             <a:extLst>
               <a:ext uri="{FF2B5EF4-FFF2-40B4-BE49-F238E27FC236}">
-                <a16:creationId xmlns:a16="http://schemas.microsoft.com/office/drawing/2014/main" xmlns="" id="{14C2B67D-81A1-457E-A410-FE4350A3CCA4}"/>
+                <a16:creationId xmlns="" xmlns:a16="http://schemas.microsoft.com/office/drawing/2014/main" id="{14C2B67D-81A1-457E-A410-FE4350A3CCA4}"/>
               </a:ext>
             </a:extLst>
           </p:cNvPr>
@@ -13444,7 +14206,7 @@
           <p:cNvPr id="4" name="Espaço Reservado para Conteúdo 3">
             <a:extLst>
               <a:ext uri="{FF2B5EF4-FFF2-40B4-BE49-F238E27FC236}">
-                <a16:creationId xmlns:a16="http://schemas.microsoft.com/office/drawing/2014/main" xmlns="" id="{0349BA64-C9D7-4730-9CA9-5C4AD9FC7969}"/>
+                <a16:creationId xmlns="" xmlns:a16="http://schemas.microsoft.com/office/drawing/2014/main" id="{0349BA64-C9D7-4730-9CA9-5C4AD9FC7969}"/>
               </a:ext>
             </a:extLst>
           </p:cNvPr>
@@ -13633,7 +14395,7 @@
           <p:cNvPr id="6" name="Imagem 5">
             <a:extLst>
               <a:ext uri="{FF2B5EF4-FFF2-40B4-BE49-F238E27FC236}">
-                <a16:creationId xmlns:a16="http://schemas.microsoft.com/office/drawing/2014/main" xmlns="" id="{C63B75BA-F777-3A50-CB3A-A642F3CCAB53}"/>
+                <a16:creationId xmlns="" xmlns:a16="http://schemas.microsoft.com/office/drawing/2014/main" id="{C63B75BA-F777-3A50-CB3A-A642F3CCAB53}"/>
               </a:ext>
             </a:extLst>
           </p:cNvPr>
@@ -13707,7 +14469,7 @@
           <p:cNvPr id="2" name="Título 1">
             <a:extLst>
               <a:ext uri="{FF2B5EF4-FFF2-40B4-BE49-F238E27FC236}">
-                <a16:creationId xmlns:a16="http://schemas.microsoft.com/office/drawing/2014/main" xmlns="" id="{5F09B89C-3183-4D52-981A-62798DDFF2B8}"/>
+                <a16:creationId xmlns="" xmlns:a16="http://schemas.microsoft.com/office/drawing/2014/main" id="{5F09B89C-3183-4D52-981A-62798DDFF2B8}"/>
               </a:ext>
             </a:extLst>
           </p:cNvPr>
@@ -13747,7 +14509,7 @@
           <p:cNvPr id="3" name="AutoShape 2" descr="An example of graph signal reconstruction over wireless sensor network. |  Download Scientific Diagram">
             <a:extLst>
               <a:ext uri="{FF2B5EF4-FFF2-40B4-BE49-F238E27FC236}">
-                <a16:creationId xmlns:a16="http://schemas.microsoft.com/office/drawing/2014/main" xmlns="" id="{0166B4DD-D72A-4A54-94A7-2C38133837FD}"/>
+                <a16:creationId xmlns="" xmlns:a16="http://schemas.microsoft.com/office/drawing/2014/main" id="{0166B4DD-D72A-4A54-94A7-2C38133837FD}"/>
               </a:ext>
             </a:extLst>
           </p:cNvPr>
@@ -13798,7 +14560,7 @@
           <p:cNvPr id="7" name="AutoShape 4" descr="An example of graph signal reconstruction over wireless sensor network. |  Download Scientific Diagram">
             <a:extLst>
               <a:ext uri="{FF2B5EF4-FFF2-40B4-BE49-F238E27FC236}">
-                <a16:creationId xmlns:a16="http://schemas.microsoft.com/office/drawing/2014/main" xmlns="" id="{14C2B67D-81A1-457E-A410-FE4350A3CCA4}"/>
+                <a16:creationId xmlns="" xmlns:a16="http://schemas.microsoft.com/office/drawing/2014/main" id="{14C2B67D-81A1-457E-A410-FE4350A3CCA4}"/>
               </a:ext>
             </a:extLst>
           </p:cNvPr>
@@ -13849,7 +14611,7 @@
           <p:cNvPr id="4" name="Espaço Reservado para Conteúdo 3">
             <a:extLst>
               <a:ext uri="{FF2B5EF4-FFF2-40B4-BE49-F238E27FC236}">
-                <a16:creationId xmlns:a16="http://schemas.microsoft.com/office/drawing/2014/main" xmlns="" id="{0349BA64-C9D7-4730-9CA9-5C4AD9FC7969}"/>
+                <a16:creationId xmlns="" xmlns:a16="http://schemas.microsoft.com/office/drawing/2014/main" id="{0349BA64-C9D7-4730-9CA9-5C4AD9FC7969}"/>
               </a:ext>
             </a:extLst>
           </p:cNvPr>
@@ -14038,7 +14800,7 @@
           <p:cNvPr id="10" name="Imagem 9">
             <a:extLst>
               <a:ext uri="{FF2B5EF4-FFF2-40B4-BE49-F238E27FC236}">
-                <a16:creationId xmlns:a16="http://schemas.microsoft.com/office/drawing/2014/main" xmlns="" id="{C7DAF8C7-0817-CFEF-006D-3A402E0434AD}"/>
+                <a16:creationId xmlns="" xmlns:a16="http://schemas.microsoft.com/office/drawing/2014/main" id="{C7DAF8C7-0817-CFEF-006D-3A402E0434AD}"/>
               </a:ext>
             </a:extLst>
           </p:cNvPr>
@@ -14112,7 +14874,7 @@
           <p:cNvPr id="2" name="Título 1">
             <a:extLst>
               <a:ext uri="{FF2B5EF4-FFF2-40B4-BE49-F238E27FC236}">
-                <a16:creationId xmlns:a16="http://schemas.microsoft.com/office/drawing/2014/main" xmlns="" id="{5F09B89C-3183-4D52-981A-62798DDFF2B8}"/>
+                <a16:creationId xmlns="" xmlns:a16="http://schemas.microsoft.com/office/drawing/2014/main" id="{5F09B89C-3183-4D52-981A-62798DDFF2B8}"/>
               </a:ext>
             </a:extLst>
           </p:cNvPr>
@@ -14152,7 +14914,7 @@
           <p:cNvPr id="3" name="AutoShape 2" descr="An example of graph signal reconstruction over wireless sensor network. |  Download Scientific Diagram">
             <a:extLst>
               <a:ext uri="{FF2B5EF4-FFF2-40B4-BE49-F238E27FC236}">
-                <a16:creationId xmlns:a16="http://schemas.microsoft.com/office/drawing/2014/main" xmlns="" id="{0166B4DD-D72A-4A54-94A7-2C38133837FD}"/>
+                <a16:creationId xmlns="" xmlns:a16="http://schemas.microsoft.com/office/drawing/2014/main" id="{0166B4DD-D72A-4A54-94A7-2C38133837FD}"/>
               </a:ext>
             </a:extLst>
           </p:cNvPr>
@@ -14203,7 +14965,7 @@
           <p:cNvPr id="7" name="AutoShape 4" descr="An example of graph signal reconstruction over wireless sensor network. |  Download Scientific Diagram">
             <a:extLst>
               <a:ext uri="{FF2B5EF4-FFF2-40B4-BE49-F238E27FC236}">
-                <a16:creationId xmlns:a16="http://schemas.microsoft.com/office/drawing/2014/main" xmlns="" id="{14C2B67D-81A1-457E-A410-FE4350A3CCA4}"/>
+                <a16:creationId xmlns="" xmlns:a16="http://schemas.microsoft.com/office/drawing/2014/main" id="{14C2B67D-81A1-457E-A410-FE4350A3CCA4}"/>
               </a:ext>
             </a:extLst>
           </p:cNvPr>
@@ -14254,7 +15016,7 @@
           <p:cNvPr id="4" name="Espaço Reservado para Conteúdo 3">
             <a:extLst>
               <a:ext uri="{FF2B5EF4-FFF2-40B4-BE49-F238E27FC236}">
-                <a16:creationId xmlns:a16="http://schemas.microsoft.com/office/drawing/2014/main" xmlns="" id="{0349BA64-C9D7-4730-9CA9-5C4AD9FC7969}"/>
+                <a16:creationId xmlns="" xmlns:a16="http://schemas.microsoft.com/office/drawing/2014/main" id="{0349BA64-C9D7-4730-9CA9-5C4AD9FC7969}"/>
               </a:ext>
             </a:extLst>
           </p:cNvPr>
@@ -14371,8 +15133,19 @@
                 <a:ea typeface="Calibri" panose="020F0502020204030204" pitchFamily="34" charset="0"/>
                 <a:cs typeface="Arial" panose="020B0604020202020204" pitchFamily="34" charset="0"/>
               </a:rPr>
-              <a:t>Sendo erguido</a:t>
-            </a:r>
+              <a:t>Sendo </a:t>
+            </a:r>
+            <a:r>
+              <a:rPr lang="pt-BR" sz="2000" dirty="0" smtClean="0">
+                <a:ea typeface="Calibri" panose="020F0502020204030204" pitchFamily="34" charset="0"/>
+                <a:cs typeface="Arial" panose="020B0604020202020204" pitchFamily="34" charset="0"/>
+              </a:rPr>
+              <a:t>erguido</a:t>
+            </a:r>
+            <a:endParaRPr lang="pt-BR" sz="2000" dirty="0">
+              <a:ea typeface="Calibri" panose="020F0502020204030204" pitchFamily="34" charset="0"/>
+              <a:cs typeface="Arial" panose="020B0604020202020204" pitchFamily="34" charset="0"/>
+            </a:endParaRPr>
           </a:p>
           <a:p>
             <a:pPr marL="495308" indent="-342900" algn="just">
@@ -14388,8 +15161,19 @@
                 <a:ea typeface="Calibri" panose="020F0502020204030204" pitchFamily="34" charset="0"/>
                 <a:cs typeface="Arial" panose="020B0604020202020204" pitchFamily="34" charset="0"/>
               </a:rPr>
-              <a:t>No mar</a:t>
-            </a:r>
+              <a:t>No </a:t>
+            </a:r>
+            <a:r>
+              <a:rPr lang="pt-BR" sz="2000" dirty="0" smtClean="0">
+                <a:ea typeface="Calibri" panose="020F0502020204030204" pitchFamily="34" charset="0"/>
+                <a:cs typeface="Arial" panose="020B0604020202020204" pitchFamily="34" charset="0"/>
+              </a:rPr>
+              <a:t>mar</a:t>
+            </a:r>
+            <a:endParaRPr lang="pt-BR" sz="2000" dirty="0">
+              <a:ea typeface="Calibri" panose="020F0502020204030204" pitchFamily="34" charset="0"/>
+              <a:cs typeface="Arial" panose="020B0604020202020204" pitchFamily="34" charset="0"/>
+            </a:endParaRPr>
           </a:p>
           <a:p>
             <a:pPr marL="495308" indent="-342900" algn="just">

--- a/slides/TP557_15_classificação de movimentos.pptx
+++ b/slides/TP557_15_classificação de movimentos.pptx
@@ -6,10 +6,10 @@
     <p:sldMasterId id="2147483660" r:id="rId2"/>
   </p:sldMasterIdLst>
   <p:notesMasterIdLst>
-    <p:notesMasterId r:id="rId23"/>
+    <p:notesMasterId r:id="rId31"/>
   </p:notesMasterIdLst>
   <p:handoutMasterIdLst>
-    <p:handoutMasterId r:id="rId24"/>
+    <p:handoutMasterId r:id="rId32"/>
   </p:handoutMasterIdLst>
   <p:sldIdLst>
     <p:sldId id="256" r:id="rId3"/>
@@ -24,14 +24,22 @@
     <p:sldId id="592" r:id="rId12"/>
     <p:sldId id="599" r:id="rId13"/>
     <p:sldId id="601" r:id="rId14"/>
-    <p:sldId id="600" r:id="rId15"/>
-    <p:sldId id="593" r:id="rId16"/>
-    <p:sldId id="594" r:id="rId17"/>
-    <p:sldId id="595" r:id="rId18"/>
-    <p:sldId id="596" r:id="rId19"/>
-    <p:sldId id="597" r:id="rId20"/>
-    <p:sldId id="598" r:id="rId21"/>
-    <p:sldId id="584" r:id="rId22"/>
+    <p:sldId id="604" r:id="rId15"/>
+    <p:sldId id="606" r:id="rId16"/>
+    <p:sldId id="607" r:id="rId17"/>
+    <p:sldId id="603" r:id="rId18"/>
+    <p:sldId id="608" r:id="rId19"/>
+    <p:sldId id="609" r:id="rId20"/>
+    <p:sldId id="610" r:id="rId21"/>
+    <p:sldId id="611" r:id="rId22"/>
+    <p:sldId id="616" r:id="rId23"/>
+    <p:sldId id="614" r:id="rId24"/>
+    <p:sldId id="613" r:id="rId25"/>
+    <p:sldId id="605" r:id="rId26"/>
+    <p:sldId id="615" r:id="rId27"/>
+    <p:sldId id="612" r:id="rId28"/>
+    <p:sldId id="600" r:id="rId29"/>
+    <p:sldId id="584" r:id="rId30"/>
   </p:sldIdLst>
   <p:sldSz cx="12192000" cy="6858000"/>
   <p:notesSz cx="7315200" cy="9601200"/>
@@ -864,6 +872,66 @@
           <a:bodyPr/>
           <a:lstStyle/>
           <a:p>
+            <a:r>
+              <a:rPr lang="pt-BR" sz="1200" b="0" i="0" kern="1200" dirty="0" smtClean="0">
+                <a:solidFill>
+                  <a:schemeClr val="tx1"/>
+                </a:solidFill>
+                <a:effectLst/>
+                <a:latin typeface="+mn-lt"/>
+                <a:ea typeface="+mn-ea"/>
+                <a:cs typeface="+mn-cs"/>
+              </a:rPr>
+              <a:t>Movimentos humanos (como caminhar, correr ou gestos) são </a:t>
+            </a:r>
+            <a:r>
+              <a:rPr lang="pt-BR" sz="1200" b="1" i="0" kern="1200" dirty="0" smtClean="0">
+                <a:solidFill>
+                  <a:schemeClr val="tx1"/>
+                </a:solidFill>
+                <a:effectLst/>
+                <a:latin typeface="+mn-lt"/>
+                <a:ea typeface="+mn-ea"/>
+                <a:cs typeface="+mn-cs"/>
+              </a:rPr>
+              <a:t>dinâmicos e sequenciais</a:t>
+            </a:r>
+            <a:r>
+              <a:rPr lang="pt-BR" sz="1200" b="0" i="0" kern="1200" dirty="0" smtClean="0">
+                <a:solidFill>
+                  <a:schemeClr val="tx1"/>
+                </a:solidFill>
+                <a:effectLst/>
+                <a:latin typeface="+mn-lt"/>
+                <a:ea typeface="+mn-ea"/>
+                <a:cs typeface="+mn-cs"/>
+              </a:rPr>
+              <a:t>. Uma única amostra captura apenas um instante, sem revelar a evolução do movimento (e.g., aceleração inicial vs. desaceleração). Janelas temporais permitem analisar </a:t>
+            </a:r>
+            <a:r>
+              <a:rPr lang="pt-BR" sz="1200" b="1" i="0" kern="1200" dirty="0" smtClean="0">
+                <a:solidFill>
+                  <a:schemeClr val="tx1"/>
+                </a:solidFill>
+                <a:effectLst/>
+                <a:latin typeface="+mn-lt"/>
+                <a:ea typeface="+mn-ea"/>
+                <a:cs typeface="+mn-cs"/>
+              </a:rPr>
+              <a:t>tendências, periodicidades e transições</a:t>
+            </a:r>
+            <a:r>
+              <a:rPr lang="pt-BR" sz="1200" b="0" i="0" kern="1200" dirty="0" smtClean="0">
+                <a:solidFill>
+                  <a:schemeClr val="tx1"/>
+                </a:solidFill>
+                <a:effectLst/>
+                <a:latin typeface="+mn-lt"/>
+                <a:ea typeface="+mn-ea"/>
+                <a:cs typeface="+mn-cs"/>
+              </a:rPr>
+              <a:t> ao longo do tempo, essenciais para distinguir atividades similares.</a:t>
+            </a:r>
             <a:endParaRPr lang="pt-BR" dirty="0"/>
           </a:p>
         </p:txBody>
@@ -1053,7 +1121,7 @@
           <a:p>
             <a:fld id="{6FC8D850-966F-45A6-8DE7-15B891E7D40D}" type="slidenum">
               <a:rPr lang="pt-BR" smtClean="0"/>
-              <a:t>14</a:t>
+              <a:t>13</a:t>
             </a:fld>
             <a:endParaRPr lang="pt-BR"/>
           </a:p>
@@ -1062,7 +1130,7 @@
     </p:spTree>
     <p:extLst>
       <p:ext uri="{BB962C8B-B14F-4D97-AF65-F5344CB8AC3E}">
-        <p14:creationId xmlns:p14="http://schemas.microsoft.com/office/powerpoint/2010/main" val="2121271820"/>
+        <p14:creationId xmlns:p14="http://schemas.microsoft.com/office/powerpoint/2010/main" val="2870711512"/>
       </p:ext>
     </p:extLst>
   </p:cSld>
@@ -1137,7 +1205,7 @@
           <a:p>
             <a:fld id="{6FC8D850-966F-45A6-8DE7-15B891E7D40D}" type="slidenum">
               <a:rPr lang="pt-BR" smtClean="0"/>
-              <a:t>15</a:t>
+              <a:t>14</a:t>
             </a:fld>
             <a:endParaRPr lang="pt-BR"/>
           </a:p>
@@ -1146,7 +1214,7 @@
     </p:spTree>
     <p:extLst>
       <p:ext uri="{BB962C8B-B14F-4D97-AF65-F5344CB8AC3E}">
-        <p14:creationId xmlns:p14="http://schemas.microsoft.com/office/powerpoint/2010/main" val="1829817525"/>
+        <p14:creationId xmlns:p14="http://schemas.microsoft.com/office/powerpoint/2010/main" val="789463344"/>
       </p:ext>
     </p:extLst>
   </p:cSld>
@@ -1221,7 +1289,7 @@
           <a:p>
             <a:fld id="{6FC8D850-966F-45A6-8DE7-15B891E7D40D}" type="slidenum">
               <a:rPr lang="pt-BR" smtClean="0"/>
-              <a:t>16</a:t>
+              <a:t>15</a:t>
             </a:fld>
             <a:endParaRPr lang="pt-BR"/>
           </a:p>
@@ -1230,7 +1298,7 @@
     </p:spTree>
     <p:extLst>
       <p:ext uri="{BB962C8B-B14F-4D97-AF65-F5344CB8AC3E}">
-        <p14:creationId xmlns:p14="http://schemas.microsoft.com/office/powerpoint/2010/main" val="598410396"/>
+        <p14:creationId xmlns:p14="http://schemas.microsoft.com/office/powerpoint/2010/main" val="1935945238"/>
       </p:ext>
     </p:extLst>
   </p:cSld>
@@ -1305,7 +1373,7 @@
           <a:p>
             <a:fld id="{6FC8D850-966F-45A6-8DE7-15B891E7D40D}" type="slidenum">
               <a:rPr lang="pt-BR" smtClean="0"/>
-              <a:t>17</a:t>
+              <a:t>16</a:t>
             </a:fld>
             <a:endParaRPr lang="pt-BR"/>
           </a:p>
@@ -1314,7 +1382,7 @@
     </p:spTree>
     <p:extLst>
       <p:ext uri="{BB962C8B-B14F-4D97-AF65-F5344CB8AC3E}">
-        <p14:creationId xmlns:p14="http://schemas.microsoft.com/office/powerpoint/2010/main" val="3331813760"/>
+        <p14:creationId xmlns:p14="http://schemas.microsoft.com/office/powerpoint/2010/main" val="1212346851"/>
       </p:ext>
     </p:extLst>
   </p:cSld>
@@ -1389,7 +1457,7 @@
           <a:p>
             <a:fld id="{6FC8D850-966F-45A6-8DE7-15B891E7D40D}" type="slidenum">
               <a:rPr lang="pt-BR" smtClean="0"/>
-              <a:t>18</a:t>
+              <a:t>17</a:t>
             </a:fld>
             <a:endParaRPr lang="pt-BR"/>
           </a:p>
@@ -1398,7 +1466,7 @@
     </p:spTree>
     <p:extLst>
       <p:ext uri="{BB962C8B-B14F-4D97-AF65-F5344CB8AC3E}">
-        <p14:creationId xmlns:p14="http://schemas.microsoft.com/office/powerpoint/2010/main" val="1616951098"/>
+        <p14:creationId xmlns:p14="http://schemas.microsoft.com/office/powerpoint/2010/main" val="10820480"/>
       </p:ext>
     </p:extLst>
   </p:cSld>
@@ -1473,7 +1541,7 @@
           <a:p>
             <a:fld id="{6FC8D850-966F-45A6-8DE7-15B891E7D40D}" type="slidenum">
               <a:rPr lang="pt-BR" smtClean="0"/>
-              <a:t>19</a:t>
+              <a:t>18</a:t>
             </a:fld>
             <a:endParaRPr lang="pt-BR"/>
           </a:p>
@@ -1482,7 +1550,7 @@
     </p:spTree>
     <p:extLst>
       <p:ext uri="{BB962C8B-B14F-4D97-AF65-F5344CB8AC3E}">
-        <p14:creationId xmlns:p14="http://schemas.microsoft.com/office/powerpoint/2010/main" val="60274718"/>
+        <p14:creationId xmlns:p14="http://schemas.microsoft.com/office/powerpoint/2010/main" val="3755686892"/>
       </p:ext>
     </p:extLst>
   </p:cSld>
@@ -1557,7 +1625,7 @@
           <a:p>
             <a:fld id="{6FC8D850-966F-45A6-8DE7-15B891E7D40D}" type="slidenum">
               <a:rPr lang="pt-BR" smtClean="0"/>
-              <a:t>20</a:t>
+              <a:t>19</a:t>
             </a:fld>
             <a:endParaRPr lang="pt-BR"/>
           </a:p>
@@ -1566,7 +1634,7 @@
     </p:spTree>
     <p:extLst>
       <p:ext uri="{BB962C8B-B14F-4D97-AF65-F5344CB8AC3E}">
-        <p14:creationId xmlns:p14="http://schemas.microsoft.com/office/powerpoint/2010/main" val="2582298393"/>
+        <p14:creationId xmlns:p14="http://schemas.microsoft.com/office/powerpoint/2010/main" val="1147060703"/>
       </p:ext>
     </p:extLst>
   </p:cSld>
@@ -1651,6 +1719,510 @@
     <p:extLst>
       <p:ext uri="{BB962C8B-B14F-4D97-AF65-F5344CB8AC3E}">
         <p14:creationId xmlns:p14="http://schemas.microsoft.com/office/powerpoint/2010/main" val="2703366992"/>
+      </p:ext>
+    </p:extLst>
+  </p:cSld>
+  <p:clrMapOvr>
+    <a:masterClrMapping/>
+  </p:clrMapOvr>
+</p:notes>
+</file>
+
+<file path=ppt/notesSlides/notesSlide20.xml><?xml version="1.0" encoding="utf-8"?>
+<p:notes xmlns:a="http://schemas.openxmlformats.org/drawingml/2006/main" xmlns:r="http://schemas.openxmlformats.org/officeDocument/2006/relationships" xmlns:p="http://schemas.openxmlformats.org/presentationml/2006/main">
+  <p:cSld>
+    <p:spTree>
+      <p:nvGrpSpPr>
+        <p:cNvPr id="1" name=""/>
+        <p:cNvGrpSpPr/>
+        <p:nvPr/>
+      </p:nvGrpSpPr>
+      <p:grpSpPr>
+        <a:xfrm>
+          <a:off x="0" y="0"/>
+          <a:ext cx="0" cy="0"/>
+          <a:chOff x="0" y="0"/>
+          <a:chExt cx="0" cy="0"/>
+        </a:xfrm>
+      </p:grpSpPr>
+      <p:sp>
+        <p:nvSpPr>
+          <p:cNvPr id="2" name="Espaço Reservado para Imagem de Slide 1"/>
+          <p:cNvSpPr>
+            <a:spLocks noGrp="1" noRot="1" noChangeAspect="1"/>
+          </p:cNvSpPr>
+          <p:nvPr>
+            <p:ph type="sldImg"/>
+          </p:nvPr>
+        </p:nvSpPr>
+        <p:spPr/>
+      </p:sp>
+      <p:sp>
+        <p:nvSpPr>
+          <p:cNvPr id="3" name="Espaço Reservado para Anotações 2"/>
+          <p:cNvSpPr>
+            <a:spLocks noGrp="1"/>
+          </p:cNvSpPr>
+          <p:nvPr>
+            <p:ph type="body" idx="1"/>
+          </p:nvPr>
+        </p:nvSpPr>
+        <p:spPr/>
+        <p:txBody>
+          <a:bodyPr/>
+          <a:lstStyle/>
+          <a:p>
+            <a:endParaRPr lang="pt-BR" dirty="0"/>
+          </a:p>
+        </p:txBody>
+      </p:sp>
+      <p:sp>
+        <p:nvSpPr>
+          <p:cNvPr id="4" name="Espaço Reservado para Número de Slide 3"/>
+          <p:cNvSpPr>
+            <a:spLocks noGrp="1"/>
+          </p:cNvSpPr>
+          <p:nvPr>
+            <p:ph type="sldNum" sz="quarter" idx="5"/>
+          </p:nvPr>
+        </p:nvSpPr>
+        <p:spPr/>
+        <p:txBody>
+          <a:bodyPr/>
+          <a:lstStyle/>
+          <a:p>
+            <a:fld id="{6FC8D850-966F-45A6-8DE7-15B891E7D40D}" type="slidenum">
+              <a:rPr lang="pt-BR" smtClean="0"/>
+              <a:t>20</a:t>
+            </a:fld>
+            <a:endParaRPr lang="pt-BR"/>
+          </a:p>
+        </p:txBody>
+      </p:sp>
+    </p:spTree>
+    <p:extLst>
+      <p:ext uri="{BB962C8B-B14F-4D97-AF65-F5344CB8AC3E}">
+        <p14:creationId xmlns:p14="http://schemas.microsoft.com/office/powerpoint/2010/main" val="3431153001"/>
+      </p:ext>
+    </p:extLst>
+  </p:cSld>
+  <p:clrMapOvr>
+    <a:masterClrMapping/>
+  </p:clrMapOvr>
+</p:notes>
+</file>
+
+<file path=ppt/notesSlides/notesSlide21.xml><?xml version="1.0" encoding="utf-8"?>
+<p:notes xmlns:a="http://schemas.openxmlformats.org/drawingml/2006/main" xmlns:r="http://schemas.openxmlformats.org/officeDocument/2006/relationships" xmlns:p="http://schemas.openxmlformats.org/presentationml/2006/main">
+  <p:cSld>
+    <p:spTree>
+      <p:nvGrpSpPr>
+        <p:cNvPr id="1" name=""/>
+        <p:cNvGrpSpPr/>
+        <p:nvPr/>
+      </p:nvGrpSpPr>
+      <p:grpSpPr>
+        <a:xfrm>
+          <a:off x="0" y="0"/>
+          <a:ext cx="0" cy="0"/>
+          <a:chOff x="0" y="0"/>
+          <a:chExt cx="0" cy="0"/>
+        </a:xfrm>
+      </p:grpSpPr>
+      <p:sp>
+        <p:nvSpPr>
+          <p:cNvPr id="2" name="Espaço Reservado para Imagem de Slide 1"/>
+          <p:cNvSpPr>
+            <a:spLocks noGrp="1" noRot="1" noChangeAspect="1"/>
+          </p:cNvSpPr>
+          <p:nvPr>
+            <p:ph type="sldImg"/>
+          </p:nvPr>
+        </p:nvSpPr>
+        <p:spPr/>
+      </p:sp>
+      <p:sp>
+        <p:nvSpPr>
+          <p:cNvPr id="3" name="Espaço Reservado para Anotações 2"/>
+          <p:cNvSpPr>
+            <a:spLocks noGrp="1"/>
+          </p:cNvSpPr>
+          <p:nvPr>
+            <p:ph type="body" idx="1"/>
+          </p:nvPr>
+        </p:nvSpPr>
+        <p:spPr/>
+        <p:txBody>
+          <a:bodyPr/>
+          <a:lstStyle/>
+          <a:p>
+            <a:endParaRPr lang="pt-BR" dirty="0"/>
+          </a:p>
+        </p:txBody>
+      </p:sp>
+      <p:sp>
+        <p:nvSpPr>
+          <p:cNvPr id="4" name="Espaço Reservado para Número de Slide 3"/>
+          <p:cNvSpPr>
+            <a:spLocks noGrp="1"/>
+          </p:cNvSpPr>
+          <p:nvPr>
+            <p:ph type="sldNum" sz="quarter" idx="5"/>
+          </p:nvPr>
+        </p:nvSpPr>
+        <p:spPr/>
+        <p:txBody>
+          <a:bodyPr/>
+          <a:lstStyle/>
+          <a:p>
+            <a:fld id="{6FC8D850-966F-45A6-8DE7-15B891E7D40D}" type="slidenum">
+              <a:rPr lang="pt-BR" smtClean="0"/>
+              <a:t>21</a:t>
+            </a:fld>
+            <a:endParaRPr lang="pt-BR"/>
+          </a:p>
+        </p:txBody>
+      </p:sp>
+    </p:spTree>
+    <p:extLst>
+      <p:ext uri="{BB962C8B-B14F-4D97-AF65-F5344CB8AC3E}">
+        <p14:creationId xmlns:p14="http://schemas.microsoft.com/office/powerpoint/2010/main" val="3687634267"/>
+      </p:ext>
+    </p:extLst>
+  </p:cSld>
+  <p:clrMapOvr>
+    <a:masterClrMapping/>
+  </p:clrMapOvr>
+</p:notes>
+</file>
+
+<file path=ppt/notesSlides/notesSlide22.xml><?xml version="1.0" encoding="utf-8"?>
+<p:notes xmlns:a="http://schemas.openxmlformats.org/drawingml/2006/main" xmlns:r="http://schemas.openxmlformats.org/officeDocument/2006/relationships" xmlns:p="http://schemas.openxmlformats.org/presentationml/2006/main">
+  <p:cSld>
+    <p:spTree>
+      <p:nvGrpSpPr>
+        <p:cNvPr id="1" name=""/>
+        <p:cNvGrpSpPr/>
+        <p:nvPr/>
+      </p:nvGrpSpPr>
+      <p:grpSpPr>
+        <a:xfrm>
+          <a:off x="0" y="0"/>
+          <a:ext cx="0" cy="0"/>
+          <a:chOff x="0" y="0"/>
+          <a:chExt cx="0" cy="0"/>
+        </a:xfrm>
+      </p:grpSpPr>
+      <p:sp>
+        <p:nvSpPr>
+          <p:cNvPr id="2" name="Espaço Reservado para Imagem de Slide 1"/>
+          <p:cNvSpPr>
+            <a:spLocks noGrp="1" noRot="1" noChangeAspect="1"/>
+          </p:cNvSpPr>
+          <p:nvPr>
+            <p:ph type="sldImg"/>
+          </p:nvPr>
+        </p:nvSpPr>
+        <p:spPr/>
+      </p:sp>
+      <p:sp>
+        <p:nvSpPr>
+          <p:cNvPr id="3" name="Espaço Reservado para Anotações 2"/>
+          <p:cNvSpPr>
+            <a:spLocks noGrp="1"/>
+          </p:cNvSpPr>
+          <p:nvPr>
+            <p:ph type="body" idx="1"/>
+          </p:nvPr>
+        </p:nvSpPr>
+        <p:spPr/>
+        <p:txBody>
+          <a:bodyPr/>
+          <a:lstStyle/>
+          <a:p>
+            <a:endParaRPr lang="pt-BR" dirty="0"/>
+          </a:p>
+        </p:txBody>
+      </p:sp>
+      <p:sp>
+        <p:nvSpPr>
+          <p:cNvPr id="4" name="Espaço Reservado para Número de Slide 3"/>
+          <p:cNvSpPr>
+            <a:spLocks noGrp="1"/>
+          </p:cNvSpPr>
+          <p:nvPr>
+            <p:ph type="sldNum" sz="quarter" idx="5"/>
+          </p:nvPr>
+        </p:nvSpPr>
+        <p:spPr/>
+        <p:txBody>
+          <a:bodyPr/>
+          <a:lstStyle/>
+          <a:p>
+            <a:fld id="{6FC8D850-966F-45A6-8DE7-15B891E7D40D}" type="slidenum">
+              <a:rPr lang="pt-BR" smtClean="0"/>
+              <a:t>22</a:t>
+            </a:fld>
+            <a:endParaRPr lang="pt-BR"/>
+          </a:p>
+        </p:txBody>
+      </p:sp>
+    </p:spTree>
+    <p:extLst>
+      <p:ext uri="{BB962C8B-B14F-4D97-AF65-F5344CB8AC3E}">
+        <p14:creationId xmlns:p14="http://schemas.microsoft.com/office/powerpoint/2010/main" val="1780492303"/>
+      </p:ext>
+    </p:extLst>
+  </p:cSld>
+  <p:clrMapOvr>
+    <a:masterClrMapping/>
+  </p:clrMapOvr>
+</p:notes>
+</file>
+
+<file path=ppt/notesSlides/notesSlide23.xml><?xml version="1.0" encoding="utf-8"?>
+<p:notes xmlns:a="http://schemas.openxmlformats.org/drawingml/2006/main" xmlns:r="http://schemas.openxmlformats.org/officeDocument/2006/relationships" xmlns:p="http://schemas.openxmlformats.org/presentationml/2006/main">
+  <p:cSld>
+    <p:spTree>
+      <p:nvGrpSpPr>
+        <p:cNvPr id="1" name=""/>
+        <p:cNvGrpSpPr/>
+        <p:nvPr/>
+      </p:nvGrpSpPr>
+      <p:grpSpPr>
+        <a:xfrm>
+          <a:off x="0" y="0"/>
+          <a:ext cx="0" cy="0"/>
+          <a:chOff x="0" y="0"/>
+          <a:chExt cx="0" cy="0"/>
+        </a:xfrm>
+      </p:grpSpPr>
+      <p:sp>
+        <p:nvSpPr>
+          <p:cNvPr id="2" name="Espaço Reservado para Imagem de Slide 1"/>
+          <p:cNvSpPr>
+            <a:spLocks noGrp="1" noRot="1" noChangeAspect="1"/>
+          </p:cNvSpPr>
+          <p:nvPr>
+            <p:ph type="sldImg"/>
+          </p:nvPr>
+        </p:nvSpPr>
+        <p:spPr/>
+      </p:sp>
+      <p:sp>
+        <p:nvSpPr>
+          <p:cNvPr id="3" name="Espaço Reservado para Anotações 2"/>
+          <p:cNvSpPr>
+            <a:spLocks noGrp="1"/>
+          </p:cNvSpPr>
+          <p:nvPr>
+            <p:ph type="body" idx="1"/>
+          </p:nvPr>
+        </p:nvSpPr>
+        <p:spPr/>
+        <p:txBody>
+          <a:bodyPr/>
+          <a:lstStyle/>
+          <a:p>
+            <a:endParaRPr lang="pt-BR" dirty="0"/>
+          </a:p>
+        </p:txBody>
+      </p:sp>
+      <p:sp>
+        <p:nvSpPr>
+          <p:cNvPr id="4" name="Espaço Reservado para Número de Slide 3"/>
+          <p:cNvSpPr>
+            <a:spLocks noGrp="1"/>
+          </p:cNvSpPr>
+          <p:nvPr>
+            <p:ph type="sldNum" sz="quarter" idx="5"/>
+          </p:nvPr>
+        </p:nvSpPr>
+        <p:spPr/>
+        <p:txBody>
+          <a:bodyPr/>
+          <a:lstStyle/>
+          <a:p>
+            <a:fld id="{6FC8D850-966F-45A6-8DE7-15B891E7D40D}" type="slidenum">
+              <a:rPr lang="pt-BR" smtClean="0"/>
+              <a:t>23</a:t>
+            </a:fld>
+            <a:endParaRPr lang="pt-BR"/>
+          </a:p>
+        </p:txBody>
+      </p:sp>
+    </p:spTree>
+    <p:extLst>
+      <p:ext uri="{BB962C8B-B14F-4D97-AF65-F5344CB8AC3E}">
+        <p14:creationId xmlns:p14="http://schemas.microsoft.com/office/powerpoint/2010/main" val="2336527954"/>
+      </p:ext>
+    </p:extLst>
+  </p:cSld>
+  <p:clrMapOvr>
+    <a:masterClrMapping/>
+  </p:clrMapOvr>
+</p:notes>
+</file>
+
+<file path=ppt/notesSlides/notesSlide24.xml><?xml version="1.0" encoding="utf-8"?>
+<p:notes xmlns:a="http://schemas.openxmlformats.org/drawingml/2006/main" xmlns:r="http://schemas.openxmlformats.org/officeDocument/2006/relationships" xmlns:p="http://schemas.openxmlformats.org/presentationml/2006/main">
+  <p:cSld>
+    <p:spTree>
+      <p:nvGrpSpPr>
+        <p:cNvPr id="1" name=""/>
+        <p:cNvGrpSpPr/>
+        <p:nvPr/>
+      </p:nvGrpSpPr>
+      <p:grpSpPr>
+        <a:xfrm>
+          <a:off x="0" y="0"/>
+          <a:ext cx="0" cy="0"/>
+          <a:chOff x="0" y="0"/>
+          <a:chExt cx="0" cy="0"/>
+        </a:xfrm>
+      </p:grpSpPr>
+      <p:sp>
+        <p:nvSpPr>
+          <p:cNvPr id="2" name="Espaço Reservado para Imagem de Slide 1"/>
+          <p:cNvSpPr>
+            <a:spLocks noGrp="1" noRot="1" noChangeAspect="1"/>
+          </p:cNvSpPr>
+          <p:nvPr>
+            <p:ph type="sldImg"/>
+          </p:nvPr>
+        </p:nvSpPr>
+        <p:spPr/>
+      </p:sp>
+      <p:sp>
+        <p:nvSpPr>
+          <p:cNvPr id="3" name="Espaço Reservado para Anotações 2"/>
+          <p:cNvSpPr>
+            <a:spLocks noGrp="1"/>
+          </p:cNvSpPr>
+          <p:nvPr>
+            <p:ph type="body" idx="1"/>
+          </p:nvPr>
+        </p:nvSpPr>
+        <p:spPr/>
+        <p:txBody>
+          <a:bodyPr/>
+          <a:lstStyle/>
+          <a:p>
+            <a:endParaRPr lang="pt-BR" dirty="0"/>
+          </a:p>
+        </p:txBody>
+      </p:sp>
+      <p:sp>
+        <p:nvSpPr>
+          <p:cNvPr id="4" name="Espaço Reservado para Número de Slide 3"/>
+          <p:cNvSpPr>
+            <a:spLocks noGrp="1"/>
+          </p:cNvSpPr>
+          <p:nvPr>
+            <p:ph type="sldNum" sz="quarter" idx="5"/>
+          </p:nvPr>
+        </p:nvSpPr>
+        <p:spPr/>
+        <p:txBody>
+          <a:bodyPr/>
+          <a:lstStyle/>
+          <a:p>
+            <a:fld id="{6FC8D850-966F-45A6-8DE7-15B891E7D40D}" type="slidenum">
+              <a:rPr lang="pt-BR" smtClean="0"/>
+              <a:t>25</a:t>
+            </a:fld>
+            <a:endParaRPr lang="pt-BR"/>
+          </a:p>
+        </p:txBody>
+      </p:sp>
+    </p:spTree>
+    <p:extLst>
+      <p:ext uri="{BB962C8B-B14F-4D97-AF65-F5344CB8AC3E}">
+        <p14:creationId xmlns:p14="http://schemas.microsoft.com/office/powerpoint/2010/main" val="641627231"/>
+      </p:ext>
+    </p:extLst>
+  </p:cSld>
+  <p:clrMapOvr>
+    <a:masterClrMapping/>
+  </p:clrMapOvr>
+</p:notes>
+</file>
+
+<file path=ppt/notesSlides/notesSlide25.xml><?xml version="1.0" encoding="utf-8"?>
+<p:notes xmlns:a="http://schemas.openxmlformats.org/drawingml/2006/main" xmlns:r="http://schemas.openxmlformats.org/officeDocument/2006/relationships" xmlns:p="http://schemas.openxmlformats.org/presentationml/2006/main">
+  <p:cSld>
+    <p:spTree>
+      <p:nvGrpSpPr>
+        <p:cNvPr id="1" name=""/>
+        <p:cNvGrpSpPr/>
+        <p:nvPr/>
+      </p:nvGrpSpPr>
+      <p:grpSpPr>
+        <a:xfrm>
+          <a:off x="0" y="0"/>
+          <a:ext cx="0" cy="0"/>
+          <a:chOff x="0" y="0"/>
+          <a:chExt cx="0" cy="0"/>
+        </a:xfrm>
+      </p:grpSpPr>
+      <p:sp>
+        <p:nvSpPr>
+          <p:cNvPr id="2" name="Espaço Reservado para Imagem de Slide 1"/>
+          <p:cNvSpPr>
+            <a:spLocks noGrp="1" noRot="1" noChangeAspect="1"/>
+          </p:cNvSpPr>
+          <p:nvPr>
+            <p:ph type="sldImg"/>
+          </p:nvPr>
+        </p:nvSpPr>
+        <p:spPr/>
+      </p:sp>
+      <p:sp>
+        <p:nvSpPr>
+          <p:cNvPr id="3" name="Espaço Reservado para Anotações 2"/>
+          <p:cNvSpPr>
+            <a:spLocks noGrp="1"/>
+          </p:cNvSpPr>
+          <p:nvPr>
+            <p:ph type="body" idx="1"/>
+          </p:nvPr>
+        </p:nvSpPr>
+        <p:spPr/>
+        <p:txBody>
+          <a:bodyPr/>
+          <a:lstStyle/>
+          <a:p>
+            <a:endParaRPr lang="pt-BR" dirty="0"/>
+          </a:p>
+        </p:txBody>
+      </p:sp>
+      <p:sp>
+        <p:nvSpPr>
+          <p:cNvPr id="4" name="Espaço Reservado para Número de Slide 3"/>
+          <p:cNvSpPr>
+            <a:spLocks noGrp="1"/>
+          </p:cNvSpPr>
+          <p:nvPr>
+            <p:ph type="sldNum" sz="quarter" idx="5"/>
+          </p:nvPr>
+        </p:nvSpPr>
+        <p:spPr/>
+        <p:txBody>
+          <a:bodyPr/>
+          <a:lstStyle/>
+          <a:p>
+            <a:fld id="{6FC8D850-966F-45A6-8DE7-15B891E7D40D}" type="slidenum">
+              <a:rPr lang="pt-BR" smtClean="0"/>
+              <a:t>28</a:t>
+            </a:fld>
+            <a:endParaRPr lang="pt-BR"/>
+          </a:p>
+        </p:txBody>
+      </p:sp>
+    </p:spTree>
+    <p:extLst>
+      <p:ext uri="{BB962C8B-B14F-4D97-AF65-F5344CB8AC3E}">
+        <p14:creationId xmlns:p14="http://schemas.microsoft.com/office/powerpoint/2010/main" val="2582298393"/>
       </p:ext>
     </p:extLst>
   </p:cSld>
@@ -2383,7 +2955,7 @@
           <p:cNvPr id="2" name="Título 1">
             <a:extLst>
               <a:ext uri="{FF2B5EF4-FFF2-40B4-BE49-F238E27FC236}">
-                <a16:creationId xmlns="" xmlns:a16="http://schemas.microsoft.com/office/drawing/2014/main" id="{1DB9B4FF-B06E-403C-A326-BDC64D8FF94E}"/>
+                <a16:creationId xmlns:a16="http://schemas.microsoft.com/office/drawing/2014/main" xmlns="" id="{1DB9B4FF-B06E-403C-A326-BDC64D8FF94E}"/>
               </a:ext>
             </a:extLst>
           </p:cNvPr>
@@ -2420,7 +2992,7 @@
           <p:cNvPr id="3" name="Subtítulo 2">
             <a:extLst>
               <a:ext uri="{FF2B5EF4-FFF2-40B4-BE49-F238E27FC236}">
-                <a16:creationId xmlns="" xmlns:a16="http://schemas.microsoft.com/office/drawing/2014/main" id="{247BDFCE-746E-45BF-A319-4733D58D1632}"/>
+                <a16:creationId xmlns:a16="http://schemas.microsoft.com/office/drawing/2014/main" xmlns="" id="{247BDFCE-746E-45BF-A319-4733D58D1632}"/>
               </a:ext>
             </a:extLst>
           </p:cNvPr>
@@ -2490,7 +3062,7 @@
           <p:cNvPr id="4" name="Espaço Reservado para Data 3">
             <a:extLst>
               <a:ext uri="{FF2B5EF4-FFF2-40B4-BE49-F238E27FC236}">
-                <a16:creationId xmlns="" xmlns:a16="http://schemas.microsoft.com/office/drawing/2014/main" id="{9EDE2778-5372-4104-B96D-968184DA8288}"/>
+                <a16:creationId xmlns:a16="http://schemas.microsoft.com/office/drawing/2014/main" xmlns="" id="{9EDE2778-5372-4104-B96D-968184DA8288}"/>
               </a:ext>
             </a:extLst>
           </p:cNvPr>
@@ -2519,7 +3091,7 @@
           <p:cNvPr id="5" name="Espaço Reservado para Rodapé 4">
             <a:extLst>
               <a:ext uri="{FF2B5EF4-FFF2-40B4-BE49-F238E27FC236}">
-                <a16:creationId xmlns="" xmlns:a16="http://schemas.microsoft.com/office/drawing/2014/main" id="{C1DD0F41-C861-4051-988D-3024A37A4B93}"/>
+                <a16:creationId xmlns:a16="http://schemas.microsoft.com/office/drawing/2014/main" xmlns="" id="{C1DD0F41-C861-4051-988D-3024A37A4B93}"/>
               </a:ext>
             </a:extLst>
           </p:cNvPr>
@@ -2544,7 +3116,7 @@
           <p:cNvPr id="6" name="Espaço Reservado para Número de Slide 5">
             <a:extLst>
               <a:ext uri="{FF2B5EF4-FFF2-40B4-BE49-F238E27FC236}">
-                <a16:creationId xmlns="" xmlns:a16="http://schemas.microsoft.com/office/drawing/2014/main" id="{07E5967E-D980-431A-A5DB-3F0C5030A81E}"/>
+                <a16:creationId xmlns:a16="http://schemas.microsoft.com/office/drawing/2014/main" xmlns="" id="{07E5967E-D980-431A-A5DB-3F0C5030A81E}"/>
               </a:ext>
             </a:extLst>
           </p:cNvPr>
@@ -2603,7 +3175,7 @@
           <p:cNvPr id="2" name="Título 1">
             <a:extLst>
               <a:ext uri="{FF2B5EF4-FFF2-40B4-BE49-F238E27FC236}">
-                <a16:creationId xmlns="" xmlns:a16="http://schemas.microsoft.com/office/drawing/2014/main" id="{9036C49F-3E68-4175-81BA-3C3FEE44308A}"/>
+                <a16:creationId xmlns:a16="http://schemas.microsoft.com/office/drawing/2014/main" xmlns="" id="{9036C49F-3E68-4175-81BA-3C3FEE44308A}"/>
               </a:ext>
             </a:extLst>
           </p:cNvPr>
@@ -2631,7 +3203,7 @@
           <p:cNvPr id="3" name="Espaço Reservado para Texto Vertical 2">
             <a:extLst>
               <a:ext uri="{FF2B5EF4-FFF2-40B4-BE49-F238E27FC236}">
-                <a16:creationId xmlns="" xmlns:a16="http://schemas.microsoft.com/office/drawing/2014/main" id="{426FA736-3DD3-4D4E-B57B-BBE1D8F7D424}"/>
+                <a16:creationId xmlns:a16="http://schemas.microsoft.com/office/drawing/2014/main" xmlns="" id="{426FA736-3DD3-4D4E-B57B-BBE1D8F7D424}"/>
               </a:ext>
             </a:extLst>
           </p:cNvPr>
@@ -2688,7 +3260,7 @@
           <p:cNvPr id="4" name="Espaço Reservado para Data 3">
             <a:extLst>
               <a:ext uri="{FF2B5EF4-FFF2-40B4-BE49-F238E27FC236}">
-                <a16:creationId xmlns="" xmlns:a16="http://schemas.microsoft.com/office/drawing/2014/main" id="{99E8855C-D8FD-48F6-B14E-861E0DE4D915}"/>
+                <a16:creationId xmlns:a16="http://schemas.microsoft.com/office/drawing/2014/main" xmlns="" id="{99E8855C-D8FD-48F6-B14E-861E0DE4D915}"/>
               </a:ext>
             </a:extLst>
           </p:cNvPr>
@@ -2717,7 +3289,7 @@
           <p:cNvPr id="5" name="Espaço Reservado para Rodapé 4">
             <a:extLst>
               <a:ext uri="{FF2B5EF4-FFF2-40B4-BE49-F238E27FC236}">
-                <a16:creationId xmlns="" xmlns:a16="http://schemas.microsoft.com/office/drawing/2014/main" id="{97C0BB88-2F21-42A5-ACFF-83DA47F2D340}"/>
+                <a16:creationId xmlns:a16="http://schemas.microsoft.com/office/drawing/2014/main" xmlns="" id="{97C0BB88-2F21-42A5-ACFF-83DA47F2D340}"/>
               </a:ext>
             </a:extLst>
           </p:cNvPr>
@@ -2742,7 +3314,7 @@
           <p:cNvPr id="6" name="Espaço Reservado para Número de Slide 5">
             <a:extLst>
               <a:ext uri="{FF2B5EF4-FFF2-40B4-BE49-F238E27FC236}">
-                <a16:creationId xmlns="" xmlns:a16="http://schemas.microsoft.com/office/drawing/2014/main" id="{6CB462B3-1F22-4C05-B4B8-7A279FB7D5E9}"/>
+                <a16:creationId xmlns:a16="http://schemas.microsoft.com/office/drawing/2014/main" xmlns="" id="{6CB462B3-1F22-4C05-B4B8-7A279FB7D5E9}"/>
               </a:ext>
             </a:extLst>
           </p:cNvPr>
@@ -2801,7 +3373,7 @@
           <p:cNvPr id="2" name="Título Vertical 1">
             <a:extLst>
               <a:ext uri="{FF2B5EF4-FFF2-40B4-BE49-F238E27FC236}">
-                <a16:creationId xmlns="" xmlns:a16="http://schemas.microsoft.com/office/drawing/2014/main" id="{EAEAB728-701C-4207-A9D5-23FF45C60502}"/>
+                <a16:creationId xmlns:a16="http://schemas.microsoft.com/office/drawing/2014/main" xmlns="" id="{EAEAB728-701C-4207-A9D5-23FF45C60502}"/>
               </a:ext>
             </a:extLst>
           </p:cNvPr>
@@ -2834,7 +3406,7 @@
           <p:cNvPr id="3" name="Espaço Reservado para Texto Vertical 2">
             <a:extLst>
               <a:ext uri="{FF2B5EF4-FFF2-40B4-BE49-F238E27FC236}">
-                <a16:creationId xmlns="" xmlns:a16="http://schemas.microsoft.com/office/drawing/2014/main" id="{BA8C8CCF-7823-480A-9A19-0F664DD17E3B}"/>
+                <a16:creationId xmlns:a16="http://schemas.microsoft.com/office/drawing/2014/main" xmlns="" id="{BA8C8CCF-7823-480A-9A19-0F664DD17E3B}"/>
               </a:ext>
             </a:extLst>
           </p:cNvPr>
@@ -2896,7 +3468,7 @@
           <p:cNvPr id="4" name="Espaço Reservado para Data 3">
             <a:extLst>
               <a:ext uri="{FF2B5EF4-FFF2-40B4-BE49-F238E27FC236}">
-                <a16:creationId xmlns="" xmlns:a16="http://schemas.microsoft.com/office/drawing/2014/main" id="{721D5734-7B1F-425D-942F-6EB73344027C}"/>
+                <a16:creationId xmlns:a16="http://schemas.microsoft.com/office/drawing/2014/main" xmlns="" id="{721D5734-7B1F-425D-942F-6EB73344027C}"/>
               </a:ext>
             </a:extLst>
           </p:cNvPr>
@@ -2925,7 +3497,7 @@
           <p:cNvPr id="5" name="Espaço Reservado para Rodapé 4">
             <a:extLst>
               <a:ext uri="{FF2B5EF4-FFF2-40B4-BE49-F238E27FC236}">
-                <a16:creationId xmlns="" xmlns:a16="http://schemas.microsoft.com/office/drawing/2014/main" id="{1E1AAEAC-F08D-45FE-89EC-B1B349A868C9}"/>
+                <a16:creationId xmlns:a16="http://schemas.microsoft.com/office/drawing/2014/main" xmlns="" id="{1E1AAEAC-F08D-45FE-89EC-B1B349A868C9}"/>
               </a:ext>
             </a:extLst>
           </p:cNvPr>
@@ -2950,7 +3522,7 @@
           <p:cNvPr id="6" name="Espaço Reservado para Número de Slide 5">
             <a:extLst>
               <a:ext uri="{FF2B5EF4-FFF2-40B4-BE49-F238E27FC236}">
-                <a16:creationId xmlns="" xmlns:a16="http://schemas.microsoft.com/office/drawing/2014/main" id="{BAA44493-9911-47B2-87A6-C2141A972BC8}"/>
+                <a16:creationId xmlns:a16="http://schemas.microsoft.com/office/drawing/2014/main" xmlns="" id="{BAA44493-9911-47B2-87A6-C2141A972BC8}"/>
               </a:ext>
             </a:extLst>
           </p:cNvPr>
@@ -4883,7 +5455,7 @@
           <p:cNvPr id="2" name="Título 1">
             <a:extLst>
               <a:ext uri="{FF2B5EF4-FFF2-40B4-BE49-F238E27FC236}">
-                <a16:creationId xmlns="" xmlns:a16="http://schemas.microsoft.com/office/drawing/2014/main" id="{71BD44A5-8F21-4626-A01D-48A1C874B1D5}"/>
+                <a16:creationId xmlns:a16="http://schemas.microsoft.com/office/drawing/2014/main" xmlns="" id="{71BD44A5-8F21-4626-A01D-48A1C874B1D5}"/>
               </a:ext>
             </a:extLst>
           </p:cNvPr>
@@ -4911,7 +5483,7 @@
           <p:cNvPr id="3" name="Espaço Reservado para Conteúdo 2">
             <a:extLst>
               <a:ext uri="{FF2B5EF4-FFF2-40B4-BE49-F238E27FC236}">
-                <a16:creationId xmlns="" xmlns:a16="http://schemas.microsoft.com/office/drawing/2014/main" id="{B79E8085-65A9-48AA-951D-71D978BFF4ED}"/>
+                <a16:creationId xmlns:a16="http://schemas.microsoft.com/office/drawing/2014/main" xmlns="" id="{B79E8085-65A9-48AA-951D-71D978BFF4ED}"/>
               </a:ext>
             </a:extLst>
           </p:cNvPr>
@@ -4968,7 +5540,7 @@
           <p:cNvPr id="4" name="Espaço Reservado para Data 3">
             <a:extLst>
               <a:ext uri="{FF2B5EF4-FFF2-40B4-BE49-F238E27FC236}">
-                <a16:creationId xmlns="" xmlns:a16="http://schemas.microsoft.com/office/drawing/2014/main" id="{F05BE1AF-51EA-425D-B188-DE7BD675009F}"/>
+                <a16:creationId xmlns:a16="http://schemas.microsoft.com/office/drawing/2014/main" xmlns="" id="{F05BE1AF-51EA-425D-B188-DE7BD675009F}"/>
               </a:ext>
             </a:extLst>
           </p:cNvPr>
@@ -4997,7 +5569,7 @@
           <p:cNvPr id="5" name="Espaço Reservado para Rodapé 4">
             <a:extLst>
               <a:ext uri="{FF2B5EF4-FFF2-40B4-BE49-F238E27FC236}">
-                <a16:creationId xmlns="" xmlns:a16="http://schemas.microsoft.com/office/drawing/2014/main" id="{121BE632-29CF-4CB9-B365-C9EF38F89BE6}"/>
+                <a16:creationId xmlns:a16="http://schemas.microsoft.com/office/drawing/2014/main" xmlns="" id="{121BE632-29CF-4CB9-B365-C9EF38F89BE6}"/>
               </a:ext>
             </a:extLst>
           </p:cNvPr>
@@ -5022,7 +5594,7 @@
           <p:cNvPr id="6" name="Espaço Reservado para Número de Slide 5">
             <a:extLst>
               <a:ext uri="{FF2B5EF4-FFF2-40B4-BE49-F238E27FC236}">
-                <a16:creationId xmlns="" xmlns:a16="http://schemas.microsoft.com/office/drawing/2014/main" id="{60CF3DD1-9AEC-4A57-B461-4E4DD86FAC18}"/>
+                <a16:creationId xmlns:a16="http://schemas.microsoft.com/office/drawing/2014/main" xmlns="" id="{60CF3DD1-9AEC-4A57-B461-4E4DD86FAC18}"/>
               </a:ext>
             </a:extLst>
           </p:cNvPr>
@@ -5694,7 +6266,7 @@
           <p:cNvPr id="2" name="Título 1">
             <a:extLst>
               <a:ext uri="{FF2B5EF4-FFF2-40B4-BE49-F238E27FC236}">
-                <a16:creationId xmlns="" xmlns:a16="http://schemas.microsoft.com/office/drawing/2014/main" id="{34AB2FF0-A4D7-4E28-991D-FF26140D5988}"/>
+                <a16:creationId xmlns:a16="http://schemas.microsoft.com/office/drawing/2014/main" xmlns="" id="{34AB2FF0-A4D7-4E28-991D-FF26140D5988}"/>
               </a:ext>
             </a:extLst>
           </p:cNvPr>
@@ -5731,7 +6303,7 @@
           <p:cNvPr id="3" name="Espaço Reservado para Texto 2">
             <a:extLst>
               <a:ext uri="{FF2B5EF4-FFF2-40B4-BE49-F238E27FC236}">
-                <a16:creationId xmlns="" xmlns:a16="http://schemas.microsoft.com/office/drawing/2014/main" id="{E2AC45B0-4145-40DB-8E61-105461170604}"/>
+                <a16:creationId xmlns:a16="http://schemas.microsoft.com/office/drawing/2014/main" xmlns="" id="{E2AC45B0-4145-40DB-8E61-105461170604}"/>
               </a:ext>
             </a:extLst>
           </p:cNvPr>
@@ -5856,7 +6428,7 @@
           <p:cNvPr id="4" name="Espaço Reservado para Data 3">
             <a:extLst>
               <a:ext uri="{FF2B5EF4-FFF2-40B4-BE49-F238E27FC236}">
-                <a16:creationId xmlns="" xmlns:a16="http://schemas.microsoft.com/office/drawing/2014/main" id="{50F1D3FB-740A-4EBA-A309-2CE71D12ECFB}"/>
+                <a16:creationId xmlns:a16="http://schemas.microsoft.com/office/drawing/2014/main" xmlns="" id="{50F1D3FB-740A-4EBA-A309-2CE71D12ECFB}"/>
               </a:ext>
             </a:extLst>
           </p:cNvPr>
@@ -5885,7 +6457,7 @@
           <p:cNvPr id="5" name="Espaço Reservado para Rodapé 4">
             <a:extLst>
               <a:ext uri="{FF2B5EF4-FFF2-40B4-BE49-F238E27FC236}">
-                <a16:creationId xmlns="" xmlns:a16="http://schemas.microsoft.com/office/drawing/2014/main" id="{BDCAB18F-8715-4465-A940-F9C193A2ACE9}"/>
+                <a16:creationId xmlns:a16="http://schemas.microsoft.com/office/drawing/2014/main" xmlns="" id="{BDCAB18F-8715-4465-A940-F9C193A2ACE9}"/>
               </a:ext>
             </a:extLst>
           </p:cNvPr>
@@ -5910,7 +6482,7 @@
           <p:cNvPr id="6" name="Espaço Reservado para Número de Slide 5">
             <a:extLst>
               <a:ext uri="{FF2B5EF4-FFF2-40B4-BE49-F238E27FC236}">
-                <a16:creationId xmlns="" xmlns:a16="http://schemas.microsoft.com/office/drawing/2014/main" id="{353466C6-8248-429F-8056-FF040BF509EB}"/>
+                <a16:creationId xmlns:a16="http://schemas.microsoft.com/office/drawing/2014/main" xmlns="" id="{353466C6-8248-429F-8056-FF040BF509EB}"/>
               </a:ext>
             </a:extLst>
           </p:cNvPr>
@@ -5969,7 +6541,7 @@
           <p:cNvPr id="2" name="Título 1">
             <a:extLst>
               <a:ext uri="{FF2B5EF4-FFF2-40B4-BE49-F238E27FC236}">
-                <a16:creationId xmlns="" xmlns:a16="http://schemas.microsoft.com/office/drawing/2014/main" id="{BC7BB9F0-F14B-4A91-B2B7-35BC47FE4DE7}"/>
+                <a16:creationId xmlns:a16="http://schemas.microsoft.com/office/drawing/2014/main" xmlns="" id="{BC7BB9F0-F14B-4A91-B2B7-35BC47FE4DE7}"/>
               </a:ext>
             </a:extLst>
           </p:cNvPr>
@@ -5997,7 +6569,7 @@
           <p:cNvPr id="3" name="Espaço Reservado para Conteúdo 2">
             <a:extLst>
               <a:ext uri="{FF2B5EF4-FFF2-40B4-BE49-F238E27FC236}">
-                <a16:creationId xmlns="" xmlns:a16="http://schemas.microsoft.com/office/drawing/2014/main" id="{EC1FC1C4-73DA-47A6-8496-B0B457F7D39A}"/>
+                <a16:creationId xmlns:a16="http://schemas.microsoft.com/office/drawing/2014/main" xmlns="" id="{EC1FC1C4-73DA-47A6-8496-B0B457F7D39A}"/>
               </a:ext>
             </a:extLst>
           </p:cNvPr>
@@ -6059,7 +6631,7 @@
           <p:cNvPr id="4" name="Espaço Reservado para Conteúdo 3">
             <a:extLst>
               <a:ext uri="{FF2B5EF4-FFF2-40B4-BE49-F238E27FC236}">
-                <a16:creationId xmlns="" xmlns:a16="http://schemas.microsoft.com/office/drawing/2014/main" id="{E92F06A8-A449-4D92-9912-76873E529B38}"/>
+                <a16:creationId xmlns:a16="http://schemas.microsoft.com/office/drawing/2014/main" xmlns="" id="{E92F06A8-A449-4D92-9912-76873E529B38}"/>
               </a:ext>
             </a:extLst>
           </p:cNvPr>
@@ -6121,7 +6693,7 @@
           <p:cNvPr id="5" name="Espaço Reservado para Data 4">
             <a:extLst>
               <a:ext uri="{FF2B5EF4-FFF2-40B4-BE49-F238E27FC236}">
-                <a16:creationId xmlns="" xmlns:a16="http://schemas.microsoft.com/office/drawing/2014/main" id="{938070A4-BC2F-4D55-BD8D-DEAF11BB9EE9}"/>
+                <a16:creationId xmlns:a16="http://schemas.microsoft.com/office/drawing/2014/main" xmlns="" id="{938070A4-BC2F-4D55-BD8D-DEAF11BB9EE9}"/>
               </a:ext>
             </a:extLst>
           </p:cNvPr>
@@ -6150,7 +6722,7 @@
           <p:cNvPr id="6" name="Espaço Reservado para Rodapé 5">
             <a:extLst>
               <a:ext uri="{FF2B5EF4-FFF2-40B4-BE49-F238E27FC236}">
-                <a16:creationId xmlns="" xmlns:a16="http://schemas.microsoft.com/office/drawing/2014/main" id="{45CC2DB8-844A-465F-BA9A-7734C80C7F43}"/>
+                <a16:creationId xmlns:a16="http://schemas.microsoft.com/office/drawing/2014/main" xmlns="" id="{45CC2DB8-844A-465F-BA9A-7734C80C7F43}"/>
               </a:ext>
             </a:extLst>
           </p:cNvPr>
@@ -6175,7 +6747,7 @@
           <p:cNvPr id="7" name="Espaço Reservado para Número de Slide 6">
             <a:extLst>
               <a:ext uri="{FF2B5EF4-FFF2-40B4-BE49-F238E27FC236}">
-                <a16:creationId xmlns="" xmlns:a16="http://schemas.microsoft.com/office/drawing/2014/main" id="{4CC606A8-097B-4040-94E0-CD8C88280D8F}"/>
+                <a16:creationId xmlns:a16="http://schemas.microsoft.com/office/drawing/2014/main" xmlns="" id="{4CC606A8-097B-4040-94E0-CD8C88280D8F}"/>
               </a:ext>
             </a:extLst>
           </p:cNvPr>
@@ -6234,7 +6806,7 @@
           <p:cNvPr id="2" name="Título 1">
             <a:extLst>
               <a:ext uri="{FF2B5EF4-FFF2-40B4-BE49-F238E27FC236}">
-                <a16:creationId xmlns="" xmlns:a16="http://schemas.microsoft.com/office/drawing/2014/main" id="{76D66686-0143-4CB6-8C09-BA326F1E7ACA}"/>
+                <a16:creationId xmlns:a16="http://schemas.microsoft.com/office/drawing/2014/main" xmlns="" id="{76D66686-0143-4CB6-8C09-BA326F1E7ACA}"/>
               </a:ext>
             </a:extLst>
           </p:cNvPr>
@@ -6267,7 +6839,7 @@
           <p:cNvPr id="3" name="Espaço Reservado para Texto 2">
             <a:extLst>
               <a:ext uri="{FF2B5EF4-FFF2-40B4-BE49-F238E27FC236}">
-                <a16:creationId xmlns="" xmlns:a16="http://schemas.microsoft.com/office/drawing/2014/main" id="{0227AB85-F59E-4BCE-B846-4FA0992C2F23}"/>
+                <a16:creationId xmlns:a16="http://schemas.microsoft.com/office/drawing/2014/main" xmlns="" id="{0227AB85-F59E-4BCE-B846-4FA0992C2F23}"/>
               </a:ext>
             </a:extLst>
           </p:cNvPr>
@@ -6338,7 +6910,7 @@
           <p:cNvPr id="4" name="Espaço Reservado para Conteúdo 3">
             <a:extLst>
               <a:ext uri="{FF2B5EF4-FFF2-40B4-BE49-F238E27FC236}">
-                <a16:creationId xmlns="" xmlns:a16="http://schemas.microsoft.com/office/drawing/2014/main" id="{3373456C-7319-4D0A-827D-D29F6B083F5D}"/>
+                <a16:creationId xmlns:a16="http://schemas.microsoft.com/office/drawing/2014/main" xmlns="" id="{3373456C-7319-4D0A-827D-D29F6B083F5D}"/>
               </a:ext>
             </a:extLst>
           </p:cNvPr>
@@ -6400,7 +6972,7 @@
           <p:cNvPr id="5" name="Espaço Reservado para Texto 4">
             <a:extLst>
               <a:ext uri="{FF2B5EF4-FFF2-40B4-BE49-F238E27FC236}">
-                <a16:creationId xmlns="" xmlns:a16="http://schemas.microsoft.com/office/drawing/2014/main" id="{4CD109D0-2E83-4262-8029-A871CEC47406}"/>
+                <a16:creationId xmlns:a16="http://schemas.microsoft.com/office/drawing/2014/main" xmlns="" id="{4CD109D0-2E83-4262-8029-A871CEC47406}"/>
               </a:ext>
             </a:extLst>
           </p:cNvPr>
@@ -6471,7 +7043,7 @@
           <p:cNvPr id="6" name="Espaço Reservado para Conteúdo 5">
             <a:extLst>
               <a:ext uri="{FF2B5EF4-FFF2-40B4-BE49-F238E27FC236}">
-                <a16:creationId xmlns="" xmlns:a16="http://schemas.microsoft.com/office/drawing/2014/main" id="{AD706E3A-CFBB-4A6C-A65F-D0360A9E74FE}"/>
+                <a16:creationId xmlns:a16="http://schemas.microsoft.com/office/drawing/2014/main" xmlns="" id="{AD706E3A-CFBB-4A6C-A65F-D0360A9E74FE}"/>
               </a:ext>
             </a:extLst>
           </p:cNvPr>
@@ -6533,7 +7105,7 @@
           <p:cNvPr id="7" name="Espaço Reservado para Data 6">
             <a:extLst>
               <a:ext uri="{FF2B5EF4-FFF2-40B4-BE49-F238E27FC236}">
-                <a16:creationId xmlns="" xmlns:a16="http://schemas.microsoft.com/office/drawing/2014/main" id="{4172C0E5-5AF0-4805-BB51-443733CD2BD5}"/>
+                <a16:creationId xmlns:a16="http://schemas.microsoft.com/office/drawing/2014/main" xmlns="" id="{4172C0E5-5AF0-4805-BB51-443733CD2BD5}"/>
               </a:ext>
             </a:extLst>
           </p:cNvPr>
@@ -6562,7 +7134,7 @@
           <p:cNvPr id="8" name="Espaço Reservado para Rodapé 7">
             <a:extLst>
               <a:ext uri="{FF2B5EF4-FFF2-40B4-BE49-F238E27FC236}">
-                <a16:creationId xmlns="" xmlns:a16="http://schemas.microsoft.com/office/drawing/2014/main" id="{0E801648-156F-497E-99CF-797DF48051E1}"/>
+                <a16:creationId xmlns:a16="http://schemas.microsoft.com/office/drawing/2014/main" xmlns="" id="{0E801648-156F-497E-99CF-797DF48051E1}"/>
               </a:ext>
             </a:extLst>
           </p:cNvPr>
@@ -6587,7 +7159,7 @@
           <p:cNvPr id="9" name="Espaço Reservado para Número de Slide 8">
             <a:extLst>
               <a:ext uri="{FF2B5EF4-FFF2-40B4-BE49-F238E27FC236}">
-                <a16:creationId xmlns="" xmlns:a16="http://schemas.microsoft.com/office/drawing/2014/main" id="{EEE23D32-80E7-4796-A137-66BF842E4B53}"/>
+                <a16:creationId xmlns:a16="http://schemas.microsoft.com/office/drawing/2014/main" xmlns="" id="{EEE23D32-80E7-4796-A137-66BF842E4B53}"/>
               </a:ext>
             </a:extLst>
           </p:cNvPr>
@@ -6646,7 +7218,7 @@
           <p:cNvPr id="2" name="Título 1">
             <a:extLst>
               <a:ext uri="{FF2B5EF4-FFF2-40B4-BE49-F238E27FC236}">
-                <a16:creationId xmlns="" xmlns:a16="http://schemas.microsoft.com/office/drawing/2014/main" id="{2BCE2379-C78F-47E1-8CFC-B846E7AF148D}"/>
+                <a16:creationId xmlns:a16="http://schemas.microsoft.com/office/drawing/2014/main" xmlns="" id="{2BCE2379-C78F-47E1-8CFC-B846E7AF148D}"/>
               </a:ext>
             </a:extLst>
           </p:cNvPr>
@@ -6674,7 +7246,7 @@
           <p:cNvPr id="3" name="Espaço Reservado para Data 2">
             <a:extLst>
               <a:ext uri="{FF2B5EF4-FFF2-40B4-BE49-F238E27FC236}">
-                <a16:creationId xmlns="" xmlns:a16="http://schemas.microsoft.com/office/drawing/2014/main" id="{342600A9-7F92-4E22-9D94-E4717252A817}"/>
+                <a16:creationId xmlns:a16="http://schemas.microsoft.com/office/drawing/2014/main" xmlns="" id="{342600A9-7F92-4E22-9D94-E4717252A817}"/>
               </a:ext>
             </a:extLst>
           </p:cNvPr>
@@ -6703,7 +7275,7 @@
           <p:cNvPr id="4" name="Espaço Reservado para Rodapé 3">
             <a:extLst>
               <a:ext uri="{FF2B5EF4-FFF2-40B4-BE49-F238E27FC236}">
-                <a16:creationId xmlns="" xmlns:a16="http://schemas.microsoft.com/office/drawing/2014/main" id="{192E6BED-F546-40CC-A2DF-99CBA853654E}"/>
+                <a16:creationId xmlns:a16="http://schemas.microsoft.com/office/drawing/2014/main" xmlns="" id="{192E6BED-F546-40CC-A2DF-99CBA853654E}"/>
               </a:ext>
             </a:extLst>
           </p:cNvPr>
@@ -6728,7 +7300,7 @@
           <p:cNvPr id="5" name="Espaço Reservado para Número de Slide 4">
             <a:extLst>
               <a:ext uri="{FF2B5EF4-FFF2-40B4-BE49-F238E27FC236}">
-                <a16:creationId xmlns="" xmlns:a16="http://schemas.microsoft.com/office/drawing/2014/main" id="{6091CC40-A8C4-4063-80EB-CC5099621678}"/>
+                <a16:creationId xmlns:a16="http://schemas.microsoft.com/office/drawing/2014/main" xmlns="" id="{6091CC40-A8C4-4063-80EB-CC5099621678}"/>
               </a:ext>
             </a:extLst>
           </p:cNvPr>
@@ -6787,7 +7359,7 @@
           <p:cNvPr id="2" name="Espaço Reservado para Data 1">
             <a:extLst>
               <a:ext uri="{FF2B5EF4-FFF2-40B4-BE49-F238E27FC236}">
-                <a16:creationId xmlns="" xmlns:a16="http://schemas.microsoft.com/office/drawing/2014/main" id="{DD19515C-212C-4EAE-84A3-8FF4BC844F1B}"/>
+                <a16:creationId xmlns:a16="http://schemas.microsoft.com/office/drawing/2014/main" xmlns="" id="{DD19515C-212C-4EAE-84A3-8FF4BC844F1B}"/>
               </a:ext>
             </a:extLst>
           </p:cNvPr>
@@ -6816,7 +7388,7 @@
           <p:cNvPr id="3" name="Espaço Reservado para Rodapé 2">
             <a:extLst>
               <a:ext uri="{FF2B5EF4-FFF2-40B4-BE49-F238E27FC236}">
-                <a16:creationId xmlns="" xmlns:a16="http://schemas.microsoft.com/office/drawing/2014/main" id="{94D3D120-B3E8-4C96-861D-7A4F12F49B3A}"/>
+                <a16:creationId xmlns:a16="http://schemas.microsoft.com/office/drawing/2014/main" xmlns="" id="{94D3D120-B3E8-4C96-861D-7A4F12F49B3A}"/>
               </a:ext>
             </a:extLst>
           </p:cNvPr>
@@ -6841,7 +7413,7 @@
           <p:cNvPr id="4" name="Espaço Reservado para Número de Slide 3">
             <a:extLst>
               <a:ext uri="{FF2B5EF4-FFF2-40B4-BE49-F238E27FC236}">
-                <a16:creationId xmlns="" xmlns:a16="http://schemas.microsoft.com/office/drawing/2014/main" id="{42E49B68-FA1B-468B-9F17-D5C09243D454}"/>
+                <a16:creationId xmlns:a16="http://schemas.microsoft.com/office/drawing/2014/main" xmlns="" id="{42E49B68-FA1B-468B-9F17-D5C09243D454}"/>
               </a:ext>
             </a:extLst>
           </p:cNvPr>
@@ -6900,7 +7472,7 @@
           <p:cNvPr id="2" name="Título 1">
             <a:extLst>
               <a:ext uri="{FF2B5EF4-FFF2-40B4-BE49-F238E27FC236}">
-                <a16:creationId xmlns="" xmlns:a16="http://schemas.microsoft.com/office/drawing/2014/main" id="{1C17BCBE-A897-4319-85EC-D87909C24980}"/>
+                <a16:creationId xmlns:a16="http://schemas.microsoft.com/office/drawing/2014/main" xmlns="" id="{1C17BCBE-A897-4319-85EC-D87909C24980}"/>
               </a:ext>
             </a:extLst>
           </p:cNvPr>
@@ -6937,7 +7509,7 @@
           <p:cNvPr id="3" name="Espaço Reservado para Conteúdo 2">
             <a:extLst>
               <a:ext uri="{FF2B5EF4-FFF2-40B4-BE49-F238E27FC236}">
-                <a16:creationId xmlns="" xmlns:a16="http://schemas.microsoft.com/office/drawing/2014/main" id="{4226F885-0204-4913-868B-4B8B82576F17}"/>
+                <a16:creationId xmlns:a16="http://schemas.microsoft.com/office/drawing/2014/main" xmlns="" id="{4226F885-0204-4913-868B-4B8B82576F17}"/>
               </a:ext>
             </a:extLst>
           </p:cNvPr>
@@ -7027,7 +7599,7 @@
           <p:cNvPr id="4" name="Espaço Reservado para Texto 3">
             <a:extLst>
               <a:ext uri="{FF2B5EF4-FFF2-40B4-BE49-F238E27FC236}">
-                <a16:creationId xmlns="" xmlns:a16="http://schemas.microsoft.com/office/drawing/2014/main" id="{00F9F784-A858-441B-8AB5-697098141751}"/>
+                <a16:creationId xmlns:a16="http://schemas.microsoft.com/office/drawing/2014/main" xmlns="" id="{00F9F784-A858-441B-8AB5-697098141751}"/>
               </a:ext>
             </a:extLst>
           </p:cNvPr>
@@ -7098,7 +7670,7 @@
           <p:cNvPr id="5" name="Espaço Reservado para Data 4">
             <a:extLst>
               <a:ext uri="{FF2B5EF4-FFF2-40B4-BE49-F238E27FC236}">
-                <a16:creationId xmlns="" xmlns:a16="http://schemas.microsoft.com/office/drawing/2014/main" id="{A4DC363A-5000-472E-8B17-02E7DCB8840A}"/>
+                <a16:creationId xmlns:a16="http://schemas.microsoft.com/office/drawing/2014/main" xmlns="" id="{A4DC363A-5000-472E-8B17-02E7DCB8840A}"/>
               </a:ext>
             </a:extLst>
           </p:cNvPr>
@@ -7127,7 +7699,7 @@
           <p:cNvPr id="6" name="Espaço Reservado para Rodapé 5">
             <a:extLst>
               <a:ext uri="{FF2B5EF4-FFF2-40B4-BE49-F238E27FC236}">
-                <a16:creationId xmlns="" xmlns:a16="http://schemas.microsoft.com/office/drawing/2014/main" id="{5548425D-2C21-4C56-BAD4-662978775C28}"/>
+                <a16:creationId xmlns:a16="http://schemas.microsoft.com/office/drawing/2014/main" xmlns="" id="{5548425D-2C21-4C56-BAD4-662978775C28}"/>
               </a:ext>
             </a:extLst>
           </p:cNvPr>
@@ -7152,7 +7724,7 @@
           <p:cNvPr id="7" name="Espaço Reservado para Número de Slide 6">
             <a:extLst>
               <a:ext uri="{FF2B5EF4-FFF2-40B4-BE49-F238E27FC236}">
-                <a16:creationId xmlns="" xmlns:a16="http://schemas.microsoft.com/office/drawing/2014/main" id="{C63E9726-E64C-42B2-AE8A-8C235A956B48}"/>
+                <a16:creationId xmlns:a16="http://schemas.microsoft.com/office/drawing/2014/main" xmlns="" id="{C63E9726-E64C-42B2-AE8A-8C235A956B48}"/>
               </a:ext>
             </a:extLst>
           </p:cNvPr>
@@ -7211,7 +7783,7 @@
           <p:cNvPr id="2" name="Título 1">
             <a:extLst>
               <a:ext uri="{FF2B5EF4-FFF2-40B4-BE49-F238E27FC236}">
-                <a16:creationId xmlns="" xmlns:a16="http://schemas.microsoft.com/office/drawing/2014/main" id="{11086A78-3E74-450C-96A6-CA8AC37AF772}"/>
+                <a16:creationId xmlns:a16="http://schemas.microsoft.com/office/drawing/2014/main" xmlns="" id="{11086A78-3E74-450C-96A6-CA8AC37AF772}"/>
               </a:ext>
             </a:extLst>
           </p:cNvPr>
@@ -7248,7 +7820,7 @@
           <p:cNvPr id="3" name="Espaço Reservado para Imagem 2">
             <a:extLst>
               <a:ext uri="{FF2B5EF4-FFF2-40B4-BE49-F238E27FC236}">
-                <a16:creationId xmlns="" xmlns:a16="http://schemas.microsoft.com/office/drawing/2014/main" id="{5F5B7312-975A-4DBC-9B2F-3652ADA006FD}"/>
+                <a16:creationId xmlns:a16="http://schemas.microsoft.com/office/drawing/2014/main" xmlns="" id="{5F5B7312-975A-4DBC-9B2F-3652ADA006FD}"/>
               </a:ext>
             </a:extLst>
           </p:cNvPr>
@@ -7315,7 +7887,7 @@
           <p:cNvPr id="4" name="Espaço Reservado para Texto 3">
             <a:extLst>
               <a:ext uri="{FF2B5EF4-FFF2-40B4-BE49-F238E27FC236}">
-                <a16:creationId xmlns="" xmlns:a16="http://schemas.microsoft.com/office/drawing/2014/main" id="{AAF805F5-1DFF-41C6-944C-7D79FE0D0963}"/>
+                <a16:creationId xmlns:a16="http://schemas.microsoft.com/office/drawing/2014/main" xmlns="" id="{AAF805F5-1DFF-41C6-944C-7D79FE0D0963}"/>
               </a:ext>
             </a:extLst>
           </p:cNvPr>
@@ -7386,7 +7958,7 @@
           <p:cNvPr id="5" name="Espaço Reservado para Data 4">
             <a:extLst>
               <a:ext uri="{FF2B5EF4-FFF2-40B4-BE49-F238E27FC236}">
-                <a16:creationId xmlns="" xmlns:a16="http://schemas.microsoft.com/office/drawing/2014/main" id="{02113D81-8665-4516-BD81-C6A1F254EECD}"/>
+                <a16:creationId xmlns:a16="http://schemas.microsoft.com/office/drawing/2014/main" xmlns="" id="{02113D81-8665-4516-BD81-C6A1F254EECD}"/>
               </a:ext>
             </a:extLst>
           </p:cNvPr>
@@ -7415,7 +7987,7 @@
           <p:cNvPr id="6" name="Espaço Reservado para Rodapé 5">
             <a:extLst>
               <a:ext uri="{FF2B5EF4-FFF2-40B4-BE49-F238E27FC236}">
-                <a16:creationId xmlns="" xmlns:a16="http://schemas.microsoft.com/office/drawing/2014/main" id="{2B00C88B-FF32-40AA-A187-727D96FD7862}"/>
+                <a16:creationId xmlns:a16="http://schemas.microsoft.com/office/drawing/2014/main" xmlns="" id="{2B00C88B-FF32-40AA-A187-727D96FD7862}"/>
               </a:ext>
             </a:extLst>
           </p:cNvPr>
@@ -7440,7 +8012,7 @@
           <p:cNvPr id="7" name="Espaço Reservado para Número de Slide 6">
             <a:extLst>
               <a:ext uri="{FF2B5EF4-FFF2-40B4-BE49-F238E27FC236}">
-                <a16:creationId xmlns="" xmlns:a16="http://schemas.microsoft.com/office/drawing/2014/main" id="{A04D1A2D-69F7-4B8F-A730-BC26DC340BA6}"/>
+                <a16:creationId xmlns:a16="http://schemas.microsoft.com/office/drawing/2014/main" xmlns="" id="{A04D1A2D-69F7-4B8F-A730-BC26DC340BA6}"/>
               </a:ext>
             </a:extLst>
           </p:cNvPr>
@@ -7504,7 +8076,7 @@
           <p:cNvPr id="2" name="Espaço Reservado para Título 1">
             <a:extLst>
               <a:ext uri="{FF2B5EF4-FFF2-40B4-BE49-F238E27FC236}">
-                <a16:creationId xmlns="" xmlns:a16="http://schemas.microsoft.com/office/drawing/2014/main" id="{E69A0273-1966-4A1B-9370-4C1CE5036371}"/>
+                <a16:creationId xmlns:a16="http://schemas.microsoft.com/office/drawing/2014/main" xmlns="" id="{E69A0273-1966-4A1B-9370-4C1CE5036371}"/>
               </a:ext>
             </a:extLst>
           </p:cNvPr>
@@ -7542,7 +8114,7 @@
           <p:cNvPr id="3" name="Espaço Reservado para Texto 2">
             <a:extLst>
               <a:ext uri="{FF2B5EF4-FFF2-40B4-BE49-F238E27FC236}">
-                <a16:creationId xmlns="" xmlns:a16="http://schemas.microsoft.com/office/drawing/2014/main" id="{3B9CF87A-0448-49A7-AB25-EBC1D56A40EF}"/>
+                <a16:creationId xmlns:a16="http://schemas.microsoft.com/office/drawing/2014/main" xmlns="" id="{3B9CF87A-0448-49A7-AB25-EBC1D56A40EF}"/>
               </a:ext>
             </a:extLst>
           </p:cNvPr>
@@ -7609,7 +8181,7 @@
           <p:cNvPr id="4" name="Espaço Reservado para Data 3">
             <a:extLst>
               <a:ext uri="{FF2B5EF4-FFF2-40B4-BE49-F238E27FC236}">
-                <a16:creationId xmlns="" xmlns:a16="http://schemas.microsoft.com/office/drawing/2014/main" id="{2EF7B1F2-BB5A-44D0-816D-16AD2C71430E}"/>
+                <a16:creationId xmlns:a16="http://schemas.microsoft.com/office/drawing/2014/main" xmlns="" id="{2EF7B1F2-BB5A-44D0-816D-16AD2C71430E}"/>
               </a:ext>
             </a:extLst>
           </p:cNvPr>
@@ -7656,7 +8228,7 @@
           <p:cNvPr id="5" name="Espaço Reservado para Rodapé 4">
             <a:extLst>
               <a:ext uri="{FF2B5EF4-FFF2-40B4-BE49-F238E27FC236}">
-                <a16:creationId xmlns="" xmlns:a16="http://schemas.microsoft.com/office/drawing/2014/main" id="{C703F94C-2CC8-4DAA-BC35-14FC3E841DCD}"/>
+                <a16:creationId xmlns:a16="http://schemas.microsoft.com/office/drawing/2014/main" xmlns="" id="{C703F94C-2CC8-4DAA-BC35-14FC3E841DCD}"/>
               </a:ext>
             </a:extLst>
           </p:cNvPr>
@@ -7699,7 +8271,7 @@
           <p:cNvPr id="6" name="Espaço Reservado para Número de Slide 5">
             <a:extLst>
               <a:ext uri="{FF2B5EF4-FFF2-40B4-BE49-F238E27FC236}">
-                <a16:creationId xmlns="" xmlns:a16="http://schemas.microsoft.com/office/drawing/2014/main" id="{64051336-7048-457A-8B61-D94291D71648}"/>
+                <a16:creationId xmlns:a16="http://schemas.microsoft.com/office/drawing/2014/main" xmlns="" id="{64051336-7048-457A-8B61-D94291D71648}"/>
               </a:ext>
             </a:extLst>
           </p:cNvPr>
@@ -8579,7 +9151,7 @@
           <p:cNvPr id="2" name="Título 1">
             <a:extLst>
               <a:ext uri="{FF2B5EF4-FFF2-40B4-BE49-F238E27FC236}">
-                <a16:creationId xmlns="" xmlns:a16="http://schemas.microsoft.com/office/drawing/2014/main" id="{32666AC8-2E17-4DB4-B0F5-60C640CCFD2E}"/>
+                <a16:creationId xmlns:a16="http://schemas.microsoft.com/office/drawing/2014/main" xmlns="" id="{32666AC8-2E17-4DB4-B0F5-60C640CCFD2E}"/>
               </a:ext>
             </a:extLst>
           </p:cNvPr>
@@ -8638,7 +9210,7 @@
           <p:cNvPr id="1026" name="Picture 2" descr="Logo">
             <a:extLst>
               <a:ext uri="{FF2B5EF4-FFF2-40B4-BE49-F238E27FC236}">
-                <a16:creationId xmlns="" xmlns:a16="http://schemas.microsoft.com/office/drawing/2014/main" id="{3F2642E0-4F6A-4196-8F58-E77D36E9A33F}"/>
+                <a16:creationId xmlns:a16="http://schemas.microsoft.com/office/drawing/2014/main" xmlns="" id="{3F2642E0-4F6A-4196-8F58-E77D36E9A33F}"/>
               </a:ext>
             </a:extLst>
           </p:cNvPr>
@@ -8683,7 +9255,7 @@
           <p:cNvPr id="5122" name="Picture 2" descr="Image result for machine learning">
             <a:extLst>
               <a:ext uri="{FF2B5EF4-FFF2-40B4-BE49-F238E27FC236}">
-                <a16:creationId xmlns="" xmlns:a16="http://schemas.microsoft.com/office/drawing/2014/main" id="{810CE0A2-4102-44A6-A370-175E7896CDCB}"/>
+                <a16:creationId xmlns:a16="http://schemas.microsoft.com/office/drawing/2014/main" xmlns="" id="{810CE0A2-4102-44A6-A370-175E7896CDCB}"/>
               </a:ext>
             </a:extLst>
           </p:cNvPr>
@@ -8728,7 +9300,7 @@
           <p:cNvPr id="3" name="Picture 2" descr="IoT Group">
             <a:extLst>
               <a:ext uri="{FF2B5EF4-FFF2-40B4-BE49-F238E27FC236}">
-                <a16:creationId xmlns="" xmlns:a16="http://schemas.microsoft.com/office/drawing/2014/main" id="{AC034F57-E830-B6E7-6790-12FDBBDB2975}"/>
+                <a16:creationId xmlns:a16="http://schemas.microsoft.com/office/drawing/2014/main" xmlns="" id="{AC034F57-E830-B6E7-6790-12FDBBDB2975}"/>
               </a:ext>
             </a:extLst>
           </p:cNvPr>
@@ -8773,7 +9345,7 @@
           <p:cNvPr id="5" name="CaixaDeTexto 4">
             <a:extLst>
               <a:ext uri="{FF2B5EF4-FFF2-40B4-BE49-F238E27FC236}">
-                <a16:creationId xmlns="" xmlns:a16="http://schemas.microsoft.com/office/drawing/2014/main" id="{2D82026D-D2EA-05D7-61F2-DEE04704DB7E}"/>
+                <a16:creationId xmlns:a16="http://schemas.microsoft.com/office/drawing/2014/main" xmlns="" id="{2D82026D-D2EA-05D7-61F2-DEE04704DB7E}"/>
               </a:ext>
             </a:extLst>
           </p:cNvPr>
@@ -8858,7 +9430,7 @@
           <p:cNvPr id="2" name="Título 1">
             <a:extLst>
               <a:ext uri="{FF2B5EF4-FFF2-40B4-BE49-F238E27FC236}">
-                <a16:creationId xmlns="" xmlns:a16="http://schemas.microsoft.com/office/drawing/2014/main" id="{5F09B89C-3183-4D52-981A-62798DDFF2B8}"/>
+                <a16:creationId xmlns:a16="http://schemas.microsoft.com/office/drawing/2014/main" xmlns="" id="{5F09B89C-3183-4D52-981A-62798DDFF2B8}"/>
               </a:ext>
             </a:extLst>
           </p:cNvPr>
@@ -8898,7 +9470,7 @@
           <p:cNvPr id="3" name="AutoShape 2" descr="An example of graph signal reconstruction over wireless sensor network. |  Download Scientific Diagram">
             <a:extLst>
               <a:ext uri="{FF2B5EF4-FFF2-40B4-BE49-F238E27FC236}">
-                <a16:creationId xmlns="" xmlns:a16="http://schemas.microsoft.com/office/drawing/2014/main" id="{0166B4DD-D72A-4A54-94A7-2C38133837FD}"/>
+                <a16:creationId xmlns:a16="http://schemas.microsoft.com/office/drawing/2014/main" xmlns="" id="{0166B4DD-D72A-4A54-94A7-2C38133837FD}"/>
               </a:ext>
             </a:extLst>
           </p:cNvPr>
@@ -8949,7 +9521,7 @@
           <p:cNvPr id="7" name="AutoShape 4" descr="An example of graph signal reconstruction over wireless sensor network. |  Download Scientific Diagram">
             <a:extLst>
               <a:ext uri="{FF2B5EF4-FFF2-40B4-BE49-F238E27FC236}">
-                <a16:creationId xmlns="" xmlns:a16="http://schemas.microsoft.com/office/drawing/2014/main" id="{14C2B67D-81A1-457E-A410-FE4350A3CCA4}"/>
+                <a16:creationId xmlns:a16="http://schemas.microsoft.com/office/drawing/2014/main" xmlns="" id="{14C2B67D-81A1-457E-A410-FE4350A3CCA4}"/>
               </a:ext>
             </a:extLst>
           </p:cNvPr>
@@ -9000,7 +9572,7 @@
           <p:cNvPr id="4" name="Espaço Reservado para Conteúdo 3">
             <a:extLst>
               <a:ext uri="{FF2B5EF4-FFF2-40B4-BE49-F238E27FC236}">
-                <a16:creationId xmlns="" xmlns:a16="http://schemas.microsoft.com/office/drawing/2014/main" id="{0349BA64-C9D7-4730-9CA9-5C4AD9FC7969}"/>
+                <a16:creationId xmlns:a16="http://schemas.microsoft.com/office/drawing/2014/main" xmlns="" id="{0349BA64-C9D7-4730-9CA9-5C4AD9FC7969}"/>
               </a:ext>
             </a:extLst>
           </p:cNvPr>
@@ -9163,7 +9735,7 @@
           <p:cNvPr id="2" name="Título 1">
             <a:extLst>
               <a:ext uri="{FF2B5EF4-FFF2-40B4-BE49-F238E27FC236}">
-                <a16:creationId xmlns="" xmlns:a16="http://schemas.microsoft.com/office/drawing/2014/main" id="{5F09B89C-3183-4D52-981A-62798DDFF2B8}"/>
+                <a16:creationId xmlns:a16="http://schemas.microsoft.com/office/drawing/2014/main" xmlns="" id="{5F09B89C-3183-4D52-981A-62798DDFF2B8}"/>
               </a:ext>
             </a:extLst>
           </p:cNvPr>
@@ -9203,7 +9775,7 @@
           <p:cNvPr id="3" name="AutoShape 2" descr="An example of graph signal reconstruction over wireless sensor network. |  Download Scientific Diagram">
             <a:extLst>
               <a:ext uri="{FF2B5EF4-FFF2-40B4-BE49-F238E27FC236}">
-                <a16:creationId xmlns="" xmlns:a16="http://schemas.microsoft.com/office/drawing/2014/main" id="{0166B4DD-D72A-4A54-94A7-2C38133837FD}"/>
+                <a16:creationId xmlns:a16="http://schemas.microsoft.com/office/drawing/2014/main" xmlns="" id="{0166B4DD-D72A-4A54-94A7-2C38133837FD}"/>
               </a:ext>
             </a:extLst>
           </p:cNvPr>
@@ -9254,7 +9826,7 @@
           <p:cNvPr id="7" name="AutoShape 4" descr="An example of graph signal reconstruction over wireless sensor network. |  Download Scientific Diagram">
             <a:extLst>
               <a:ext uri="{FF2B5EF4-FFF2-40B4-BE49-F238E27FC236}">
-                <a16:creationId xmlns="" xmlns:a16="http://schemas.microsoft.com/office/drawing/2014/main" id="{14C2B67D-81A1-457E-A410-FE4350A3CCA4}"/>
+                <a16:creationId xmlns:a16="http://schemas.microsoft.com/office/drawing/2014/main" xmlns="" id="{14C2B67D-81A1-457E-A410-FE4350A3CCA4}"/>
               </a:ext>
             </a:extLst>
           </p:cNvPr>
@@ -9305,7 +9877,7 @@
           <p:cNvPr id="4" name="Espaço Reservado para Conteúdo 3">
             <a:extLst>
               <a:ext uri="{FF2B5EF4-FFF2-40B4-BE49-F238E27FC236}">
-                <a16:creationId xmlns="" xmlns:a16="http://schemas.microsoft.com/office/drawing/2014/main" id="{0349BA64-C9D7-4730-9CA9-5C4AD9FC7969}"/>
+                <a16:creationId xmlns:a16="http://schemas.microsoft.com/office/drawing/2014/main" xmlns="" id="{0349BA64-C9D7-4730-9CA9-5C4AD9FC7969}"/>
               </a:ext>
             </a:extLst>
           </p:cNvPr>
@@ -9456,12 +10028,35 @@
           <a:chExt cx="0" cy="0"/>
         </a:xfrm>
       </p:grpSpPr>
+      <p:pic>
+        <p:nvPicPr>
+          <p:cNvPr id="5" name="Imagem 4"/>
+          <p:cNvPicPr>
+            <a:picLocks noChangeAspect="1"/>
+          </p:cNvPicPr>
+          <p:nvPr/>
+        </p:nvPicPr>
+        <p:blipFill rotWithShape="1">
+          <a:blip r:embed="rId4"/>
+          <a:srcRect l="1037" t="1338"/>
+          <a:stretch/>
+        </p:blipFill>
+        <p:spPr>
+          <a:xfrm>
+            <a:off x="78827" y="1333707"/>
+            <a:ext cx="10279117" cy="4646876"/>
+          </a:xfrm>
+          <a:prstGeom prst="rect">
+            <a:avLst/>
+          </a:prstGeom>
+        </p:spPr>
+      </p:pic>
       <p:sp>
         <p:nvSpPr>
           <p:cNvPr id="2" name="Título 1">
             <a:extLst>
               <a:ext uri="{FF2B5EF4-FFF2-40B4-BE49-F238E27FC236}">
-                <a16:creationId xmlns="" xmlns:a16="http://schemas.microsoft.com/office/drawing/2014/main" id="{5F09B89C-3183-4D52-981A-62798DDFF2B8}"/>
+                <a16:creationId xmlns:a16="http://schemas.microsoft.com/office/drawing/2014/main" xmlns="" id="{5F09B89C-3183-4D52-981A-62798DDFF2B8}"/>
               </a:ext>
             </a:extLst>
           </p:cNvPr>
@@ -9501,7 +10096,7 @@
           <p:cNvPr id="3" name="AutoShape 2" descr="An example of graph signal reconstruction over wireless sensor network. |  Download Scientific Diagram">
             <a:extLst>
               <a:ext uri="{FF2B5EF4-FFF2-40B4-BE49-F238E27FC236}">
-                <a16:creationId xmlns="" xmlns:a16="http://schemas.microsoft.com/office/drawing/2014/main" id="{0166B4DD-D72A-4A54-94A7-2C38133837FD}"/>
+                <a16:creationId xmlns:a16="http://schemas.microsoft.com/office/drawing/2014/main" xmlns="" id="{0166B4DD-D72A-4A54-94A7-2C38133837FD}"/>
               </a:ext>
             </a:extLst>
           </p:cNvPr>
@@ -9552,7 +10147,7 @@
           <p:cNvPr id="7" name="AutoShape 4" descr="An example of graph signal reconstruction over wireless sensor network. |  Download Scientific Diagram">
             <a:extLst>
               <a:ext uri="{FF2B5EF4-FFF2-40B4-BE49-F238E27FC236}">
-                <a16:creationId xmlns="" xmlns:a16="http://schemas.microsoft.com/office/drawing/2014/main" id="{14C2B67D-81A1-457E-A410-FE4350A3CCA4}"/>
+                <a16:creationId xmlns:a16="http://schemas.microsoft.com/office/drawing/2014/main" xmlns="" id="{14C2B67D-81A1-457E-A410-FE4350A3CCA4}"/>
               </a:ext>
             </a:extLst>
           </p:cNvPr>
@@ -9598,30 +10193,45 @@
           </a:p>
         </p:txBody>
       </p:sp>
-      <p:pic>
-        <p:nvPicPr>
-          <p:cNvPr id="5" name="Imagem 4"/>
-          <p:cNvPicPr>
-            <a:picLocks noChangeAspect="1"/>
-          </p:cNvPicPr>
+      <p:sp>
+        <p:nvSpPr>
+          <p:cNvPr id="4" name="CaixaDeTexto 3"/>
+          <p:cNvSpPr txBox="1"/>
           <p:nvPr/>
-        </p:nvPicPr>
-        <p:blipFill>
-          <a:blip r:embed="rId4"/>
-          <a:stretch>
-            <a:fillRect/>
-          </a:stretch>
-        </p:blipFill>
+        </p:nvSpPr>
         <p:spPr>
           <a:xfrm>
-            <a:off x="304800" y="1362389"/>
-            <a:ext cx="10011378" cy="4539621"/>
+            <a:off x="7330966" y="4099034"/>
+            <a:ext cx="2412124" cy="830997"/>
           </a:xfrm>
           <a:prstGeom prst="rect">
             <a:avLst/>
           </a:prstGeom>
-        </p:spPr>
-      </p:pic>
+          <a:noFill/>
+        </p:spPr>
+        <p:txBody>
+          <a:bodyPr wrap="square" rtlCol="0">
+            <a:spAutoFit/>
+          </a:bodyPr>
+          <a:lstStyle/>
+          <a:p>
+            <a:pPr algn="ctr"/>
+            <a:r>
+              <a:rPr lang="pt-BR" sz="2400" b="1" i="1" dirty="0" smtClean="0">
+                <a:solidFill>
+                  <a:srgbClr val="7030A0"/>
+                </a:solidFill>
+              </a:rPr>
+              <a:t>375 atributos de entrada!</a:t>
+            </a:r>
+            <a:endParaRPr lang="pt-BR" sz="2400" b="1" i="1" dirty="0">
+              <a:solidFill>
+                <a:srgbClr val="7030A0"/>
+              </a:solidFill>
+            </a:endParaRPr>
+          </a:p>
+        </p:txBody>
+      </p:sp>
     </p:spTree>
     <p:extLst>
       <p:ext uri="{BB962C8B-B14F-4D97-AF65-F5344CB8AC3E}">
@@ -9632,12 +10242,33 @@
   <p:clrMapOvr>
     <a:masterClrMapping/>
   </p:clrMapOvr>
+  <p:timing>
+    <p:tnLst>
+      <p:par>
+        <p:cTn id="1" dur="indefinite" restart="never" nodeType="tmRoot"/>
+      </p:par>
+    </p:tnLst>
+  </p:timing>
 </p:sld>
 </file>
 
 <file path=ppt/slides/slide13.xml><?xml version="1.0" encoding="utf-8"?>
 <p:sld xmlns:a="http://schemas.openxmlformats.org/drawingml/2006/main" xmlns:r="http://schemas.openxmlformats.org/officeDocument/2006/relationships" xmlns:p="http://schemas.openxmlformats.org/presentationml/2006/main">
   <p:cSld>
+    <p:bg>
+      <p:bgPr>
+        <a:blipFill dpi="0" rotWithShape="1">
+          <a:blip r:embed="rId3">
+            <a:lum/>
+          </a:blip>
+          <a:srcRect/>
+          <a:stretch>
+            <a:fillRect/>
+          </a:stretch>
+        </a:blipFill>
+        <a:effectLst/>
+      </p:bgPr>
+    </p:bg>
     <p:spTree>
       <p:nvGrpSpPr>
         <p:cNvPr id="1" name=""/>
@@ -9652,9 +10283,38 @@
           <a:chExt cx="0" cy="0"/>
         </a:xfrm>
       </p:grpSpPr>
-      <p:sp>
-        <p:nvSpPr>
-          <p:cNvPr id="2" name="Título 1"/>
+      <p:pic>
+        <p:nvPicPr>
+          <p:cNvPr id="5" name="Imagem 4"/>
+          <p:cNvPicPr>
+            <a:picLocks noChangeAspect="1"/>
+          </p:cNvPicPr>
+          <p:nvPr/>
+        </p:nvPicPr>
+        <p:blipFill rotWithShape="1">
+          <a:blip r:embed="rId4"/>
+          <a:srcRect l="1037" t="1338"/>
+          <a:stretch/>
+        </p:blipFill>
+        <p:spPr>
+          <a:xfrm>
+            <a:off x="78827" y="1333707"/>
+            <a:ext cx="10279117" cy="4646876"/>
+          </a:xfrm>
+          <a:prstGeom prst="rect">
+            <a:avLst/>
+          </a:prstGeom>
+        </p:spPr>
+      </p:pic>
+      <p:sp>
+        <p:nvSpPr>
+          <p:cNvPr id="2" name="Título 1">
+            <a:extLst>
+              <a:ext uri="{FF2B5EF4-FFF2-40B4-BE49-F238E27FC236}">
+                <a16:creationId xmlns:a16="http://schemas.microsoft.com/office/drawing/2014/main" xmlns="" id="{5F09B89C-3183-4D52-981A-62798DDFF2B8}"/>
+              </a:ext>
+            </a:extLst>
+          </p:cNvPr>
           <p:cNvSpPr>
             <a:spLocks noGrp="1"/>
           </p:cNvSpPr>
@@ -9662,44 +10322,188 @@
             <p:ph type="title"/>
           </p:nvPr>
         </p:nvSpPr>
-        <p:spPr/>
-        <p:txBody>
-          <a:bodyPr/>
-          <a:lstStyle/>
-          <a:p>
-            <a:endParaRPr lang="pt-BR"/>
-          </a:p>
-        </p:txBody>
-      </p:sp>
-      <p:sp>
-        <p:nvSpPr>
-          <p:cNvPr id="3" name="Espaço Reservado para Conteúdo 2"/>
-          <p:cNvSpPr>
-            <a:spLocks noGrp="1"/>
-          </p:cNvSpPr>
-          <p:nvPr>
-            <p:ph idx="1"/>
-          </p:nvPr>
-        </p:nvSpPr>
-        <p:spPr/>
-        <p:txBody>
-          <a:bodyPr/>
-          <a:lstStyle/>
-          <a:p>
-            <a:endParaRPr lang="pt-BR"/>
+        <p:spPr>
+          <a:xfrm>
+            <a:off x="304800" y="183092"/>
+            <a:ext cx="6559285" cy="762000"/>
+          </a:xfrm>
+        </p:spPr>
+        <p:txBody>
+          <a:bodyPr>
+            <a:normAutofit/>
+          </a:bodyPr>
+          <a:lstStyle/>
+          <a:p>
+            <a:r>
+              <a:rPr lang="pt-BR" dirty="0"/>
+              <a:t>Motion </a:t>
+            </a:r>
+            <a:r>
+              <a:rPr lang="pt-BR" dirty="0" err="1"/>
+              <a:t>Classification</a:t>
+            </a:r>
+            <a:endParaRPr lang="pt-BR" dirty="0"/>
+          </a:p>
+        </p:txBody>
+      </p:sp>
+      <p:sp>
+        <p:nvSpPr>
+          <p:cNvPr id="3" name="AutoShape 2" descr="An example of graph signal reconstruction over wireless sensor network. |  Download Scientific Diagram">
+            <a:extLst>
+              <a:ext uri="{FF2B5EF4-FFF2-40B4-BE49-F238E27FC236}">
+                <a16:creationId xmlns:a16="http://schemas.microsoft.com/office/drawing/2014/main" xmlns="" id="{0166B4DD-D72A-4A54-94A7-2C38133837FD}"/>
+              </a:ext>
+            </a:extLst>
+          </p:cNvPr>
+          <p:cNvSpPr>
+            <a:spLocks noChangeAspect="1" noChangeArrowheads="1"/>
+          </p:cNvSpPr>
+          <p:nvPr/>
+        </p:nvSpPr>
+        <p:spPr bwMode="auto">
+          <a:xfrm>
+            <a:off x="5994400" y="3327400"/>
+            <a:ext cx="203200" cy="203200"/>
+          </a:xfrm>
+          <a:prstGeom prst="rect">
+            <a:avLst/>
+          </a:prstGeom>
+          <a:noFill/>
+          <a:extLst>
+            <a:ext uri="{909E8E84-426E-40DD-AFC4-6F175D3DCCD1}">
+              <a14:hiddenFill xmlns:a14="http://schemas.microsoft.com/office/drawing/2010/main">
+                <a:solidFill>
+                  <a:srgbClr val="FFFFFF"/>
+                </a:solidFill>
+              </a14:hiddenFill>
+            </a:ext>
+          </a:extLst>
+        </p:spPr>
+        <p:txBody>
+          <a:bodyPr vert="horz" wrap="square" lIns="60960" tIns="30480" rIns="60960" bIns="30480" numCol="1" anchor="t" anchorCtr="0" compatLnSpc="1">
+            <a:prstTxWarp prst="textNoShape">
+              <a:avLst/>
+            </a:prstTxWarp>
+          </a:bodyPr>
+          <a:lstStyle/>
+          <a:p>
+            <a:pPr defTabSz="609630"/>
+            <a:endParaRPr lang="pt-BR" sz="1200">
+              <a:solidFill>
+                <a:prstClr val="black"/>
+              </a:solidFill>
+              <a:latin typeface="Calibri"/>
+            </a:endParaRPr>
+          </a:p>
+        </p:txBody>
+      </p:sp>
+      <p:sp>
+        <p:nvSpPr>
+          <p:cNvPr id="7" name="AutoShape 4" descr="An example of graph signal reconstruction over wireless sensor network. |  Download Scientific Diagram">
+            <a:extLst>
+              <a:ext uri="{FF2B5EF4-FFF2-40B4-BE49-F238E27FC236}">
+                <a16:creationId xmlns:a16="http://schemas.microsoft.com/office/drawing/2014/main" xmlns="" id="{14C2B67D-81A1-457E-A410-FE4350A3CCA4}"/>
+              </a:ext>
+            </a:extLst>
+          </p:cNvPr>
+          <p:cNvSpPr>
+            <a:spLocks noChangeAspect="1" noChangeArrowheads="1"/>
+          </p:cNvSpPr>
+          <p:nvPr/>
+        </p:nvSpPr>
+        <p:spPr bwMode="auto">
+          <a:xfrm>
+            <a:off x="6096000" y="3429000"/>
+            <a:ext cx="203200" cy="203200"/>
+          </a:xfrm>
+          <a:prstGeom prst="rect">
+            <a:avLst/>
+          </a:prstGeom>
+          <a:noFill/>
+          <a:extLst>
+            <a:ext uri="{909E8E84-426E-40DD-AFC4-6F175D3DCCD1}">
+              <a14:hiddenFill xmlns:a14="http://schemas.microsoft.com/office/drawing/2010/main">
+                <a:solidFill>
+                  <a:srgbClr val="FFFFFF"/>
+                </a:solidFill>
+              </a14:hiddenFill>
+            </a:ext>
+          </a:extLst>
+        </p:spPr>
+        <p:txBody>
+          <a:bodyPr vert="horz" wrap="square" lIns="60960" tIns="30480" rIns="60960" bIns="30480" numCol="1" anchor="t" anchorCtr="0" compatLnSpc="1">
+            <a:prstTxWarp prst="textNoShape">
+              <a:avLst/>
+            </a:prstTxWarp>
+          </a:bodyPr>
+          <a:lstStyle/>
+          <a:p>
+            <a:pPr defTabSz="609630"/>
+            <a:endParaRPr lang="pt-BR" sz="1200">
+              <a:solidFill>
+                <a:prstClr val="black"/>
+              </a:solidFill>
+              <a:latin typeface="Calibri"/>
+            </a:endParaRPr>
+          </a:p>
+        </p:txBody>
+      </p:sp>
+      <p:sp>
+        <p:nvSpPr>
+          <p:cNvPr id="4" name="CaixaDeTexto 3"/>
+          <p:cNvSpPr txBox="1"/>
+          <p:nvPr/>
+        </p:nvSpPr>
+        <p:spPr>
+          <a:xfrm>
+            <a:off x="7078717" y="3657145"/>
+            <a:ext cx="3862551" cy="1938992"/>
+          </a:xfrm>
+          <a:prstGeom prst="rect">
+            <a:avLst/>
+          </a:prstGeom>
+          <a:noFill/>
+        </p:spPr>
+        <p:txBody>
+          <a:bodyPr wrap="square" rtlCol="0">
+            <a:spAutoFit/>
+          </a:bodyPr>
+          <a:lstStyle/>
+          <a:p>
+            <a:pPr algn="ctr"/>
+            <a:r>
+              <a:rPr lang="pt-BR" sz="2400" b="1" i="1" dirty="0" smtClean="0">
+                <a:solidFill>
+                  <a:srgbClr val="7030A0"/>
+                </a:solidFill>
+              </a:rPr>
+              <a:t>Precisamos de uma rede complexa (e.g., LSTM) para processar todas os atributos de entrada e compreender cada janela.</a:t>
+            </a:r>
+            <a:endParaRPr lang="pt-BR" sz="2400" b="1" i="1" dirty="0">
+              <a:solidFill>
+                <a:srgbClr val="FF0000"/>
+              </a:solidFill>
+            </a:endParaRPr>
           </a:p>
         </p:txBody>
       </p:sp>
     </p:spTree>
     <p:extLst>
       <p:ext uri="{BB962C8B-B14F-4D97-AF65-F5344CB8AC3E}">
-        <p14:creationId xmlns:p14="http://schemas.microsoft.com/office/powerpoint/2010/main" val="320590118"/>
+        <p14:creationId xmlns:p14="http://schemas.microsoft.com/office/powerpoint/2010/main" val="837169749"/>
       </p:ext>
     </p:extLst>
   </p:cSld>
   <p:clrMapOvr>
     <a:masterClrMapping/>
   </p:clrMapOvr>
+  <p:timing>
+    <p:tnLst>
+      <p:par>
+        <p:cTn id="1" dur="indefinite" restart="never" nodeType="tmRoot"/>
+      </p:par>
+    </p:tnLst>
+  </p:timing>
 </p:sld>
 </file>
 
@@ -9734,12 +10538,35 @@
           <a:chExt cx="0" cy="0"/>
         </a:xfrm>
       </p:grpSpPr>
+      <p:pic>
+        <p:nvPicPr>
+          <p:cNvPr id="5" name="Imagem 4"/>
+          <p:cNvPicPr>
+            <a:picLocks noChangeAspect="1"/>
+          </p:cNvPicPr>
+          <p:nvPr/>
+        </p:nvPicPr>
+        <p:blipFill rotWithShape="1">
+          <a:blip r:embed="rId4"/>
+          <a:srcRect l="1037" t="1338"/>
+          <a:stretch/>
+        </p:blipFill>
+        <p:spPr>
+          <a:xfrm>
+            <a:off x="0" y="1333707"/>
+            <a:ext cx="10279117" cy="4646876"/>
+          </a:xfrm>
+          <a:prstGeom prst="rect">
+            <a:avLst/>
+          </a:prstGeom>
+        </p:spPr>
+      </p:pic>
       <p:sp>
         <p:nvSpPr>
           <p:cNvPr id="2" name="Título 1">
             <a:extLst>
               <a:ext uri="{FF2B5EF4-FFF2-40B4-BE49-F238E27FC236}">
-                <a16:creationId xmlns="" xmlns:a16="http://schemas.microsoft.com/office/drawing/2014/main" id="{5F09B89C-3183-4D52-981A-62798DDFF2B8}"/>
+                <a16:creationId xmlns:a16="http://schemas.microsoft.com/office/drawing/2014/main" xmlns="" id="{5F09B89C-3183-4D52-981A-62798DDFF2B8}"/>
               </a:ext>
             </a:extLst>
           </p:cNvPr>
@@ -9779,7 +10606,7 @@
           <p:cNvPr id="3" name="AutoShape 2" descr="An example of graph signal reconstruction over wireless sensor network. |  Download Scientific Diagram">
             <a:extLst>
               <a:ext uri="{FF2B5EF4-FFF2-40B4-BE49-F238E27FC236}">
-                <a16:creationId xmlns="" xmlns:a16="http://schemas.microsoft.com/office/drawing/2014/main" id="{0166B4DD-D72A-4A54-94A7-2C38133837FD}"/>
+                <a16:creationId xmlns:a16="http://schemas.microsoft.com/office/drawing/2014/main" xmlns="" id="{0166B4DD-D72A-4A54-94A7-2C38133837FD}"/>
               </a:ext>
             </a:extLst>
           </p:cNvPr>
@@ -9830,7 +10657,7 @@
           <p:cNvPr id="7" name="AutoShape 4" descr="An example of graph signal reconstruction over wireless sensor network. |  Download Scientific Diagram">
             <a:extLst>
               <a:ext uri="{FF2B5EF4-FFF2-40B4-BE49-F238E27FC236}">
-                <a16:creationId xmlns="" xmlns:a16="http://schemas.microsoft.com/office/drawing/2014/main" id="{14C2B67D-81A1-457E-A410-FE4350A3CCA4}"/>
+                <a16:creationId xmlns:a16="http://schemas.microsoft.com/office/drawing/2014/main" xmlns="" id="{14C2B67D-81A1-457E-A410-FE4350A3CCA4}"/>
               </a:ext>
             </a:extLst>
           </p:cNvPr>
@@ -9878,333 +10705,95 @@
       </p:sp>
       <p:sp>
         <p:nvSpPr>
-          <p:cNvPr id="4" name="Espaço Reservado para Conteúdo 3">
-            <a:extLst>
-              <a:ext uri="{FF2B5EF4-FFF2-40B4-BE49-F238E27FC236}">
-                <a16:creationId xmlns="" xmlns:a16="http://schemas.microsoft.com/office/drawing/2014/main" id="{0349BA64-C9D7-4730-9CA9-5C4AD9FC7969}"/>
-              </a:ext>
-            </a:extLst>
-          </p:cNvPr>
-          <p:cNvSpPr>
-            <a:spLocks noGrp="1"/>
-          </p:cNvSpPr>
-          <p:nvPr>
-            <p:ph idx="1"/>
-          </p:nvPr>
+          <p:cNvPr id="4" name="CaixaDeTexto 3"/>
+          <p:cNvSpPr txBox="1"/>
+          <p:nvPr/>
         </p:nvSpPr>
         <p:spPr>
           <a:xfrm>
-            <a:off x="304800" y="1066800"/>
-            <a:ext cx="9958552" cy="4330419"/>
-          </a:xfrm>
-        </p:spPr>
-        <p:txBody>
-          <a:bodyPr>
-            <a:noAutofit/>
-          </a:bodyPr>
-          <a:lstStyle/>
-          <a:p>
-            <a:pPr marL="495308" indent="-342900" algn="just">
-              <a:lnSpc>
-                <a:spcPct val="107000"/>
-              </a:lnSpc>
-              <a:spcAft>
-                <a:spcPts val="533"/>
-              </a:spcAft>
-            </a:pPr>
-            <a:r>
-              <a:rPr lang="pt-BR" sz="2000" dirty="0">
-                <a:ea typeface="Calibri" panose="020F0502020204030204" pitchFamily="34" charset="0"/>
-                <a:cs typeface="Arial" panose="020B0604020202020204" pitchFamily="34" charset="0"/>
-              </a:rPr>
-              <a:t>Exemplo de dado recebido com frequência de leitura de 62.5 </a:t>
-            </a:r>
-            <a:r>
-              <a:rPr lang="pt-BR" sz="2000" dirty="0" smtClean="0">
-                <a:ea typeface="Calibri" panose="020F0502020204030204" pitchFamily="34" charset="0"/>
-                <a:cs typeface="Arial" panose="020B0604020202020204" pitchFamily="34" charset="0"/>
-              </a:rPr>
-              <a:t>Hz, i.e. 62.5 amostras por segundo.</a:t>
-            </a:r>
-            <a:endParaRPr lang="pt-BR" sz="2000" dirty="0">
-              <a:ea typeface="Calibri" panose="020F0502020204030204" pitchFamily="34" charset="0"/>
-              <a:cs typeface="Arial" panose="020B0604020202020204" pitchFamily="34" charset="0"/>
-            </a:endParaRPr>
-          </a:p>
-          <a:p>
-            <a:pPr marL="495308" indent="-342900" algn="just">
-              <a:lnSpc>
-                <a:spcPct val="107000"/>
-              </a:lnSpc>
-              <a:spcAft>
-                <a:spcPts val="533"/>
-              </a:spcAft>
-            </a:pPr>
-            <a:endParaRPr lang="pt-BR" sz="2000" dirty="0">
-              <a:ea typeface="Calibri" panose="020F0502020204030204" pitchFamily="34" charset="0"/>
-              <a:cs typeface="Arial" panose="020B0604020202020204" pitchFamily="34" charset="0"/>
-            </a:endParaRPr>
-          </a:p>
-          <a:p>
-            <a:pPr marL="495308" indent="-342900" algn="just">
-              <a:lnSpc>
-                <a:spcPct val="107000"/>
-              </a:lnSpc>
-              <a:spcAft>
-                <a:spcPts val="533"/>
-              </a:spcAft>
-            </a:pPr>
-            <a:endParaRPr lang="pt-BR" sz="2000" dirty="0">
-              <a:ea typeface="Calibri" panose="020F0502020204030204" pitchFamily="34" charset="0"/>
-              <a:cs typeface="Arial" panose="020B0604020202020204" pitchFamily="34" charset="0"/>
-            </a:endParaRPr>
-          </a:p>
-          <a:p>
-            <a:pPr marL="495308" indent="-342900" algn="just">
-              <a:lnSpc>
-                <a:spcPct val="107000"/>
-              </a:lnSpc>
-              <a:spcAft>
-                <a:spcPts val="533"/>
-              </a:spcAft>
-            </a:pPr>
-            <a:endParaRPr lang="pt-BR" sz="2000" dirty="0">
-              <a:ea typeface="Calibri" panose="020F0502020204030204" pitchFamily="34" charset="0"/>
-              <a:cs typeface="Arial" panose="020B0604020202020204" pitchFamily="34" charset="0"/>
-            </a:endParaRPr>
-          </a:p>
-          <a:p>
-            <a:pPr marL="495308" indent="-342900" algn="just">
-              <a:lnSpc>
-                <a:spcPct val="107000"/>
-              </a:lnSpc>
-              <a:spcAft>
-                <a:spcPts val="533"/>
-              </a:spcAft>
-            </a:pPr>
-            <a:endParaRPr lang="pt-BR" sz="2000" dirty="0">
-              <a:ea typeface="Calibri" panose="020F0502020204030204" pitchFamily="34" charset="0"/>
-              <a:cs typeface="Arial" panose="020B0604020202020204" pitchFamily="34" charset="0"/>
-            </a:endParaRPr>
-          </a:p>
-          <a:p>
-            <a:pPr marL="495308" indent="-342900" algn="just">
-              <a:lnSpc>
-                <a:spcPct val="107000"/>
-              </a:lnSpc>
-              <a:spcAft>
-                <a:spcPts val="533"/>
-              </a:spcAft>
-            </a:pPr>
-            <a:endParaRPr lang="pt-BR" sz="2000" dirty="0">
-              <a:ea typeface="Calibri" panose="020F0502020204030204" pitchFamily="34" charset="0"/>
-              <a:cs typeface="Arial" panose="020B0604020202020204" pitchFamily="34" charset="0"/>
-            </a:endParaRPr>
-          </a:p>
-          <a:p>
-            <a:pPr marL="495308" indent="-342900" algn="just">
-              <a:lnSpc>
-                <a:spcPct val="107000"/>
-              </a:lnSpc>
-              <a:spcAft>
-                <a:spcPts val="533"/>
-              </a:spcAft>
-            </a:pPr>
-            <a:endParaRPr lang="pt-BR" sz="2000" dirty="0">
-              <a:ea typeface="Calibri" panose="020F0502020204030204" pitchFamily="34" charset="0"/>
-              <a:cs typeface="Arial" panose="020B0604020202020204" pitchFamily="34" charset="0"/>
-            </a:endParaRPr>
-          </a:p>
-          <a:p>
-            <a:pPr marL="495308" indent="-342900" algn="just">
-              <a:lnSpc>
-                <a:spcPct val="107000"/>
-              </a:lnSpc>
-              <a:spcAft>
-                <a:spcPts val="533"/>
-              </a:spcAft>
-            </a:pPr>
-            <a:endParaRPr lang="pt-BR" sz="2000" dirty="0">
-              <a:ea typeface="Calibri" panose="020F0502020204030204" pitchFamily="34" charset="0"/>
-              <a:cs typeface="Arial" panose="020B0604020202020204" pitchFamily="34" charset="0"/>
-            </a:endParaRPr>
-          </a:p>
-          <a:p>
-            <a:pPr marL="495308" indent="-342900" algn="just">
-              <a:lnSpc>
-                <a:spcPct val="107000"/>
-              </a:lnSpc>
-              <a:spcAft>
-                <a:spcPts val="533"/>
-              </a:spcAft>
-            </a:pPr>
-            <a:r>
-              <a:rPr lang="pt-BR" sz="2000" dirty="0">
-                <a:ea typeface="Calibri" panose="020F0502020204030204" pitchFamily="34" charset="0"/>
-                <a:cs typeface="Arial" panose="020B0604020202020204" pitchFamily="34" charset="0"/>
-              </a:rPr>
-              <a:t>Tempo de janela de 2 segundos. Possibilidade de pegar pelo menos 2 ciclos completos.</a:t>
-            </a:r>
-          </a:p>
-          <a:p>
-            <a:pPr marL="495308" indent="-342900" algn="just">
-              <a:lnSpc>
-                <a:spcPct val="107000"/>
-              </a:lnSpc>
-              <a:spcAft>
-                <a:spcPts val="533"/>
-              </a:spcAft>
-            </a:pPr>
-            <a:r>
-              <a:rPr lang="pt-BR" sz="2000" dirty="0" smtClean="0">
-                <a:ea typeface="Calibri" panose="020F0502020204030204" pitchFamily="34" charset="0"/>
-                <a:cs typeface="Arial" panose="020B0604020202020204" pitchFamily="34" charset="0"/>
-              </a:rPr>
-              <a:t>2*62,5 = 125 amostras por </a:t>
-            </a:r>
-            <a:r>
-              <a:rPr lang="pt-BR" sz="2000" dirty="0">
-                <a:ea typeface="Calibri" panose="020F0502020204030204" pitchFamily="34" charset="0"/>
-                <a:cs typeface="Arial" panose="020B0604020202020204" pitchFamily="34" charset="0"/>
-              </a:rPr>
-              <a:t>eixo</a:t>
-            </a:r>
-          </a:p>
-          <a:p>
-            <a:pPr marL="495308" indent="-342900" algn="just">
-              <a:lnSpc>
-                <a:spcPct val="107000"/>
-              </a:lnSpc>
-              <a:spcAft>
-                <a:spcPts val="533"/>
-              </a:spcAft>
-            </a:pPr>
-            <a:r>
-              <a:rPr lang="pt-BR" sz="2000" dirty="0">
-                <a:ea typeface="Calibri" panose="020F0502020204030204" pitchFamily="34" charset="0"/>
-                <a:cs typeface="Arial" panose="020B0604020202020204" pitchFamily="34" charset="0"/>
-              </a:rPr>
-              <a:t>375 valores de entrada.</a:t>
-            </a:r>
-          </a:p>
-          <a:p>
-            <a:pPr marL="152408" indent="0" algn="just">
-              <a:lnSpc>
-                <a:spcPct val="107000"/>
-              </a:lnSpc>
-              <a:spcAft>
-                <a:spcPts val="533"/>
-              </a:spcAft>
-              <a:buNone/>
-            </a:pPr>
-            <a:endParaRPr lang="pt-BR" sz="2000" dirty="0">
-              <a:ea typeface="Calibri" panose="020F0502020204030204" pitchFamily="34" charset="0"/>
-              <a:cs typeface="Arial" panose="020B0604020202020204" pitchFamily="34" charset="0"/>
-            </a:endParaRPr>
-          </a:p>
-          <a:p>
-            <a:pPr marL="495308" indent="-342900" algn="just">
-              <a:lnSpc>
-                <a:spcPct val="107000"/>
-              </a:lnSpc>
-              <a:spcAft>
-                <a:spcPts val="533"/>
-              </a:spcAft>
-            </a:pPr>
-            <a:endParaRPr lang="pt-BR" sz="2000" dirty="0">
-              <a:ea typeface="Calibri" panose="020F0502020204030204" pitchFamily="34" charset="0"/>
-              <a:cs typeface="Arial" panose="020B0604020202020204" pitchFamily="34" charset="0"/>
-            </a:endParaRPr>
-          </a:p>
-        </p:txBody>
-      </p:sp>
-      <p:pic>
-        <p:nvPicPr>
-          <p:cNvPr id="6" name="Imagem 5">
-            <a:extLst>
-              <a:ext uri="{FF2B5EF4-FFF2-40B4-BE49-F238E27FC236}">
-                <a16:creationId xmlns="" xmlns:a16="http://schemas.microsoft.com/office/drawing/2014/main" id="{226A6266-4F96-A9EE-A327-C4A981C95342}"/>
-              </a:ext>
-            </a:extLst>
-          </p:cNvPr>
-          <p:cNvPicPr>
-            <a:picLocks noChangeAspect="1"/>
-          </p:cNvPicPr>
-          <p:nvPr/>
-        </p:nvPicPr>
-        <p:blipFill>
-          <a:blip r:embed="rId4"/>
-          <a:stretch>
-            <a:fillRect/>
-          </a:stretch>
-        </p:blipFill>
-        <p:spPr>
-          <a:xfrm>
-            <a:off x="1127165" y="2344202"/>
-            <a:ext cx="3132091" cy="1775614"/>
-          </a:xfrm>
-          <a:prstGeom prst="rect">
-            <a:avLst/>
-          </a:prstGeom>
-        </p:spPr>
-      </p:pic>
-      <p:pic>
-        <p:nvPicPr>
-          <p:cNvPr id="3074" name="Picture 2">
-            <a:extLst>
-              <a:ext uri="{FF2B5EF4-FFF2-40B4-BE49-F238E27FC236}">
-                <a16:creationId xmlns="" xmlns:a16="http://schemas.microsoft.com/office/drawing/2014/main" id="{CBE89270-4C86-1A06-BB71-909DD12DB6C2}"/>
-              </a:ext>
-            </a:extLst>
-          </p:cNvPr>
-          <p:cNvPicPr>
-            <a:picLocks noChangeAspect="1" noChangeArrowheads="1"/>
-          </p:cNvPicPr>
-          <p:nvPr/>
-        </p:nvPicPr>
-        <p:blipFill>
-          <a:blip r:embed="rId5">
-            <a:extLst>
-              <a:ext uri="{28A0092B-C50C-407E-A947-70E740481C1C}">
-                <a14:useLocalDpi xmlns:a14="http://schemas.microsoft.com/office/drawing/2010/main" val="0"/>
-              </a:ext>
-            </a:extLst>
-          </a:blip>
-          <a:srcRect/>
-          <a:stretch>
-            <a:fillRect/>
-          </a:stretch>
-        </p:blipFill>
-        <p:spPr bwMode="auto">
-          <a:xfrm>
-            <a:off x="4718058" y="2238375"/>
-            <a:ext cx="6429375" cy="2381250"/>
+            <a:off x="7078717" y="3657145"/>
+            <a:ext cx="3862551" cy="2308324"/>
           </a:xfrm>
           <a:prstGeom prst="rect">
             <a:avLst/>
           </a:prstGeom>
           <a:noFill/>
-          <a:extLst>
-            <a:ext uri="{909E8E84-426E-40DD-AFC4-6F175D3DCCD1}">
-              <a14:hiddenFill xmlns:a14="http://schemas.microsoft.com/office/drawing/2010/main">
+        </p:spPr>
+        <p:txBody>
+          <a:bodyPr wrap="square" rtlCol="0">
+            <a:spAutoFit/>
+          </a:bodyPr>
+          <a:lstStyle/>
+          <a:p>
+            <a:pPr algn="ctr"/>
+            <a:r>
+              <a:rPr lang="pt-BR" sz="2400" b="1" i="1" dirty="0" smtClean="0">
                 <a:solidFill>
-                  <a:srgbClr val="FFFFFF"/>
+                  <a:srgbClr val="0070C0"/>
                 </a:solidFill>
-              </a14:hiddenFill>
-            </a:ext>
-          </a:extLst>
-        </p:spPr>
-      </p:pic>
+              </a:rPr>
+              <a:t>A consequência é que o modelo consome </a:t>
+            </a:r>
+            <a:r>
+              <a:rPr lang="pt-BR" sz="2400" b="1" i="1" dirty="0">
+                <a:solidFill>
+                  <a:srgbClr val="0070C0"/>
+                </a:solidFill>
+              </a:rPr>
+              <a:t>mais </a:t>
+            </a:r>
+            <a:r>
+              <a:rPr lang="pt-BR" sz="2400" b="1" i="1" dirty="0" smtClean="0">
+                <a:solidFill>
+                  <a:srgbClr val="0070C0"/>
+                </a:solidFill>
+              </a:rPr>
+              <a:t>memória e pode não operar em tempo real.</a:t>
+            </a:r>
+          </a:p>
+          <a:p>
+            <a:pPr algn="ctr"/>
+            <a:endParaRPr lang="pt-BR" sz="2400" b="1" i="1" dirty="0">
+              <a:solidFill>
+                <a:srgbClr val="0070C0"/>
+              </a:solidFill>
+            </a:endParaRPr>
+          </a:p>
+          <a:p>
+            <a:pPr algn="ctr"/>
+            <a:r>
+              <a:rPr lang="pt-BR" sz="2400" b="1" i="1" dirty="0" smtClean="0">
+                <a:solidFill>
+                  <a:srgbClr val="FF0000"/>
+                </a:solidFill>
+              </a:rPr>
+              <a:t>O que podemos fazer?</a:t>
+            </a:r>
+            <a:endParaRPr lang="pt-BR" sz="2400" dirty="0">
+              <a:solidFill>
+                <a:srgbClr val="FF0000"/>
+              </a:solidFill>
+            </a:endParaRPr>
+          </a:p>
+        </p:txBody>
+      </p:sp>
     </p:spTree>
     <p:extLst>
       <p:ext uri="{BB962C8B-B14F-4D97-AF65-F5344CB8AC3E}">
-        <p14:creationId xmlns:p14="http://schemas.microsoft.com/office/powerpoint/2010/main" val="2646648382"/>
+        <p14:creationId xmlns:p14="http://schemas.microsoft.com/office/powerpoint/2010/main" val="3164434639"/>
       </p:ext>
     </p:extLst>
   </p:cSld>
   <p:clrMapOvr>
     <a:masterClrMapping/>
   </p:clrMapOvr>
+  <p:timing>
+    <p:tnLst>
+      <p:par>
+        <p:cTn id="1" dur="indefinite" restart="never" nodeType="tmRoot"/>
+      </p:par>
+    </p:tnLst>
+  </p:timing>
 </p:sld>
 </file>
 
@@ -10239,12 +10828,35 @@
           <a:chExt cx="0" cy="0"/>
         </a:xfrm>
       </p:grpSpPr>
+      <p:pic>
+        <p:nvPicPr>
+          <p:cNvPr id="5" name="Imagem 4"/>
+          <p:cNvPicPr>
+            <a:picLocks noChangeAspect="1"/>
+          </p:cNvPicPr>
+          <p:nvPr/>
+        </p:nvPicPr>
+        <p:blipFill rotWithShape="1">
+          <a:blip r:embed="rId4"/>
+          <a:srcRect l="1037" t="1338"/>
+          <a:stretch/>
+        </p:blipFill>
+        <p:spPr>
+          <a:xfrm>
+            <a:off x="0" y="1333707"/>
+            <a:ext cx="10279117" cy="4646876"/>
+          </a:xfrm>
+          <a:prstGeom prst="rect">
+            <a:avLst/>
+          </a:prstGeom>
+        </p:spPr>
+      </p:pic>
       <p:sp>
         <p:nvSpPr>
           <p:cNvPr id="2" name="Título 1">
             <a:extLst>
               <a:ext uri="{FF2B5EF4-FFF2-40B4-BE49-F238E27FC236}">
-                <a16:creationId xmlns="" xmlns:a16="http://schemas.microsoft.com/office/drawing/2014/main" id="{5F09B89C-3183-4D52-981A-62798DDFF2B8}"/>
+                <a16:creationId xmlns:a16="http://schemas.microsoft.com/office/drawing/2014/main" xmlns="" id="{5F09B89C-3183-4D52-981A-62798DDFF2B8}"/>
               </a:ext>
             </a:extLst>
           </p:cNvPr>
@@ -10284,7 +10896,7 @@
           <p:cNvPr id="3" name="AutoShape 2" descr="An example of graph signal reconstruction over wireless sensor network. |  Download Scientific Diagram">
             <a:extLst>
               <a:ext uri="{FF2B5EF4-FFF2-40B4-BE49-F238E27FC236}">
-                <a16:creationId xmlns="" xmlns:a16="http://schemas.microsoft.com/office/drawing/2014/main" id="{0166B4DD-D72A-4A54-94A7-2C38133837FD}"/>
+                <a16:creationId xmlns:a16="http://schemas.microsoft.com/office/drawing/2014/main" xmlns="" id="{0166B4DD-D72A-4A54-94A7-2C38133837FD}"/>
               </a:ext>
             </a:extLst>
           </p:cNvPr>
@@ -10335,7 +10947,7 @@
           <p:cNvPr id="7" name="AutoShape 4" descr="An example of graph signal reconstruction over wireless sensor network. |  Download Scientific Diagram">
             <a:extLst>
               <a:ext uri="{FF2B5EF4-FFF2-40B4-BE49-F238E27FC236}">
-                <a16:creationId xmlns="" xmlns:a16="http://schemas.microsoft.com/office/drawing/2014/main" id="{14C2B67D-81A1-457E-A410-FE4350A3CCA4}"/>
+                <a16:creationId xmlns:a16="http://schemas.microsoft.com/office/drawing/2014/main" xmlns="" id="{14C2B67D-81A1-457E-A410-FE4350A3CCA4}"/>
               </a:ext>
             </a:extLst>
           </p:cNvPr>
@@ -10383,246 +10995,87 @@
       </p:sp>
       <p:sp>
         <p:nvSpPr>
-          <p:cNvPr id="4" name="Espaço Reservado para Conteúdo 3">
-            <a:extLst>
-              <a:ext uri="{FF2B5EF4-FFF2-40B4-BE49-F238E27FC236}">
-                <a16:creationId xmlns="" xmlns:a16="http://schemas.microsoft.com/office/drawing/2014/main" id="{0349BA64-C9D7-4730-9CA9-5C4AD9FC7969}"/>
-              </a:ext>
-            </a:extLst>
-          </p:cNvPr>
-          <p:cNvSpPr>
-            <a:spLocks noGrp="1"/>
-          </p:cNvSpPr>
-          <p:nvPr>
-            <p:ph idx="1"/>
-          </p:nvPr>
+          <p:cNvPr id="4" name="CaixaDeTexto 3"/>
+          <p:cNvSpPr txBox="1"/>
+          <p:nvPr/>
         </p:nvSpPr>
         <p:spPr>
           <a:xfrm>
-            <a:off x="304800" y="1066800"/>
-            <a:ext cx="9295589" cy="4330419"/>
-          </a:xfrm>
-        </p:spPr>
-        <p:txBody>
-          <a:bodyPr>
-            <a:noAutofit/>
-          </a:bodyPr>
-          <a:lstStyle/>
-          <a:p>
-            <a:pPr marL="495308" indent="-342900" algn="just">
-              <a:lnSpc>
-                <a:spcPct val="107000"/>
-              </a:lnSpc>
-              <a:spcAft>
-                <a:spcPts val="533"/>
-              </a:spcAft>
-            </a:pPr>
-            <a:r>
-              <a:rPr lang="pt-BR" sz="2000" dirty="0">
-                <a:ea typeface="Calibri" panose="020F0502020204030204" pitchFamily="34" charset="0"/>
-                <a:cs typeface="Arial" panose="020B0604020202020204" pitchFamily="34" charset="0"/>
-              </a:rPr>
-              <a:t>Exemplo de dado recebido com frequência de leitura de 62.5 Hz;</a:t>
-            </a:r>
-          </a:p>
-          <a:p>
-            <a:pPr marL="495308" indent="-342900" algn="just">
-              <a:lnSpc>
-                <a:spcPct val="107000"/>
-              </a:lnSpc>
-              <a:spcAft>
-                <a:spcPts val="533"/>
-              </a:spcAft>
-            </a:pPr>
-            <a:endParaRPr lang="pt-BR" sz="2000" dirty="0">
-              <a:ea typeface="Calibri" panose="020F0502020204030204" pitchFamily="34" charset="0"/>
-              <a:cs typeface="Arial" panose="020B0604020202020204" pitchFamily="34" charset="0"/>
-            </a:endParaRPr>
-          </a:p>
-          <a:p>
-            <a:pPr marL="495308" indent="-342900" algn="just">
-              <a:lnSpc>
-                <a:spcPct val="107000"/>
-              </a:lnSpc>
-              <a:spcAft>
-                <a:spcPts val="533"/>
-              </a:spcAft>
-            </a:pPr>
-            <a:r>
-              <a:rPr lang="pt-BR" sz="2000" dirty="0">
-                <a:ea typeface="Calibri" panose="020F0502020204030204" pitchFamily="34" charset="0"/>
-                <a:cs typeface="Arial" panose="020B0604020202020204" pitchFamily="34" charset="0"/>
-              </a:rPr>
-              <a:t>375 valores de entrada.</a:t>
-            </a:r>
-          </a:p>
-          <a:p>
-            <a:pPr marL="495308" indent="-342900" algn="just">
-              <a:lnSpc>
-                <a:spcPct val="107000"/>
-              </a:lnSpc>
-              <a:spcAft>
-                <a:spcPts val="533"/>
-              </a:spcAft>
-            </a:pPr>
-            <a:endParaRPr lang="pt-BR" sz="2000" dirty="0">
-              <a:ea typeface="Calibri" panose="020F0502020204030204" pitchFamily="34" charset="0"/>
-              <a:cs typeface="Arial" panose="020B0604020202020204" pitchFamily="34" charset="0"/>
-            </a:endParaRPr>
-          </a:p>
-          <a:p>
-            <a:pPr marL="495308" indent="-342900" algn="just">
-              <a:lnSpc>
-                <a:spcPct val="107000"/>
-              </a:lnSpc>
-              <a:spcAft>
-                <a:spcPts val="533"/>
-              </a:spcAft>
-            </a:pPr>
-            <a:r>
-              <a:rPr lang="pt-BR" sz="2000" dirty="0">
-                <a:ea typeface="Calibri" panose="020F0502020204030204" pitchFamily="34" charset="0"/>
-                <a:cs typeface="Arial" panose="020B0604020202020204" pitchFamily="34" charset="0"/>
-              </a:rPr>
-              <a:t>Rede neural mais complexa.</a:t>
-            </a:r>
-          </a:p>
-          <a:p>
-            <a:pPr marL="495308" indent="-342900" algn="just">
-              <a:lnSpc>
-                <a:spcPct val="107000"/>
-              </a:lnSpc>
-              <a:spcAft>
-                <a:spcPts val="533"/>
-              </a:spcAft>
-            </a:pPr>
-            <a:r>
-              <a:rPr lang="pt-BR" sz="2000" dirty="0">
-                <a:ea typeface="Calibri" panose="020F0502020204030204" pitchFamily="34" charset="0"/>
-                <a:cs typeface="Arial" panose="020B0604020202020204" pitchFamily="34" charset="0"/>
-              </a:rPr>
-              <a:t>Rede </a:t>
-            </a:r>
-            <a:r>
-              <a:rPr lang="pt-BR" sz="2000" dirty="0" err="1">
-                <a:ea typeface="Calibri" panose="020F0502020204030204" pitchFamily="34" charset="0"/>
-                <a:cs typeface="Arial" panose="020B0604020202020204" pitchFamily="34" charset="0"/>
-              </a:rPr>
-              <a:t>convolucional</a:t>
-            </a:r>
-            <a:r>
-              <a:rPr lang="pt-BR" sz="2000" dirty="0">
-                <a:ea typeface="Calibri" panose="020F0502020204030204" pitchFamily="34" charset="0"/>
-                <a:cs typeface="Arial" panose="020B0604020202020204" pitchFamily="34" charset="0"/>
-              </a:rPr>
-              <a:t>.</a:t>
-            </a:r>
-          </a:p>
-          <a:p>
-            <a:pPr marL="495308" indent="-342900" algn="just">
-              <a:lnSpc>
-                <a:spcPct val="107000"/>
-              </a:lnSpc>
-              <a:spcAft>
-                <a:spcPts val="533"/>
-              </a:spcAft>
-            </a:pPr>
-            <a:r>
-              <a:rPr lang="pt-BR" sz="2000" dirty="0">
-                <a:ea typeface="Calibri" panose="020F0502020204030204" pitchFamily="34" charset="0"/>
-                <a:cs typeface="Arial" panose="020B0604020202020204" pitchFamily="34" charset="0"/>
-              </a:rPr>
-              <a:t>Custo energético mais alto para embarcado.</a:t>
-            </a:r>
-          </a:p>
-          <a:p>
-            <a:pPr marL="152408" indent="0" algn="just">
-              <a:lnSpc>
-                <a:spcPct val="107000"/>
-              </a:lnSpc>
-              <a:spcAft>
-                <a:spcPts val="533"/>
-              </a:spcAft>
-              <a:buNone/>
-            </a:pPr>
-            <a:endParaRPr lang="pt-BR" sz="2000" dirty="0">
-              <a:ea typeface="Calibri" panose="020F0502020204030204" pitchFamily="34" charset="0"/>
-              <a:cs typeface="Arial" panose="020B0604020202020204" pitchFamily="34" charset="0"/>
-            </a:endParaRPr>
-          </a:p>
-          <a:p>
-            <a:pPr marL="495308" indent="-342900" algn="just">
-              <a:lnSpc>
-                <a:spcPct val="107000"/>
-              </a:lnSpc>
-              <a:spcAft>
-                <a:spcPts val="533"/>
-              </a:spcAft>
-            </a:pPr>
-            <a:endParaRPr lang="pt-BR" sz="2000" dirty="0">
-              <a:ea typeface="Calibri" panose="020F0502020204030204" pitchFamily="34" charset="0"/>
-              <a:cs typeface="Arial" panose="020B0604020202020204" pitchFamily="34" charset="0"/>
-            </a:endParaRPr>
-          </a:p>
-        </p:txBody>
-      </p:sp>
-      <p:pic>
-        <p:nvPicPr>
-          <p:cNvPr id="5" name="Picture 2">
-            <a:extLst>
-              <a:ext uri="{FF2B5EF4-FFF2-40B4-BE49-F238E27FC236}">
-                <a16:creationId xmlns="" xmlns:a16="http://schemas.microsoft.com/office/drawing/2014/main" id="{07870545-4F2D-B338-1639-8D24A15221F0}"/>
-              </a:ext>
-            </a:extLst>
-          </p:cNvPr>
-          <p:cNvPicPr>
-            <a:picLocks noChangeAspect="1" noChangeArrowheads="1"/>
-          </p:cNvPicPr>
-          <p:nvPr/>
-        </p:nvPicPr>
-        <p:blipFill>
-          <a:blip r:embed="rId4">
-            <a:extLst>
-              <a:ext uri="{28A0092B-C50C-407E-A947-70E740481C1C}">
-                <a14:useLocalDpi xmlns:a14="http://schemas.microsoft.com/office/drawing/2010/main" val="0"/>
-              </a:ext>
-            </a:extLst>
-          </a:blip>
-          <a:srcRect/>
-          <a:stretch>
-            <a:fillRect/>
-          </a:stretch>
-        </p:blipFill>
-        <p:spPr bwMode="auto">
-          <a:xfrm>
-            <a:off x="5730566" y="2238375"/>
-            <a:ext cx="5416867" cy="2006247"/>
+            <a:off x="6558456" y="3830565"/>
+            <a:ext cx="5265682" cy="1938992"/>
           </a:xfrm>
           <a:prstGeom prst="rect">
             <a:avLst/>
           </a:prstGeom>
           <a:noFill/>
-          <a:extLst>
-            <a:ext uri="{909E8E84-426E-40DD-AFC4-6F175D3DCCD1}">
-              <a14:hiddenFill xmlns:a14="http://schemas.microsoft.com/office/drawing/2010/main">
+        </p:spPr>
+        <p:txBody>
+          <a:bodyPr wrap="square" rtlCol="0">
+            <a:spAutoFit/>
+          </a:bodyPr>
+          <a:lstStyle/>
+          <a:p>
+            <a:pPr algn="ctr"/>
+            <a:r>
+              <a:rPr lang="pt-BR" sz="2400" b="1" i="1" dirty="0" smtClean="0">
                 <a:solidFill>
-                  <a:srgbClr val="FFFFFF"/>
+                  <a:srgbClr val="0070C0"/>
                 </a:solidFill>
-              </a14:hiddenFill>
-            </a:ext>
-          </a:extLst>
-        </p:spPr>
-      </p:pic>
+              </a:rPr>
+              <a:t>Ao invés de termos uma rede muito complexa que faça a extração de atributos de forma automática, vamos</a:t>
+            </a:r>
+          </a:p>
+          <a:p>
+            <a:pPr algn="ctr"/>
+            <a:r>
+              <a:rPr lang="pt-BR" sz="2400" b="1" i="1" dirty="0" err="1">
+                <a:solidFill>
+                  <a:srgbClr val="0070C0"/>
+                </a:solidFill>
+              </a:rPr>
+              <a:t>p</a:t>
+            </a:r>
+            <a:r>
+              <a:rPr lang="pt-BR" sz="2400" b="1" i="1" dirty="0" err="1" smtClean="0">
+                <a:solidFill>
+                  <a:srgbClr val="0070C0"/>
+                </a:solidFill>
+              </a:rPr>
+              <a:t>ré</a:t>
+            </a:r>
+            <a:r>
+              <a:rPr lang="pt-BR" sz="2400" b="1" i="1" dirty="0" smtClean="0">
+                <a:solidFill>
+                  <a:srgbClr val="0070C0"/>
+                </a:solidFill>
+              </a:rPr>
+              <a:t>-processar os dados e extrair alguns atributos manualmente.</a:t>
+            </a:r>
+            <a:endParaRPr lang="pt-BR" sz="2400" dirty="0">
+              <a:solidFill>
+                <a:srgbClr val="FF0000"/>
+              </a:solidFill>
+            </a:endParaRPr>
+          </a:p>
+        </p:txBody>
+      </p:sp>
     </p:spTree>
     <p:extLst>
       <p:ext uri="{BB962C8B-B14F-4D97-AF65-F5344CB8AC3E}">
-        <p14:creationId xmlns:p14="http://schemas.microsoft.com/office/powerpoint/2010/main" val="2891458677"/>
+        <p14:creationId xmlns:p14="http://schemas.microsoft.com/office/powerpoint/2010/main" val="1563864535"/>
       </p:ext>
     </p:extLst>
   </p:cSld>
   <p:clrMapOvr>
     <a:masterClrMapping/>
   </p:clrMapOvr>
+  <p:timing>
+    <p:tnLst>
+      <p:par>
+        <p:cTn id="1" dur="indefinite" restart="never" nodeType="tmRoot"/>
+      </p:par>
+    </p:tnLst>
+  </p:timing>
 </p:sld>
 </file>
 
@@ -10662,7 +11115,7 @@
           <p:cNvPr id="2" name="Título 1">
             <a:extLst>
               <a:ext uri="{FF2B5EF4-FFF2-40B4-BE49-F238E27FC236}">
-                <a16:creationId xmlns="" xmlns:a16="http://schemas.microsoft.com/office/drawing/2014/main" id="{5F09B89C-3183-4D52-981A-62798DDFF2B8}"/>
+                <a16:creationId xmlns:a16="http://schemas.microsoft.com/office/drawing/2014/main" xmlns="" id="{5F09B89C-3183-4D52-981A-62798DDFF2B8}"/>
               </a:ext>
             </a:extLst>
           </p:cNvPr>
@@ -10702,7 +11155,7 @@
           <p:cNvPr id="3" name="AutoShape 2" descr="An example of graph signal reconstruction over wireless sensor network. |  Download Scientific Diagram">
             <a:extLst>
               <a:ext uri="{FF2B5EF4-FFF2-40B4-BE49-F238E27FC236}">
-                <a16:creationId xmlns="" xmlns:a16="http://schemas.microsoft.com/office/drawing/2014/main" id="{0166B4DD-D72A-4A54-94A7-2C38133837FD}"/>
+                <a16:creationId xmlns:a16="http://schemas.microsoft.com/office/drawing/2014/main" xmlns="" id="{0166B4DD-D72A-4A54-94A7-2C38133837FD}"/>
               </a:ext>
             </a:extLst>
           </p:cNvPr>
@@ -10753,7 +11206,7 @@
           <p:cNvPr id="7" name="AutoShape 4" descr="An example of graph signal reconstruction over wireless sensor network. |  Download Scientific Diagram">
             <a:extLst>
               <a:ext uri="{FF2B5EF4-FFF2-40B4-BE49-F238E27FC236}">
-                <a16:creationId xmlns="" xmlns:a16="http://schemas.microsoft.com/office/drawing/2014/main" id="{14C2B67D-81A1-457E-A410-FE4350A3CCA4}"/>
+                <a16:creationId xmlns:a16="http://schemas.microsoft.com/office/drawing/2014/main" xmlns="" id="{14C2B67D-81A1-457E-A410-FE4350A3CCA4}"/>
               </a:ext>
             </a:extLst>
           </p:cNvPr>
@@ -10799,219 +11252,98 @@
           </a:p>
         </p:txBody>
       </p:sp>
-      <p:sp>
-        <p:nvSpPr>
-          <p:cNvPr id="4" name="Espaço Reservado para Conteúdo 3">
-            <a:extLst>
-              <a:ext uri="{FF2B5EF4-FFF2-40B4-BE49-F238E27FC236}">
-                <a16:creationId xmlns="" xmlns:a16="http://schemas.microsoft.com/office/drawing/2014/main" id="{0349BA64-C9D7-4730-9CA9-5C4AD9FC7969}"/>
-              </a:ext>
-            </a:extLst>
-          </p:cNvPr>
-          <p:cNvSpPr>
-            <a:spLocks noGrp="1"/>
-          </p:cNvSpPr>
-          <p:nvPr>
-            <p:ph idx="1"/>
-          </p:nvPr>
-        </p:nvSpPr>
-        <p:spPr>
-          <a:xfrm>
-            <a:off x="304800" y="1066800"/>
-            <a:ext cx="9295589" cy="4330419"/>
-          </a:xfrm>
-        </p:spPr>
-        <p:txBody>
-          <a:bodyPr>
-            <a:noAutofit/>
-          </a:bodyPr>
-          <a:lstStyle/>
-          <a:p>
-            <a:pPr marL="495308" indent="-342900" algn="just">
-              <a:lnSpc>
-                <a:spcPct val="107000"/>
-              </a:lnSpc>
-              <a:spcAft>
-                <a:spcPts val="533"/>
-              </a:spcAft>
-            </a:pPr>
-            <a:r>
-              <a:rPr lang="pt-BR" sz="2000" dirty="0">
-                <a:ea typeface="Calibri" panose="020F0502020204030204" pitchFamily="34" charset="0"/>
-                <a:cs typeface="Arial" panose="020B0604020202020204" pitchFamily="34" charset="0"/>
-              </a:rPr>
-              <a:t>Exemplo de dado recebido com frequência de leitura de 62.5 Hz;</a:t>
-            </a:r>
-          </a:p>
-          <a:p>
-            <a:pPr marL="495308" indent="-342900" algn="just">
-              <a:lnSpc>
-                <a:spcPct val="107000"/>
-              </a:lnSpc>
-              <a:spcAft>
-                <a:spcPts val="533"/>
-              </a:spcAft>
-            </a:pPr>
-            <a:r>
-              <a:rPr lang="pt-BR" sz="2000" dirty="0">
-                <a:ea typeface="Calibri" panose="020F0502020204030204" pitchFamily="34" charset="0"/>
-                <a:cs typeface="Arial" panose="020B0604020202020204" pitchFamily="34" charset="0"/>
-              </a:rPr>
-              <a:t>Solução: </a:t>
-            </a:r>
-            <a:r>
-              <a:rPr lang="pt-BR" sz="2000" dirty="0" err="1">
-                <a:ea typeface="Calibri" panose="020F0502020204030204" pitchFamily="34" charset="0"/>
-                <a:cs typeface="Arial" panose="020B0604020202020204" pitchFamily="34" charset="0"/>
-              </a:rPr>
-              <a:t>Pré</a:t>
-            </a:r>
-            <a:r>
-              <a:rPr lang="pt-BR" sz="2000" dirty="0">
-                <a:ea typeface="Calibri" panose="020F0502020204030204" pitchFamily="34" charset="0"/>
-                <a:cs typeface="Arial" panose="020B0604020202020204" pitchFamily="34" charset="0"/>
-              </a:rPr>
-              <a:t> processamento dos dados.</a:t>
-            </a:r>
-          </a:p>
-          <a:p>
-            <a:pPr marL="495308" indent="-342900" algn="just">
-              <a:lnSpc>
-                <a:spcPct val="107000"/>
-              </a:lnSpc>
-              <a:spcAft>
-                <a:spcPts val="533"/>
-              </a:spcAft>
-            </a:pPr>
-            <a:r>
-              <a:rPr lang="pt-BR" sz="2000" dirty="0">
-                <a:ea typeface="Calibri" panose="020F0502020204030204" pitchFamily="34" charset="0"/>
-                <a:cs typeface="Arial" panose="020B0604020202020204" pitchFamily="34" charset="0"/>
-              </a:rPr>
-              <a:t>Valores RMS das três curvas</a:t>
-            </a:r>
-          </a:p>
-          <a:p>
-            <a:pPr marL="152408" indent="0" algn="just">
-              <a:lnSpc>
-                <a:spcPct val="107000"/>
-              </a:lnSpc>
-              <a:spcAft>
-                <a:spcPts val="533"/>
-              </a:spcAft>
-              <a:buNone/>
-            </a:pPr>
-            <a:r>
-              <a:rPr lang="pt-BR" sz="2000" dirty="0">
-                <a:ea typeface="Calibri" panose="020F0502020204030204" pitchFamily="34" charset="0"/>
-                <a:cs typeface="Arial" panose="020B0604020202020204" pitchFamily="34" charset="0"/>
-              </a:rPr>
-              <a:t> </a:t>
-            </a:r>
-          </a:p>
-          <a:p>
-            <a:pPr marL="495308" indent="-342900" algn="just">
-              <a:lnSpc>
-                <a:spcPct val="107000"/>
-              </a:lnSpc>
-              <a:spcAft>
-                <a:spcPts val="533"/>
-              </a:spcAft>
-            </a:pPr>
-            <a:endParaRPr lang="pt-BR" sz="2000" dirty="0">
-              <a:ea typeface="Calibri" panose="020F0502020204030204" pitchFamily="34" charset="0"/>
-              <a:cs typeface="Arial" panose="020B0604020202020204" pitchFamily="34" charset="0"/>
-            </a:endParaRPr>
-          </a:p>
-        </p:txBody>
-      </p:sp>
       <p:pic>
         <p:nvPicPr>
-          <p:cNvPr id="6" name="Imagem 5">
-            <a:extLst>
-              <a:ext uri="{FF2B5EF4-FFF2-40B4-BE49-F238E27FC236}">
-                <a16:creationId xmlns="" xmlns:a16="http://schemas.microsoft.com/office/drawing/2014/main" id="{3876BA1F-0314-9771-20B7-DAEE6955ED5F}"/>
-              </a:ext>
-            </a:extLst>
-          </p:cNvPr>
+          <p:cNvPr id="4" name="Imagem 3"/>
           <p:cNvPicPr>
             <a:picLocks noChangeAspect="1"/>
           </p:cNvPicPr>
           <p:nvPr/>
         </p:nvPicPr>
-        <p:blipFill>
+        <p:blipFill rotWithShape="1">
           <a:blip r:embed="rId4"/>
-          <a:stretch>
-            <a:fillRect/>
-          </a:stretch>
+          <a:srcRect l="1693" t="3836" r="5346" b="43789"/>
+          <a:stretch/>
         </p:blipFill>
         <p:spPr>
           <a:xfrm>
-            <a:off x="6981833" y="3055444"/>
-            <a:ext cx="4943475" cy="1524000"/>
+            <a:off x="141890" y="1371600"/>
+            <a:ext cx="10093567" cy="3200400"/>
           </a:xfrm>
           <a:prstGeom prst="rect">
             <a:avLst/>
           </a:prstGeom>
         </p:spPr>
       </p:pic>
-      <p:pic>
-        <p:nvPicPr>
-          <p:cNvPr id="8" name="Picture 2">
-            <a:extLst>
-              <a:ext uri="{FF2B5EF4-FFF2-40B4-BE49-F238E27FC236}">
-                <a16:creationId xmlns="" xmlns:a16="http://schemas.microsoft.com/office/drawing/2014/main" id="{CF338048-EB3D-C9A4-2D47-CD7735A5E606}"/>
-              </a:ext>
-            </a:extLst>
-          </p:cNvPr>
-          <p:cNvPicPr>
-            <a:picLocks noChangeAspect="1" noChangeArrowheads="1"/>
-          </p:cNvPicPr>
+      <p:sp>
+        <p:nvSpPr>
+          <p:cNvPr id="6" name="CaixaDeTexto 5"/>
+          <p:cNvSpPr txBox="1"/>
           <p:nvPr/>
-        </p:nvPicPr>
-        <p:blipFill>
-          <a:blip r:embed="rId5">
-            <a:extLst>
-              <a:ext uri="{28A0092B-C50C-407E-A947-70E740481C1C}">
-                <a14:useLocalDpi xmlns:a14="http://schemas.microsoft.com/office/drawing/2010/main" val="0"/>
-              </a:ext>
-            </a:extLst>
-          </a:blip>
-          <a:srcRect/>
-          <a:stretch>
-            <a:fillRect/>
-          </a:stretch>
-        </p:blipFill>
-        <p:spPr bwMode="auto">
-          <a:xfrm>
-            <a:off x="552458" y="2904419"/>
-            <a:ext cx="6429375" cy="2381250"/>
+        </p:nvSpPr>
+        <p:spPr>
+          <a:xfrm>
+            <a:off x="3864336" y="4998508"/>
+            <a:ext cx="4869727" cy="1200329"/>
           </a:xfrm>
           <a:prstGeom prst="rect">
             <a:avLst/>
           </a:prstGeom>
           <a:noFill/>
-          <a:extLst>
-            <a:ext uri="{909E8E84-426E-40DD-AFC4-6F175D3DCCD1}">
-              <a14:hiddenFill xmlns:a14="http://schemas.microsoft.com/office/drawing/2010/main">
+        </p:spPr>
+        <p:txBody>
+          <a:bodyPr wrap="square" rtlCol="0">
+            <a:spAutoFit/>
+          </a:bodyPr>
+          <a:lstStyle/>
+          <a:p>
+            <a:pPr marL="457200" indent="-457200" algn="ctr">
+              <a:buAutoNum type="arabicPeriod"/>
+            </a:pPr>
+            <a:r>
+              <a:rPr lang="pt-BR" sz="2400" b="1" i="1" dirty="0" smtClean="0">
                 <a:solidFill>
-                  <a:srgbClr val="FFFFFF"/>
+                  <a:srgbClr val="0070C0"/>
                 </a:solidFill>
-              </a14:hiddenFill>
-            </a:ext>
-          </a:extLst>
-        </p:spPr>
-      </p:pic>
+              </a:rPr>
+              <a:t>Etapa do pré-processamento:</a:t>
+            </a:r>
+          </a:p>
+          <a:p>
+            <a:pPr algn="ctr"/>
+            <a:r>
+              <a:rPr lang="pt-BR" sz="2400" b="1" i="1" dirty="0" smtClean="0">
+                <a:solidFill>
+                  <a:srgbClr val="0070C0"/>
+                </a:solidFill>
+              </a:rPr>
+              <a:t>Calcular o valor RMS de cada um dos eixos.</a:t>
+            </a:r>
+            <a:endParaRPr lang="pt-BR" sz="2400" dirty="0">
+              <a:solidFill>
+                <a:srgbClr val="FF0000"/>
+              </a:solidFill>
+            </a:endParaRPr>
+          </a:p>
+        </p:txBody>
+      </p:sp>
     </p:spTree>
     <p:extLst>
       <p:ext uri="{BB962C8B-B14F-4D97-AF65-F5344CB8AC3E}">
-        <p14:creationId xmlns:p14="http://schemas.microsoft.com/office/powerpoint/2010/main" val="2598366965"/>
+        <p14:creationId xmlns:p14="http://schemas.microsoft.com/office/powerpoint/2010/main" val="3839096215"/>
       </p:ext>
     </p:extLst>
   </p:cSld>
   <p:clrMapOvr>
     <a:masterClrMapping/>
   </p:clrMapOvr>
+  <p:timing>
+    <p:tnLst>
+      <p:par>
+        <p:cTn id="1" dur="indefinite" restart="never" nodeType="tmRoot"/>
+      </p:par>
+    </p:tnLst>
+  </p:timing>
 </p:sld>
 </file>
 
@@ -11051,7 +11383,7 @@
           <p:cNvPr id="2" name="Título 1">
             <a:extLst>
               <a:ext uri="{FF2B5EF4-FFF2-40B4-BE49-F238E27FC236}">
-                <a16:creationId xmlns="" xmlns:a16="http://schemas.microsoft.com/office/drawing/2014/main" id="{5F09B89C-3183-4D52-981A-62798DDFF2B8}"/>
+                <a16:creationId xmlns:a16="http://schemas.microsoft.com/office/drawing/2014/main" xmlns="" id="{5F09B89C-3183-4D52-981A-62798DDFF2B8}"/>
               </a:ext>
             </a:extLst>
           </p:cNvPr>
@@ -11091,7 +11423,7 @@
           <p:cNvPr id="3" name="AutoShape 2" descr="An example of graph signal reconstruction over wireless sensor network. |  Download Scientific Diagram">
             <a:extLst>
               <a:ext uri="{FF2B5EF4-FFF2-40B4-BE49-F238E27FC236}">
-                <a16:creationId xmlns="" xmlns:a16="http://schemas.microsoft.com/office/drawing/2014/main" id="{0166B4DD-D72A-4A54-94A7-2C38133837FD}"/>
+                <a16:creationId xmlns:a16="http://schemas.microsoft.com/office/drawing/2014/main" xmlns="" id="{0166B4DD-D72A-4A54-94A7-2C38133837FD}"/>
               </a:ext>
             </a:extLst>
           </p:cNvPr>
@@ -11142,7 +11474,7 @@
           <p:cNvPr id="7" name="AutoShape 4" descr="An example of graph signal reconstruction over wireless sensor network. |  Download Scientific Diagram">
             <a:extLst>
               <a:ext uri="{FF2B5EF4-FFF2-40B4-BE49-F238E27FC236}">
-                <a16:creationId xmlns="" xmlns:a16="http://schemas.microsoft.com/office/drawing/2014/main" id="{14C2B67D-81A1-457E-A410-FE4350A3CCA4}"/>
+                <a16:creationId xmlns:a16="http://schemas.microsoft.com/office/drawing/2014/main" xmlns="" id="{14C2B67D-81A1-457E-A410-FE4350A3CCA4}"/>
               </a:ext>
             </a:extLst>
           </p:cNvPr>
@@ -11188,163 +11520,9 @@
           </a:p>
         </p:txBody>
       </p:sp>
-      <p:sp>
-        <p:nvSpPr>
-          <p:cNvPr id="4" name="Espaço Reservado para Conteúdo 3">
-            <a:extLst>
-              <a:ext uri="{FF2B5EF4-FFF2-40B4-BE49-F238E27FC236}">
-                <a16:creationId xmlns="" xmlns:a16="http://schemas.microsoft.com/office/drawing/2014/main" id="{0349BA64-C9D7-4730-9CA9-5C4AD9FC7969}"/>
-              </a:ext>
-            </a:extLst>
-          </p:cNvPr>
-          <p:cNvSpPr>
-            <a:spLocks noGrp="1"/>
-          </p:cNvSpPr>
-          <p:nvPr>
-            <p:ph idx="1"/>
-          </p:nvPr>
-        </p:nvSpPr>
-        <p:spPr>
-          <a:xfrm>
-            <a:off x="304800" y="1066800"/>
-            <a:ext cx="9295589" cy="4330419"/>
-          </a:xfrm>
-        </p:spPr>
-        <p:txBody>
-          <a:bodyPr>
-            <a:noAutofit/>
-          </a:bodyPr>
-          <a:lstStyle/>
-          <a:p>
-            <a:pPr marL="495308" indent="-342900" algn="just">
-              <a:lnSpc>
-                <a:spcPct val="107000"/>
-              </a:lnSpc>
-              <a:spcAft>
-                <a:spcPts val="533"/>
-              </a:spcAft>
-            </a:pPr>
-            <a:r>
-              <a:rPr lang="pt-BR" sz="2000" dirty="0">
-                <a:ea typeface="Calibri" panose="020F0502020204030204" pitchFamily="34" charset="0"/>
-                <a:cs typeface="Arial" panose="020B0604020202020204" pitchFamily="34" charset="0"/>
-              </a:rPr>
-              <a:t>Exemplo de dado recebido com frequência de leitura de 62.5 Hz;</a:t>
-            </a:r>
-          </a:p>
-          <a:p>
-            <a:pPr marL="495308" indent="-342900" algn="just">
-              <a:lnSpc>
-                <a:spcPct val="107000"/>
-              </a:lnSpc>
-              <a:spcAft>
-                <a:spcPts val="533"/>
-              </a:spcAft>
-            </a:pPr>
-            <a:r>
-              <a:rPr lang="pt-BR" sz="2000" dirty="0">
-                <a:ea typeface="Calibri" panose="020F0502020204030204" pitchFamily="34" charset="0"/>
-                <a:cs typeface="Arial" panose="020B0604020202020204" pitchFamily="34" charset="0"/>
-              </a:rPr>
-              <a:t>Solução: Pré-processamento dos dados.</a:t>
-            </a:r>
-          </a:p>
-          <a:p>
-            <a:pPr marL="495308" indent="-342900" algn="just">
-              <a:lnSpc>
-                <a:spcPct val="107000"/>
-              </a:lnSpc>
-              <a:spcAft>
-                <a:spcPts val="533"/>
-              </a:spcAft>
-            </a:pPr>
-            <a:r>
-              <a:rPr lang="pt-BR" sz="2000" dirty="0">
-                <a:ea typeface="Calibri" panose="020F0502020204030204" pitchFamily="34" charset="0"/>
-                <a:cs typeface="Arial" panose="020B0604020202020204" pitchFamily="34" charset="0"/>
-              </a:rPr>
-              <a:t>Calculo da FFT das curvas:</a:t>
-            </a:r>
-          </a:p>
-          <a:p>
-            <a:pPr marL="152408" indent="0" algn="just">
-              <a:lnSpc>
-                <a:spcPct val="107000"/>
-              </a:lnSpc>
-              <a:spcAft>
-                <a:spcPts val="533"/>
-              </a:spcAft>
-              <a:buNone/>
-            </a:pPr>
-            <a:r>
-              <a:rPr lang="pt-BR" sz="2000" dirty="0">
-                <a:ea typeface="Calibri" panose="020F0502020204030204" pitchFamily="34" charset="0"/>
-                <a:cs typeface="Arial" panose="020B0604020202020204" pitchFamily="34" charset="0"/>
-              </a:rPr>
-              <a:t>Pegar a frequência e a amplitude da fundamental mais duas harmônicas por eixo: 9 valores de amplitude e 9 frequências: 18 valores</a:t>
-            </a:r>
-          </a:p>
-          <a:p>
-            <a:pPr marL="152408" indent="0" algn="just">
-              <a:lnSpc>
-                <a:spcPct val="107000"/>
-              </a:lnSpc>
-              <a:spcAft>
-                <a:spcPts val="533"/>
-              </a:spcAft>
-              <a:buNone/>
-            </a:pPr>
-            <a:r>
-              <a:rPr lang="pt-BR" sz="2000" dirty="0">
-                <a:ea typeface="Calibri" panose="020F0502020204030204" pitchFamily="34" charset="0"/>
-                <a:cs typeface="Arial" panose="020B0604020202020204" pitchFamily="34" charset="0"/>
-              </a:rPr>
-              <a:t> </a:t>
-            </a:r>
-          </a:p>
-          <a:p>
-            <a:pPr marL="152408" indent="0" algn="just">
-              <a:lnSpc>
-                <a:spcPct val="107000"/>
-              </a:lnSpc>
-              <a:spcAft>
-                <a:spcPts val="533"/>
-              </a:spcAft>
-              <a:buNone/>
-            </a:pPr>
-            <a:r>
-              <a:rPr lang="pt-BR" sz="2000" dirty="0">
-                <a:ea typeface="Calibri" panose="020F0502020204030204" pitchFamily="34" charset="0"/>
-                <a:cs typeface="Arial" panose="020B0604020202020204" pitchFamily="34" charset="0"/>
-              </a:rPr>
-              <a:t> </a:t>
-            </a:r>
-          </a:p>
-          <a:p>
-            <a:pPr marL="495308" indent="-342900" algn="just">
-              <a:lnSpc>
-                <a:spcPct val="107000"/>
-              </a:lnSpc>
-              <a:spcAft>
-                <a:spcPts val="533"/>
-              </a:spcAft>
-            </a:pPr>
-            <a:endParaRPr lang="pt-BR" sz="2000" dirty="0">
-              <a:ea typeface="Calibri" panose="020F0502020204030204" pitchFamily="34" charset="0"/>
-              <a:cs typeface="Arial" panose="020B0604020202020204" pitchFamily="34" charset="0"/>
-            </a:endParaRPr>
-          </a:p>
-        </p:txBody>
-      </p:sp>
       <p:pic>
         <p:nvPicPr>
-          <p:cNvPr id="9" name="Imagem 8">
-            <a:extLst>
-              <a:ext uri="{FF2B5EF4-FFF2-40B4-BE49-F238E27FC236}">
-                <a16:creationId xmlns="" xmlns:a16="http://schemas.microsoft.com/office/drawing/2014/main" id="{E34DDF80-3AF4-098B-D371-5E05913D72CB}"/>
-              </a:ext>
-            </a:extLst>
-          </p:cNvPr>
+          <p:cNvPr id="4" name="Imagem 3"/>
           <p:cNvPicPr>
             <a:picLocks noChangeAspect="1"/>
           </p:cNvPicPr>
@@ -11358,24 +11536,107 @@
         </p:blipFill>
         <p:spPr>
           <a:xfrm>
-            <a:off x="3584442" y="3530600"/>
-            <a:ext cx="3676474" cy="2911767"/>
+            <a:off x="111015" y="1081087"/>
+            <a:ext cx="8343900" cy="4695825"/>
           </a:xfrm>
           <a:prstGeom prst="rect">
             <a:avLst/>
           </a:prstGeom>
         </p:spPr>
       </p:pic>
+      <p:sp>
+        <p:nvSpPr>
+          <p:cNvPr id="6" name="CaixaDeTexto 5"/>
+          <p:cNvSpPr txBox="1"/>
+          <p:nvPr/>
+        </p:nvSpPr>
+        <p:spPr>
+          <a:xfrm>
+            <a:off x="6400800" y="1943140"/>
+            <a:ext cx="4869727" cy="2308324"/>
+          </a:xfrm>
+          <a:prstGeom prst="rect">
+            <a:avLst/>
+          </a:prstGeom>
+          <a:noFill/>
+        </p:spPr>
+        <p:txBody>
+          <a:bodyPr wrap="square" rtlCol="0">
+            <a:spAutoFit/>
+          </a:bodyPr>
+          <a:lstStyle/>
+          <a:p>
+            <a:pPr algn="ctr"/>
+            <a:r>
+              <a:rPr lang="pt-BR" sz="2400" b="1" i="1" dirty="0" smtClean="0">
+                <a:solidFill>
+                  <a:srgbClr val="0070C0"/>
+                </a:solidFill>
+              </a:rPr>
+              <a:t>2. Etapa do pré-processamento:</a:t>
+            </a:r>
+          </a:p>
+          <a:p>
+            <a:pPr algn="ctr"/>
+            <a:r>
+              <a:rPr lang="pt-BR" sz="2400" b="1" i="1" dirty="0" smtClean="0">
+                <a:solidFill>
+                  <a:srgbClr val="0070C0"/>
+                </a:solidFill>
+              </a:rPr>
+              <a:t>Calcular a FFT dos sinais do 3 eixos.</a:t>
+            </a:r>
+            <a:br>
+              <a:rPr lang="pt-BR" sz="2400" b="1" i="1" dirty="0" smtClean="0">
+                <a:solidFill>
+                  <a:srgbClr val="0070C0"/>
+                </a:solidFill>
+              </a:rPr>
+            </a:br>
+            <a:r>
+              <a:rPr lang="pt-BR" sz="2400" b="1" i="1" dirty="0" smtClean="0">
+                <a:solidFill>
+                  <a:srgbClr val="00B050"/>
+                </a:solidFill>
+              </a:rPr>
+              <a:t>Usamos como atributos de entrada: 3 valores de pico e suas respectivas frequências para cada eixo.</a:t>
+            </a:r>
+          </a:p>
+          <a:p>
+            <a:pPr algn="ctr"/>
+            <a:r>
+              <a:rPr lang="pt-BR" sz="2400" b="1" i="1" dirty="0" smtClean="0">
+                <a:solidFill>
+                  <a:srgbClr val="00B050"/>
+                </a:solidFill>
+              </a:rPr>
+              <a:t>Totalizando 18 atributos.</a:t>
+            </a:r>
+            <a:endParaRPr lang="pt-BR" sz="2400" dirty="0">
+              <a:solidFill>
+                <a:srgbClr val="00B050"/>
+              </a:solidFill>
+            </a:endParaRPr>
+          </a:p>
+        </p:txBody>
+      </p:sp>
     </p:spTree>
     <p:extLst>
       <p:ext uri="{BB962C8B-B14F-4D97-AF65-F5344CB8AC3E}">
-        <p14:creationId xmlns:p14="http://schemas.microsoft.com/office/powerpoint/2010/main" val="1164262540"/>
+        <p14:creationId xmlns:p14="http://schemas.microsoft.com/office/powerpoint/2010/main" val="2675668951"/>
       </p:ext>
     </p:extLst>
   </p:cSld>
   <p:clrMapOvr>
     <a:masterClrMapping/>
   </p:clrMapOvr>
+  <p:timing>
+    <p:tnLst>
+      <p:par>
+        <p:cTn id="1" dur="indefinite" restart="never" nodeType="tmRoot"/>
+      </p:par>
+    </p:tnLst>
+  </p:timing>
 </p:sld>
 </file>
 
@@ -11415,7 +11676,7 @@
           <p:cNvPr id="2" name="Título 1">
             <a:extLst>
               <a:ext uri="{FF2B5EF4-FFF2-40B4-BE49-F238E27FC236}">
-                <a16:creationId xmlns="" xmlns:a16="http://schemas.microsoft.com/office/drawing/2014/main" id="{5F09B89C-3183-4D52-981A-62798DDFF2B8}"/>
+                <a16:creationId xmlns:a16="http://schemas.microsoft.com/office/drawing/2014/main" xmlns="" id="{5F09B89C-3183-4D52-981A-62798DDFF2B8}"/>
               </a:ext>
             </a:extLst>
           </p:cNvPr>
@@ -11455,7 +11716,7 @@
           <p:cNvPr id="3" name="AutoShape 2" descr="An example of graph signal reconstruction over wireless sensor network. |  Download Scientific Diagram">
             <a:extLst>
               <a:ext uri="{FF2B5EF4-FFF2-40B4-BE49-F238E27FC236}">
-                <a16:creationId xmlns="" xmlns:a16="http://schemas.microsoft.com/office/drawing/2014/main" id="{0166B4DD-D72A-4A54-94A7-2C38133837FD}"/>
+                <a16:creationId xmlns:a16="http://schemas.microsoft.com/office/drawing/2014/main" xmlns="" id="{0166B4DD-D72A-4A54-94A7-2C38133837FD}"/>
               </a:ext>
             </a:extLst>
           </p:cNvPr>
@@ -11506,7 +11767,7 @@
           <p:cNvPr id="7" name="AutoShape 4" descr="An example of graph signal reconstruction over wireless sensor network. |  Download Scientific Diagram">
             <a:extLst>
               <a:ext uri="{FF2B5EF4-FFF2-40B4-BE49-F238E27FC236}">
-                <a16:creationId xmlns="" xmlns:a16="http://schemas.microsoft.com/office/drawing/2014/main" id="{14C2B67D-81A1-457E-A410-FE4350A3CCA4}"/>
+                <a16:creationId xmlns:a16="http://schemas.microsoft.com/office/drawing/2014/main" xmlns="" id="{14C2B67D-81A1-457E-A410-FE4350A3CCA4}"/>
               </a:ext>
             </a:extLst>
           </p:cNvPr>
@@ -11552,127 +11813,9 @@
           </a:p>
         </p:txBody>
       </p:sp>
-      <p:sp>
-        <p:nvSpPr>
-          <p:cNvPr id="4" name="Espaço Reservado para Conteúdo 3">
-            <a:extLst>
-              <a:ext uri="{FF2B5EF4-FFF2-40B4-BE49-F238E27FC236}">
-                <a16:creationId xmlns="" xmlns:a16="http://schemas.microsoft.com/office/drawing/2014/main" id="{0349BA64-C9D7-4730-9CA9-5C4AD9FC7969}"/>
-              </a:ext>
-            </a:extLst>
-          </p:cNvPr>
-          <p:cNvSpPr>
-            <a:spLocks noGrp="1"/>
-          </p:cNvSpPr>
-          <p:nvPr>
-            <p:ph idx="1"/>
-          </p:nvPr>
-        </p:nvSpPr>
-        <p:spPr>
-          <a:xfrm>
-            <a:off x="304800" y="1066800"/>
-            <a:ext cx="9295589" cy="4330419"/>
-          </a:xfrm>
-        </p:spPr>
-        <p:txBody>
-          <a:bodyPr>
-            <a:noAutofit/>
-          </a:bodyPr>
-          <a:lstStyle/>
-          <a:p>
-            <a:pPr marL="495308" indent="-342900" algn="just">
-              <a:lnSpc>
-                <a:spcPct val="107000"/>
-              </a:lnSpc>
-              <a:spcAft>
-                <a:spcPts val="533"/>
-              </a:spcAft>
-            </a:pPr>
-            <a:r>
-              <a:rPr lang="pt-BR" sz="2000" dirty="0">
-                <a:ea typeface="Calibri" panose="020F0502020204030204" pitchFamily="34" charset="0"/>
-                <a:cs typeface="Arial" panose="020B0604020202020204" pitchFamily="34" charset="0"/>
-              </a:rPr>
-              <a:t>Exemplo de dado recebido com frequência de leitura de 62.5 Hz;</a:t>
-            </a:r>
-          </a:p>
-          <a:p>
-            <a:pPr marL="495308" indent="-342900" algn="just">
-              <a:lnSpc>
-                <a:spcPct val="107000"/>
-              </a:lnSpc>
-              <a:spcAft>
-                <a:spcPts val="533"/>
-              </a:spcAft>
-            </a:pPr>
-            <a:r>
-              <a:rPr lang="pt-BR" sz="2000" dirty="0">
-                <a:ea typeface="Calibri" panose="020F0502020204030204" pitchFamily="34" charset="0"/>
-                <a:cs typeface="Arial" panose="020B0604020202020204" pitchFamily="34" charset="0"/>
-              </a:rPr>
-              <a:t>Solução: Pré-processamento dos dados.</a:t>
-            </a:r>
-          </a:p>
-          <a:p>
-            <a:pPr marL="495308" indent="-342900" algn="just">
-              <a:lnSpc>
-                <a:spcPct val="107000"/>
-              </a:lnSpc>
-              <a:spcAft>
-                <a:spcPts val="533"/>
-              </a:spcAft>
-            </a:pPr>
-            <a:r>
-              <a:rPr lang="pt-BR" sz="2000" dirty="0">
-                <a:ea typeface="Calibri" panose="020F0502020204030204" pitchFamily="34" charset="0"/>
-                <a:cs typeface="Arial" panose="020B0604020202020204" pitchFamily="34" charset="0"/>
-              </a:rPr>
-              <a:t>Calcular a densidade espectral de potência (PSD) : 4 regiões* 3 eixos= 12 valores </a:t>
-            </a:r>
-          </a:p>
-          <a:p>
-            <a:pPr marL="152408" indent="0" algn="just">
-              <a:lnSpc>
-                <a:spcPct val="107000"/>
-              </a:lnSpc>
-              <a:spcAft>
-                <a:spcPts val="533"/>
-              </a:spcAft>
-              <a:buNone/>
-            </a:pPr>
-            <a:r>
-              <a:rPr lang="pt-BR" sz="2000" dirty="0">
-                <a:ea typeface="Calibri" panose="020F0502020204030204" pitchFamily="34" charset="0"/>
-                <a:cs typeface="Arial" panose="020B0604020202020204" pitchFamily="34" charset="0"/>
-              </a:rPr>
-              <a:t> </a:t>
-            </a:r>
-          </a:p>
-          <a:p>
-            <a:pPr marL="495308" indent="-342900" algn="just">
-              <a:lnSpc>
-                <a:spcPct val="107000"/>
-              </a:lnSpc>
-              <a:spcAft>
-                <a:spcPts val="533"/>
-              </a:spcAft>
-            </a:pPr>
-            <a:endParaRPr lang="pt-BR" sz="2000" dirty="0">
-              <a:ea typeface="Calibri" panose="020F0502020204030204" pitchFamily="34" charset="0"/>
-              <a:cs typeface="Arial" panose="020B0604020202020204" pitchFamily="34" charset="0"/>
-            </a:endParaRPr>
-          </a:p>
-        </p:txBody>
-      </p:sp>
       <p:pic>
         <p:nvPicPr>
-          <p:cNvPr id="6" name="Imagem 5">
-            <a:extLst>
-              <a:ext uri="{FF2B5EF4-FFF2-40B4-BE49-F238E27FC236}">
-                <a16:creationId xmlns="" xmlns:a16="http://schemas.microsoft.com/office/drawing/2014/main" id="{AA943D34-6194-3573-A1F3-15277F095134}"/>
-              </a:ext>
-            </a:extLst>
-          </p:cNvPr>
+          <p:cNvPr id="4" name="Imagem 3"/>
           <p:cNvPicPr>
             <a:picLocks noChangeAspect="1"/>
           </p:cNvPicPr>
@@ -11686,54 +11829,131 @@
         </p:blipFill>
         <p:spPr>
           <a:xfrm>
-            <a:off x="2167229" y="2440094"/>
-            <a:ext cx="3827171" cy="3731492"/>
+            <a:off x="72454" y="1655704"/>
+            <a:ext cx="7023975" cy="3952991"/>
           </a:xfrm>
           <a:prstGeom prst="rect">
             <a:avLst/>
           </a:prstGeom>
         </p:spPr>
       </p:pic>
-      <p:pic>
-        <p:nvPicPr>
-          <p:cNvPr id="10" name="Imagem 9">
-            <a:extLst>
-              <a:ext uri="{FF2B5EF4-FFF2-40B4-BE49-F238E27FC236}">
-                <a16:creationId xmlns="" xmlns:a16="http://schemas.microsoft.com/office/drawing/2014/main" id="{25B0EB0A-63CF-B662-F66B-F677CAAE5270}"/>
-              </a:ext>
-            </a:extLst>
-          </p:cNvPr>
-          <p:cNvPicPr>
-            <a:picLocks noChangeAspect="1"/>
-          </p:cNvPicPr>
+      <p:sp>
+        <p:nvSpPr>
+          <p:cNvPr id="6" name="CaixaDeTexto 5"/>
+          <p:cNvSpPr txBox="1"/>
           <p:nvPr/>
-        </p:nvPicPr>
-        <p:blipFill>
-          <a:blip r:embed="rId5"/>
-          <a:stretch>
-            <a:fillRect/>
-          </a:stretch>
-        </p:blipFill>
+        </p:nvSpPr>
         <p:spPr>
           <a:xfrm>
-            <a:off x="6400800" y="2904874"/>
-            <a:ext cx="5113867" cy="2614053"/>
+            <a:off x="7472855" y="2614765"/>
+            <a:ext cx="4351283" cy="3046988"/>
           </a:xfrm>
           <a:prstGeom prst="rect">
             <a:avLst/>
           </a:prstGeom>
-        </p:spPr>
-      </p:pic>
+          <a:noFill/>
+        </p:spPr>
+        <p:txBody>
+          <a:bodyPr wrap="square" rtlCol="0">
+            <a:spAutoFit/>
+          </a:bodyPr>
+          <a:lstStyle/>
+          <a:p>
+            <a:pPr algn="ctr"/>
+            <a:r>
+              <a:rPr lang="pt-BR" sz="2400" b="1" i="1" dirty="0">
+                <a:solidFill>
+                  <a:srgbClr val="0070C0"/>
+                </a:solidFill>
+              </a:rPr>
+              <a:t>3</a:t>
+            </a:r>
+            <a:r>
+              <a:rPr lang="pt-BR" sz="2400" b="1" i="1" dirty="0" smtClean="0">
+                <a:solidFill>
+                  <a:srgbClr val="0070C0"/>
+                </a:solidFill>
+              </a:rPr>
+              <a:t>. Etapa do pré-processamento: Densidade espectral de potência.</a:t>
+            </a:r>
+          </a:p>
+          <a:p>
+            <a:pPr algn="ctr"/>
+            <a:r>
+              <a:rPr lang="pt-BR" sz="2400" b="1" i="1" dirty="0" smtClean="0">
+                <a:solidFill>
+                  <a:srgbClr val="00B050"/>
+                </a:solidFill>
+                <a:ea typeface="Calibri" panose="020F0502020204030204" pitchFamily="34" charset="0"/>
+                <a:cs typeface="Arial" panose="020B0604020202020204" pitchFamily="34" charset="0"/>
+              </a:rPr>
+              <a:t>Divide-se a largura de banda em 4 e calcula-se a densidade de potência para cada região. Assim, temos 4 regiões * </a:t>
+            </a:r>
+            <a:r>
+              <a:rPr lang="pt-BR" sz="2400" b="1" i="1" dirty="0">
+                <a:solidFill>
+                  <a:srgbClr val="00B050"/>
+                </a:solidFill>
+                <a:ea typeface="Calibri" panose="020F0502020204030204" pitchFamily="34" charset="0"/>
+                <a:cs typeface="Arial" panose="020B0604020202020204" pitchFamily="34" charset="0"/>
+              </a:rPr>
+              <a:t>3 </a:t>
+            </a:r>
+            <a:r>
+              <a:rPr lang="pt-BR" sz="2400" b="1" i="1" dirty="0" smtClean="0">
+                <a:solidFill>
+                  <a:srgbClr val="00B050"/>
+                </a:solidFill>
+                <a:ea typeface="Calibri" panose="020F0502020204030204" pitchFamily="34" charset="0"/>
+                <a:cs typeface="Arial" panose="020B0604020202020204" pitchFamily="34" charset="0"/>
+              </a:rPr>
+              <a:t>eixos = </a:t>
+            </a:r>
+            <a:r>
+              <a:rPr lang="pt-BR" sz="2400" b="1" i="1" dirty="0">
+                <a:solidFill>
+                  <a:srgbClr val="00B050"/>
+                </a:solidFill>
+                <a:ea typeface="Calibri" panose="020F0502020204030204" pitchFamily="34" charset="0"/>
+                <a:cs typeface="Arial" panose="020B0604020202020204" pitchFamily="34" charset="0"/>
+              </a:rPr>
+              <a:t>12 </a:t>
+            </a:r>
+            <a:r>
+              <a:rPr lang="pt-BR" sz="2400" b="1" i="1" dirty="0" smtClean="0">
+                <a:solidFill>
+                  <a:srgbClr val="00B050"/>
+                </a:solidFill>
+                <a:ea typeface="Calibri" panose="020F0502020204030204" pitchFamily="34" charset="0"/>
+                <a:cs typeface="Arial" panose="020B0604020202020204" pitchFamily="34" charset="0"/>
+              </a:rPr>
+              <a:t>atributos.</a:t>
+            </a:r>
+            <a:endParaRPr lang="pt-BR" sz="2400" b="1" i="1" dirty="0" smtClean="0">
+              <a:solidFill>
+                <a:srgbClr val="00B050"/>
+              </a:solidFill>
+            </a:endParaRPr>
+          </a:p>
+        </p:txBody>
+      </p:sp>
     </p:spTree>
     <p:extLst>
       <p:ext uri="{BB962C8B-B14F-4D97-AF65-F5344CB8AC3E}">
-        <p14:creationId xmlns:p14="http://schemas.microsoft.com/office/powerpoint/2010/main" val="3141207834"/>
+        <p14:creationId xmlns:p14="http://schemas.microsoft.com/office/powerpoint/2010/main" val="2018076686"/>
       </p:ext>
     </p:extLst>
   </p:cSld>
   <p:clrMapOvr>
     <a:masterClrMapping/>
   </p:clrMapOvr>
+  <p:timing>
+    <p:tnLst>
+      <p:par>
+        <p:cTn id="1" dur="indefinite" restart="never" nodeType="tmRoot"/>
+      </p:par>
+    </p:tnLst>
+  </p:timing>
 </p:sld>
 </file>
 
@@ -11773,7 +11993,7 @@
           <p:cNvPr id="2" name="Título 1">
             <a:extLst>
               <a:ext uri="{FF2B5EF4-FFF2-40B4-BE49-F238E27FC236}">
-                <a16:creationId xmlns="" xmlns:a16="http://schemas.microsoft.com/office/drawing/2014/main" id="{5F09B89C-3183-4D52-981A-62798DDFF2B8}"/>
+                <a16:creationId xmlns:a16="http://schemas.microsoft.com/office/drawing/2014/main" xmlns="" id="{5F09B89C-3183-4D52-981A-62798DDFF2B8}"/>
               </a:ext>
             </a:extLst>
           </p:cNvPr>
@@ -11813,7 +12033,7 @@
           <p:cNvPr id="3" name="AutoShape 2" descr="An example of graph signal reconstruction over wireless sensor network. |  Download Scientific Diagram">
             <a:extLst>
               <a:ext uri="{FF2B5EF4-FFF2-40B4-BE49-F238E27FC236}">
-                <a16:creationId xmlns="" xmlns:a16="http://schemas.microsoft.com/office/drawing/2014/main" id="{0166B4DD-D72A-4A54-94A7-2C38133837FD}"/>
+                <a16:creationId xmlns:a16="http://schemas.microsoft.com/office/drawing/2014/main" xmlns="" id="{0166B4DD-D72A-4A54-94A7-2C38133837FD}"/>
               </a:ext>
             </a:extLst>
           </p:cNvPr>
@@ -11864,7 +12084,7 @@
           <p:cNvPr id="7" name="AutoShape 4" descr="An example of graph signal reconstruction over wireless sensor network. |  Download Scientific Diagram">
             <a:extLst>
               <a:ext uri="{FF2B5EF4-FFF2-40B4-BE49-F238E27FC236}">
-                <a16:creationId xmlns="" xmlns:a16="http://schemas.microsoft.com/office/drawing/2014/main" id="{14C2B67D-81A1-457E-A410-FE4350A3CCA4}"/>
+                <a16:creationId xmlns:a16="http://schemas.microsoft.com/office/drawing/2014/main" xmlns="" id="{14C2B67D-81A1-457E-A410-FE4350A3CCA4}"/>
               </a:ext>
             </a:extLst>
           </p:cNvPr>
@@ -11910,143 +12130,64 @@
           </a:p>
         </p:txBody>
       </p:sp>
-      <p:sp>
-        <p:nvSpPr>
-          <p:cNvPr id="4" name="Espaço Reservado para Conteúdo 3">
-            <a:extLst>
-              <a:ext uri="{FF2B5EF4-FFF2-40B4-BE49-F238E27FC236}">
-                <a16:creationId xmlns="" xmlns:a16="http://schemas.microsoft.com/office/drawing/2014/main" id="{0349BA64-C9D7-4730-9CA9-5C4AD9FC7969}"/>
-              </a:ext>
-            </a:extLst>
-          </p:cNvPr>
-          <p:cNvSpPr>
-            <a:spLocks noGrp="1"/>
-          </p:cNvSpPr>
-          <p:nvPr>
-            <p:ph idx="1"/>
-          </p:nvPr>
-        </p:nvSpPr>
+      <p:pic>
+        <p:nvPicPr>
+          <p:cNvPr id="4" name="Imagem 3"/>
+          <p:cNvPicPr>
+            <a:picLocks noChangeAspect="1"/>
+          </p:cNvPicPr>
+          <p:nvPr/>
+        </p:nvPicPr>
+        <p:blipFill rotWithShape="1">
+          <a:blip r:embed="rId4"/>
+          <a:srcRect l="4527" t="11372" r="1567" b="2679"/>
+          <a:stretch/>
+        </p:blipFill>
         <p:spPr>
           <a:xfrm>
-            <a:off x="304800" y="1066800"/>
-            <a:ext cx="9295589" cy="4330419"/>
-          </a:xfrm>
-        </p:spPr>
-        <p:txBody>
-          <a:bodyPr>
-            <a:noAutofit/>
+            <a:off x="0" y="1072055"/>
+            <a:ext cx="9733115" cy="5013435"/>
+          </a:xfrm>
+          <a:prstGeom prst="rect">
+            <a:avLst/>
+          </a:prstGeom>
+        </p:spPr>
+      </p:pic>
+      <p:sp>
+        <p:nvSpPr>
+          <p:cNvPr id="6" name="CaixaDeTexto 5"/>
+          <p:cNvSpPr txBox="1"/>
+          <p:nvPr/>
+        </p:nvSpPr>
+        <p:spPr>
+          <a:xfrm>
+            <a:off x="9222828" y="3860240"/>
+            <a:ext cx="2443655" cy="1569660"/>
+          </a:xfrm>
+          <a:prstGeom prst="rect">
+            <a:avLst/>
+          </a:prstGeom>
+          <a:noFill/>
+        </p:spPr>
+        <p:txBody>
+          <a:bodyPr wrap="square" rtlCol="0">
+            <a:spAutoFit/>
           </a:bodyPr>
           <a:lstStyle/>
           <a:p>
-            <a:pPr marL="152408" indent="0" algn="just">
-              <a:lnSpc>
-                <a:spcPct val="107000"/>
-              </a:lnSpc>
-              <a:spcAft>
-                <a:spcPts val="533"/>
-              </a:spcAft>
-              <a:buNone/>
-            </a:pPr>
-            <a:r>
-              <a:rPr lang="pt-BR" sz="2000" dirty="0">
-                <a:ea typeface="Calibri" panose="020F0502020204030204" pitchFamily="34" charset="0"/>
-                <a:cs typeface="Arial" panose="020B0604020202020204" pitchFamily="34" charset="0"/>
+            <a:pPr algn="ctr"/>
+            <a:r>
+              <a:rPr lang="pt-BR" sz="2400" b="1" i="1" dirty="0" smtClean="0">
+                <a:solidFill>
+                  <a:srgbClr val="0070C0"/>
+                </a:solidFill>
               </a:rPr>
-              <a:t>Para este exemplo ficamos com uma rede neural com: </a:t>
-            </a:r>
-          </a:p>
-          <a:p>
-            <a:pPr marL="152408" indent="0" algn="just">
-              <a:lnSpc>
-                <a:spcPct val="107000"/>
-              </a:lnSpc>
-              <a:spcAft>
-                <a:spcPts val="533"/>
-              </a:spcAft>
-              <a:buNone/>
-            </a:pPr>
-            <a:endParaRPr lang="pt-BR" sz="2000" dirty="0">
-              <a:ea typeface="Calibri" panose="020F0502020204030204" pitchFamily="34" charset="0"/>
-              <a:cs typeface="Arial" panose="020B0604020202020204" pitchFamily="34" charset="0"/>
-            </a:endParaRPr>
-          </a:p>
-          <a:p>
-            <a:pPr marL="495308" indent="-342900" algn="just">
-              <a:lnSpc>
-                <a:spcPct val="107000"/>
-              </a:lnSpc>
-              <a:spcAft>
-                <a:spcPts val="533"/>
-              </a:spcAft>
-            </a:pPr>
-            <a:r>
-              <a:rPr lang="pt-BR" sz="2000" dirty="0">
-                <a:ea typeface="Calibri" panose="020F0502020204030204" pitchFamily="34" charset="0"/>
-                <a:cs typeface="Arial" panose="020B0604020202020204" pitchFamily="34" charset="0"/>
-              </a:rPr>
-              <a:t>33 entradas</a:t>
-            </a:r>
-          </a:p>
-          <a:p>
-            <a:pPr marL="495308" indent="-342900" algn="just">
-              <a:lnSpc>
-                <a:spcPct val="107000"/>
-              </a:lnSpc>
-              <a:spcAft>
-                <a:spcPts val="533"/>
-              </a:spcAft>
-            </a:pPr>
-            <a:r>
-              <a:rPr lang="pt-BR" sz="2000" dirty="0">
-                <a:ea typeface="Calibri" panose="020F0502020204030204" pitchFamily="34" charset="0"/>
-                <a:cs typeface="Arial" panose="020B0604020202020204" pitchFamily="34" charset="0"/>
-              </a:rPr>
-              <a:t>Camadas densas</a:t>
-            </a:r>
-          </a:p>
-          <a:p>
-            <a:pPr marL="495308" indent="-342900" algn="just">
-              <a:lnSpc>
-                <a:spcPct val="107000"/>
-              </a:lnSpc>
-              <a:spcAft>
-                <a:spcPts val="533"/>
-              </a:spcAft>
-            </a:pPr>
-            <a:r>
-              <a:rPr lang="pt-BR" sz="2000" dirty="0">
-                <a:ea typeface="Calibri" panose="020F0502020204030204" pitchFamily="34" charset="0"/>
-                <a:cs typeface="Arial" panose="020B0604020202020204" pitchFamily="34" charset="0"/>
-              </a:rPr>
-              <a:t>4 saídas:  Parado, sendo erguido, no mar, no caminhão.</a:t>
-            </a:r>
-          </a:p>
-          <a:p>
-            <a:pPr marL="495308" indent="-342900" algn="just">
-              <a:lnSpc>
-                <a:spcPct val="107000"/>
-              </a:lnSpc>
-              <a:spcAft>
-                <a:spcPts val="533"/>
-              </a:spcAft>
-            </a:pPr>
-            <a:endParaRPr lang="pt-BR" sz="2000" dirty="0">
-              <a:ea typeface="Calibri" panose="020F0502020204030204" pitchFamily="34" charset="0"/>
-              <a:cs typeface="Arial" panose="020B0604020202020204" pitchFamily="34" charset="0"/>
-            </a:endParaRPr>
-          </a:p>
-          <a:p>
-            <a:pPr marL="495308" indent="-342900" algn="just">
-              <a:lnSpc>
-                <a:spcPct val="107000"/>
-              </a:lnSpc>
-              <a:spcAft>
-                <a:spcPts val="533"/>
-              </a:spcAft>
-            </a:pPr>
-            <a:endParaRPr lang="pt-BR" sz="2000" dirty="0">
-              <a:ea typeface="Calibri" panose="020F0502020204030204" pitchFamily="34" charset="0"/>
-              <a:cs typeface="Arial" panose="020B0604020202020204" pitchFamily="34" charset="0"/>
+              <a:t>Portanto, a rede neural terá 33 atributos de entrada.</a:t>
+            </a:r>
+            <a:endParaRPr lang="pt-BR" sz="2400" b="1" i="1" dirty="0" smtClean="0">
+              <a:solidFill>
+                <a:srgbClr val="00B050"/>
+              </a:solidFill>
             </a:endParaRPr>
           </a:p>
         </p:txBody>
@@ -12054,13 +12195,20 @@
     </p:spTree>
     <p:extLst>
       <p:ext uri="{BB962C8B-B14F-4D97-AF65-F5344CB8AC3E}">
-        <p14:creationId xmlns:p14="http://schemas.microsoft.com/office/powerpoint/2010/main" val="3469059530"/>
+        <p14:creationId xmlns:p14="http://schemas.microsoft.com/office/powerpoint/2010/main" val="1270230834"/>
       </p:ext>
     </p:extLst>
   </p:cSld>
   <p:clrMapOvr>
     <a:masterClrMapping/>
   </p:clrMapOvr>
+  <p:timing>
+    <p:tnLst>
+      <p:par>
+        <p:cTn id="1" dur="indefinite" restart="never" nodeType="tmRoot"/>
+      </p:par>
+    </p:tnLst>
+  </p:timing>
 </p:sld>
 </file>
 
@@ -12100,7 +12248,7 @@
           <p:cNvPr id="2" name="Título 1">
             <a:extLst>
               <a:ext uri="{FF2B5EF4-FFF2-40B4-BE49-F238E27FC236}">
-                <a16:creationId xmlns="" xmlns:a16="http://schemas.microsoft.com/office/drawing/2014/main" id="{5F09B89C-3183-4D52-981A-62798DDFF2B8}"/>
+                <a16:creationId xmlns:a16="http://schemas.microsoft.com/office/drawing/2014/main" xmlns="" id="{5F09B89C-3183-4D52-981A-62798DDFF2B8}"/>
               </a:ext>
             </a:extLst>
           </p:cNvPr>
@@ -12140,7 +12288,7 @@
           <p:cNvPr id="3" name="AutoShape 2" descr="An example of graph signal reconstruction over wireless sensor network. |  Download Scientific Diagram">
             <a:extLst>
               <a:ext uri="{FF2B5EF4-FFF2-40B4-BE49-F238E27FC236}">
-                <a16:creationId xmlns="" xmlns:a16="http://schemas.microsoft.com/office/drawing/2014/main" id="{0166B4DD-D72A-4A54-94A7-2C38133837FD}"/>
+                <a16:creationId xmlns:a16="http://schemas.microsoft.com/office/drawing/2014/main" xmlns="" id="{0166B4DD-D72A-4A54-94A7-2C38133837FD}"/>
               </a:ext>
             </a:extLst>
           </p:cNvPr>
@@ -12191,7 +12339,7 @@
           <p:cNvPr id="7" name="AutoShape 4" descr="An example of graph signal reconstruction over wireless sensor network. |  Download Scientific Diagram">
             <a:extLst>
               <a:ext uri="{FF2B5EF4-FFF2-40B4-BE49-F238E27FC236}">
-                <a16:creationId xmlns="" xmlns:a16="http://schemas.microsoft.com/office/drawing/2014/main" id="{14C2B67D-81A1-457E-A410-FE4350A3CCA4}"/>
+                <a16:creationId xmlns:a16="http://schemas.microsoft.com/office/drawing/2014/main" xmlns="" id="{14C2B67D-81A1-457E-A410-FE4350A3CCA4}"/>
               </a:ext>
             </a:extLst>
           </p:cNvPr>
@@ -12242,7 +12390,7 @@
           <p:cNvPr id="5" name="Picture 2" descr="Mockup Celular - iPhone Mockup | Maker Mockup">
             <a:extLst>
               <a:ext uri="{FF2B5EF4-FFF2-40B4-BE49-F238E27FC236}">
-                <a16:creationId xmlns="" xmlns:a16="http://schemas.microsoft.com/office/drawing/2014/main" id="{FC87A0DC-550D-BB34-6B8D-21472B938809}"/>
+                <a16:creationId xmlns:a16="http://schemas.microsoft.com/office/drawing/2014/main" xmlns="" id="{FC87A0DC-550D-BB34-6B8D-21472B938809}"/>
               </a:ext>
             </a:extLst>
           </p:cNvPr>
@@ -12291,7 +12439,7 @@
           <p:cNvPr id="1028" name="Picture 4" descr="Notebook Samsung Book 4GB, 15.6'', Intel Celeron, 500 GB, Windows 10 Home,  Cinza - Samsung Book - Magazine Luiza">
             <a:extLst>
               <a:ext uri="{FF2B5EF4-FFF2-40B4-BE49-F238E27FC236}">
-                <a16:creationId xmlns="" xmlns:a16="http://schemas.microsoft.com/office/drawing/2014/main" id="{846ECC3C-0F71-81E5-1C69-59A8D9A2C0AB}"/>
+                <a16:creationId xmlns:a16="http://schemas.microsoft.com/office/drawing/2014/main" xmlns="" id="{846ECC3C-0F71-81E5-1C69-59A8D9A2C0AB}"/>
               </a:ext>
             </a:extLst>
           </p:cNvPr>
@@ -12338,7 +12486,7 @@
           <p:cNvPr id="1030" name="Picture 6" descr="Colar monitora vacas para melhorar produtividade de leite - 12/05/2023 -  Tec - Folha">
             <a:extLst>
               <a:ext uri="{FF2B5EF4-FFF2-40B4-BE49-F238E27FC236}">
-                <a16:creationId xmlns="" xmlns:a16="http://schemas.microsoft.com/office/drawing/2014/main" id="{219B56EB-C5FB-216B-A62B-12BD558A49F2}"/>
+                <a16:creationId xmlns:a16="http://schemas.microsoft.com/office/drawing/2014/main" xmlns="" id="{219B56EB-C5FB-216B-A62B-12BD558A49F2}"/>
               </a:ext>
             </a:extLst>
           </p:cNvPr>
@@ -12385,7 +12533,7 @@
           <p:cNvPr id="6" name="Picture 2" descr="Free photo industrial containers box for logistic import export business.">
             <a:extLst>
               <a:ext uri="{FF2B5EF4-FFF2-40B4-BE49-F238E27FC236}">
-                <a16:creationId xmlns="" xmlns:a16="http://schemas.microsoft.com/office/drawing/2014/main" id="{EEB34E5E-7F0E-7162-8BAF-B92B4B06BA43}"/>
+                <a16:creationId xmlns:a16="http://schemas.microsoft.com/office/drawing/2014/main" xmlns="" id="{EEB34E5E-7F0E-7162-8BAF-B92B4B06BA43}"/>
               </a:ext>
             </a:extLst>
           </p:cNvPr>
@@ -12432,7 +12580,7 @@
           <p:cNvPr id="10" name="Imagem 9">
             <a:extLst>
               <a:ext uri="{FF2B5EF4-FFF2-40B4-BE49-F238E27FC236}">
-                <a16:creationId xmlns="" xmlns:a16="http://schemas.microsoft.com/office/drawing/2014/main" id="{240919DB-71EF-5F88-F569-C5D883B2B487}"/>
+                <a16:creationId xmlns:a16="http://schemas.microsoft.com/office/drawing/2014/main" xmlns="" id="{240919DB-71EF-5F88-F569-C5D883B2B487}"/>
               </a:ext>
             </a:extLst>
           </p:cNvPr>
@@ -12506,7 +12654,7 @@
           <p:cNvPr id="2" name="Título 1">
             <a:extLst>
               <a:ext uri="{FF2B5EF4-FFF2-40B4-BE49-F238E27FC236}">
-                <a16:creationId xmlns="" xmlns:a16="http://schemas.microsoft.com/office/drawing/2014/main" id="{5F09B89C-3183-4D52-981A-62798DDFF2B8}"/>
+                <a16:creationId xmlns:a16="http://schemas.microsoft.com/office/drawing/2014/main" xmlns="" id="{5F09B89C-3183-4D52-981A-62798DDFF2B8}"/>
               </a:ext>
             </a:extLst>
           </p:cNvPr>
@@ -12531,8 +12679,13 @@
           <a:p>
             <a:r>
               <a:rPr lang="pt-BR" dirty="0"/>
-              <a:t>Edge Impulse</a:t>
-            </a:r>
+              <a:t>Motion </a:t>
+            </a:r>
+            <a:r>
+              <a:rPr lang="pt-BR" dirty="0" err="1"/>
+              <a:t>Classification</a:t>
+            </a:r>
+            <a:endParaRPr lang="pt-BR" dirty="0"/>
           </a:p>
         </p:txBody>
       </p:sp>
@@ -12541,7 +12694,7 @@
           <p:cNvPr id="3" name="AutoShape 2" descr="An example of graph signal reconstruction over wireless sensor network. |  Download Scientific Diagram">
             <a:extLst>
               <a:ext uri="{FF2B5EF4-FFF2-40B4-BE49-F238E27FC236}">
-                <a16:creationId xmlns="" xmlns:a16="http://schemas.microsoft.com/office/drawing/2014/main" id="{0166B4DD-D72A-4A54-94A7-2C38133837FD}"/>
+                <a16:creationId xmlns:a16="http://schemas.microsoft.com/office/drawing/2014/main" xmlns="" id="{0166B4DD-D72A-4A54-94A7-2C38133837FD}"/>
               </a:ext>
             </a:extLst>
           </p:cNvPr>
@@ -12592,7 +12745,7 @@
           <p:cNvPr id="7" name="AutoShape 4" descr="An example of graph signal reconstruction over wireless sensor network. |  Download Scientific Diagram">
             <a:extLst>
               <a:ext uri="{FF2B5EF4-FFF2-40B4-BE49-F238E27FC236}">
-                <a16:creationId xmlns="" xmlns:a16="http://schemas.microsoft.com/office/drawing/2014/main" id="{14C2B67D-81A1-457E-A410-FE4350A3CCA4}"/>
+                <a16:creationId xmlns:a16="http://schemas.microsoft.com/office/drawing/2014/main" xmlns="" id="{14C2B67D-81A1-457E-A410-FE4350A3CCA4}"/>
               </a:ext>
             </a:extLst>
           </p:cNvPr>
@@ -12638,12 +12791,174 @@
           </a:p>
         </p:txBody>
       </p:sp>
-      <p:sp>
-        <p:nvSpPr>
-          <p:cNvPr id="4" name="Espaço Reservado para Conteúdo 3">
+      <p:pic>
+        <p:nvPicPr>
+          <p:cNvPr id="4" name="Imagem 3"/>
+          <p:cNvPicPr>
+            <a:picLocks noChangeAspect="1"/>
+          </p:cNvPicPr>
+          <p:nvPr/>
+        </p:nvPicPr>
+        <p:blipFill rotWithShape="1">
+          <a:blip r:embed="rId4"/>
+          <a:srcRect l="4527" t="11895" r="2323" b="14580"/>
+          <a:stretch/>
+        </p:blipFill>
+        <p:spPr>
+          <a:xfrm>
+            <a:off x="0" y="1213945"/>
+            <a:ext cx="10256726" cy="4556234"/>
+          </a:xfrm>
+          <a:prstGeom prst="rect">
+            <a:avLst/>
+          </a:prstGeom>
+        </p:spPr>
+      </p:pic>
+      <p:pic>
+        <p:nvPicPr>
+          <p:cNvPr id="5" name="Imagem 4"/>
+          <p:cNvPicPr>
+            <a:picLocks noChangeAspect="1"/>
+          </p:cNvPicPr>
+          <p:nvPr/>
+        </p:nvPicPr>
+        <p:blipFill>
+          <a:blip r:embed="rId5"/>
+          <a:stretch>
+            <a:fillRect/>
+          </a:stretch>
+        </p:blipFill>
+        <p:spPr>
+          <a:xfrm>
+            <a:off x="8907517" y="4724582"/>
+            <a:ext cx="1560786" cy="809115"/>
+          </a:xfrm>
+          <a:prstGeom prst="rect">
+            <a:avLst/>
+          </a:prstGeom>
+        </p:spPr>
+      </p:pic>
+      <p:sp>
+        <p:nvSpPr>
+          <p:cNvPr id="8" name="CaixaDeTexto 7"/>
+          <p:cNvSpPr txBox="1"/>
+          <p:nvPr/>
+        </p:nvSpPr>
+        <p:spPr>
+          <a:xfrm>
+            <a:off x="8907517" y="4635653"/>
+            <a:ext cx="2822685" cy="1077218"/>
+          </a:xfrm>
+          <a:prstGeom prst="rect">
+            <a:avLst/>
+          </a:prstGeom>
+          <a:noFill/>
+        </p:spPr>
+        <p:txBody>
+          <a:bodyPr wrap="square" rtlCol="0">
+            <a:spAutoFit/>
+          </a:bodyPr>
+          <a:lstStyle/>
+          <a:p>
+            <a:pPr marL="285750" indent="-285750">
+              <a:buFont typeface="Arial" panose="020B0604020202020204" pitchFamily="34" charset="0"/>
+              <a:buChar char="•"/>
+            </a:pPr>
+            <a:r>
+              <a:rPr lang="pt-BR" sz="1600" b="1" dirty="0" smtClean="0"/>
+              <a:t>Parado</a:t>
+            </a:r>
+          </a:p>
+          <a:p>
+            <a:pPr marL="285750" indent="-285750">
+              <a:buFont typeface="Arial" panose="020B0604020202020204" pitchFamily="34" charset="0"/>
+              <a:buChar char="•"/>
+            </a:pPr>
+            <a:r>
+              <a:rPr lang="pt-BR" sz="1600" b="1" dirty="0" smtClean="0"/>
+              <a:t>Sendo erguido</a:t>
+            </a:r>
+          </a:p>
+          <a:p>
+            <a:pPr marL="285750" indent="-285750">
+              <a:buFont typeface="Arial" panose="020B0604020202020204" pitchFamily="34" charset="0"/>
+              <a:buChar char="•"/>
+            </a:pPr>
+            <a:r>
+              <a:rPr lang="pt-BR" sz="1600" b="1" dirty="0" smtClean="0"/>
+              <a:t>Mar</a:t>
+            </a:r>
+          </a:p>
+          <a:p>
+            <a:pPr marL="285750" indent="-285750">
+              <a:buFont typeface="Arial" panose="020B0604020202020204" pitchFamily="34" charset="0"/>
+              <a:buChar char="•"/>
+            </a:pPr>
+            <a:r>
+              <a:rPr lang="pt-BR" sz="1600" b="1" dirty="0" smtClean="0"/>
+              <a:t>Caminhão</a:t>
+            </a:r>
+            <a:endParaRPr lang="pt-BR" sz="1600" b="1" dirty="0"/>
+          </a:p>
+        </p:txBody>
+      </p:sp>
+    </p:spTree>
+    <p:extLst>
+      <p:ext uri="{BB962C8B-B14F-4D97-AF65-F5344CB8AC3E}">
+        <p14:creationId xmlns:p14="http://schemas.microsoft.com/office/powerpoint/2010/main" val="1381615622"/>
+      </p:ext>
+    </p:extLst>
+  </p:cSld>
+  <p:clrMapOvr>
+    <a:masterClrMapping/>
+  </p:clrMapOvr>
+  <p:timing>
+    <p:tnLst>
+      <p:par>
+        <p:cTn id="1" dur="indefinite" restart="never" nodeType="tmRoot"/>
+      </p:par>
+    </p:tnLst>
+  </p:timing>
+</p:sld>
+</file>
+
+<file path=ppt/slides/slide21.xml><?xml version="1.0" encoding="utf-8"?>
+<p:sld xmlns:a="http://schemas.openxmlformats.org/drawingml/2006/main" xmlns:r="http://schemas.openxmlformats.org/officeDocument/2006/relationships" xmlns:p="http://schemas.openxmlformats.org/presentationml/2006/main">
+  <p:cSld>
+    <p:bg>
+      <p:bgPr>
+        <a:blipFill dpi="0" rotWithShape="1">
+          <a:blip r:embed="rId3">
+            <a:lum/>
+          </a:blip>
+          <a:srcRect/>
+          <a:stretch>
+            <a:fillRect/>
+          </a:stretch>
+        </a:blipFill>
+        <a:effectLst/>
+      </p:bgPr>
+    </p:bg>
+    <p:spTree>
+      <p:nvGrpSpPr>
+        <p:cNvPr id="1" name=""/>
+        <p:cNvGrpSpPr/>
+        <p:nvPr/>
+      </p:nvGrpSpPr>
+      <p:grpSpPr>
+        <a:xfrm>
+          <a:off x="0" y="0"/>
+          <a:ext cx="0" cy="0"/>
+          <a:chOff x="0" y="0"/>
+          <a:chExt cx="0" cy="0"/>
+        </a:xfrm>
+      </p:grpSpPr>
+      <p:sp>
+        <p:nvSpPr>
+          <p:cNvPr id="2" name="Título 1">
             <a:extLst>
               <a:ext uri="{FF2B5EF4-FFF2-40B4-BE49-F238E27FC236}">
-                <a16:creationId xmlns="" xmlns:a16="http://schemas.microsoft.com/office/drawing/2014/main" id="{0349BA64-C9D7-4730-9CA9-5C4AD9FC7969}"/>
+                <a16:creationId xmlns:a16="http://schemas.microsoft.com/office/drawing/2014/main" xmlns="" id="{5F09B89C-3183-4D52-981A-62798DDFF2B8}"/>
               </a:ext>
             </a:extLst>
           </p:cNvPr>
@@ -12651,18 +12966,177 @@
             <a:spLocks noGrp="1"/>
           </p:cNvSpPr>
           <p:nvPr>
-            <p:ph idx="1"/>
+            <p:ph type="title"/>
           </p:nvPr>
         </p:nvSpPr>
         <p:spPr>
           <a:xfrm>
-            <a:off x="304800" y="1066800"/>
-            <a:ext cx="9295589" cy="4330419"/>
+            <a:off x="304800" y="183092"/>
+            <a:ext cx="6559285" cy="762000"/>
           </a:xfrm>
         </p:spPr>
         <p:txBody>
           <a:bodyPr>
-            <a:noAutofit/>
+            <a:normAutofit/>
+          </a:bodyPr>
+          <a:lstStyle/>
+          <a:p>
+            <a:r>
+              <a:rPr lang="pt-BR" dirty="0"/>
+              <a:t>Motion </a:t>
+            </a:r>
+            <a:r>
+              <a:rPr lang="pt-BR" dirty="0" err="1"/>
+              <a:t>Classification</a:t>
+            </a:r>
+            <a:endParaRPr lang="pt-BR" dirty="0"/>
+          </a:p>
+        </p:txBody>
+      </p:sp>
+      <p:sp>
+        <p:nvSpPr>
+          <p:cNvPr id="3" name="AutoShape 2" descr="An example of graph signal reconstruction over wireless sensor network. |  Download Scientific Diagram">
+            <a:extLst>
+              <a:ext uri="{FF2B5EF4-FFF2-40B4-BE49-F238E27FC236}">
+                <a16:creationId xmlns:a16="http://schemas.microsoft.com/office/drawing/2014/main" xmlns="" id="{0166B4DD-D72A-4A54-94A7-2C38133837FD}"/>
+              </a:ext>
+            </a:extLst>
+          </p:cNvPr>
+          <p:cNvSpPr>
+            <a:spLocks noChangeAspect="1" noChangeArrowheads="1"/>
+          </p:cNvSpPr>
+          <p:nvPr/>
+        </p:nvSpPr>
+        <p:spPr bwMode="auto">
+          <a:xfrm>
+            <a:off x="5994400" y="3327400"/>
+            <a:ext cx="203200" cy="203200"/>
+          </a:xfrm>
+          <a:prstGeom prst="rect">
+            <a:avLst/>
+          </a:prstGeom>
+          <a:noFill/>
+          <a:extLst>
+            <a:ext uri="{909E8E84-426E-40DD-AFC4-6F175D3DCCD1}">
+              <a14:hiddenFill xmlns:a14="http://schemas.microsoft.com/office/drawing/2010/main">
+                <a:solidFill>
+                  <a:srgbClr val="FFFFFF"/>
+                </a:solidFill>
+              </a14:hiddenFill>
+            </a:ext>
+          </a:extLst>
+        </p:spPr>
+        <p:txBody>
+          <a:bodyPr vert="horz" wrap="square" lIns="60960" tIns="30480" rIns="60960" bIns="30480" numCol="1" anchor="t" anchorCtr="0" compatLnSpc="1">
+            <a:prstTxWarp prst="textNoShape">
+              <a:avLst/>
+            </a:prstTxWarp>
+          </a:bodyPr>
+          <a:lstStyle/>
+          <a:p>
+            <a:pPr defTabSz="609630"/>
+            <a:endParaRPr lang="pt-BR" sz="1200">
+              <a:solidFill>
+                <a:prstClr val="black"/>
+              </a:solidFill>
+              <a:latin typeface="Calibri"/>
+            </a:endParaRPr>
+          </a:p>
+        </p:txBody>
+      </p:sp>
+      <p:sp>
+        <p:nvSpPr>
+          <p:cNvPr id="7" name="AutoShape 4" descr="An example of graph signal reconstruction over wireless sensor network. |  Download Scientific Diagram">
+            <a:extLst>
+              <a:ext uri="{FF2B5EF4-FFF2-40B4-BE49-F238E27FC236}">
+                <a16:creationId xmlns:a16="http://schemas.microsoft.com/office/drawing/2014/main" xmlns="" id="{14C2B67D-81A1-457E-A410-FE4350A3CCA4}"/>
+              </a:ext>
+            </a:extLst>
+          </p:cNvPr>
+          <p:cNvSpPr>
+            <a:spLocks noChangeAspect="1" noChangeArrowheads="1"/>
+          </p:cNvSpPr>
+          <p:nvPr/>
+        </p:nvSpPr>
+        <p:spPr bwMode="auto">
+          <a:xfrm>
+            <a:off x="6096000" y="3429000"/>
+            <a:ext cx="203200" cy="203200"/>
+          </a:xfrm>
+          <a:prstGeom prst="rect">
+            <a:avLst/>
+          </a:prstGeom>
+          <a:noFill/>
+          <a:extLst>
+            <a:ext uri="{909E8E84-426E-40DD-AFC4-6F175D3DCCD1}">
+              <a14:hiddenFill xmlns:a14="http://schemas.microsoft.com/office/drawing/2010/main">
+                <a:solidFill>
+                  <a:srgbClr val="FFFFFF"/>
+                </a:solidFill>
+              </a14:hiddenFill>
+            </a:ext>
+          </a:extLst>
+        </p:spPr>
+        <p:txBody>
+          <a:bodyPr vert="horz" wrap="square" lIns="60960" tIns="30480" rIns="60960" bIns="30480" numCol="1" anchor="t" anchorCtr="0" compatLnSpc="1">
+            <a:prstTxWarp prst="textNoShape">
+              <a:avLst/>
+            </a:prstTxWarp>
+          </a:bodyPr>
+          <a:lstStyle/>
+          <a:p>
+            <a:pPr defTabSz="609630"/>
+            <a:endParaRPr lang="pt-BR" sz="1200">
+              <a:solidFill>
+                <a:prstClr val="black"/>
+              </a:solidFill>
+              <a:latin typeface="Calibri"/>
+            </a:endParaRPr>
+          </a:p>
+        </p:txBody>
+      </p:sp>
+      <p:pic>
+        <p:nvPicPr>
+          <p:cNvPr id="4" name="Imagem 3"/>
+          <p:cNvPicPr>
+            <a:picLocks noChangeAspect="1"/>
+          </p:cNvPicPr>
+          <p:nvPr/>
+        </p:nvPicPr>
+        <p:blipFill>
+          <a:blip r:embed="rId4"/>
+          <a:stretch>
+            <a:fillRect/>
+          </a:stretch>
+        </p:blipFill>
+        <p:spPr>
+          <a:xfrm>
+            <a:off x="1092692" y="1860823"/>
+            <a:ext cx="9803416" cy="2190915"/>
+          </a:xfrm>
+          <a:prstGeom prst="rect">
+            <a:avLst/>
+          </a:prstGeom>
+        </p:spPr>
+      </p:pic>
+      <p:sp>
+        <p:nvSpPr>
+          <p:cNvPr id="6" name="Retângulo 5"/>
+          <p:cNvSpPr/>
+          <p:nvPr/>
+        </p:nvSpPr>
+        <p:spPr>
+          <a:xfrm>
+            <a:off x="3453840" y="4811681"/>
+            <a:ext cx="5284332" cy="375552"/>
+          </a:xfrm>
+          <a:prstGeom prst="rect">
+            <a:avLst/>
+          </a:prstGeom>
+        </p:spPr>
+        <p:txBody>
+          <a:bodyPr wrap="none">
+            <a:spAutoFit/>
           </a:bodyPr>
           <a:lstStyle/>
           <a:p>
@@ -12675,13 +13149,228 @@
               </a:spcAft>
             </a:pPr>
             <a:r>
-              <a:rPr lang="pt-BR" sz="2000" dirty="0">
+              <a:rPr lang="pt-BR" dirty="0" smtClean="0">
                 <a:ea typeface="Calibri" panose="020F0502020204030204" pitchFamily="34" charset="0"/>
                 <a:cs typeface="Arial" panose="020B0604020202020204" pitchFamily="34" charset="0"/>
               </a:rPr>
-              <a:t>Trabalho </a:t>
-            </a:r>
-          </a:p>
+              <a:t>Vamos usar o Edge Impulse para criar essa aplicação.</a:t>
+            </a:r>
+          </a:p>
+        </p:txBody>
+      </p:sp>
+    </p:spTree>
+    <p:extLst>
+      <p:ext uri="{BB962C8B-B14F-4D97-AF65-F5344CB8AC3E}">
+        <p14:creationId xmlns:p14="http://schemas.microsoft.com/office/powerpoint/2010/main" val="1603406045"/>
+      </p:ext>
+    </p:extLst>
+  </p:cSld>
+  <p:clrMapOvr>
+    <a:masterClrMapping/>
+  </p:clrMapOvr>
+  <p:timing>
+    <p:tnLst>
+      <p:par>
+        <p:cTn id="1" dur="indefinite" restart="never" nodeType="tmRoot"/>
+      </p:par>
+    </p:tnLst>
+  </p:timing>
+</p:sld>
+</file>
+
+<file path=ppt/slides/slide22.xml><?xml version="1.0" encoding="utf-8"?>
+<p:sld xmlns:a="http://schemas.openxmlformats.org/drawingml/2006/main" xmlns:r="http://schemas.openxmlformats.org/officeDocument/2006/relationships" xmlns:p="http://schemas.openxmlformats.org/presentationml/2006/main">
+  <p:cSld>
+    <p:bg>
+      <p:bgPr>
+        <a:blipFill dpi="0" rotWithShape="1">
+          <a:blip r:embed="rId3">
+            <a:lum/>
+          </a:blip>
+          <a:srcRect/>
+          <a:stretch>
+            <a:fillRect/>
+          </a:stretch>
+        </a:blipFill>
+        <a:effectLst/>
+      </p:bgPr>
+    </p:bg>
+    <p:spTree>
+      <p:nvGrpSpPr>
+        <p:cNvPr id="1" name=""/>
+        <p:cNvGrpSpPr/>
+        <p:nvPr/>
+      </p:nvGrpSpPr>
+      <p:grpSpPr>
+        <a:xfrm>
+          <a:off x="0" y="0"/>
+          <a:ext cx="0" cy="0"/>
+          <a:chOff x="0" y="0"/>
+          <a:chExt cx="0" cy="0"/>
+        </a:xfrm>
+      </p:grpSpPr>
+      <p:sp>
+        <p:nvSpPr>
+          <p:cNvPr id="2" name="Título 1">
+            <a:extLst>
+              <a:ext uri="{FF2B5EF4-FFF2-40B4-BE49-F238E27FC236}">
+                <a16:creationId xmlns:a16="http://schemas.microsoft.com/office/drawing/2014/main" xmlns="" id="{5F09B89C-3183-4D52-981A-62798DDFF2B8}"/>
+              </a:ext>
+            </a:extLst>
+          </p:cNvPr>
+          <p:cNvSpPr>
+            <a:spLocks noGrp="1"/>
+          </p:cNvSpPr>
+          <p:nvPr>
+            <p:ph type="title"/>
+          </p:nvPr>
+        </p:nvSpPr>
+        <p:spPr>
+          <a:xfrm>
+            <a:off x="304800" y="183092"/>
+            <a:ext cx="6559285" cy="762000"/>
+          </a:xfrm>
+        </p:spPr>
+        <p:txBody>
+          <a:bodyPr>
+            <a:normAutofit/>
+          </a:bodyPr>
+          <a:lstStyle/>
+          <a:p>
+            <a:r>
+              <a:rPr lang="pt-BR" dirty="0"/>
+              <a:t>Motion </a:t>
+            </a:r>
+            <a:r>
+              <a:rPr lang="pt-BR" dirty="0" err="1"/>
+              <a:t>Classification</a:t>
+            </a:r>
+            <a:endParaRPr lang="pt-BR" dirty="0"/>
+          </a:p>
+        </p:txBody>
+      </p:sp>
+      <p:sp>
+        <p:nvSpPr>
+          <p:cNvPr id="3" name="AutoShape 2" descr="An example of graph signal reconstruction over wireless sensor network. |  Download Scientific Diagram">
+            <a:extLst>
+              <a:ext uri="{FF2B5EF4-FFF2-40B4-BE49-F238E27FC236}">
+                <a16:creationId xmlns:a16="http://schemas.microsoft.com/office/drawing/2014/main" xmlns="" id="{0166B4DD-D72A-4A54-94A7-2C38133837FD}"/>
+              </a:ext>
+            </a:extLst>
+          </p:cNvPr>
+          <p:cNvSpPr>
+            <a:spLocks noChangeAspect="1" noChangeArrowheads="1"/>
+          </p:cNvSpPr>
+          <p:nvPr/>
+        </p:nvSpPr>
+        <p:spPr bwMode="auto">
+          <a:xfrm>
+            <a:off x="5994400" y="3327400"/>
+            <a:ext cx="203200" cy="203200"/>
+          </a:xfrm>
+          <a:prstGeom prst="rect">
+            <a:avLst/>
+          </a:prstGeom>
+          <a:noFill/>
+          <a:extLst>
+            <a:ext uri="{909E8E84-426E-40DD-AFC4-6F175D3DCCD1}">
+              <a14:hiddenFill xmlns:a14="http://schemas.microsoft.com/office/drawing/2010/main">
+                <a:solidFill>
+                  <a:srgbClr val="FFFFFF"/>
+                </a:solidFill>
+              </a14:hiddenFill>
+            </a:ext>
+          </a:extLst>
+        </p:spPr>
+        <p:txBody>
+          <a:bodyPr vert="horz" wrap="square" lIns="60960" tIns="30480" rIns="60960" bIns="30480" numCol="1" anchor="t" anchorCtr="0" compatLnSpc="1">
+            <a:prstTxWarp prst="textNoShape">
+              <a:avLst/>
+            </a:prstTxWarp>
+          </a:bodyPr>
+          <a:lstStyle/>
+          <a:p>
+            <a:pPr defTabSz="609630"/>
+            <a:endParaRPr lang="pt-BR" sz="1200">
+              <a:solidFill>
+                <a:prstClr val="black"/>
+              </a:solidFill>
+              <a:latin typeface="Calibri"/>
+            </a:endParaRPr>
+          </a:p>
+        </p:txBody>
+      </p:sp>
+      <p:sp>
+        <p:nvSpPr>
+          <p:cNvPr id="7" name="AutoShape 4" descr="An example of graph signal reconstruction over wireless sensor network. |  Download Scientific Diagram">
+            <a:extLst>
+              <a:ext uri="{FF2B5EF4-FFF2-40B4-BE49-F238E27FC236}">
+                <a16:creationId xmlns:a16="http://schemas.microsoft.com/office/drawing/2014/main" xmlns="" id="{14C2B67D-81A1-457E-A410-FE4350A3CCA4}"/>
+              </a:ext>
+            </a:extLst>
+          </p:cNvPr>
+          <p:cNvSpPr>
+            <a:spLocks noChangeAspect="1" noChangeArrowheads="1"/>
+          </p:cNvSpPr>
+          <p:nvPr/>
+        </p:nvSpPr>
+        <p:spPr bwMode="auto">
+          <a:xfrm>
+            <a:off x="6096000" y="3429000"/>
+            <a:ext cx="203200" cy="203200"/>
+          </a:xfrm>
+          <a:prstGeom prst="rect">
+            <a:avLst/>
+          </a:prstGeom>
+          <a:noFill/>
+          <a:extLst>
+            <a:ext uri="{909E8E84-426E-40DD-AFC4-6F175D3DCCD1}">
+              <a14:hiddenFill xmlns:a14="http://schemas.microsoft.com/office/drawing/2010/main">
+                <a:solidFill>
+                  <a:srgbClr val="FFFFFF"/>
+                </a:solidFill>
+              </a14:hiddenFill>
+            </a:ext>
+          </a:extLst>
+        </p:spPr>
+        <p:txBody>
+          <a:bodyPr vert="horz" wrap="square" lIns="60960" tIns="30480" rIns="60960" bIns="30480" numCol="1" anchor="t" anchorCtr="0" compatLnSpc="1">
+            <a:prstTxWarp prst="textNoShape">
+              <a:avLst/>
+            </a:prstTxWarp>
+          </a:bodyPr>
+          <a:lstStyle/>
+          <a:p>
+            <a:pPr defTabSz="609630"/>
+            <a:endParaRPr lang="pt-BR" sz="1200">
+              <a:solidFill>
+                <a:prstClr val="black"/>
+              </a:solidFill>
+              <a:latin typeface="Calibri"/>
+            </a:endParaRPr>
+          </a:p>
+        </p:txBody>
+      </p:sp>
+      <p:sp>
+        <p:nvSpPr>
+          <p:cNvPr id="5" name="Retângulo 4"/>
+          <p:cNvSpPr/>
+          <p:nvPr/>
+        </p:nvSpPr>
+        <p:spPr>
+          <a:xfrm>
+            <a:off x="6197600" y="3697637"/>
+            <a:ext cx="4966138" cy="1475404"/>
+          </a:xfrm>
+          <a:prstGeom prst="rect">
+            <a:avLst/>
+          </a:prstGeom>
+        </p:spPr>
+        <p:txBody>
+          <a:bodyPr wrap="square">
+            <a:spAutoFit/>
+          </a:bodyPr>
+          <a:lstStyle/>
           <a:p>
             <a:pPr marL="495308" indent="-342900" algn="just">
               <a:lnSpc>
@@ -12692,6 +13381,1106 @@
               </a:spcAft>
             </a:pPr>
             <a:r>
+              <a:rPr lang="pt-BR" sz="2800" b="1" i="1" dirty="0" smtClean="0">
+                <a:solidFill>
+                  <a:srgbClr val="00B050"/>
+                </a:solidFill>
+                <a:ea typeface="Calibri" panose="020F0502020204030204" pitchFamily="34" charset="0"/>
+                <a:cs typeface="Arial" panose="020B0604020202020204" pitchFamily="34" charset="0"/>
+              </a:rPr>
+              <a:t>Vamos criar a base </a:t>
+            </a:r>
+            <a:r>
+              <a:rPr lang="pt-BR" sz="2800" b="1" i="1" dirty="0">
+                <a:solidFill>
+                  <a:srgbClr val="00B050"/>
+                </a:solidFill>
+                <a:ea typeface="Calibri" panose="020F0502020204030204" pitchFamily="34" charset="0"/>
+                <a:cs typeface="Arial" panose="020B0604020202020204" pitchFamily="34" charset="0"/>
+              </a:rPr>
+              <a:t>de </a:t>
+            </a:r>
+            <a:r>
+              <a:rPr lang="pt-BR" sz="2800" b="1" i="1" dirty="0" smtClean="0">
+                <a:solidFill>
+                  <a:srgbClr val="00B050"/>
+                </a:solidFill>
+                <a:ea typeface="Calibri" panose="020F0502020204030204" pitchFamily="34" charset="0"/>
+                <a:cs typeface="Arial" panose="020B0604020202020204" pitchFamily="34" charset="0"/>
+              </a:rPr>
+              <a:t>dados no </a:t>
+            </a:r>
+            <a:r>
+              <a:rPr lang="pt-BR" sz="2800" b="1" i="1" dirty="0" err="1" smtClean="0">
+                <a:solidFill>
+                  <a:srgbClr val="00B050"/>
+                </a:solidFill>
+                <a:ea typeface="Calibri" panose="020F0502020204030204" pitchFamily="34" charset="0"/>
+                <a:cs typeface="Arial" panose="020B0604020202020204" pitchFamily="34" charset="0"/>
+              </a:rPr>
+              <a:t>edge</a:t>
+            </a:r>
+            <a:r>
+              <a:rPr lang="pt-BR" sz="2800" b="1" i="1" dirty="0" smtClean="0">
+                <a:solidFill>
+                  <a:srgbClr val="00B050"/>
+                </a:solidFill>
+                <a:ea typeface="Calibri" panose="020F0502020204030204" pitchFamily="34" charset="0"/>
+                <a:cs typeface="Arial" panose="020B0604020202020204" pitchFamily="34" charset="0"/>
+              </a:rPr>
+              <a:t> impulse com o acelerômetro do celular.</a:t>
+            </a:r>
+            <a:endParaRPr lang="pt-BR" sz="2800" b="1" i="1" dirty="0">
+              <a:solidFill>
+                <a:srgbClr val="00B050"/>
+              </a:solidFill>
+              <a:ea typeface="Calibri" panose="020F0502020204030204" pitchFamily="34" charset="0"/>
+              <a:cs typeface="Arial" panose="020B0604020202020204" pitchFamily="34" charset="0"/>
+            </a:endParaRPr>
+          </a:p>
+        </p:txBody>
+      </p:sp>
+      <p:pic>
+        <p:nvPicPr>
+          <p:cNvPr id="4" name="Imagem 3"/>
+          <p:cNvPicPr>
+            <a:picLocks noChangeAspect="1"/>
+          </p:cNvPicPr>
+          <p:nvPr/>
+        </p:nvPicPr>
+        <p:blipFill>
+          <a:blip r:embed="rId4"/>
+          <a:stretch>
+            <a:fillRect/>
+          </a:stretch>
+        </p:blipFill>
+        <p:spPr>
+          <a:xfrm>
+            <a:off x="644414" y="1425217"/>
+            <a:ext cx="4552950" cy="3467100"/>
+          </a:xfrm>
+          <a:prstGeom prst="rect">
+            <a:avLst/>
+          </a:prstGeom>
+        </p:spPr>
+      </p:pic>
+      <p:pic>
+        <p:nvPicPr>
+          <p:cNvPr id="6" name="Imagem 5"/>
+          <p:cNvPicPr>
+            <a:picLocks noChangeAspect="1"/>
+          </p:cNvPicPr>
+          <p:nvPr/>
+        </p:nvPicPr>
+        <p:blipFill>
+          <a:blip r:embed="rId5"/>
+          <a:stretch>
+            <a:fillRect/>
+          </a:stretch>
+        </p:blipFill>
+        <p:spPr>
+          <a:xfrm>
+            <a:off x="5408722" y="1483963"/>
+            <a:ext cx="3171825" cy="1676400"/>
+          </a:xfrm>
+          <a:prstGeom prst="rect">
+            <a:avLst/>
+          </a:prstGeom>
+        </p:spPr>
+      </p:pic>
+    </p:spTree>
+    <p:extLst>
+      <p:ext uri="{BB962C8B-B14F-4D97-AF65-F5344CB8AC3E}">
+        <p14:creationId xmlns:p14="http://schemas.microsoft.com/office/powerpoint/2010/main" val="2749170996"/>
+      </p:ext>
+    </p:extLst>
+  </p:cSld>
+  <p:clrMapOvr>
+    <a:masterClrMapping/>
+  </p:clrMapOvr>
+  <p:timing>
+    <p:tnLst>
+      <p:par>
+        <p:cTn id="1" dur="indefinite" restart="never" nodeType="tmRoot"/>
+      </p:par>
+    </p:tnLst>
+  </p:timing>
+</p:sld>
+</file>
+
+<file path=ppt/slides/slide23.xml><?xml version="1.0" encoding="utf-8"?>
+<p:sld xmlns:a="http://schemas.openxmlformats.org/drawingml/2006/main" xmlns:r="http://schemas.openxmlformats.org/officeDocument/2006/relationships" xmlns:p="http://schemas.openxmlformats.org/presentationml/2006/main">
+  <p:cSld>
+    <p:bg>
+      <p:bgPr>
+        <a:blipFill dpi="0" rotWithShape="1">
+          <a:blip r:embed="rId3">
+            <a:lum/>
+          </a:blip>
+          <a:srcRect/>
+          <a:stretch>
+            <a:fillRect/>
+          </a:stretch>
+        </a:blipFill>
+        <a:effectLst/>
+      </p:bgPr>
+    </p:bg>
+    <p:spTree>
+      <p:nvGrpSpPr>
+        <p:cNvPr id="1" name=""/>
+        <p:cNvGrpSpPr/>
+        <p:nvPr/>
+      </p:nvGrpSpPr>
+      <p:grpSpPr>
+        <a:xfrm>
+          <a:off x="0" y="0"/>
+          <a:ext cx="0" cy="0"/>
+          <a:chOff x="0" y="0"/>
+          <a:chExt cx="0" cy="0"/>
+        </a:xfrm>
+      </p:grpSpPr>
+      <p:sp>
+        <p:nvSpPr>
+          <p:cNvPr id="2" name="Título 1">
+            <a:extLst>
+              <a:ext uri="{FF2B5EF4-FFF2-40B4-BE49-F238E27FC236}">
+                <a16:creationId xmlns:a16="http://schemas.microsoft.com/office/drawing/2014/main" xmlns="" id="{5F09B89C-3183-4D52-981A-62798DDFF2B8}"/>
+              </a:ext>
+            </a:extLst>
+          </p:cNvPr>
+          <p:cNvSpPr>
+            <a:spLocks noGrp="1"/>
+          </p:cNvSpPr>
+          <p:nvPr>
+            <p:ph type="title"/>
+          </p:nvPr>
+        </p:nvSpPr>
+        <p:spPr>
+          <a:xfrm>
+            <a:off x="304800" y="183092"/>
+            <a:ext cx="6559285" cy="762000"/>
+          </a:xfrm>
+        </p:spPr>
+        <p:txBody>
+          <a:bodyPr>
+            <a:normAutofit/>
+          </a:bodyPr>
+          <a:lstStyle/>
+          <a:p>
+            <a:r>
+              <a:rPr lang="pt-BR" dirty="0"/>
+              <a:t>Motion </a:t>
+            </a:r>
+            <a:r>
+              <a:rPr lang="pt-BR" dirty="0" err="1"/>
+              <a:t>Classification</a:t>
+            </a:r>
+            <a:endParaRPr lang="pt-BR" dirty="0"/>
+          </a:p>
+        </p:txBody>
+      </p:sp>
+      <p:sp>
+        <p:nvSpPr>
+          <p:cNvPr id="3" name="AutoShape 2" descr="An example of graph signal reconstruction over wireless sensor network. |  Download Scientific Diagram">
+            <a:extLst>
+              <a:ext uri="{FF2B5EF4-FFF2-40B4-BE49-F238E27FC236}">
+                <a16:creationId xmlns:a16="http://schemas.microsoft.com/office/drawing/2014/main" xmlns="" id="{0166B4DD-D72A-4A54-94A7-2C38133837FD}"/>
+              </a:ext>
+            </a:extLst>
+          </p:cNvPr>
+          <p:cNvSpPr>
+            <a:spLocks noChangeAspect="1" noChangeArrowheads="1"/>
+          </p:cNvSpPr>
+          <p:nvPr/>
+        </p:nvSpPr>
+        <p:spPr bwMode="auto">
+          <a:xfrm>
+            <a:off x="5994400" y="3327400"/>
+            <a:ext cx="203200" cy="203200"/>
+          </a:xfrm>
+          <a:prstGeom prst="rect">
+            <a:avLst/>
+          </a:prstGeom>
+          <a:noFill/>
+          <a:extLst>
+            <a:ext uri="{909E8E84-426E-40DD-AFC4-6F175D3DCCD1}">
+              <a14:hiddenFill xmlns:a14="http://schemas.microsoft.com/office/drawing/2010/main">
+                <a:solidFill>
+                  <a:srgbClr val="FFFFFF"/>
+                </a:solidFill>
+              </a14:hiddenFill>
+            </a:ext>
+          </a:extLst>
+        </p:spPr>
+        <p:txBody>
+          <a:bodyPr vert="horz" wrap="square" lIns="60960" tIns="30480" rIns="60960" bIns="30480" numCol="1" anchor="t" anchorCtr="0" compatLnSpc="1">
+            <a:prstTxWarp prst="textNoShape">
+              <a:avLst/>
+            </a:prstTxWarp>
+          </a:bodyPr>
+          <a:lstStyle/>
+          <a:p>
+            <a:pPr defTabSz="609630"/>
+            <a:endParaRPr lang="pt-BR" sz="1200">
+              <a:solidFill>
+                <a:prstClr val="black"/>
+              </a:solidFill>
+              <a:latin typeface="Calibri"/>
+            </a:endParaRPr>
+          </a:p>
+        </p:txBody>
+      </p:sp>
+      <p:sp>
+        <p:nvSpPr>
+          <p:cNvPr id="7" name="AutoShape 4" descr="An example of graph signal reconstruction over wireless sensor network. |  Download Scientific Diagram">
+            <a:extLst>
+              <a:ext uri="{FF2B5EF4-FFF2-40B4-BE49-F238E27FC236}">
+                <a16:creationId xmlns:a16="http://schemas.microsoft.com/office/drawing/2014/main" xmlns="" id="{14C2B67D-81A1-457E-A410-FE4350A3CCA4}"/>
+              </a:ext>
+            </a:extLst>
+          </p:cNvPr>
+          <p:cNvSpPr>
+            <a:spLocks noChangeAspect="1" noChangeArrowheads="1"/>
+          </p:cNvSpPr>
+          <p:nvPr/>
+        </p:nvSpPr>
+        <p:spPr bwMode="auto">
+          <a:xfrm>
+            <a:off x="6096000" y="3429000"/>
+            <a:ext cx="203200" cy="203200"/>
+          </a:xfrm>
+          <a:prstGeom prst="rect">
+            <a:avLst/>
+          </a:prstGeom>
+          <a:noFill/>
+          <a:extLst>
+            <a:ext uri="{909E8E84-426E-40DD-AFC4-6F175D3DCCD1}">
+              <a14:hiddenFill xmlns:a14="http://schemas.microsoft.com/office/drawing/2010/main">
+                <a:solidFill>
+                  <a:srgbClr val="FFFFFF"/>
+                </a:solidFill>
+              </a14:hiddenFill>
+            </a:ext>
+          </a:extLst>
+        </p:spPr>
+        <p:txBody>
+          <a:bodyPr vert="horz" wrap="square" lIns="60960" tIns="30480" rIns="60960" bIns="30480" numCol="1" anchor="t" anchorCtr="0" compatLnSpc="1">
+            <a:prstTxWarp prst="textNoShape">
+              <a:avLst/>
+            </a:prstTxWarp>
+          </a:bodyPr>
+          <a:lstStyle/>
+          <a:p>
+            <a:pPr defTabSz="609630"/>
+            <a:endParaRPr lang="pt-BR" sz="1200">
+              <a:solidFill>
+                <a:prstClr val="black"/>
+              </a:solidFill>
+              <a:latin typeface="Calibri"/>
+            </a:endParaRPr>
+          </a:p>
+        </p:txBody>
+      </p:sp>
+      <p:grpSp>
+        <p:nvGrpSpPr>
+          <p:cNvPr id="10" name="Grupo 9"/>
+          <p:cNvGrpSpPr/>
+          <p:nvPr/>
+        </p:nvGrpSpPr>
+        <p:grpSpPr>
+          <a:xfrm>
+            <a:off x="304800" y="2356626"/>
+            <a:ext cx="11582400" cy="1830297"/>
+            <a:chOff x="304800" y="2877817"/>
+            <a:chExt cx="11582400" cy="1830297"/>
+          </a:xfrm>
+        </p:grpSpPr>
+        <p:pic>
+          <p:nvPicPr>
+            <p:cNvPr id="4" name="Imagem 3"/>
+            <p:cNvPicPr>
+              <a:picLocks noChangeAspect="1"/>
+            </p:cNvPicPr>
+            <p:nvPr/>
+          </p:nvPicPr>
+          <p:blipFill>
+            <a:blip r:embed="rId4"/>
+            <a:stretch>
+              <a:fillRect/>
+            </a:stretch>
+          </p:blipFill>
+          <p:spPr>
+            <a:xfrm>
+              <a:off x="304800" y="2877817"/>
+              <a:ext cx="10494579" cy="1830297"/>
+            </a:xfrm>
+            <a:prstGeom prst="rect">
+              <a:avLst/>
+            </a:prstGeom>
+          </p:spPr>
+        </p:pic>
+        <p:sp>
+          <p:nvSpPr>
+            <p:cNvPr id="6" name="CaixaDeTexto 5"/>
+            <p:cNvSpPr txBox="1"/>
+            <p:nvPr/>
+          </p:nvSpPr>
+          <p:spPr>
+            <a:xfrm>
+              <a:off x="9616965" y="3365936"/>
+              <a:ext cx="2270235" cy="1077218"/>
+            </a:xfrm>
+            <a:prstGeom prst="rect">
+              <a:avLst/>
+            </a:prstGeom>
+            <a:solidFill>
+              <a:schemeClr val="bg1"/>
+            </a:solidFill>
+          </p:spPr>
+          <p:txBody>
+            <a:bodyPr wrap="square" rtlCol="0">
+              <a:spAutoFit/>
+            </a:bodyPr>
+            <a:lstStyle/>
+            <a:p>
+              <a:pPr marL="285750" indent="-285750">
+                <a:buFont typeface="Arial" panose="020B0604020202020204" pitchFamily="34" charset="0"/>
+                <a:buChar char="•"/>
+              </a:pPr>
+              <a:r>
+                <a:rPr lang="pt-BR" sz="1600" b="1" dirty="0" smtClean="0"/>
+                <a:t>Parado</a:t>
+              </a:r>
+            </a:p>
+            <a:p>
+              <a:pPr marL="285750" indent="-285750">
+                <a:buFont typeface="Arial" panose="020B0604020202020204" pitchFamily="34" charset="0"/>
+                <a:buChar char="•"/>
+              </a:pPr>
+              <a:r>
+                <a:rPr lang="pt-BR" sz="1600" b="1" dirty="0" smtClean="0"/>
+                <a:t>Sendo erguido</a:t>
+              </a:r>
+            </a:p>
+            <a:p>
+              <a:pPr marL="285750" indent="-285750">
+                <a:buFont typeface="Arial" panose="020B0604020202020204" pitchFamily="34" charset="0"/>
+                <a:buChar char="•"/>
+              </a:pPr>
+              <a:r>
+                <a:rPr lang="pt-BR" sz="1600" b="1" dirty="0" smtClean="0"/>
+                <a:t>Mar</a:t>
+              </a:r>
+            </a:p>
+            <a:p>
+              <a:pPr marL="285750" indent="-285750">
+                <a:buFont typeface="Arial" panose="020B0604020202020204" pitchFamily="34" charset="0"/>
+                <a:buChar char="•"/>
+              </a:pPr>
+              <a:r>
+                <a:rPr lang="pt-BR" sz="1600" b="1" dirty="0" smtClean="0"/>
+                <a:t>Caminhão</a:t>
+              </a:r>
+              <a:endParaRPr lang="pt-BR" sz="1600" b="1" dirty="0"/>
+            </a:p>
+          </p:txBody>
+        </p:sp>
+      </p:grpSp>
+      <p:sp>
+        <p:nvSpPr>
+          <p:cNvPr id="9" name="Retângulo 8"/>
+          <p:cNvSpPr/>
+          <p:nvPr/>
+        </p:nvSpPr>
+        <p:spPr>
+          <a:xfrm>
+            <a:off x="3192517" y="4584077"/>
+            <a:ext cx="5295462" cy="1014380"/>
+          </a:xfrm>
+          <a:prstGeom prst="rect">
+            <a:avLst/>
+          </a:prstGeom>
+        </p:spPr>
+        <p:txBody>
+          <a:bodyPr wrap="square">
+            <a:spAutoFit/>
+          </a:bodyPr>
+          <a:lstStyle/>
+          <a:p>
+            <a:pPr marL="152408" algn="ctr">
+              <a:lnSpc>
+                <a:spcPct val="107000"/>
+              </a:lnSpc>
+              <a:spcAft>
+                <a:spcPts val="533"/>
+              </a:spcAft>
+            </a:pPr>
+            <a:r>
+              <a:rPr lang="pt-BR" sz="2800" b="1" i="1" dirty="0" smtClean="0">
+                <a:solidFill>
+                  <a:srgbClr val="00B050"/>
+                </a:solidFill>
+                <a:ea typeface="Calibri" panose="020F0502020204030204" pitchFamily="34" charset="0"/>
+                <a:cs typeface="Arial" panose="020B0604020202020204" pitchFamily="34" charset="0"/>
+              </a:rPr>
+              <a:t>Na sequência projetamos, treinamos e testamos o modelo.</a:t>
+            </a:r>
+            <a:endParaRPr lang="pt-BR" sz="2800" b="1" i="1" dirty="0">
+              <a:solidFill>
+                <a:srgbClr val="00B050"/>
+              </a:solidFill>
+              <a:ea typeface="Calibri" panose="020F0502020204030204" pitchFamily="34" charset="0"/>
+              <a:cs typeface="Arial" panose="020B0604020202020204" pitchFamily="34" charset="0"/>
+            </a:endParaRPr>
+          </a:p>
+        </p:txBody>
+      </p:sp>
+    </p:spTree>
+    <p:extLst>
+      <p:ext uri="{BB962C8B-B14F-4D97-AF65-F5344CB8AC3E}">
+        <p14:creationId xmlns:p14="http://schemas.microsoft.com/office/powerpoint/2010/main" val="2031988013"/>
+      </p:ext>
+    </p:extLst>
+  </p:cSld>
+  <p:clrMapOvr>
+    <a:masterClrMapping/>
+  </p:clrMapOvr>
+  <p:timing>
+    <p:tnLst>
+      <p:par>
+        <p:cTn id="1" dur="indefinite" restart="never" nodeType="tmRoot"/>
+      </p:par>
+    </p:tnLst>
+  </p:timing>
+</p:sld>
+</file>
+
+<file path=ppt/slides/slide24.xml><?xml version="1.0" encoding="utf-8"?>
+<p:sld xmlns:a="http://schemas.openxmlformats.org/drawingml/2006/main" xmlns:r="http://schemas.openxmlformats.org/officeDocument/2006/relationships" xmlns:p="http://schemas.openxmlformats.org/presentationml/2006/main">
+  <p:cSld>
+    <p:spTree>
+      <p:nvGrpSpPr>
+        <p:cNvPr id="1" name=""/>
+        <p:cNvGrpSpPr/>
+        <p:nvPr/>
+      </p:nvGrpSpPr>
+      <p:grpSpPr>
+        <a:xfrm>
+          <a:off x="0" y="0"/>
+          <a:ext cx="0" cy="0"/>
+          <a:chOff x="0" y="0"/>
+          <a:chExt cx="0" cy="0"/>
+        </a:xfrm>
+      </p:grpSpPr>
+      <p:sp>
+        <p:nvSpPr>
+          <p:cNvPr id="2" name="Título 1"/>
+          <p:cNvSpPr>
+            <a:spLocks noGrp="1"/>
+          </p:cNvSpPr>
+          <p:nvPr>
+            <p:ph type="title"/>
+          </p:nvPr>
+        </p:nvSpPr>
+        <p:spPr/>
+        <p:txBody>
+          <a:bodyPr/>
+          <a:lstStyle/>
+          <a:p>
+            <a:endParaRPr lang="pt-BR"/>
+          </a:p>
+        </p:txBody>
+      </p:sp>
+      <p:sp>
+        <p:nvSpPr>
+          <p:cNvPr id="3" name="Espaço Reservado para Conteúdo 2"/>
+          <p:cNvSpPr>
+            <a:spLocks noGrp="1"/>
+          </p:cNvSpPr>
+          <p:nvPr>
+            <p:ph idx="1"/>
+          </p:nvPr>
+        </p:nvSpPr>
+        <p:spPr/>
+        <p:txBody>
+          <a:bodyPr/>
+          <a:lstStyle/>
+          <a:p>
+            <a:endParaRPr lang="pt-BR"/>
+          </a:p>
+        </p:txBody>
+      </p:sp>
+    </p:spTree>
+    <p:extLst>
+      <p:ext uri="{BB962C8B-B14F-4D97-AF65-F5344CB8AC3E}">
+        <p14:creationId xmlns:p14="http://schemas.microsoft.com/office/powerpoint/2010/main" val="3258566149"/>
+      </p:ext>
+    </p:extLst>
+  </p:cSld>
+  <p:clrMapOvr>
+    <a:masterClrMapping/>
+  </p:clrMapOvr>
+</p:sld>
+</file>
+
+<file path=ppt/slides/slide25.xml><?xml version="1.0" encoding="utf-8"?>
+<p:sld xmlns:a="http://schemas.openxmlformats.org/drawingml/2006/main" xmlns:r="http://schemas.openxmlformats.org/officeDocument/2006/relationships" xmlns:p="http://schemas.openxmlformats.org/presentationml/2006/main">
+  <p:cSld>
+    <p:bg>
+      <p:bgPr>
+        <a:blipFill dpi="0" rotWithShape="1">
+          <a:blip r:embed="rId3">
+            <a:lum/>
+          </a:blip>
+          <a:srcRect/>
+          <a:stretch>
+            <a:fillRect/>
+          </a:stretch>
+        </a:blipFill>
+        <a:effectLst/>
+      </p:bgPr>
+    </p:bg>
+    <p:spTree>
+      <p:nvGrpSpPr>
+        <p:cNvPr id="1" name=""/>
+        <p:cNvGrpSpPr/>
+        <p:nvPr/>
+      </p:nvGrpSpPr>
+      <p:grpSpPr>
+        <a:xfrm>
+          <a:off x="0" y="0"/>
+          <a:ext cx="0" cy="0"/>
+          <a:chOff x="0" y="0"/>
+          <a:chExt cx="0" cy="0"/>
+        </a:xfrm>
+      </p:grpSpPr>
+      <p:sp>
+        <p:nvSpPr>
+          <p:cNvPr id="2" name="Título 1">
+            <a:extLst>
+              <a:ext uri="{FF2B5EF4-FFF2-40B4-BE49-F238E27FC236}">
+                <a16:creationId xmlns:a16="http://schemas.microsoft.com/office/drawing/2014/main" xmlns="" id="{5F09B89C-3183-4D52-981A-62798DDFF2B8}"/>
+              </a:ext>
+            </a:extLst>
+          </p:cNvPr>
+          <p:cNvSpPr>
+            <a:spLocks noGrp="1"/>
+          </p:cNvSpPr>
+          <p:nvPr>
+            <p:ph type="title"/>
+          </p:nvPr>
+        </p:nvSpPr>
+        <p:spPr>
+          <a:xfrm>
+            <a:off x="304800" y="183092"/>
+            <a:ext cx="6559285" cy="762000"/>
+          </a:xfrm>
+        </p:spPr>
+        <p:txBody>
+          <a:bodyPr>
+            <a:normAutofit/>
+          </a:bodyPr>
+          <a:lstStyle/>
+          <a:p>
+            <a:r>
+              <a:rPr lang="pt-BR" dirty="0"/>
+              <a:t>Motion </a:t>
+            </a:r>
+            <a:r>
+              <a:rPr lang="pt-BR" dirty="0" err="1"/>
+              <a:t>Classification</a:t>
+            </a:r>
+            <a:endParaRPr lang="pt-BR" dirty="0"/>
+          </a:p>
+        </p:txBody>
+      </p:sp>
+      <p:sp>
+        <p:nvSpPr>
+          <p:cNvPr id="3" name="AutoShape 2" descr="An example of graph signal reconstruction over wireless sensor network. |  Download Scientific Diagram">
+            <a:extLst>
+              <a:ext uri="{FF2B5EF4-FFF2-40B4-BE49-F238E27FC236}">
+                <a16:creationId xmlns:a16="http://schemas.microsoft.com/office/drawing/2014/main" xmlns="" id="{0166B4DD-D72A-4A54-94A7-2C38133837FD}"/>
+              </a:ext>
+            </a:extLst>
+          </p:cNvPr>
+          <p:cNvSpPr>
+            <a:spLocks noChangeAspect="1" noChangeArrowheads="1"/>
+          </p:cNvSpPr>
+          <p:nvPr/>
+        </p:nvSpPr>
+        <p:spPr bwMode="auto">
+          <a:xfrm>
+            <a:off x="5994400" y="3327400"/>
+            <a:ext cx="203200" cy="203200"/>
+          </a:xfrm>
+          <a:prstGeom prst="rect">
+            <a:avLst/>
+          </a:prstGeom>
+          <a:noFill/>
+          <a:extLst>
+            <a:ext uri="{909E8E84-426E-40DD-AFC4-6F175D3DCCD1}">
+              <a14:hiddenFill xmlns:a14="http://schemas.microsoft.com/office/drawing/2010/main">
+                <a:solidFill>
+                  <a:srgbClr val="FFFFFF"/>
+                </a:solidFill>
+              </a14:hiddenFill>
+            </a:ext>
+          </a:extLst>
+        </p:spPr>
+        <p:txBody>
+          <a:bodyPr vert="horz" wrap="square" lIns="60960" tIns="30480" rIns="60960" bIns="30480" numCol="1" anchor="t" anchorCtr="0" compatLnSpc="1">
+            <a:prstTxWarp prst="textNoShape">
+              <a:avLst/>
+            </a:prstTxWarp>
+          </a:bodyPr>
+          <a:lstStyle/>
+          <a:p>
+            <a:pPr defTabSz="609630"/>
+            <a:endParaRPr lang="pt-BR" sz="1200">
+              <a:solidFill>
+                <a:prstClr val="black"/>
+              </a:solidFill>
+              <a:latin typeface="Calibri"/>
+            </a:endParaRPr>
+          </a:p>
+        </p:txBody>
+      </p:sp>
+      <p:sp>
+        <p:nvSpPr>
+          <p:cNvPr id="7" name="AutoShape 4" descr="An example of graph signal reconstruction over wireless sensor network. |  Download Scientific Diagram">
+            <a:extLst>
+              <a:ext uri="{FF2B5EF4-FFF2-40B4-BE49-F238E27FC236}">
+                <a16:creationId xmlns:a16="http://schemas.microsoft.com/office/drawing/2014/main" xmlns="" id="{14C2B67D-81A1-457E-A410-FE4350A3CCA4}"/>
+              </a:ext>
+            </a:extLst>
+          </p:cNvPr>
+          <p:cNvSpPr>
+            <a:spLocks noChangeAspect="1" noChangeArrowheads="1"/>
+          </p:cNvSpPr>
+          <p:nvPr/>
+        </p:nvSpPr>
+        <p:spPr bwMode="auto">
+          <a:xfrm>
+            <a:off x="6096000" y="3429000"/>
+            <a:ext cx="203200" cy="203200"/>
+          </a:xfrm>
+          <a:prstGeom prst="rect">
+            <a:avLst/>
+          </a:prstGeom>
+          <a:noFill/>
+          <a:extLst>
+            <a:ext uri="{909E8E84-426E-40DD-AFC4-6F175D3DCCD1}">
+              <a14:hiddenFill xmlns:a14="http://schemas.microsoft.com/office/drawing/2010/main">
+                <a:solidFill>
+                  <a:srgbClr val="FFFFFF"/>
+                </a:solidFill>
+              </a14:hiddenFill>
+            </a:ext>
+          </a:extLst>
+        </p:spPr>
+        <p:txBody>
+          <a:bodyPr vert="horz" wrap="square" lIns="60960" tIns="30480" rIns="60960" bIns="30480" numCol="1" anchor="t" anchorCtr="0" compatLnSpc="1">
+            <a:prstTxWarp prst="textNoShape">
+              <a:avLst/>
+            </a:prstTxWarp>
+          </a:bodyPr>
+          <a:lstStyle/>
+          <a:p>
+            <a:pPr defTabSz="609630"/>
+            <a:endParaRPr lang="pt-BR" sz="1200">
+              <a:solidFill>
+                <a:prstClr val="black"/>
+              </a:solidFill>
+              <a:latin typeface="Calibri"/>
+            </a:endParaRPr>
+          </a:p>
+        </p:txBody>
+      </p:sp>
+    </p:spTree>
+    <p:extLst>
+      <p:ext uri="{BB962C8B-B14F-4D97-AF65-F5344CB8AC3E}">
+        <p14:creationId xmlns:p14="http://schemas.microsoft.com/office/powerpoint/2010/main" val="164149742"/>
+      </p:ext>
+    </p:extLst>
+  </p:cSld>
+  <p:clrMapOvr>
+    <a:masterClrMapping/>
+  </p:clrMapOvr>
+  <p:timing>
+    <p:tnLst>
+      <p:par>
+        <p:cTn id="1" dur="indefinite" restart="never" nodeType="tmRoot"/>
+      </p:par>
+    </p:tnLst>
+  </p:timing>
+</p:sld>
+</file>
+
+<file path=ppt/slides/slide26.xml><?xml version="1.0" encoding="utf-8"?>
+<p:sld xmlns:a="http://schemas.openxmlformats.org/drawingml/2006/main" xmlns:r="http://schemas.openxmlformats.org/officeDocument/2006/relationships" xmlns:p="http://schemas.openxmlformats.org/presentationml/2006/main">
+  <p:cSld>
+    <p:spTree>
+      <p:nvGrpSpPr>
+        <p:cNvPr id="1" name=""/>
+        <p:cNvGrpSpPr/>
+        <p:nvPr/>
+      </p:nvGrpSpPr>
+      <p:grpSpPr>
+        <a:xfrm>
+          <a:off x="0" y="0"/>
+          <a:ext cx="0" cy="0"/>
+          <a:chOff x="0" y="0"/>
+          <a:chExt cx="0" cy="0"/>
+        </a:xfrm>
+      </p:grpSpPr>
+      <p:sp>
+        <p:nvSpPr>
+          <p:cNvPr id="2" name="Título 1"/>
+          <p:cNvSpPr>
+            <a:spLocks noGrp="1"/>
+          </p:cNvSpPr>
+          <p:nvPr>
+            <p:ph type="title"/>
+          </p:nvPr>
+        </p:nvSpPr>
+        <p:spPr/>
+        <p:txBody>
+          <a:bodyPr/>
+          <a:lstStyle/>
+          <a:p>
+            <a:endParaRPr lang="pt-BR"/>
+          </a:p>
+        </p:txBody>
+      </p:sp>
+      <p:sp>
+        <p:nvSpPr>
+          <p:cNvPr id="3" name="Espaço Reservado para Conteúdo 2"/>
+          <p:cNvSpPr>
+            <a:spLocks noGrp="1"/>
+          </p:cNvSpPr>
+          <p:nvPr>
+            <p:ph idx="1"/>
+          </p:nvPr>
+        </p:nvSpPr>
+        <p:spPr/>
+        <p:txBody>
+          <a:bodyPr/>
+          <a:lstStyle/>
+          <a:p>
+            <a:endParaRPr lang="pt-BR"/>
+          </a:p>
+        </p:txBody>
+      </p:sp>
+    </p:spTree>
+    <p:extLst>
+      <p:ext uri="{BB962C8B-B14F-4D97-AF65-F5344CB8AC3E}">
+        <p14:creationId xmlns:p14="http://schemas.microsoft.com/office/powerpoint/2010/main" val="3869589547"/>
+      </p:ext>
+    </p:extLst>
+  </p:cSld>
+  <p:clrMapOvr>
+    <a:masterClrMapping/>
+  </p:clrMapOvr>
+</p:sld>
+</file>
+
+<file path=ppt/slides/slide27.xml><?xml version="1.0" encoding="utf-8"?>
+<p:sld xmlns:a="http://schemas.openxmlformats.org/drawingml/2006/main" xmlns:r="http://schemas.openxmlformats.org/officeDocument/2006/relationships" xmlns:p="http://schemas.openxmlformats.org/presentationml/2006/main">
+  <p:cSld>
+    <p:spTree>
+      <p:nvGrpSpPr>
+        <p:cNvPr id="1" name=""/>
+        <p:cNvGrpSpPr/>
+        <p:nvPr/>
+      </p:nvGrpSpPr>
+      <p:grpSpPr>
+        <a:xfrm>
+          <a:off x="0" y="0"/>
+          <a:ext cx="0" cy="0"/>
+          <a:chOff x="0" y="0"/>
+          <a:chExt cx="0" cy="0"/>
+        </a:xfrm>
+      </p:grpSpPr>
+      <p:sp>
+        <p:nvSpPr>
+          <p:cNvPr id="2" name="Título 1"/>
+          <p:cNvSpPr>
+            <a:spLocks noGrp="1"/>
+          </p:cNvSpPr>
+          <p:nvPr>
+            <p:ph type="title"/>
+          </p:nvPr>
+        </p:nvSpPr>
+        <p:spPr/>
+        <p:txBody>
+          <a:bodyPr/>
+          <a:lstStyle/>
+          <a:p>
+            <a:endParaRPr lang="pt-BR"/>
+          </a:p>
+        </p:txBody>
+      </p:sp>
+      <p:sp>
+        <p:nvSpPr>
+          <p:cNvPr id="3" name="Espaço Reservado para Conteúdo 2"/>
+          <p:cNvSpPr>
+            <a:spLocks noGrp="1"/>
+          </p:cNvSpPr>
+          <p:nvPr>
+            <p:ph idx="1"/>
+          </p:nvPr>
+        </p:nvSpPr>
+        <p:spPr/>
+        <p:txBody>
+          <a:bodyPr/>
+          <a:lstStyle/>
+          <a:p>
+            <a:endParaRPr lang="pt-BR"/>
+          </a:p>
+        </p:txBody>
+      </p:sp>
+    </p:spTree>
+    <p:extLst>
+      <p:ext uri="{BB962C8B-B14F-4D97-AF65-F5344CB8AC3E}">
+        <p14:creationId xmlns:p14="http://schemas.microsoft.com/office/powerpoint/2010/main" val="320590118"/>
+      </p:ext>
+    </p:extLst>
+  </p:cSld>
+  <p:clrMapOvr>
+    <a:masterClrMapping/>
+  </p:clrMapOvr>
+  <p:timing>
+    <p:tnLst>
+      <p:par>
+        <p:cTn id="1" dur="indefinite" restart="never" nodeType="tmRoot"/>
+      </p:par>
+    </p:tnLst>
+  </p:timing>
+</p:sld>
+</file>
+
+<file path=ppt/slides/slide28.xml><?xml version="1.0" encoding="utf-8"?>
+<p:sld xmlns:a="http://schemas.openxmlformats.org/drawingml/2006/main" xmlns:r="http://schemas.openxmlformats.org/officeDocument/2006/relationships" xmlns:p="http://schemas.openxmlformats.org/presentationml/2006/main">
+  <p:cSld>
+    <p:bg>
+      <p:bgPr>
+        <a:blipFill dpi="0" rotWithShape="1">
+          <a:blip r:embed="rId3">
+            <a:lum/>
+          </a:blip>
+          <a:srcRect/>
+          <a:stretch>
+            <a:fillRect/>
+          </a:stretch>
+        </a:blipFill>
+        <a:effectLst/>
+      </p:bgPr>
+    </p:bg>
+    <p:spTree>
+      <p:nvGrpSpPr>
+        <p:cNvPr id="1" name=""/>
+        <p:cNvGrpSpPr/>
+        <p:nvPr/>
+      </p:nvGrpSpPr>
+      <p:grpSpPr>
+        <a:xfrm>
+          <a:off x="0" y="0"/>
+          <a:ext cx="0" cy="0"/>
+          <a:chOff x="0" y="0"/>
+          <a:chExt cx="0" cy="0"/>
+        </a:xfrm>
+      </p:grpSpPr>
+      <p:sp>
+        <p:nvSpPr>
+          <p:cNvPr id="2" name="Título 1">
+            <a:extLst>
+              <a:ext uri="{FF2B5EF4-FFF2-40B4-BE49-F238E27FC236}">
+                <a16:creationId xmlns:a16="http://schemas.microsoft.com/office/drawing/2014/main" xmlns="" id="{5F09B89C-3183-4D52-981A-62798DDFF2B8}"/>
+              </a:ext>
+            </a:extLst>
+          </p:cNvPr>
+          <p:cNvSpPr>
+            <a:spLocks noGrp="1"/>
+          </p:cNvSpPr>
+          <p:nvPr>
+            <p:ph type="title"/>
+          </p:nvPr>
+        </p:nvSpPr>
+        <p:spPr>
+          <a:xfrm>
+            <a:off x="304800" y="183092"/>
+            <a:ext cx="6559285" cy="762000"/>
+          </a:xfrm>
+        </p:spPr>
+        <p:txBody>
+          <a:bodyPr>
+            <a:normAutofit/>
+          </a:bodyPr>
+          <a:lstStyle/>
+          <a:p>
+            <a:r>
+              <a:rPr lang="pt-BR" dirty="0"/>
+              <a:t>Edge Impulse</a:t>
+            </a:r>
+          </a:p>
+        </p:txBody>
+      </p:sp>
+      <p:sp>
+        <p:nvSpPr>
+          <p:cNvPr id="3" name="AutoShape 2" descr="An example of graph signal reconstruction over wireless sensor network. |  Download Scientific Diagram">
+            <a:extLst>
+              <a:ext uri="{FF2B5EF4-FFF2-40B4-BE49-F238E27FC236}">
+                <a16:creationId xmlns:a16="http://schemas.microsoft.com/office/drawing/2014/main" xmlns="" id="{0166B4DD-D72A-4A54-94A7-2C38133837FD}"/>
+              </a:ext>
+            </a:extLst>
+          </p:cNvPr>
+          <p:cNvSpPr>
+            <a:spLocks noChangeAspect="1" noChangeArrowheads="1"/>
+          </p:cNvSpPr>
+          <p:nvPr/>
+        </p:nvSpPr>
+        <p:spPr bwMode="auto">
+          <a:xfrm>
+            <a:off x="5994400" y="3327400"/>
+            <a:ext cx="203200" cy="203200"/>
+          </a:xfrm>
+          <a:prstGeom prst="rect">
+            <a:avLst/>
+          </a:prstGeom>
+          <a:noFill/>
+          <a:extLst>
+            <a:ext uri="{909E8E84-426E-40DD-AFC4-6F175D3DCCD1}">
+              <a14:hiddenFill xmlns:a14="http://schemas.microsoft.com/office/drawing/2010/main">
+                <a:solidFill>
+                  <a:srgbClr val="FFFFFF"/>
+                </a:solidFill>
+              </a14:hiddenFill>
+            </a:ext>
+          </a:extLst>
+        </p:spPr>
+        <p:txBody>
+          <a:bodyPr vert="horz" wrap="square" lIns="60960" tIns="30480" rIns="60960" bIns="30480" numCol="1" anchor="t" anchorCtr="0" compatLnSpc="1">
+            <a:prstTxWarp prst="textNoShape">
+              <a:avLst/>
+            </a:prstTxWarp>
+          </a:bodyPr>
+          <a:lstStyle/>
+          <a:p>
+            <a:pPr defTabSz="609630"/>
+            <a:endParaRPr lang="pt-BR" sz="1200">
+              <a:solidFill>
+                <a:prstClr val="black"/>
+              </a:solidFill>
+              <a:latin typeface="Calibri"/>
+            </a:endParaRPr>
+          </a:p>
+        </p:txBody>
+      </p:sp>
+      <p:sp>
+        <p:nvSpPr>
+          <p:cNvPr id="7" name="AutoShape 4" descr="An example of graph signal reconstruction over wireless sensor network. |  Download Scientific Diagram">
+            <a:extLst>
+              <a:ext uri="{FF2B5EF4-FFF2-40B4-BE49-F238E27FC236}">
+                <a16:creationId xmlns:a16="http://schemas.microsoft.com/office/drawing/2014/main" xmlns="" id="{14C2B67D-81A1-457E-A410-FE4350A3CCA4}"/>
+              </a:ext>
+            </a:extLst>
+          </p:cNvPr>
+          <p:cNvSpPr>
+            <a:spLocks noChangeAspect="1" noChangeArrowheads="1"/>
+          </p:cNvSpPr>
+          <p:nvPr/>
+        </p:nvSpPr>
+        <p:spPr bwMode="auto">
+          <a:xfrm>
+            <a:off x="6096000" y="3429000"/>
+            <a:ext cx="203200" cy="203200"/>
+          </a:xfrm>
+          <a:prstGeom prst="rect">
+            <a:avLst/>
+          </a:prstGeom>
+          <a:noFill/>
+          <a:extLst>
+            <a:ext uri="{909E8E84-426E-40DD-AFC4-6F175D3DCCD1}">
+              <a14:hiddenFill xmlns:a14="http://schemas.microsoft.com/office/drawing/2010/main">
+                <a:solidFill>
+                  <a:srgbClr val="FFFFFF"/>
+                </a:solidFill>
+              </a14:hiddenFill>
+            </a:ext>
+          </a:extLst>
+        </p:spPr>
+        <p:txBody>
+          <a:bodyPr vert="horz" wrap="square" lIns="60960" tIns="30480" rIns="60960" bIns="30480" numCol="1" anchor="t" anchorCtr="0" compatLnSpc="1">
+            <a:prstTxWarp prst="textNoShape">
+              <a:avLst/>
+            </a:prstTxWarp>
+          </a:bodyPr>
+          <a:lstStyle/>
+          <a:p>
+            <a:pPr defTabSz="609630"/>
+            <a:endParaRPr lang="pt-BR" sz="1200">
+              <a:solidFill>
+                <a:prstClr val="black"/>
+              </a:solidFill>
+              <a:latin typeface="Calibri"/>
+            </a:endParaRPr>
+          </a:p>
+        </p:txBody>
+      </p:sp>
+      <p:sp>
+        <p:nvSpPr>
+          <p:cNvPr id="4" name="Espaço Reservado para Conteúdo 3">
+            <a:extLst>
+              <a:ext uri="{FF2B5EF4-FFF2-40B4-BE49-F238E27FC236}">
+                <a16:creationId xmlns:a16="http://schemas.microsoft.com/office/drawing/2014/main" xmlns="" id="{0349BA64-C9D7-4730-9CA9-5C4AD9FC7969}"/>
+              </a:ext>
+            </a:extLst>
+          </p:cNvPr>
+          <p:cNvSpPr>
+            <a:spLocks noGrp="1"/>
+          </p:cNvSpPr>
+          <p:nvPr>
+            <p:ph idx="1"/>
+          </p:nvPr>
+        </p:nvSpPr>
+        <p:spPr>
+          <a:xfrm>
+            <a:off x="304800" y="1066800"/>
+            <a:ext cx="9295589" cy="4330419"/>
+          </a:xfrm>
+        </p:spPr>
+        <p:txBody>
+          <a:bodyPr>
+            <a:noAutofit/>
+          </a:bodyPr>
+          <a:lstStyle/>
+          <a:p>
+            <a:pPr marL="495308" indent="-342900" algn="just">
+              <a:lnSpc>
+                <a:spcPct val="107000"/>
+              </a:lnSpc>
+              <a:spcAft>
+                <a:spcPts val="533"/>
+              </a:spcAft>
+            </a:pPr>
+            <a:r>
+              <a:rPr lang="pt-BR" sz="2000" dirty="0">
+                <a:ea typeface="Calibri" panose="020F0502020204030204" pitchFamily="34" charset="0"/>
+                <a:cs typeface="Arial" panose="020B0604020202020204" pitchFamily="34" charset="0"/>
+              </a:rPr>
+              <a:t>Trabalho </a:t>
+            </a:r>
+          </a:p>
+          <a:p>
+            <a:pPr marL="495308" indent="-342900" algn="just">
+              <a:lnSpc>
+                <a:spcPct val="107000"/>
+              </a:lnSpc>
+              <a:spcAft>
+                <a:spcPts val="533"/>
+              </a:spcAft>
+            </a:pPr>
+            <a:r>
               <a:rPr lang="pt-BR" sz="2000" dirty="0">
                 <a:ea typeface="Calibri" panose="020F0502020204030204" pitchFamily="34" charset="0"/>
                 <a:cs typeface="Arial" panose="020B0604020202020204" pitchFamily="34" charset="0"/>
@@ -12710,7 +14499,28 @@
                 <a:ea typeface="Calibri" panose="020F0502020204030204" pitchFamily="34" charset="0"/>
                 <a:cs typeface="Arial" panose="020B0604020202020204" pitchFamily="34" charset="0"/>
               </a:rPr>
-              <a:t> para classificação de movimento para movimentação de uma cadeira de rodas com uso de movimento da cabeça, treinar pelo menos três movimentos no Edge Impulse.</a:t>
+              <a:t> para classificação de movimento para movimentação de uma cadeira de rodas com </a:t>
+            </a:r>
+            <a:r>
+              <a:rPr lang="pt-BR" sz="2000">
+                <a:ea typeface="Calibri" panose="020F0502020204030204" pitchFamily="34" charset="0"/>
+                <a:cs typeface="Arial" panose="020B0604020202020204" pitchFamily="34" charset="0"/>
+              </a:rPr>
+              <a:t>uso </a:t>
+            </a:r>
+            <a:r>
+              <a:rPr lang="pt-BR" sz="2000" smtClean="0">
+                <a:ea typeface="Calibri" panose="020F0502020204030204" pitchFamily="34" charset="0"/>
+                <a:cs typeface="Arial" panose="020B0604020202020204" pitchFamily="34" charset="0"/>
+              </a:rPr>
+              <a:t>do </a:t>
+            </a:r>
+            <a:r>
+              <a:rPr lang="pt-BR" sz="2000" dirty="0">
+                <a:ea typeface="Calibri" panose="020F0502020204030204" pitchFamily="34" charset="0"/>
+                <a:cs typeface="Arial" panose="020B0604020202020204" pitchFamily="34" charset="0"/>
+              </a:rPr>
+              <a:t>movimento da cabeça, treinar pelo menos três movimentos no Edge Impulse.</a:t>
             </a:r>
           </a:p>
           <a:p>
@@ -12780,7 +14590,7 @@
           <p:cNvPr id="9" name="Imagem 8">
             <a:extLst>
               <a:ext uri="{FF2B5EF4-FFF2-40B4-BE49-F238E27FC236}">
-                <a16:creationId xmlns="" xmlns:a16="http://schemas.microsoft.com/office/drawing/2014/main" id="{805DE0C9-CC2B-9A66-2836-0B5BA9411A2D}"/>
+                <a16:creationId xmlns:a16="http://schemas.microsoft.com/office/drawing/2014/main" xmlns="" id="{805DE0C9-CC2B-9A66-2836-0B5BA9411A2D}"/>
               </a:ext>
             </a:extLst>
           </p:cNvPr>
@@ -12854,7 +14664,7 @@
           <p:cNvPr id="2" name="Título 1">
             <a:extLst>
               <a:ext uri="{FF2B5EF4-FFF2-40B4-BE49-F238E27FC236}">
-                <a16:creationId xmlns="" xmlns:a16="http://schemas.microsoft.com/office/drawing/2014/main" id="{5F09B89C-3183-4D52-981A-62798DDFF2B8}"/>
+                <a16:creationId xmlns:a16="http://schemas.microsoft.com/office/drawing/2014/main" xmlns="" id="{5F09B89C-3183-4D52-981A-62798DDFF2B8}"/>
               </a:ext>
             </a:extLst>
           </p:cNvPr>
@@ -12894,7 +14704,7 @@
           <p:cNvPr id="3" name="AutoShape 2" descr="An example of graph signal reconstruction over wireless sensor network. |  Download Scientific Diagram">
             <a:extLst>
               <a:ext uri="{FF2B5EF4-FFF2-40B4-BE49-F238E27FC236}">
-                <a16:creationId xmlns="" xmlns:a16="http://schemas.microsoft.com/office/drawing/2014/main" id="{0166B4DD-D72A-4A54-94A7-2C38133837FD}"/>
+                <a16:creationId xmlns:a16="http://schemas.microsoft.com/office/drawing/2014/main" xmlns="" id="{0166B4DD-D72A-4A54-94A7-2C38133837FD}"/>
               </a:ext>
             </a:extLst>
           </p:cNvPr>
@@ -12945,7 +14755,7 @@
           <p:cNvPr id="7" name="AutoShape 4" descr="An example of graph signal reconstruction over wireless sensor network. |  Download Scientific Diagram">
             <a:extLst>
               <a:ext uri="{FF2B5EF4-FFF2-40B4-BE49-F238E27FC236}">
-                <a16:creationId xmlns="" xmlns:a16="http://schemas.microsoft.com/office/drawing/2014/main" id="{14C2B67D-81A1-457E-A410-FE4350A3CCA4}"/>
+                <a16:creationId xmlns:a16="http://schemas.microsoft.com/office/drawing/2014/main" xmlns="" id="{14C2B67D-81A1-457E-A410-FE4350A3CCA4}"/>
               </a:ext>
             </a:extLst>
           </p:cNvPr>
@@ -12996,7 +14806,7 @@
           <p:cNvPr id="4" name="Espaço Reservado para Conteúdo 3">
             <a:extLst>
               <a:ext uri="{FF2B5EF4-FFF2-40B4-BE49-F238E27FC236}">
-                <a16:creationId xmlns="" xmlns:a16="http://schemas.microsoft.com/office/drawing/2014/main" id="{0349BA64-C9D7-4730-9CA9-5C4AD9FC7969}"/>
+                <a16:creationId xmlns:a16="http://schemas.microsoft.com/office/drawing/2014/main" xmlns="" id="{0349BA64-C9D7-4730-9CA9-5C4AD9FC7969}"/>
               </a:ext>
             </a:extLst>
           </p:cNvPr>
@@ -13042,7 +14852,7 @@
           <p:cNvPr id="1026" name="Picture 2" descr="Free photo industrial containers box for logistic import export business.">
             <a:extLst>
               <a:ext uri="{FF2B5EF4-FFF2-40B4-BE49-F238E27FC236}">
-                <a16:creationId xmlns="" xmlns:a16="http://schemas.microsoft.com/office/drawing/2014/main" id="{FDC07977-F662-66CB-7534-103E83976919}"/>
+                <a16:creationId xmlns:a16="http://schemas.microsoft.com/office/drawing/2014/main" xmlns="" id="{FDC07977-F662-66CB-7534-103E83976919}"/>
               </a:ext>
             </a:extLst>
           </p:cNvPr>
@@ -13133,7 +14943,7 @@
           <p:cNvPr id="2" name="Título 1">
             <a:extLst>
               <a:ext uri="{FF2B5EF4-FFF2-40B4-BE49-F238E27FC236}">
-                <a16:creationId xmlns="" xmlns:a16="http://schemas.microsoft.com/office/drawing/2014/main" id="{5F09B89C-3183-4D52-981A-62798DDFF2B8}"/>
+                <a16:creationId xmlns:a16="http://schemas.microsoft.com/office/drawing/2014/main" xmlns="" id="{5F09B89C-3183-4D52-981A-62798DDFF2B8}"/>
               </a:ext>
             </a:extLst>
           </p:cNvPr>
@@ -13173,7 +14983,7 @@
           <p:cNvPr id="3" name="AutoShape 2" descr="An example of graph signal reconstruction over wireless sensor network. |  Download Scientific Diagram">
             <a:extLst>
               <a:ext uri="{FF2B5EF4-FFF2-40B4-BE49-F238E27FC236}">
-                <a16:creationId xmlns="" xmlns:a16="http://schemas.microsoft.com/office/drawing/2014/main" id="{0166B4DD-D72A-4A54-94A7-2C38133837FD}"/>
+                <a16:creationId xmlns:a16="http://schemas.microsoft.com/office/drawing/2014/main" xmlns="" id="{0166B4DD-D72A-4A54-94A7-2C38133837FD}"/>
               </a:ext>
             </a:extLst>
           </p:cNvPr>
@@ -13224,7 +15034,7 @@
           <p:cNvPr id="7" name="AutoShape 4" descr="An example of graph signal reconstruction over wireless sensor network. |  Download Scientific Diagram">
             <a:extLst>
               <a:ext uri="{FF2B5EF4-FFF2-40B4-BE49-F238E27FC236}">
-                <a16:creationId xmlns="" xmlns:a16="http://schemas.microsoft.com/office/drawing/2014/main" id="{14C2B67D-81A1-457E-A410-FE4350A3CCA4}"/>
+                <a16:creationId xmlns:a16="http://schemas.microsoft.com/office/drawing/2014/main" xmlns="" id="{14C2B67D-81A1-457E-A410-FE4350A3CCA4}"/>
               </a:ext>
             </a:extLst>
           </p:cNvPr>
@@ -13275,7 +15085,7 @@
           <p:cNvPr id="4" name="Espaço Reservado para Conteúdo 3">
             <a:extLst>
               <a:ext uri="{FF2B5EF4-FFF2-40B4-BE49-F238E27FC236}">
-                <a16:creationId xmlns="" xmlns:a16="http://schemas.microsoft.com/office/drawing/2014/main" id="{0349BA64-C9D7-4730-9CA9-5C4AD9FC7969}"/>
+                <a16:creationId xmlns:a16="http://schemas.microsoft.com/office/drawing/2014/main" xmlns="" id="{0349BA64-C9D7-4730-9CA9-5C4AD9FC7969}"/>
               </a:ext>
             </a:extLst>
           </p:cNvPr>
@@ -13321,7 +15131,7 @@
           <p:cNvPr id="1026" name="Picture 2" descr="Free photo industrial containers box for logistic import export business.">
             <a:extLst>
               <a:ext uri="{FF2B5EF4-FFF2-40B4-BE49-F238E27FC236}">
-                <a16:creationId xmlns="" xmlns:a16="http://schemas.microsoft.com/office/drawing/2014/main" id="{FDC07977-F662-66CB-7534-103E83976919}"/>
+                <a16:creationId xmlns:a16="http://schemas.microsoft.com/office/drawing/2014/main" xmlns="" id="{FDC07977-F662-66CB-7534-103E83976919}"/>
               </a:ext>
             </a:extLst>
           </p:cNvPr>
@@ -13412,7 +15222,7 @@
           <p:cNvPr id="2" name="Título 1">
             <a:extLst>
               <a:ext uri="{FF2B5EF4-FFF2-40B4-BE49-F238E27FC236}">
-                <a16:creationId xmlns="" xmlns:a16="http://schemas.microsoft.com/office/drawing/2014/main" id="{5F09B89C-3183-4D52-981A-62798DDFF2B8}"/>
+                <a16:creationId xmlns:a16="http://schemas.microsoft.com/office/drawing/2014/main" xmlns="" id="{5F09B89C-3183-4D52-981A-62798DDFF2B8}"/>
               </a:ext>
             </a:extLst>
           </p:cNvPr>
@@ -13452,7 +15262,7 @@
           <p:cNvPr id="3" name="AutoShape 2" descr="An example of graph signal reconstruction over wireless sensor network. |  Download Scientific Diagram">
             <a:extLst>
               <a:ext uri="{FF2B5EF4-FFF2-40B4-BE49-F238E27FC236}">
-                <a16:creationId xmlns="" xmlns:a16="http://schemas.microsoft.com/office/drawing/2014/main" id="{0166B4DD-D72A-4A54-94A7-2C38133837FD}"/>
+                <a16:creationId xmlns:a16="http://schemas.microsoft.com/office/drawing/2014/main" xmlns="" id="{0166B4DD-D72A-4A54-94A7-2C38133837FD}"/>
               </a:ext>
             </a:extLst>
           </p:cNvPr>
@@ -13503,7 +15313,7 @@
           <p:cNvPr id="7" name="AutoShape 4" descr="An example of graph signal reconstruction over wireless sensor network. |  Download Scientific Diagram">
             <a:extLst>
               <a:ext uri="{FF2B5EF4-FFF2-40B4-BE49-F238E27FC236}">
-                <a16:creationId xmlns="" xmlns:a16="http://schemas.microsoft.com/office/drawing/2014/main" id="{14C2B67D-81A1-457E-A410-FE4350A3CCA4}"/>
+                <a16:creationId xmlns:a16="http://schemas.microsoft.com/office/drawing/2014/main" xmlns="" id="{14C2B67D-81A1-457E-A410-FE4350A3CCA4}"/>
               </a:ext>
             </a:extLst>
           </p:cNvPr>
@@ -13554,7 +15364,7 @@
           <p:cNvPr id="4" name="Espaço Reservado para Conteúdo 3">
             <a:extLst>
               <a:ext uri="{FF2B5EF4-FFF2-40B4-BE49-F238E27FC236}">
-                <a16:creationId xmlns="" xmlns:a16="http://schemas.microsoft.com/office/drawing/2014/main" id="{0349BA64-C9D7-4730-9CA9-5C4AD9FC7969}"/>
+                <a16:creationId xmlns:a16="http://schemas.microsoft.com/office/drawing/2014/main" xmlns="" id="{0349BA64-C9D7-4730-9CA9-5C4AD9FC7969}"/>
               </a:ext>
             </a:extLst>
           </p:cNvPr>
@@ -13600,7 +15410,7 @@
           <p:cNvPr id="2050" name="Picture 2" descr="Free PSD blue cargo container on transparent background">
             <a:extLst>
               <a:ext uri="{FF2B5EF4-FFF2-40B4-BE49-F238E27FC236}">
-                <a16:creationId xmlns="" xmlns:a16="http://schemas.microsoft.com/office/drawing/2014/main" id="{A98A15EA-A147-6CDF-C2F6-87AAFC6C49FD}"/>
+                <a16:creationId xmlns:a16="http://schemas.microsoft.com/office/drawing/2014/main" xmlns="" id="{A98A15EA-A147-6CDF-C2F6-87AAFC6C49FD}"/>
               </a:ext>
             </a:extLst>
           </p:cNvPr>
@@ -13647,7 +15457,7 @@
           <p:cNvPr id="6" name="CaixaDeTexto 5">
             <a:extLst>
               <a:ext uri="{FF2B5EF4-FFF2-40B4-BE49-F238E27FC236}">
-                <a16:creationId xmlns="" xmlns:a16="http://schemas.microsoft.com/office/drawing/2014/main" id="{42657F2C-3A0E-77BB-E339-41D96ABE7E97}"/>
+                <a16:creationId xmlns:a16="http://schemas.microsoft.com/office/drawing/2014/main" xmlns="" id="{42657F2C-3A0E-77BB-E339-41D96ABE7E97}"/>
               </a:ext>
             </a:extLst>
           </p:cNvPr>
@@ -13737,7 +15547,7 @@
           <p:cNvPr id="2" name="Título 1">
             <a:extLst>
               <a:ext uri="{FF2B5EF4-FFF2-40B4-BE49-F238E27FC236}">
-                <a16:creationId xmlns="" xmlns:a16="http://schemas.microsoft.com/office/drawing/2014/main" id="{5F09B89C-3183-4D52-981A-62798DDFF2B8}"/>
+                <a16:creationId xmlns:a16="http://schemas.microsoft.com/office/drawing/2014/main" xmlns="" id="{5F09B89C-3183-4D52-981A-62798DDFF2B8}"/>
               </a:ext>
             </a:extLst>
           </p:cNvPr>
@@ -13777,7 +15587,7 @@
           <p:cNvPr id="3" name="AutoShape 2" descr="An example of graph signal reconstruction over wireless sensor network. |  Download Scientific Diagram">
             <a:extLst>
               <a:ext uri="{FF2B5EF4-FFF2-40B4-BE49-F238E27FC236}">
-                <a16:creationId xmlns="" xmlns:a16="http://schemas.microsoft.com/office/drawing/2014/main" id="{0166B4DD-D72A-4A54-94A7-2C38133837FD}"/>
+                <a16:creationId xmlns:a16="http://schemas.microsoft.com/office/drawing/2014/main" xmlns="" id="{0166B4DD-D72A-4A54-94A7-2C38133837FD}"/>
               </a:ext>
             </a:extLst>
           </p:cNvPr>
@@ -13828,7 +15638,7 @@
           <p:cNvPr id="7" name="AutoShape 4" descr="An example of graph signal reconstruction over wireless sensor network. |  Download Scientific Diagram">
             <a:extLst>
               <a:ext uri="{FF2B5EF4-FFF2-40B4-BE49-F238E27FC236}">
-                <a16:creationId xmlns="" xmlns:a16="http://schemas.microsoft.com/office/drawing/2014/main" id="{14C2B67D-81A1-457E-A410-FE4350A3CCA4}"/>
+                <a16:creationId xmlns:a16="http://schemas.microsoft.com/office/drawing/2014/main" xmlns="" id="{14C2B67D-81A1-457E-A410-FE4350A3CCA4}"/>
               </a:ext>
             </a:extLst>
           </p:cNvPr>
@@ -13879,7 +15689,7 @@
           <p:cNvPr id="4" name="Espaço Reservado para Conteúdo 3">
             <a:extLst>
               <a:ext uri="{FF2B5EF4-FFF2-40B4-BE49-F238E27FC236}">
-                <a16:creationId xmlns="" xmlns:a16="http://schemas.microsoft.com/office/drawing/2014/main" id="{0349BA64-C9D7-4730-9CA9-5C4AD9FC7969}"/>
+                <a16:creationId xmlns:a16="http://schemas.microsoft.com/office/drawing/2014/main" xmlns="" id="{0349BA64-C9D7-4730-9CA9-5C4AD9FC7969}"/>
               </a:ext>
             </a:extLst>
           </p:cNvPr>
@@ -13925,7 +15735,7 @@
           <p:cNvPr id="3074" name="Picture 2" descr="Free photo aerial view of cargo ship with cargo container on sea">
             <a:extLst>
               <a:ext uri="{FF2B5EF4-FFF2-40B4-BE49-F238E27FC236}">
-                <a16:creationId xmlns="" xmlns:a16="http://schemas.microsoft.com/office/drawing/2014/main" id="{6D87BA9E-F12B-B77C-65AD-AFA156B87962}"/>
+                <a16:creationId xmlns:a16="http://schemas.microsoft.com/office/drawing/2014/main" xmlns="" id="{6D87BA9E-F12B-B77C-65AD-AFA156B87962}"/>
               </a:ext>
             </a:extLst>
           </p:cNvPr>
@@ -13972,7 +15782,7 @@
           <p:cNvPr id="6" name="CaixaDeTexto 5">
             <a:extLst>
               <a:ext uri="{FF2B5EF4-FFF2-40B4-BE49-F238E27FC236}">
-                <a16:creationId xmlns="" xmlns:a16="http://schemas.microsoft.com/office/drawing/2014/main" id="{7CAF6758-F677-FD03-7446-3A59B85054CD}"/>
+                <a16:creationId xmlns:a16="http://schemas.microsoft.com/office/drawing/2014/main" xmlns="" id="{7CAF6758-F677-FD03-7446-3A59B85054CD}"/>
               </a:ext>
             </a:extLst>
           </p:cNvPr>
@@ -14064,7 +15874,7 @@
           <p:cNvPr id="2" name="Título 1">
             <a:extLst>
               <a:ext uri="{FF2B5EF4-FFF2-40B4-BE49-F238E27FC236}">
-                <a16:creationId xmlns="" xmlns:a16="http://schemas.microsoft.com/office/drawing/2014/main" id="{5F09B89C-3183-4D52-981A-62798DDFF2B8}"/>
+                <a16:creationId xmlns:a16="http://schemas.microsoft.com/office/drawing/2014/main" xmlns="" id="{5F09B89C-3183-4D52-981A-62798DDFF2B8}"/>
               </a:ext>
             </a:extLst>
           </p:cNvPr>
@@ -14104,7 +15914,7 @@
           <p:cNvPr id="3" name="AutoShape 2" descr="An example of graph signal reconstruction over wireless sensor network. |  Download Scientific Diagram">
             <a:extLst>
               <a:ext uri="{FF2B5EF4-FFF2-40B4-BE49-F238E27FC236}">
-                <a16:creationId xmlns="" xmlns:a16="http://schemas.microsoft.com/office/drawing/2014/main" id="{0166B4DD-D72A-4A54-94A7-2C38133837FD}"/>
+                <a16:creationId xmlns:a16="http://schemas.microsoft.com/office/drawing/2014/main" xmlns="" id="{0166B4DD-D72A-4A54-94A7-2C38133837FD}"/>
               </a:ext>
             </a:extLst>
           </p:cNvPr>
@@ -14155,7 +15965,7 @@
           <p:cNvPr id="7" name="AutoShape 4" descr="An example of graph signal reconstruction over wireless sensor network. |  Download Scientific Diagram">
             <a:extLst>
               <a:ext uri="{FF2B5EF4-FFF2-40B4-BE49-F238E27FC236}">
-                <a16:creationId xmlns="" xmlns:a16="http://schemas.microsoft.com/office/drawing/2014/main" id="{14C2B67D-81A1-457E-A410-FE4350A3CCA4}"/>
+                <a16:creationId xmlns:a16="http://schemas.microsoft.com/office/drawing/2014/main" xmlns="" id="{14C2B67D-81A1-457E-A410-FE4350A3CCA4}"/>
               </a:ext>
             </a:extLst>
           </p:cNvPr>
@@ -14206,7 +16016,7 @@
           <p:cNvPr id="4" name="Espaço Reservado para Conteúdo 3">
             <a:extLst>
               <a:ext uri="{FF2B5EF4-FFF2-40B4-BE49-F238E27FC236}">
-                <a16:creationId xmlns="" xmlns:a16="http://schemas.microsoft.com/office/drawing/2014/main" id="{0349BA64-C9D7-4730-9CA9-5C4AD9FC7969}"/>
+                <a16:creationId xmlns:a16="http://schemas.microsoft.com/office/drawing/2014/main" xmlns="" id="{0349BA64-C9D7-4730-9CA9-5C4AD9FC7969}"/>
               </a:ext>
             </a:extLst>
           </p:cNvPr>
@@ -14395,7 +16205,7 @@
           <p:cNvPr id="6" name="Imagem 5">
             <a:extLst>
               <a:ext uri="{FF2B5EF4-FFF2-40B4-BE49-F238E27FC236}">
-                <a16:creationId xmlns="" xmlns:a16="http://schemas.microsoft.com/office/drawing/2014/main" id="{C63B75BA-F777-3A50-CB3A-A642F3CCAB53}"/>
+                <a16:creationId xmlns:a16="http://schemas.microsoft.com/office/drawing/2014/main" xmlns="" id="{C63B75BA-F777-3A50-CB3A-A642F3CCAB53}"/>
               </a:ext>
             </a:extLst>
           </p:cNvPr>
@@ -14469,7 +16279,7 @@
           <p:cNvPr id="2" name="Título 1">
             <a:extLst>
               <a:ext uri="{FF2B5EF4-FFF2-40B4-BE49-F238E27FC236}">
-                <a16:creationId xmlns="" xmlns:a16="http://schemas.microsoft.com/office/drawing/2014/main" id="{5F09B89C-3183-4D52-981A-62798DDFF2B8}"/>
+                <a16:creationId xmlns:a16="http://schemas.microsoft.com/office/drawing/2014/main" xmlns="" id="{5F09B89C-3183-4D52-981A-62798DDFF2B8}"/>
               </a:ext>
             </a:extLst>
           </p:cNvPr>
@@ -14509,7 +16319,7 @@
           <p:cNvPr id="3" name="AutoShape 2" descr="An example of graph signal reconstruction over wireless sensor network. |  Download Scientific Diagram">
             <a:extLst>
               <a:ext uri="{FF2B5EF4-FFF2-40B4-BE49-F238E27FC236}">
-                <a16:creationId xmlns="" xmlns:a16="http://schemas.microsoft.com/office/drawing/2014/main" id="{0166B4DD-D72A-4A54-94A7-2C38133837FD}"/>
+                <a16:creationId xmlns:a16="http://schemas.microsoft.com/office/drawing/2014/main" xmlns="" id="{0166B4DD-D72A-4A54-94A7-2C38133837FD}"/>
               </a:ext>
             </a:extLst>
           </p:cNvPr>
@@ -14560,7 +16370,7 @@
           <p:cNvPr id="7" name="AutoShape 4" descr="An example of graph signal reconstruction over wireless sensor network. |  Download Scientific Diagram">
             <a:extLst>
               <a:ext uri="{FF2B5EF4-FFF2-40B4-BE49-F238E27FC236}">
-                <a16:creationId xmlns="" xmlns:a16="http://schemas.microsoft.com/office/drawing/2014/main" id="{14C2B67D-81A1-457E-A410-FE4350A3CCA4}"/>
+                <a16:creationId xmlns:a16="http://schemas.microsoft.com/office/drawing/2014/main" xmlns="" id="{14C2B67D-81A1-457E-A410-FE4350A3CCA4}"/>
               </a:ext>
             </a:extLst>
           </p:cNvPr>
@@ -14611,7 +16421,7 @@
           <p:cNvPr id="4" name="Espaço Reservado para Conteúdo 3">
             <a:extLst>
               <a:ext uri="{FF2B5EF4-FFF2-40B4-BE49-F238E27FC236}">
-                <a16:creationId xmlns="" xmlns:a16="http://schemas.microsoft.com/office/drawing/2014/main" id="{0349BA64-C9D7-4730-9CA9-5C4AD9FC7969}"/>
+                <a16:creationId xmlns:a16="http://schemas.microsoft.com/office/drawing/2014/main" xmlns="" id="{0349BA64-C9D7-4730-9CA9-5C4AD9FC7969}"/>
               </a:ext>
             </a:extLst>
           </p:cNvPr>
@@ -14800,7 +16610,7 @@
           <p:cNvPr id="10" name="Imagem 9">
             <a:extLst>
               <a:ext uri="{FF2B5EF4-FFF2-40B4-BE49-F238E27FC236}">
-                <a16:creationId xmlns="" xmlns:a16="http://schemas.microsoft.com/office/drawing/2014/main" id="{C7DAF8C7-0817-CFEF-006D-3A402E0434AD}"/>
+                <a16:creationId xmlns:a16="http://schemas.microsoft.com/office/drawing/2014/main" xmlns="" id="{C7DAF8C7-0817-CFEF-006D-3A402E0434AD}"/>
               </a:ext>
             </a:extLst>
           </p:cNvPr>
@@ -14874,7 +16684,7 @@
           <p:cNvPr id="2" name="Título 1">
             <a:extLst>
               <a:ext uri="{FF2B5EF4-FFF2-40B4-BE49-F238E27FC236}">
-                <a16:creationId xmlns="" xmlns:a16="http://schemas.microsoft.com/office/drawing/2014/main" id="{5F09B89C-3183-4D52-981A-62798DDFF2B8}"/>
+                <a16:creationId xmlns:a16="http://schemas.microsoft.com/office/drawing/2014/main" xmlns="" id="{5F09B89C-3183-4D52-981A-62798DDFF2B8}"/>
               </a:ext>
             </a:extLst>
           </p:cNvPr>
@@ -14914,7 +16724,7 @@
           <p:cNvPr id="3" name="AutoShape 2" descr="An example of graph signal reconstruction over wireless sensor network. |  Download Scientific Diagram">
             <a:extLst>
               <a:ext uri="{FF2B5EF4-FFF2-40B4-BE49-F238E27FC236}">
-                <a16:creationId xmlns="" xmlns:a16="http://schemas.microsoft.com/office/drawing/2014/main" id="{0166B4DD-D72A-4A54-94A7-2C38133837FD}"/>
+                <a16:creationId xmlns:a16="http://schemas.microsoft.com/office/drawing/2014/main" xmlns="" id="{0166B4DD-D72A-4A54-94A7-2C38133837FD}"/>
               </a:ext>
             </a:extLst>
           </p:cNvPr>
@@ -14965,7 +16775,7 @@
           <p:cNvPr id="7" name="AutoShape 4" descr="An example of graph signal reconstruction over wireless sensor network. |  Download Scientific Diagram">
             <a:extLst>
               <a:ext uri="{FF2B5EF4-FFF2-40B4-BE49-F238E27FC236}">
-                <a16:creationId xmlns="" xmlns:a16="http://schemas.microsoft.com/office/drawing/2014/main" id="{14C2B67D-81A1-457E-A410-FE4350A3CCA4}"/>
+                <a16:creationId xmlns:a16="http://schemas.microsoft.com/office/drawing/2014/main" xmlns="" id="{14C2B67D-81A1-457E-A410-FE4350A3CCA4}"/>
               </a:ext>
             </a:extLst>
           </p:cNvPr>
@@ -15016,7 +16826,7 @@
           <p:cNvPr id="4" name="Espaço Reservado para Conteúdo 3">
             <a:extLst>
               <a:ext uri="{FF2B5EF4-FFF2-40B4-BE49-F238E27FC236}">
-                <a16:creationId xmlns="" xmlns:a16="http://schemas.microsoft.com/office/drawing/2014/main" id="{0349BA64-C9D7-4730-9CA9-5C4AD9FC7969}"/>
+                <a16:creationId xmlns:a16="http://schemas.microsoft.com/office/drawing/2014/main" xmlns="" id="{0349BA64-C9D7-4730-9CA9-5C4AD9FC7969}"/>
               </a:ext>
             </a:extLst>
           </p:cNvPr>
@@ -15038,37 +16848,6 @@
             <a:noAutofit/>
           </a:bodyPr>
           <a:lstStyle/>
-          <a:p>
-            <a:pPr marL="495308" indent="-342900" algn="just">
-              <a:lnSpc>
-                <a:spcPct val="107000"/>
-              </a:lnSpc>
-              <a:spcAft>
-                <a:spcPts val="533"/>
-              </a:spcAft>
-            </a:pPr>
-            <a:r>
-              <a:rPr lang="pt-BR" sz="2000" dirty="0">
-                <a:ea typeface="Calibri" panose="020F0502020204030204" pitchFamily="34" charset="0"/>
-                <a:cs typeface="Arial" panose="020B0604020202020204" pitchFamily="34" charset="0"/>
-              </a:rPr>
-              <a:t>Criar uma base de dados com uso do celular no </a:t>
-            </a:r>
-            <a:r>
-              <a:rPr lang="pt-BR" sz="2000" dirty="0" err="1">
-                <a:ea typeface="Calibri" panose="020F0502020204030204" pitchFamily="34" charset="0"/>
-                <a:cs typeface="Arial" panose="020B0604020202020204" pitchFamily="34" charset="0"/>
-              </a:rPr>
-              <a:t>edge</a:t>
-            </a:r>
-            <a:r>
-              <a:rPr lang="pt-BR" sz="2000" dirty="0">
-                <a:ea typeface="Calibri" panose="020F0502020204030204" pitchFamily="34" charset="0"/>
-                <a:cs typeface="Arial" panose="020B0604020202020204" pitchFamily="34" charset="0"/>
-              </a:rPr>
-              <a:t> impulse</a:t>
-            </a:r>
-          </a:p>
           <a:p>
             <a:pPr marL="152408" indent="0" algn="just">
               <a:lnSpc>
@@ -15080,11 +16859,18 @@
               <a:buNone/>
             </a:pPr>
             <a:r>
+              <a:rPr lang="pt-BR" sz="2000" dirty="0" smtClean="0">
+                <a:ea typeface="Calibri" panose="020F0502020204030204" pitchFamily="34" charset="0"/>
+                <a:cs typeface="Arial" panose="020B0604020202020204" pitchFamily="34" charset="0"/>
+              </a:rPr>
+              <a:t>Aplicação: Classificação </a:t>
+            </a:r>
+            <a:r>
               <a:rPr lang="pt-BR" sz="2000" dirty="0">
                 <a:ea typeface="Calibri" panose="020F0502020204030204" pitchFamily="34" charset="0"/>
                 <a:cs typeface="Arial" panose="020B0604020202020204" pitchFamily="34" charset="0"/>
               </a:rPr>
-              <a:t>Classificação de 4 estados do container </a:t>
+              <a:t>de 4 estados do container </a:t>
             </a:r>
           </a:p>
           <a:p>
